--- a/Documents/Sprint_Reviews/Sprint_Review01.pptx
+++ b/Documents/Sprint_Reviews/Sprint_Review01.pptx
@@ -822,7 +822,7 @@
   <p:cSld>
     <p:spTree>
       <p:nvGrpSpPr>
-        <p:cNvPr id="170" name="Shape 170"/>
+        <p:cNvPr id="173" name="Shape 173"/>
         <p:cNvGrpSpPr/>
         <p:nvPr/>
       </p:nvGrpSpPr>
@@ -836,7 +836,7 @@
       </p:grpSpPr>
       <p:sp>
         <p:nvSpPr>
-          <p:cNvPr id="171" name="Google Shape;171;g396060f51c5_0_26:notes"/>
+          <p:cNvPr id="174" name="Google Shape;174;g396060f51c5_0_26:notes"/>
           <p:cNvSpPr/>
           <p:nvPr>
             <p:ph idx="2" type="sldImg"/>
@@ -871,7 +871,7 @@
       </p:sp>
       <p:sp>
         <p:nvSpPr>
-          <p:cNvPr id="172" name="Google Shape;172;g396060f51c5_0_26:notes"/>
+          <p:cNvPr id="175" name="Google Shape;175;g396060f51c5_0_26:notes"/>
           <p:cNvSpPr txBox="1"/>
           <p:nvPr>
             <p:ph idx="1" type="body"/>
@@ -921,7 +921,7 @@
   <p:cSld>
     <p:spTree>
       <p:nvGrpSpPr>
-        <p:cNvPr id="176" name="Shape 176"/>
+        <p:cNvPr id="179" name="Shape 179"/>
         <p:cNvGrpSpPr/>
         <p:nvPr/>
       </p:nvGrpSpPr>
@@ -935,7 +935,7 @@
       </p:grpSpPr>
       <p:sp>
         <p:nvSpPr>
-          <p:cNvPr id="177" name="Google Shape;177;g396060f51c5_0_31:notes"/>
+          <p:cNvPr id="180" name="Google Shape;180;g396060f51c5_0_31:notes"/>
           <p:cNvSpPr/>
           <p:nvPr>
             <p:ph idx="2" type="sldImg"/>
@@ -970,7 +970,7 @@
       </p:sp>
       <p:sp>
         <p:nvSpPr>
-          <p:cNvPr id="178" name="Google Shape;178;g396060f51c5_0_31:notes"/>
+          <p:cNvPr id="181" name="Google Shape;181;g396060f51c5_0_31:notes"/>
           <p:cNvSpPr txBox="1"/>
           <p:nvPr>
             <p:ph idx="1" type="body"/>
@@ -1020,7 +1020,7 @@
   <p:cSld>
     <p:spTree>
       <p:nvGrpSpPr>
-        <p:cNvPr id="182" name="Shape 182"/>
+        <p:cNvPr id="185" name="Shape 185"/>
         <p:cNvGrpSpPr/>
         <p:nvPr/>
       </p:nvGrpSpPr>
@@ -1034,7 +1034,7 @@
       </p:grpSpPr>
       <p:sp>
         <p:nvSpPr>
-          <p:cNvPr id="183" name="Google Shape;183;g3cf70ef3b9e_0_30:notes"/>
+          <p:cNvPr id="186" name="Google Shape;186;g3cf70ef3b9e_0_30:notes"/>
           <p:cNvSpPr/>
           <p:nvPr>
             <p:ph idx="2" type="sldImg"/>
@@ -1069,7 +1069,7 @@
       </p:sp>
       <p:sp>
         <p:nvSpPr>
-          <p:cNvPr id="184" name="Google Shape;184;g3cf70ef3b9e_0_30:notes"/>
+          <p:cNvPr id="187" name="Google Shape;187;g3cf70ef3b9e_0_30:notes"/>
           <p:cNvSpPr txBox="1"/>
           <p:nvPr>
             <p:ph idx="1" type="body"/>
@@ -1218,7 +1218,7 @@
   <p:cSld>
     <p:spTree>
       <p:nvGrpSpPr>
-        <p:cNvPr id="112" name="Shape 112"/>
+        <p:cNvPr id="113" name="Shape 113"/>
         <p:cNvGrpSpPr/>
         <p:nvPr/>
       </p:nvGrpSpPr>
@@ -1232,7 +1232,7 @@
       </p:grpSpPr>
       <p:sp>
         <p:nvSpPr>
-          <p:cNvPr id="113" name="Google Shape;113;g3cf70ef3b9e_0_10:notes"/>
+          <p:cNvPr id="114" name="Google Shape;114;g3cf70ef3b9e_0_10:notes"/>
           <p:cNvSpPr/>
           <p:nvPr>
             <p:ph idx="2" type="sldImg"/>
@@ -1267,7 +1267,7 @@
       </p:sp>
       <p:sp>
         <p:nvSpPr>
-          <p:cNvPr id="114" name="Google Shape;114;g3cf70ef3b9e_0_10:notes"/>
+          <p:cNvPr id="115" name="Google Shape;115;g3cf70ef3b9e_0_10:notes"/>
           <p:cNvSpPr txBox="1"/>
           <p:nvPr>
             <p:ph idx="1" type="body"/>
@@ -1317,7 +1317,7 @@
   <p:cSld>
     <p:spTree>
       <p:nvGrpSpPr>
-        <p:cNvPr id="123" name="Shape 123"/>
+        <p:cNvPr id="126" name="Shape 126"/>
         <p:cNvGrpSpPr/>
         <p:nvPr/>
       </p:nvGrpSpPr>
@@ -1331,7 +1331,7 @@
       </p:grpSpPr>
       <p:sp>
         <p:nvSpPr>
-          <p:cNvPr id="124" name="Google Shape;124;g3d02b607959_0_2:notes"/>
+          <p:cNvPr id="127" name="Google Shape;127;g3d02b607959_0_2:notes"/>
           <p:cNvSpPr/>
           <p:nvPr>
             <p:ph idx="2" type="sldImg"/>
@@ -1366,7 +1366,7 @@
       </p:sp>
       <p:sp>
         <p:nvSpPr>
-          <p:cNvPr id="125" name="Google Shape;125;g3d02b607959_0_2:notes"/>
+          <p:cNvPr id="128" name="Google Shape;128;g3d02b607959_0_2:notes"/>
           <p:cNvSpPr txBox="1"/>
           <p:nvPr>
             <p:ph idx="1" type="body"/>
@@ -1416,7 +1416,7 @@
   <p:cSld>
     <p:spTree>
       <p:nvGrpSpPr>
-        <p:cNvPr id="140" name="Shape 140"/>
+        <p:cNvPr id="143" name="Shape 143"/>
         <p:cNvGrpSpPr/>
         <p:nvPr/>
       </p:nvGrpSpPr>
@@ -1430,7 +1430,7 @@
       </p:grpSpPr>
       <p:sp>
         <p:nvSpPr>
-          <p:cNvPr id="141" name="Google Shape;141;g3cf70ef3b9e_0_26:notes"/>
+          <p:cNvPr id="144" name="Google Shape;144;g3cf70ef3b9e_0_26:notes"/>
           <p:cNvSpPr/>
           <p:nvPr>
             <p:ph idx="2" type="sldImg"/>
@@ -1465,7 +1465,7 @@
       </p:sp>
       <p:sp>
         <p:nvSpPr>
-          <p:cNvPr id="142" name="Google Shape;142;g3cf70ef3b9e_0_26:notes"/>
+          <p:cNvPr id="145" name="Google Shape;145;g3cf70ef3b9e_0_26:notes"/>
           <p:cNvSpPr txBox="1"/>
           <p:nvPr>
             <p:ph idx="1" type="body"/>
@@ -1515,7 +1515,7 @@
   <p:cSld>
     <p:spTree>
       <p:nvGrpSpPr>
-        <p:cNvPr id="146" name="Shape 146"/>
+        <p:cNvPr id="149" name="Shape 149"/>
         <p:cNvGrpSpPr/>
         <p:nvPr/>
       </p:nvGrpSpPr>
@@ -1529,7 +1529,7 @@
       </p:grpSpPr>
       <p:sp>
         <p:nvSpPr>
-          <p:cNvPr id="147" name="Google Shape;147;g396060f51c5_0_1:notes"/>
+          <p:cNvPr id="150" name="Google Shape;150;g396060f51c5_0_1:notes"/>
           <p:cNvSpPr/>
           <p:nvPr>
             <p:ph idx="2" type="sldImg"/>
@@ -1564,7 +1564,7 @@
       </p:sp>
       <p:sp>
         <p:nvSpPr>
-          <p:cNvPr id="148" name="Google Shape;148;g396060f51c5_0_1:notes"/>
+          <p:cNvPr id="151" name="Google Shape;151;g396060f51c5_0_1:notes"/>
           <p:cNvSpPr txBox="1"/>
           <p:nvPr>
             <p:ph idx="1" type="body"/>
@@ -1614,7 +1614,7 @@
   <p:cSld>
     <p:spTree>
       <p:nvGrpSpPr>
-        <p:cNvPr id="152" name="Shape 152"/>
+        <p:cNvPr id="155" name="Shape 155"/>
         <p:cNvGrpSpPr/>
         <p:nvPr/>
       </p:nvGrpSpPr>
@@ -1628,7 +1628,7 @@
       </p:grpSpPr>
       <p:sp>
         <p:nvSpPr>
-          <p:cNvPr id="153" name="Google Shape;153;g396060f51c5_0_6:notes"/>
+          <p:cNvPr id="156" name="Google Shape;156;g396060f51c5_0_6:notes"/>
           <p:cNvSpPr/>
           <p:nvPr>
             <p:ph idx="2" type="sldImg"/>
@@ -1663,7 +1663,7 @@
       </p:sp>
       <p:sp>
         <p:nvSpPr>
-          <p:cNvPr id="154" name="Google Shape;154;g396060f51c5_0_6:notes"/>
+          <p:cNvPr id="157" name="Google Shape;157;g396060f51c5_0_6:notes"/>
           <p:cNvSpPr txBox="1"/>
           <p:nvPr>
             <p:ph idx="1" type="body"/>
@@ -1713,7 +1713,7 @@
   <p:cSld>
     <p:spTree>
       <p:nvGrpSpPr>
-        <p:cNvPr id="158" name="Shape 158"/>
+        <p:cNvPr id="161" name="Shape 161"/>
         <p:cNvGrpSpPr/>
         <p:nvPr/>
       </p:nvGrpSpPr>
@@ -1727,7 +1727,7 @@
       </p:grpSpPr>
       <p:sp>
         <p:nvSpPr>
-          <p:cNvPr id="159" name="Google Shape;159;g396060f51c5_0_11:notes"/>
+          <p:cNvPr id="162" name="Google Shape;162;g396060f51c5_0_11:notes"/>
           <p:cNvSpPr/>
           <p:nvPr>
             <p:ph idx="2" type="sldImg"/>
@@ -1762,7 +1762,7 @@
       </p:sp>
       <p:sp>
         <p:nvSpPr>
-          <p:cNvPr id="160" name="Google Shape;160;g396060f51c5_0_11:notes"/>
+          <p:cNvPr id="163" name="Google Shape;163;g396060f51c5_0_11:notes"/>
           <p:cNvSpPr txBox="1"/>
           <p:nvPr>
             <p:ph idx="1" type="body"/>
@@ -1812,7 +1812,7 @@
   <p:cSld>
     <p:spTree>
       <p:nvGrpSpPr>
-        <p:cNvPr id="164" name="Shape 164"/>
+        <p:cNvPr id="167" name="Shape 167"/>
         <p:cNvGrpSpPr/>
         <p:nvPr/>
       </p:nvGrpSpPr>
@@ -1826,7 +1826,7 @@
       </p:grpSpPr>
       <p:sp>
         <p:nvSpPr>
-          <p:cNvPr id="165" name="Google Shape;165;g396060f51c5_0_16:notes"/>
+          <p:cNvPr id="168" name="Google Shape;168;g396060f51c5_0_16:notes"/>
           <p:cNvSpPr/>
           <p:nvPr>
             <p:ph idx="2" type="sldImg"/>
@@ -1861,7 +1861,7 @@
       </p:sp>
       <p:sp>
         <p:nvSpPr>
-          <p:cNvPr id="166" name="Google Shape;166;g396060f51c5_0_16:notes"/>
+          <p:cNvPr id="169" name="Google Shape;169;g396060f51c5_0_16:notes"/>
           <p:cNvSpPr txBox="1"/>
           <p:nvPr>
             <p:ph idx="1" type="body"/>
@@ -13095,7 +13095,7 @@
   <p:cSld>
     <p:spTree>
       <p:nvGrpSpPr>
-        <p:cNvPr id="173" name="Shape 173"/>
+        <p:cNvPr id="176" name="Shape 176"/>
         <p:cNvGrpSpPr/>
         <p:nvPr/>
       </p:nvGrpSpPr>
@@ -13109,7 +13109,7 @@
       </p:grpSpPr>
       <p:sp>
         <p:nvSpPr>
-          <p:cNvPr id="174" name="Google Shape;174;p30"/>
+          <p:cNvPr id="177" name="Google Shape;177;p30"/>
           <p:cNvSpPr txBox="1"/>
           <p:nvPr>
             <p:ph type="title"/>
@@ -13149,7 +13149,7 @@
       </p:sp>
       <p:sp>
         <p:nvSpPr>
-          <p:cNvPr id="175" name="Google Shape;175;p30"/>
+          <p:cNvPr id="178" name="Google Shape;178;p30"/>
           <p:cNvSpPr txBox="1"/>
           <p:nvPr/>
         </p:nvSpPr>
@@ -13291,12 +13291,20 @@
               <a:buNone/>
             </a:pPr>
             <a:r>
+              <a:rPr b="1" lang="en" u="sng">
+                <a:solidFill>
+                  <a:schemeClr val="dk1"/>
+                </a:solidFill>
+              </a:rPr>
+              <a:t>RNF 37</a:t>
+            </a:r>
+            <a:r>
               <a:rPr b="1" lang="en">
                 <a:solidFill>
                   <a:schemeClr val="dk1"/>
                 </a:solidFill>
               </a:rPr>
-              <a:t>RNF 37: </a:t>
+              <a:t>: </a:t>
             </a:r>
             <a:r>
               <a:rPr lang="en">
@@ -13304,7 +13312,23 @@
                   <a:schemeClr val="dk1"/>
                 </a:solidFill>
               </a:rPr>
-              <a:t>Només els cuiners poden accedir al menú especific.(RNF de Restricció de Disseny, seguretat). </a:t>
+              <a:t>Només els cuiners poden accedir al menú especific.(RNF de </a:t>
+            </a:r>
+            <a:r>
+              <a:rPr lang="en" u="sng">
+                <a:solidFill>
+                  <a:schemeClr val="dk1"/>
+                </a:solidFill>
+              </a:rPr>
+              <a:t>Restricció de Disseny, seguretat</a:t>
+            </a:r>
+            <a:r>
+              <a:rPr lang="en">
+                <a:solidFill>
+                  <a:schemeClr val="dk1"/>
+                </a:solidFill>
+              </a:rPr>
+              <a:t>). </a:t>
             </a:r>
             <a:endParaRPr>
               <a:solidFill>
@@ -13432,7 +13456,7 @@
   <p:cSld>
     <p:spTree>
       <p:nvGrpSpPr>
-        <p:cNvPr id="179" name="Shape 179"/>
+        <p:cNvPr id="182" name="Shape 182"/>
         <p:cNvGrpSpPr/>
         <p:nvPr/>
       </p:nvGrpSpPr>
@@ -13446,7 +13470,7 @@
       </p:grpSpPr>
       <p:sp>
         <p:nvSpPr>
-          <p:cNvPr id="180" name="Google Shape;180;p31"/>
+          <p:cNvPr id="183" name="Google Shape;183;p31"/>
           <p:cNvSpPr txBox="1"/>
           <p:nvPr>
             <p:ph type="title"/>
@@ -13486,7 +13510,7 @@
       </p:sp>
       <p:sp>
         <p:nvSpPr>
-          <p:cNvPr id="181" name="Google Shape;181;p31"/>
+          <p:cNvPr id="184" name="Google Shape;184;p31"/>
           <p:cNvSpPr txBox="1"/>
           <p:nvPr/>
         </p:nvSpPr>
@@ -13571,12 +13595,20 @@
               <a:buNone/>
             </a:pPr>
             <a:r>
+              <a:rPr b="1" lang="en" u="sng">
+                <a:solidFill>
+                  <a:schemeClr val="dk1"/>
+                </a:solidFill>
+              </a:rPr>
+              <a:t>RNF 41</a:t>
+            </a:r>
+            <a:r>
               <a:rPr b="1" lang="en">
                 <a:solidFill>
                   <a:schemeClr val="dk1"/>
                 </a:solidFill>
               </a:rPr>
-              <a:t>RNF 41: </a:t>
+              <a:t>: </a:t>
             </a:r>
             <a:r>
               <a:rPr lang="en">
@@ -13584,7 +13616,23 @@
                   <a:schemeClr val="dk1"/>
                 </a:solidFill>
               </a:rPr>
-              <a:t>Es farà servir a l'àrea metropolitana de Barcelona (RNF de Restricció de Disseny).</a:t>
+              <a:t>Es farà servir a l'àrea metropolitana de Barcelona (RNF de </a:t>
+            </a:r>
+            <a:r>
+              <a:rPr lang="en" u="sng">
+                <a:solidFill>
+                  <a:schemeClr val="dk1"/>
+                </a:solidFill>
+              </a:rPr>
+              <a:t>Restricció de Disseny</a:t>
+            </a:r>
+            <a:r>
+              <a:rPr lang="en">
+                <a:solidFill>
+                  <a:schemeClr val="dk1"/>
+                </a:solidFill>
+              </a:rPr>
+              <a:t>).</a:t>
             </a:r>
             <a:endParaRPr>
               <a:solidFill>
@@ -13606,12 +13654,20 @@
               <a:buNone/>
             </a:pPr>
             <a:r>
+              <a:rPr b="1" lang="en" u="sng">
+                <a:solidFill>
+                  <a:schemeClr val="dk1"/>
+                </a:solidFill>
+              </a:rPr>
+              <a:t>RNF 42</a:t>
+            </a:r>
+            <a:r>
               <a:rPr b="1" lang="en">
                 <a:solidFill>
                   <a:schemeClr val="dk1"/>
                 </a:solidFill>
               </a:rPr>
-              <a:t>RNF 42: </a:t>
+              <a:t>: </a:t>
             </a:r>
             <a:r>
               <a:rPr lang="en">
@@ -13619,7 +13675,23 @@
                   <a:schemeClr val="dk1"/>
                 </a:solidFill>
               </a:rPr>
-              <a:t>La interfície serà trilingüe: Espanyol, Català i Anglès (RNF d’Interfícies Externes). </a:t>
+              <a:t>La interfície serà trilingüe: Espanyol, Català i Anglès (RNF </a:t>
+            </a:r>
+            <a:r>
+              <a:rPr lang="en" u="sng">
+                <a:solidFill>
+                  <a:schemeClr val="dk1"/>
+                </a:solidFill>
+              </a:rPr>
+              <a:t>d’Interfícies Externes</a:t>
+            </a:r>
+            <a:r>
+              <a:rPr lang="en">
+                <a:solidFill>
+                  <a:schemeClr val="dk1"/>
+                </a:solidFill>
+              </a:rPr>
+              <a:t>). </a:t>
             </a:r>
             <a:endParaRPr>
               <a:solidFill>
@@ -13641,12 +13713,20 @@
               <a:buNone/>
             </a:pPr>
             <a:r>
+              <a:rPr b="1" lang="en" u="sng">
+                <a:solidFill>
+                  <a:schemeClr val="dk1"/>
+                </a:solidFill>
+              </a:rPr>
+              <a:t>RNF 43</a:t>
+            </a:r>
+            <a:r>
               <a:rPr b="1" lang="en">
                 <a:solidFill>
                   <a:schemeClr val="dk1"/>
                 </a:solidFill>
               </a:rPr>
-              <a:t>RNF 43: </a:t>
+              <a:t>: </a:t>
             </a:r>
             <a:r>
               <a:rPr lang="en">
@@ -13654,7 +13734,23 @@
                   <a:schemeClr val="dk1"/>
                 </a:solidFill>
               </a:rPr>
-              <a:t>Apte tant per a Web com per a Mòbil (RNF d’Interfícies Externes). </a:t>
+              <a:t>Apte tant per a Web com per a Mòbil (RNF </a:t>
+            </a:r>
+            <a:r>
+              <a:rPr lang="en" u="sng">
+                <a:solidFill>
+                  <a:schemeClr val="dk1"/>
+                </a:solidFill>
+              </a:rPr>
+              <a:t>d’Interfícies Externes</a:t>
+            </a:r>
+            <a:r>
+              <a:rPr lang="en">
+                <a:solidFill>
+                  <a:schemeClr val="dk1"/>
+                </a:solidFill>
+              </a:rPr>
+              <a:t>). </a:t>
             </a:r>
             <a:endParaRPr>
               <a:solidFill>
@@ -13676,12 +13772,20 @@
               <a:buNone/>
             </a:pPr>
             <a:r>
+              <a:rPr b="1" lang="en" u="sng">
+                <a:solidFill>
+                  <a:schemeClr val="dk1"/>
+                </a:solidFill>
+              </a:rPr>
+              <a:t>RNF 44</a:t>
+            </a:r>
+            <a:r>
               <a:rPr b="1" lang="en">
                 <a:solidFill>
                   <a:schemeClr val="dk1"/>
                 </a:solidFill>
               </a:rPr>
-              <a:t>RNF 44: </a:t>
+              <a:t>: </a:t>
             </a:r>
             <a:r>
               <a:rPr lang="en">
@@ -13689,7 +13793,23 @@
                   <a:schemeClr val="dk1"/>
                 </a:solidFill>
               </a:rPr>
-              <a:t>Els Mòbils hauran de tenir sistema operatiu IOS o Android (RNF de Restricció de Disseny, limitació de Hw). </a:t>
+              <a:t>Els Mòbils hauran de tenir sistema operatiu IOS o Android (RNF de </a:t>
+            </a:r>
+            <a:r>
+              <a:rPr lang="en" u="sng">
+                <a:solidFill>
+                  <a:schemeClr val="dk1"/>
+                </a:solidFill>
+              </a:rPr>
+              <a:t>Restricció de Disseny, limitació de Hw</a:t>
+            </a:r>
+            <a:r>
+              <a:rPr lang="en">
+                <a:solidFill>
+                  <a:schemeClr val="dk1"/>
+                </a:solidFill>
+              </a:rPr>
+              <a:t>). </a:t>
             </a:r>
             <a:endParaRPr>
               <a:solidFill>
@@ -13711,12 +13831,20 @@
               <a:buNone/>
             </a:pPr>
             <a:r>
+              <a:rPr b="1" lang="en" u="sng">
+                <a:solidFill>
+                  <a:schemeClr val="dk1"/>
+                </a:solidFill>
+              </a:rPr>
+              <a:t>RNF 45</a:t>
+            </a:r>
+            <a:r>
               <a:rPr b="1" lang="en">
                 <a:solidFill>
                   <a:schemeClr val="dk1"/>
                 </a:solidFill>
               </a:rPr>
-              <a:t>RNF 45: </a:t>
+              <a:t>: </a:t>
             </a:r>
             <a:r>
               <a:rPr lang="en">
@@ -13724,7 +13852,23 @@
                   <a:schemeClr val="dk1"/>
                 </a:solidFill>
               </a:rPr>
-              <a:t>Lletra Calibri tant a encapçalaments com per a la resta de continguts. (RNF d’Interfícies Externes). </a:t>
+              <a:t>Lletra Calibri tant a encapçalaments com per a la resta de continguts. (RNF </a:t>
+            </a:r>
+            <a:r>
+              <a:rPr lang="en" u="sng">
+                <a:solidFill>
+                  <a:schemeClr val="dk1"/>
+                </a:solidFill>
+              </a:rPr>
+              <a:t>d’Interfícies Externes</a:t>
+            </a:r>
+            <a:r>
+              <a:rPr lang="en">
+                <a:solidFill>
+                  <a:schemeClr val="dk1"/>
+                </a:solidFill>
+              </a:rPr>
+              <a:t>). </a:t>
             </a:r>
             <a:endParaRPr>
               <a:solidFill>
@@ -13746,12 +13890,20 @@
               <a:buNone/>
             </a:pPr>
             <a:r>
+              <a:rPr b="1" lang="en" u="sng">
+                <a:solidFill>
+                  <a:schemeClr val="dk1"/>
+                </a:solidFill>
+              </a:rPr>
+              <a:t>RNF 46</a:t>
+            </a:r>
+            <a:r>
               <a:rPr b="1" lang="en">
                 <a:solidFill>
                   <a:schemeClr val="dk1"/>
                 </a:solidFill>
               </a:rPr>
-              <a:t>RNF 46: </a:t>
+              <a:t>: </a:t>
             </a:r>
             <a:r>
               <a:rPr lang="en">
@@ -13759,7 +13911,23 @@
                   <a:schemeClr val="dk1"/>
                 </a:solidFill>
               </a:rPr>
-              <a:t>Color corporatiu taronja i  El logo ha d'aparèixer a totes les pantalles. (RNF d’Interfícies Externes). </a:t>
+              <a:t>Color corporatiu taronja i  El logo ha d'aparèixer a totes les pantalles. (RNF </a:t>
+            </a:r>
+            <a:r>
+              <a:rPr lang="en" u="sng">
+                <a:solidFill>
+                  <a:schemeClr val="dk1"/>
+                </a:solidFill>
+              </a:rPr>
+              <a:t>d’Interfícies Externes</a:t>
+            </a:r>
+            <a:r>
+              <a:rPr lang="en">
+                <a:solidFill>
+                  <a:schemeClr val="dk1"/>
+                </a:solidFill>
+              </a:rPr>
+              <a:t>). </a:t>
             </a:r>
             <a:endParaRPr>
               <a:solidFill>
@@ -13781,12 +13949,20 @@
               <a:buNone/>
             </a:pPr>
             <a:r>
+              <a:rPr b="1" lang="en" u="sng">
+                <a:solidFill>
+                  <a:schemeClr val="dk1"/>
+                </a:solidFill>
+              </a:rPr>
+              <a:t>RNF 47</a:t>
+            </a:r>
+            <a:r>
               <a:rPr b="1" lang="en">
                 <a:solidFill>
                   <a:schemeClr val="dk1"/>
                 </a:solidFill>
               </a:rPr>
-              <a:t>RNF 47: </a:t>
+              <a:t>: </a:t>
             </a:r>
             <a:r>
               <a:rPr lang="en">
@@ -13794,7 +13970,23 @@
                   <a:schemeClr val="dk1"/>
                 </a:solidFill>
               </a:rPr>
-              <a:t>La app ha de suportar 1000 usuaris connectats alhora (RNF de Rendiment estàtic).</a:t>
+              <a:t>La app ha de suportar 1000 usuaris connectats alhora (RNF de </a:t>
+            </a:r>
+            <a:r>
+              <a:rPr lang="en" u="sng">
+                <a:solidFill>
+                  <a:schemeClr val="dk1"/>
+                </a:solidFill>
+              </a:rPr>
+              <a:t>Rendiment estàtic</a:t>
+            </a:r>
+            <a:r>
+              <a:rPr lang="en">
+                <a:solidFill>
+                  <a:schemeClr val="dk1"/>
+                </a:solidFill>
+              </a:rPr>
+              <a:t>).</a:t>
             </a:r>
             <a:endParaRPr>
               <a:solidFill>
@@ -13816,12 +14008,20 @@
               <a:buNone/>
             </a:pPr>
             <a:r>
+              <a:rPr b="1" lang="en" u="sng">
+                <a:solidFill>
+                  <a:schemeClr val="dk1"/>
+                </a:solidFill>
+              </a:rPr>
+              <a:t>RNF 48</a:t>
+            </a:r>
+            <a:r>
               <a:rPr b="1" lang="en">
                 <a:solidFill>
                   <a:schemeClr val="dk1"/>
                 </a:solidFill>
               </a:rPr>
-              <a:t>RNF 48: </a:t>
+              <a:t>: </a:t>
             </a:r>
             <a:r>
               <a:rPr lang="en">
@@ -13829,7 +14029,23 @@
                   <a:schemeClr val="dk1"/>
                 </a:solidFill>
               </a:rPr>
-              <a:t>El temps màxim de resposta de la app ha de ser de 5 milisegons (RNF de Rendiment dinàmic).</a:t>
+              <a:t>El temps màxim de resposta de la app ha de ser de 5 milisegons (RNF de </a:t>
+            </a:r>
+            <a:r>
+              <a:rPr lang="en" u="sng">
+                <a:solidFill>
+                  <a:schemeClr val="dk1"/>
+                </a:solidFill>
+              </a:rPr>
+              <a:t>Rendiment dinàmic</a:t>
+            </a:r>
+            <a:r>
+              <a:rPr lang="en">
+                <a:solidFill>
+                  <a:schemeClr val="dk1"/>
+                </a:solidFill>
+              </a:rPr>
+              <a:t>).</a:t>
             </a:r>
             <a:endParaRPr>
               <a:solidFill>
@@ -13851,12 +14067,20 @@
               <a:buNone/>
             </a:pPr>
             <a:r>
+              <a:rPr b="1" lang="en" u="sng">
+                <a:solidFill>
+                  <a:schemeClr val="dk1"/>
+                </a:solidFill>
+              </a:rPr>
+              <a:t>RNF 49</a:t>
+            </a:r>
+            <a:r>
               <a:rPr b="1" lang="en">
                 <a:solidFill>
                   <a:schemeClr val="dk1"/>
                 </a:solidFill>
               </a:rPr>
-              <a:t>RNF 49:</a:t>
+              <a:t>:</a:t>
             </a:r>
             <a:r>
               <a:rPr lang="en">
@@ -13864,7 +14088,23 @@
                   <a:schemeClr val="dk1"/>
                 </a:solidFill>
               </a:rPr>
-              <a:t> Per a encriptar dades es farà servir el protocol OpenVPN (RNF de Decisió de Disseny).</a:t>
+              <a:t> Per a encriptar dades es farà servir el protocol OpenVPN (RNF de </a:t>
+            </a:r>
+            <a:r>
+              <a:rPr lang="en" u="sng">
+                <a:solidFill>
+                  <a:schemeClr val="dk1"/>
+                </a:solidFill>
+              </a:rPr>
+              <a:t>Decisió de Disseny</a:t>
+            </a:r>
+            <a:r>
+              <a:rPr lang="en">
+                <a:solidFill>
+                  <a:schemeClr val="dk1"/>
+                </a:solidFill>
+              </a:rPr>
+              <a:t>).</a:t>
             </a:r>
             <a:endParaRPr>
               <a:solidFill>
@@ -13886,12 +14126,20 @@
               <a:buNone/>
             </a:pPr>
             <a:r>
+              <a:rPr b="1" lang="en" u="sng">
+                <a:solidFill>
+                  <a:schemeClr val="dk1"/>
+                </a:solidFill>
+              </a:rPr>
+              <a:t>RNF 50</a:t>
+            </a:r>
+            <a:r>
               <a:rPr b="1" lang="en">
                 <a:solidFill>
                   <a:schemeClr val="dk1"/>
                 </a:solidFill>
               </a:rPr>
-              <a:t>RNF 50: </a:t>
+              <a:t>: </a:t>
             </a:r>
             <a:r>
               <a:rPr lang="en">
@@ -13899,7 +14147,15 @@
                   <a:schemeClr val="dk1"/>
                 </a:solidFill>
               </a:rPr>
-              <a:t>Interfície amigable i responsive. (RNF d'Objectius de Disseny</a:t>
+              <a:t>Interfície amigable i responsive. (RNF </a:t>
+            </a:r>
+            <a:r>
+              <a:rPr lang="en" u="sng">
+                <a:solidFill>
+                  <a:schemeClr val="dk1"/>
+                </a:solidFill>
+              </a:rPr>
+              <a:t>d'Objectius de Disseny</a:t>
             </a:r>
             <a:r>
               <a:rPr b="1" lang="en">
@@ -13952,7 +14208,7 @@
   <p:cSld>
     <p:spTree>
       <p:nvGrpSpPr>
-        <p:cNvPr id="185" name="Shape 185"/>
+        <p:cNvPr id="188" name="Shape 188"/>
         <p:cNvGrpSpPr/>
         <p:nvPr/>
       </p:nvGrpSpPr>
@@ -13966,7 +14222,7 @@
       </p:grpSpPr>
       <p:sp>
         <p:nvSpPr>
-          <p:cNvPr id="186" name="Google Shape;186;p32"/>
+          <p:cNvPr id="189" name="Google Shape;189;p32"/>
           <p:cNvSpPr txBox="1"/>
           <p:nvPr>
             <p:ph type="title"/>
@@ -14006,7 +14262,7 @@
       </p:sp>
       <p:pic>
         <p:nvPicPr>
-          <p:cNvPr id="187" name="Google Shape;187;p32"/>
+          <p:cNvPr id="190" name="Google Shape;190;p32"/>
           <p:cNvPicPr preferRelativeResize="0"/>
           <p:nvPr/>
         </p:nvPicPr>
@@ -14034,7 +14290,7 @@
       </p:pic>
       <p:pic>
         <p:nvPicPr>
-          <p:cNvPr id="188" name="Google Shape;188;p32"/>
+          <p:cNvPr id="191" name="Google Shape;191;p32"/>
           <p:cNvPicPr preferRelativeResize="0"/>
           <p:nvPr/>
         </p:nvPicPr>
@@ -14349,8 +14605,8 @@
         </p:blipFill>
         <p:spPr>
           <a:xfrm>
-            <a:off x="4887524" y="2257723"/>
-            <a:ext cx="1068149" cy="1068149"/>
+            <a:off x="1579763" y="2275875"/>
+            <a:ext cx="1031826" cy="1031826"/>
           </a:xfrm>
           <a:prstGeom prst="rect">
             <a:avLst/>
@@ -14363,22 +14619,21 @@
       </p:pic>
       <p:pic>
         <p:nvPicPr>
-          <p:cNvPr id="110" name="Google Shape;110;p22"/>
+          <p:cNvPr id="110" name="Google Shape;110;p22" title="IMG-20250713-WA0003.jpg"/>
           <p:cNvPicPr preferRelativeResize="0"/>
           <p:nvPr/>
         </p:nvPicPr>
-        <p:blipFill>
+        <p:blipFill rotWithShape="1">
           <a:blip r:embed="rId5">
             <a:alphaModFix/>
           </a:blip>
-          <a:stretch>
-            <a:fillRect/>
-          </a:stretch>
+          <a:srcRect b="41890" l="20975" r="52416" t="38154"/>
+          <a:stretch/>
         </p:blipFill>
         <p:spPr>
           <a:xfrm>
-            <a:off x="6514275" y="2275876"/>
-            <a:ext cx="1068150" cy="1031829"/>
+            <a:off x="3260775" y="2257725"/>
+            <a:ext cx="1068150" cy="1068152"/>
           </a:xfrm>
           <a:prstGeom prst="rect">
             <a:avLst/>
@@ -14391,22 +14646,48 @@
       </p:pic>
       <p:pic>
         <p:nvPicPr>
-          <p:cNvPr id="111" name="Google Shape;111;p22"/>
+          <p:cNvPr id="111" name="Google Shape;111;p22" title="WhatsApp Image 2026-03-15 at 17.03.54.jpeg"/>
           <p:cNvPicPr preferRelativeResize="0"/>
           <p:nvPr/>
         </p:nvPicPr>
-        <p:blipFill>
+        <p:blipFill rotWithShape="1">
           <a:blip r:embed="rId6">
             <a:alphaModFix/>
           </a:blip>
-          <a:stretch>
-            <a:fillRect/>
-          </a:stretch>
+          <a:srcRect b="44864" l="43153" r="40663" t="42841"/>
+          <a:stretch/>
         </p:blipFill>
         <p:spPr>
           <a:xfrm>
-            <a:off x="1579763" y="2275875"/>
-            <a:ext cx="1031826" cy="1031826"/>
+            <a:off x="6514275" y="2275875"/>
+            <a:ext cx="1031826" cy="1045176"/>
+          </a:xfrm>
+          <a:prstGeom prst="rect">
+            <a:avLst/>
+          </a:prstGeom>
+          <a:noFill/>
+          <a:ln>
+            <a:noFill/>
+          </a:ln>
+        </p:spPr>
+      </p:pic>
+      <p:pic>
+        <p:nvPicPr>
+          <p:cNvPr id="112" name="Google Shape;112;p22"/>
+          <p:cNvPicPr preferRelativeResize="0"/>
+          <p:nvPr/>
+        </p:nvPicPr>
+        <p:blipFill rotWithShape="1">
+          <a:blip r:embed="rId7">
+            <a:alphaModFix/>
+          </a:blip>
+          <a:srcRect b="53444" l="3895" r="56438" t="26495"/>
+          <a:stretch/>
+        </p:blipFill>
+        <p:spPr>
+          <a:xfrm>
+            <a:off x="4932000" y="2241575"/>
+            <a:ext cx="979193" cy="1100425"/>
           </a:xfrm>
           <a:prstGeom prst="rect">
             <a:avLst/>
@@ -14430,7 +14711,7 @@
   <p:cSld>
     <p:spTree>
       <p:nvGrpSpPr>
-        <p:cNvPr id="115" name="Shape 115"/>
+        <p:cNvPr id="116" name="Shape 116"/>
         <p:cNvGrpSpPr/>
         <p:nvPr/>
       </p:nvGrpSpPr>
@@ -14444,7 +14725,7 @@
       </p:grpSpPr>
       <p:sp>
         <p:nvSpPr>
-          <p:cNvPr id="116" name="Google Shape;116;p23"/>
+          <p:cNvPr id="117" name="Google Shape;117;p23"/>
           <p:cNvSpPr txBox="1"/>
           <p:nvPr>
             <p:ph type="title"/>
@@ -14452,7 +14733,7 @@
         </p:nvSpPr>
         <p:spPr>
           <a:xfrm>
-            <a:off x="228600" y="228600"/>
+            <a:off x="228750" y="903563"/>
             <a:ext cx="8686500" cy="572700"/>
           </a:xfrm>
           <a:prstGeom prst="rect">
@@ -14484,7 +14765,7 @@
       </p:sp>
       <p:sp>
         <p:nvSpPr>
-          <p:cNvPr id="117" name="Google Shape;117;p23"/>
+          <p:cNvPr id="118" name="Google Shape;118;p23"/>
           <p:cNvSpPr txBox="1"/>
           <p:nvPr>
             <p:ph idx="1" type="subTitle"/>
@@ -14492,7 +14773,7 @@
         </p:nvSpPr>
         <p:spPr>
           <a:xfrm>
-            <a:off x="513256" y="1874225"/>
+            <a:off x="513206" y="2912938"/>
             <a:ext cx="3903300" cy="738900"/>
           </a:xfrm>
           <a:prstGeom prst="rect">
@@ -14524,7 +14805,7 @@
       </p:sp>
       <p:sp>
         <p:nvSpPr>
-          <p:cNvPr id="118" name="Google Shape;118;p23"/>
+          <p:cNvPr id="119" name="Google Shape;119;p23"/>
           <p:cNvSpPr txBox="1"/>
           <p:nvPr>
             <p:ph idx="2" type="subTitle"/>
@@ -14532,7 +14813,7 @@
         </p:nvSpPr>
         <p:spPr>
           <a:xfrm>
-            <a:off x="4727444" y="1874225"/>
+            <a:off x="4727394" y="2912938"/>
             <a:ext cx="3903300" cy="738900"/>
           </a:xfrm>
           <a:prstGeom prst="rect">
@@ -14564,7 +14845,7 @@
       </p:sp>
       <p:sp>
         <p:nvSpPr>
-          <p:cNvPr id="119" name="Google Shape;119;p23"/>
+          <p:cNvPr id="120" name="Google Shape;120;p23"/>
           <p:cNvSpPr txBox="1"/>
           <p:nvPr>
             <p:ph idx="5" type="subTitle"/>
@@ -14572,7 +14853,7 @@
         </p:nvSpPr>
         <p:spPr>
           <a:xfrm>
-            <a:off x="513257" y="1519325"/>
+            <a:off x="513207" y="2558038"/>
             <a:ext cx="3903300" cy="431100"/>
           </a:xfrm>
           <a:prstGeom prst="rect">
@@ -14596,7 +14877,7 @@
             </a:pPr>
             <a:r>
               <a:rPr lang="en"/>
-              <a:t>Identificar Requisits</a:t>
+              <a:t>3- Identificar Requisits</a:t>
             </a:r>
             <a:endParaRPr/>
           </a:p>
@@ -14604,7 +14885,7 @@
       </p:sp>
       <p:sp>
         <p:nvSpPr>
-          <p:cNvPr id="120" name="Google Shape;120;p23"/>
+          <p:cNvPr id="121" name="Google Shape;121;p23"/>
           <p:cNvSpPr txBox="1"/>
           <p:nvPr>
             <p:ph idx="6" type="subTitle"/>
@@ -14612,7 +14893,7 @@
         </p:nvSpPr>
         <p:spPr>
           <a:xfrm>
-            <a:off x="513257" y="3057700"/>
+            <a:off x="513282" y="3580838"/>
             <a:ext cx="3903300" cy="431100"/>
           </a:xfrm>
           <a:prstGeom prst="rect">
@@ -14636,7 +14917,7 @@
             </a:pPr>
             <a:r>
               <a:rPr lang="en"/>
-              <a:t>Passar-ho tot al Power Point</a:t>
+              <a:t>5- Passar-ho tot al Power Point</a:t>
             </a:r>
             <a:endParaRPr/>
           </a:p>
@@ -14644,7 +14925,7 @@
       </p:sp>
       <p:sp>
         <p:nvSpPr>
-          <p:cNvPr id="121" name="Google Shape;121;p23"/>
+          <p:cNvPr id="122" name="Google Shape;122;p23"/>
           <p:cNvSpPr txBox="1"/>
           <p:nvPr>
             <p:ph idx="7" type="subTitle"/>
@@ -14652,7 +14933,7 @@
         </p:nvSpPr>
         <p:spPr>
           <a:xfrm>
-            <a:off x="4727408" y="1519325"/>
+            <a:off x="4727358" y="2558038"/>
             <a:ext cx="3903300" cy="431100"/>
           </a:xfrm>
           <a:prstGeom prst="rect">
@@ -14676,7 +14957,7 @@
             </a:pPr>
             <a:r>
               <a:rPr lang="en"/>
-              <a:t>Identificar perfils d’usuari</a:t>
+              <a:t>4- Identificar perfils d’usuari</a:t>
             </a:r>
             <a:endParaRPr/>
           </a:p>
@@ -14684,7 +14965,7 @@
       </p:sp>
       <p:sp>
         <p:nvSpPr>
-          <p:cNvPr id="122" name="Google Shape;122;p23"/>
+          <p:cNvPr id="123" name="Google Shape;123;p23"/>
           <p:cNvSpPr txBox="1"/>
           <p:nvPr>
             <p:ph idx="8" type="subTitle"/>
@@ -14692,7 +14973,7 @@
         </p:nvSpPr>
         <p:spPr>
           <a:xfrm>
-            <a:off x="4727400" y="3057700"/>
+            <a:off x="4727425" y="3580838"/>
             <a:ext cx="3903300" cy="659100"/>
           </a:xfrm>
           <a:prstGeom prst="rect">
@@ -14761,7 +15042,132 @@
             </a:pPr>
             <a:r>
               <a:rPr lang="en"/>
-              <a:t>Fer el fitxer Markdown de cada requeriment</a:t>
+              <a:t>6- Fer el fitxer Markdown de cada requeriment</a:t>
+            </a:r>
+            <a:endParaRPr/>
+          </a:p>
+        </p:txBody>
+      </p:sp>
+      <p:sp>
+        <p:nvSpPr>
+          <p:cNvPr id="124" name="Google Shape;124;p23"/>
+          <p:cNvSpPr txBox="1"/>
+          <p:nvPr>
+            <p:ph idx="6" type="subTitle"/>
+          </p:nvPr>
+        </p:nvSpPr>
+        <p:spPr>
+          <a:xfrm>
+            <a:off x="513357" y="1898925"/>
+            <a:ext cx="3903300" cy="431100"/>
+          </a:xfrm>
+          <a:prstGeom prst="rect">
+            <a:avLst/>
+          </a:prstGeom>
+        </p:spPr>
+        <p:txBody>
+          <a:bodyPr anchorCtr="0" anchor="b" bIns="91425" lIns="91425" spcFirstLastPara="1" rIns="91425" wrap="square" tIns="91425">
+            <a:noAutofit/>
+          </a:bodyPr>
+          <a:lstStyle/>
+          <a:p>
+            <a:pPr indent="0" lvl="0" marL="0" rtl="0" algn="ctr">
+              <a:spcBef>
+                <a:spcPts val="0"/>
+              </a:spcBef>
+              <a:spcAft>
+                <a:spcPts val="0"/>
+              </a:spcAft>
+              <a:buNone/>
+            </a:pPr>
+            <a:r>
+              <a:rPr lang="en"/>
+              <a:t>1- Fer un repositori en GitHub</a:t>
+            </a:r>
+            <a:endParaRPr/>
+          </a:p>
+        </p:txBody>
+      </p:sp>
+      <p:sp>
+        <p:nvSpPr>
+          <p:cNvPr id="125" name="Google Shape;125;p23"/>
+          <p:cNvSpPr txBox="1"/>
+          <p:nvPr>
+            <p:ph idx="8" type="subTitle"/>
+          </p:nvPr>
+        </p:nvSpPr>
+        <p:spPr>
+          <a:xfrm>
+            <a:off x="4727500" y="1898925"/>
+            <a:ext cx="3903300" cy="659100"/>
+          </a:xfrm>
+          <a:prstGeom prst="rect">
+            <a:avLst/>
+          </a:prstGeom>
+        </p:spPr>
+        <p:txBody>
+          <a:bodyPr anchorCtr="0" anchor="b" bIns="91425" lIns="91425" spcFirstLastPara="1" rIns="91425" wrap="square" tIns="91425">
+            <a:noAutofit/>
+          </a:bodyPr>
+          <a:lstStyle/>
+          <a:p>
+            <a:pPr indent="0" lvl="0" marL="0" rtl="0" algn="ctr">
+              <a:spcBef>
+                <a:spcPts val="0"/>
+              </a:spcBef>
+              <a:spcAft>
+                <a:spcPts val="0"/>
+              </a:spcAft>
+              <a:buNone/>
+            </a:pPr>
+            <a:r>
+              <a:t/>
+            </a:r>
+            <a:endParaRPr/>
+          </a:p>
+          <a:p>
+            <a:pPr indent="0" lvl="0" marL="0" rtl="0" algn="ctr">
+              <a:spcBef>
+                <a:spcPts val="0"/>
+              </a:spcBef>
+              <a:spcAft>
+                <a:spcPts val="0"/>
+              </a:spcAft>
+              <a:buNone/>
+            </a:pPr>
+            <a:r>
+              <a:t/>
+            </a:r>
+            <a:endParaRPr/>
+          </a:p>
+          <a:p>
+            <a:pPr indent="0" lvl="0" marL="0" rtl="0" algn="ctr">
+              <a:spcBef>
+                <a:spcPts val="0"/>
+              </a:spcBef>
+              <a:spcAft>
+                <a:spcPts val="0"/>
+              </a:spcAft>
+              <a:buNone/>
+            </a:pPr>
+            <a:r>
+              <a:rPr lang="en"/>
+              <a:t>2- Fer un tauler en Trello</a:t>
+            </a:r>
+            <a:endParaRPr/>
+          </a:p>
+          <a:p>
+            <a:pPr indent="0" lvl="0" marL="0" rtl="0" algn="l">
+              <a:spcBef>
+                <a:spcPts val="0"/>
+              </a:spcBef>
+              <a:spcAft>
+                <a:spcPts val="0"/>
+              </a:spcAft>
+              <a:buNone/>
+            </a:pPr>
+            <a:r>
+              <a:t/>
             </a:r>
             <a:endParaRPr/>
           </a:p>
@@ -14780,7 +15186,7 @@
   <p:cSld>
     <p:spTree>
       <p:nvGrpSpPr>
-        <p:cNvPr id="126" name="Shape 126"/>
+        <p:cNvPr id="129" name="Shape 129"/>
         <p:cNvGrpSpPr/>
         <p:nvPr/>
       </p:nvGrpSpPr>
@@ -14794,7 +15200,7 @@
       </p:grpSpPr>
       <p:sp>
         <p:nvSpPr>
-          <p:cNvPr id="127" name="Google Shape;127;p24"/>
+          <p:cNvPr id="130" name="Google Shape;130;p24"/>
           <p:cNvSpPr/>
           <p:nvPr/>
         </p:nvSpPr>
@@ -14842,7 +15248,7 @@
       </p:sp>
       <p:sp>
         <p:nvSpPr>
-          <p:cNvPr id="128" name="Google Shape;128;p24"/>
+          <p:cNvPr id="131" name="Google Shape;131;p24"/>
           <p:cNvSpPr txBox="1"/>
           <p:nvPr>
             <p:ph type="title"/>
@@ -14882,7 +15288,7 @@
       </p:sp>
       <p:sp>
         <p:nvSpPr>
-          <p:cNvPr id="129" name="Google Shape;129;p24"/>
+          <p:cNvPr id="132" name="Google Shape;132;p24"/>
           <p:cNvSpPr txBox="1"/>
           <p:nvPr>
             <p:ph idx="6" type="subTitle"/>
@@ -14922,7 +15328,7 @@
       </p:sp>
       <p:sp>
         <p:nvSpPr>
-          <p:cNvPr id="130" name="Google Shape;130;p24"/>
+          <p:cNvPr id="133" name="Google Shape;133;p24"/>
           <p:cNvSpPr txBox="1"/>
           <p:nvPr>
             <p:ph idx="1" type="subTitle"/>
@@ -14970,7 +15376,7 @@
       </p:sp>
       <p:sp>
         <p:nvSpPr>
-          <p:cNvPr id="131" name="Google Shape;131;p24"/>
+          <p:cNvPr id="134" name="Google Shape;134;p24"/>
           <p:cNvSpPr/>
           <p:nvPr/>
         </p:nvSpPr>
@@ -15018,7 +15424,7 @@
       </p:sp>
       <p:sp>
         <p:nvSpPr>
-          <p:cNvPr id="132" name="Google Shape;132;p24"/>
+          <p:cNvPr id="135" name="Google Shape;135;p24"/>
           <p:cNvSpPr/>
           <p:nvPr/>
         </p:nvSpPr>
@@ -15066,7 +15472,7 @@
       </p:sp>
       <p:sp>
         <p:nvSpPr>
-          <p:cNvPr id="133" name="Google Shape;133;p24"/>
+          <p:cNvPr id="136" name="Google Shape;136;p24"/>
           <p:cNvSpPr txBox="1"/>
           <p:nvPr>
             <p:ph idx="2" type="subTitle"/>
@@ -15106,7 +15512,7 @@
       </p:sp>
       <p:sp>
         <p:nvSpPr>
-          <p:cNvPr id="134" name="Google Shape;134;p24"/>
+          <p:cNvPr id="137" name="Google Shape;137;p24"/>
           <p:cNvSpPr txBox="1"/>
           <p:nvPr>
             <p:ph idx="7" type="subTitle"/>
@@ -15146,7 +15552,7 @@
       </p:sp>
       <p:sp>
         <p:nvSpPr>
-          <p:cNvPr id="135" name="Google Shape;135;p24"/>
+          <p:cNvPr id="138" name="Google Shape;138;p24"/>
           <p:cNvSpPr txBox="1"/>
           <p:nvPr>
             <p:ph idx="1" type="subTitle"/>
@@ -15186,7 +15592,7 @@
       </p:sp>
       <p:sp>
         <p:nvSpPr>
-          <p:cNvPr id="136" name="Google Shape;136;p24"/>
+          <p:cNvPr id="139" name="Google Shape;139;p24"/>
           <p:cNvSpPr txBox="1"/>
           <p:nvPr>
             <p:ph idx="5" type="subTitle"/>
@@ -15226,7 +15632,7 @@
       </p:sp>
       <p:pic>
         <p:nvPicPr>
-          <p:cNvPr id="137" name="Google Shape;137;p24" title="Recetas de pasta de Karlos Arguiñano _ Web oficial Antena 3.jpg"/>
+          <p:cNvPr id="140" name="Google Shape;140;p24" title="Recetas de pasta de Karlos Arguiñano _ Web oficial Antena 3.jpg"/>
           <p:cNvPicPr preferRelativeResize="0"/>
           <p:nvPr/>
         </p:nvPicPr>
@@ -15255,7 +15661,7 @@
       </p:pic>
       <p:pic>
         <p:nvPicPr>
-          <p:cNvPr id="138" name="Google Shape;138;p24" title="meme drôle.jpg"/>
+          <p:cNvPr id="141" name="Google Shape;141;p24" title="meme drôle.jpg"/>
           <p:cNvPicPr preferRelativeResize="0"/>
           <p:nvPr/>
         </p:nvPicPr>
@@ -15284,7 +15690,7 @@
       </p:pic>
       <p:pic>
         <p:nvPicPr>
-          <p:cNvPr id="139" name="Google Shape;139;p24" title="Pizza Delivery Man stock image_ Image of smiling, italian - 7741877.jpg"/>
+          <p:cNvPr id="142" name="Google Shape;142;p24" title="Pizza Delivery Man stock image_ Image of smiling, italian - 7741877.jpg"/>
           <p:cNvPicPr preferRelativeResize="0"/>
           <p:nvPr/>
         </p:nvPicPr>
@@ -15322,7 +15728,7 @@
   <p:cSld>
     <p:spTree>
       <p:nvGrpSpPr>
-        <p:cNvPr id="143" name="Shape 143"/>
+        <p:cNvPr id="146" name="Shape 146"/>
         <p:cNvGrpSpPr/>
         <p:nvPr/>
       </p:nvGrpSpPr>
@@ -15336,7 +15742,7 @@
       </p:grpSpPr>
       <p:sp>
         <p:nvSpPr>
-          <p:cNvPr id="144" name="Google Shape;144;p25"/>
+          <p:cNvPr id="147" name="Google Shape;147;p25"/>
           <p:cNvSpPr txBox="1"/>
           <p:nvPr>
             <p:ph type="title"/>
@@ -15376,7 +15782,7 @@
       </p:sp>
       <p:sp>
         <p:nvSpPr>
-          <p:cNvPr id="145" name="Google Shape;145;p25"/>
+          <p:cNvPr id="148" name="Google Shape;148;p25"/>
           <p:cNvSpPr txBox="1"/>
           <p:nvPr/>
         </p:nvSpPr>
@@ -15535,12 +15941,20 @@
               <a:buNone/>
             </a:pPr>
             <a:r>
+              <a:rPr b="1" lang="en" u="sng">
+                <a:solidFill>
+                  <a:schemeClr val="dk1"/>
+                </a:solidFill>
+              </a:rPr>
+              <a:t>RNF 3</a:t>
+            </a:r>
+            <a:r>
               <a:rPr b="1" lang="en">
                 <a:solidFill>
                   <a:schemeClr val="dk1"/>
                 </a:solidFill>
               </a:rPr>
-              <a:t>RNF 3: </a:t>
+              <a:t>: </a:t>
             </a:r>
             <a:r>
               <a:rPr lang="en">
@@ -15548,7 +15962,23 @@
                   <a:schemeClr val="dk1"/>
                 </a:solidFill>
               </a:rPr>
-              <a:t>Els clients podran registrar-se amb Gmail o amb Outlook (RNF de Decisió de disseny). </a:t>
+              <a:t>Els clients podran registrar-se amb Gmail o amb Outlook (RNF de </a:t>
+            </a:r>
+            <a:r>
+              <a:rPr lang="en" u="sng">
+                <a:solidFill>
+                  <a:schemeClr val="dk1"/>
+                </a:solidFill>
+              </a:rPr>
+              <a:t>Decisió de disseny</a:t>
+            </a:r>
+            <a:r>
+              <a:rPr lang="en">
+                <a:solidFill>
+                  <a:schemeClr val="dk1"/>
+                </a:solidFill>
+              </a:rPr>
+              <a:t>). </a:t>
             </a:r>
             <a:endParaRPr>
               <a:solidFill>
@@ -15639,12 +16069,20 @@
               <a:buNone/>
             </a:pPr>
             <a:r>
+              <a:rPr b="1" lang="en" u="sng">
+                <a:solidFill>
+                  <a:schemeClr val="dk1"/>
+                </a:solidFill>
+              </a:rPr>
+              <a:t>RNF 6</a:t>
+            </a:r>
+            <a:r>
               <a:rPr b="1" lang="en">
                 <a:solidFill>
                   <a:schemeClr val="dk1"/>
                 </a:solidFill>
               </a:rPr>
-              <a:t>RNF 6: </a:t>
+              <a:t>: </a:t>
             </a:r>
             <a:r>
               <a:rPr lang="en">
@@ -15652,7 +16090,23 @@
                   <a:schemeClr val="dk1"/>
                 </a:solidFill>
               </a:rPr>
-              <a:t>El nom d’usuari ha de tenir més de 5 caràcters (RNF de Decisió de disseny). </a:t>
+              <a:t>El nom d’usuari ha de tenir més de 5 caràcters (RNF de </a:t>
+            </a:r>
+            <a:r>
+              <a:rPr lang="en" u="sng">
+                <a:solidFill>
+                  <a:schemeClr val="dk1"/>
+                </a:solidFill>
+              </a:rPr>
+              <a:t>Decisió de disseny</a:t>
+            </a:r>
+            <a:r>
+              <a:rPr lang="en">
+                <a:solidFill>
+                  <a:schemeClr val="dk1"/>
+                </a:solidFill>
+              </a:rPr>
+              <a:t>). </a:t>
             </a:r>
             <a:endParaRPr>
               <a:solidFill>
@@ -15703,12 +16157,20 @@
               <a:buNone/>
             </a:pPr>
             <a:r>
+              <a:rPr b="1" lang="en" u="sng">
+                <a:solidFill>
+                  <a:schemeClr val="dk1"/>
+                </a:solidFill>
+              </a:rPr>
+              <a:t>RNF 8</a:t>
+            </a:r>
+            <a:r>
               <a:rPr b="1" lang="en">
                 <a:solidFill>
                   <a:schemeClr val="dk1"/>
                 </a:solidFill>
               </a:rPr>
-              <a:t>RNF 8: </a:t>
+              <a:t>: </a:t>
             </a:r>
             <a:r>
               <a:rPr lang="en">
@@ -15716,7 +16178,23 @@
                   <a:schemeClr val="dk1"/>
                 </a:solidFill>
               </a:rPr>
-              <a:t>La contrasenya ha de tenir més de 8 caràcters, tenir 2 majúscules i més de 2 caràcters especials. (RNF de Decisió de disseny). </a:t>
+              <a:t>La contrasenya ha de tenir més de 8 caràcters, tenir 2 majúscules i més de 2 caràcters especials. (RNF de </a:t>
+            </a:r>
+            <a:r>
+              <a:rPr lang="en" u="sng">
+                <a:solidFill>
+                  <a:schemeClr val="dk1"/>
+                </a:solidFill>
+              </a:rPr>
+              <a:t>Decisió de disseny</a:t>
+            </a:r>
+            <a:r>
+              <a:rPr lang="en">
+                <a:solidFill>
+                  <a:schemeClr val="dk1"/>
+                </a:solidFill>
+              </a:rPr>
+              <a:t>). </a:t>
             </a:r>
             <a:endParaRPr>
               <a:solidFill>
@@ -15839,12 +16317,20 @@
               <a:buNone/>
             </a:pPr>
             <a:r>
+              <a:rPr b="1" lang="en" u="sng">
+                <a:solidFill>
+                  <a:schemeClr val="dk1"/>
+                </a:solidFill>
+              </a:rPr>
+              <a:t>RNF 12</a:t>
+            </a:r>
+            <a:r>
               <a:rPr b="1" lang="en">
                 <a:solidFill>
                   <a:schemeClr val="dk1"/>
                 </a:solidFill>
               </a:rPr>
-              <a:t>RNF 12: </a:t>
+              <a:t>: </a:t>
             </a:r>
             <a:r>
               <a:rPr lang="en">
@@ -15852,7 +16338,23 @@
                   <a:schemeClr val="dk1"/>
                 </a:solidFill>
               </a:rPr>
-              <a:t>Els rols que s'han assumit es poden modificar en qualsevol moment. (RNF de Decisió de disseny).</a:t>
+              <a:t>Els rols que s'han assumit es poden modificar en qualsevol moment. (RNF de </a:t>
+            </a:r>
+            <a:r>
+              <a:rPr lang="en" u="sng">
+                <a:solidFill>
+                  <a:schemeClr val="dk1"/>
+                </a:solidFill>
+              </a:rPr>
+              <a:t>Decisió de disseny</a:t>
+            </a:r>
+            <a:r>
+              <a:rPr lang="en">
+                <a:solidFill>
+                  <a:schemeClr val="dk1"/>
+                </a:solidFill>
+              </a:rPr>
+              <a:t>).</a:t>
             </a:r>
             <a:endParaRPr>
               <a:solidFill>
@@ -15875,7 +16377,7 @@
   <p:cSld>
     <p:spTree>
       <p:nvGrpSpPr>
-        <p:cNvPr id="149" name="Shape 149"/>
+        <p:cNvPr id="152" name="Shape 152"/>
         <p:cNvGrpSpPr/>
         <p:nvPr/>
       </p:nvGrpSpPr>
@@ -15889,7 +16391,7 @@
       </p:grpSpPr>
       <p:sp>
         <p:nvSpPr>
-          <p:cNvPr id="150" name="Google Shape;150;p26"/>
+          <p:cNvPr id="153" name="Google Shape;153;p26"/>
           <p:cNvSpPr txBox="1"/>
           <p:nvPr>
             <p:ph type="title"/>
@@ -15929,7 +16431,7 @@
       </p:sp>
       <p:sp>
         <p:nvSpPr>
-          <p:cNvPr id="151" name="Google Shape;151;p26"/>
+          <p:cNvPr id="154" name="Google Shape;154;p26"/>
           <p:cNvSpPr txBox="1"/>
           <p:nvPr/>
         </p:nvSpPr>
@@ -16069,12 +16571,20 @@
               <a:buNone/>
             </a:pPr>
             <a:r>
+              <a:rPr b="1" lang="en" sz="1300" u="sng">
+                <a:solidFill>
+                  <a:schemeClr val="dk1"/>
+                </a:solidFill>
+              </a:rPr>
+              <a:t>RNF 15</a:t>
+            </a:r>
+            <a:r>
               <a:rPr b="1" lang="en" sz="1300">
                 <a:solidFill>
                   <a:schemeClr val="dk1"/>
                 </a:solidFill>
               </a:rPr>
-              <a:t>RNF 15: </a:t>
+              <a:t>: </a:t>
             </a:r>
             <a:r>
               <a:rPr lang="en" sz="1300">
@@ -16082,7 +16592,23 @@
                   <a:schemeClr val="dk1"/>
                 </a:solidFill>
               </a:rPr>
-              <a:t>Es mostraran primer els plats i menús que compleixen amb les restriccions alimentaries indicades al perfil. (RNF de Decisió de disseny). </a:t>
+              <a:t>Es mostraran primer els plats i menús que compleixen amb les restriccions alimentaries indicades al perfil. (RNF de </a:t>
+            </a:r>
+            <a:r>
+              <a:rPr lang="en" sz="1300" u="sng">
+                <a:solidFill>
+                  <a:schemeClr val="dk1"/>
+                </a:solidFill>
+              </a:rPr>
+              <a:t>Decisió de disseny</a:t>
+            </a:r>
+            <a:r>
+              <a:rPr lang="en" sz="1300">
+                <a:solidFill>
+                  <a:schemeClr val="dk1"/>
+                </a:solidFill>
+              </a:rPr>
+              <a:t>). </a:t>
             </a:r>
             <a:endParaRPr sz="1300">
               <a:solidFill>
@@ -16101,12 +16627,20 @@
               <a:buNone/>
             </a:pPr>
             <a:r>
+              <a:rPr b="1" lang="en" sz="1300" u="sng">
+                <a:solidFill>
+                  <a:schemeClr val="dk1"/>
+                </a:solidFill>
+              </a:rPr>
+              <a:t>RNF 16</a:t>
+            </a:r>
+            <a:r>
               <a:rPr b="1" lang="en" sz="1300">
                 <a:solidFill>
                   <a:schemeClr val="dk1"/>
                 </a:solidFill>
               </a:rPr>
-              <a:t>RNF 16: </a:t>
+              <a:t>: </a:t>
             </a:r>
             <a:r>
               <a:rPr lang="en" sz="1300">
@@ -16114,7 +16648,23 @@
                   <a:schemeClr val="dk1"/>
                 </a:solidFill>
               </a:rPr>
-              <a:t>També es visualitza el temps estimat d'entrega (RNF de Interfície externa). </a:t>
+              <a:t>També es visualitza el temps estimat d'entrega (RNF de </a:t>
+            </a:r>
+            <a:r>
+              <a:rPr lang="en" sz="1300" u="sng">
+                <a:solidFill>
+                  <a:schemeClr val="dk1"/>
+                </a:solidFill>
+              </a:rPr>
+              <a:t>Interfície externa</a:t>
+            </a:r>
+            <a:r>
+              <a:rPr lang="en" sz="1300">
+                <a:solidFill>
+                  <a:schemeClr val="dk1"/>
+                </a:solidFill>
+              </a:rPr>
+              <a:t>). </a:t>
             </a:r>
             <a:endParaRPr sz="1300">
               <a:solidFill>
@@ -16165,12 +16715,20 @@
               <a:buNone/>
             </a:pPr>
             <a:r>
+              <a:rPr b="1" lang="en" sz="1300" u="sng">
+                <a:solidFill>
+                  <a:schemeClr val="dk1"/>
+                </a:solidFill>
+              </a:rPr>
+              <a:t>RNF 18</a:t>
+            </a:r>
+            <a:r>
               <a:rPr b="1" lang="en" sz="1300">
                 <a:solidFill>
                   <a:schemeClr val="dk1"/>
                 </a:solidFill>
               </a:rPr>
-              <a:t>RNF 18: </a:t>
+              <a:t>: </a:t>
             </a:r>
             <a:r>
               <a:rPr lang="en" sz="1300">
@@ -16178,7 +16736,23 @@
                   <a:schemeClr val="dk1"/>
                 </a:solidFill>
               </a:rPr>
-              <a:t>Les dos llistes seran ordenades segons la distància física entre client i cuiner (RNF de Decisió de disseny).</a:t>
+              <a:t>Les dos llistes seran ordenades segons la distància física entre client i cuiner (RNF de </a:t>
+            </a:r>
+            <a:r>
+              <a:rPr lang="en" sz="1300" u="sng">
+                <a:solidFill>
+                  <a:schemeClr val="dk1"/>
+                </a:solidFill>
+              </a:rPr>
+              <a:t>Decisió de disseny</a:t>
+            </a:r>
+            <a:r>
+              <a:rPr lang="en" sz="1300">
+                <a:solidFill>
+                  <a:schemeClr val="dk1"/>
+                </a:solidFill>
+              </a:rPr>
+              <a:t>).</a:t>
             </a:r>
             <a:r>
               <a:rPr b="1" lang="en" sz="1300">
@@ -16237,12 +16811,20 @@
               <a:buNone/>
             </a:pPr>
             <a:r>
+              <a:rPr b="1" lang="en" sz="1300" u="sng">
+                <a:solidFill>
+                  <a:schemeClr val="dk1"/>
+                </a:solidFill>
+              </a:rPr>
+              <a:t>RNF 20</a:t>
+            </a:r>
+            <a:r>
               <a:rPr b="1" lang="en" sz="1300">
                 <a:solidFill>
                   <a:schemeClr val="dk1"/>
                 </a:solidFill>
               </a:rPr>
-              <a:t>RNF 20: </a:t>
+              <a:t>: </a:t>
             </a:r>
             <a:r>
               <a:rPr lang="en" sz="1300">
@@ -16250,7 +16832,23 @@
                   <a:schemeClr val="dk1"/>
                 </a:solidFill>
               </a:rPr>
-              <a:t>Els cuiners poden aparèixer en el llistat com a no disponibles, indicant l'hora en què poden acceptar comandes. (RNF de Decisió de disseny). </a:t>
+              <a:t>Els cuiners poden aparèixer en el llistat com a no disponibles, indicant l'hora en què poden acceptar comandes. (RNF de </a:t>
+            </a:r>
+            <a:r>
+              <a:rPr lang="en" sz="1300" u="sng">
+                <a:solidFill>
+                  <a:schemeClr val="dk1"/>
+                </a:solidFill>
+              </a:rPr>
+              <a:t>Decisió de disseny</a:t>
+            </a:r>
+            <a:r>
+              <a:rPr lang="en" sz="1300">
+                <a:solidFill>
+                  <a:schemeClr val="dk1"/>
+                </a:solidFill>
+              </a:rPr>
+              <a:t>). </a:t>
             </a:r>
             <a:endParaRPr sz="1300">
               <a:solidFill>
@@ -16301,12 +16899,20 @@
               <a:buNone/>
             </a:pPr>
             <a:r>
+              <a:rPr b="1" lang="en" sz="1300" u="sng">
+                <a:solidFill>
+                  <a:schemeClr val="dk1"/>
+                </a:solidFill>
+              </a:rPr>
+              <a:t>RNF 22</a:t>
+            </a:r>
+            <a:r>
               <a:rPr b="1" lang="en" sz="1300">
                 <a:solidFill>
                   <a:schemeClr val="dk1"/>
                 </a:solidFill>
               </a:rPr>
-              <a:t>RNF 22: </a:t>
+              <a:t>: </a:t>
             </a:r>
             <a:r>
               <a:rPr lang="en" sz="1300">
@@ -16314,7 +16920,23 @@
                   <a:schemeClr val="dk1"/>
                 </a:solidFill>
               </a:rPr>
-              <a:t>Un mateix client no podrà tenir més de tres comandes actives alhora. (RNF de Rendiment estàtic). </a:t>
+              <a:t>Un mateix client no podrà tenir més de tres comandes actives alhora. (RNF de </a:t>
+            </a:r>
+            <a:r>
+              <a:rPr lang="en" sz="1300" u="sng">
+                <a:solidFill>
+                  <a:schemeClr val="dk1"/>
+                </a:solidFill>
+              </a:rPr>
+              <a:t>Rendiment estàtic</a:t>
+            </a:r>
+            <a:r>
+              <a:rPr lang="en" sz="1300">
+                <a:solidFill>
+                  <a:schemeClr val="dk1"/>
+                </a:solidFill>
+              </a:rPr>
+              <a:t>). </a:t>
             </a:r>
             <a:endParaRPr sz="1300">
               <a:solidFill>
@@ -16388,7 +17010,7 @@
   <p:cSld>
     <p:spTree>
       <p:nvGrpSpPr>
-        <p:cNvPr id="155" name="Shape 155"/>
+        <p:cNvPr id="158" name="Shape 158"/>
         <p:cNvGrpSpPr/>
         <p:nvPr/>
       </p:nvGrpSpPr>
@@ -16402,7 +17024,7 @@
       </p:grpSpPr>
       <p:sp>
         <p:nvSpPr>
-          <p:cNvPr id="156" name="Google Shape;156;p27"/>
+          <p:cNvPr id="159" name="Google Shape;159;p27"/>
           <p:cNvSpPr txBox="1"/>
           <p:nvPr>
             <p:ph type="title"/>
@@ -16442,7 +17064,7 @@
       </p:sp>
       <p:sp>
         <p:nvSpPr>
-          <p:cNvPr id="157" name="Google Shape;157;p27"/>
+          <p:cNvPr id="160" name="Google Shape;160;p27"/>
           <p:cNvSpPr txBox="1"/>
           <p:nvPr/>
         </p:nvSpPr>
@@ -16681,12 +17303,20 @@
               <a:buNone/>
             </a:pPr>
             <a:r>
+              <a:rPr b="1" lang="en" u="sng">
+                <a:solidFill>
+                  <a:schemeClr val="dk1"/>
+                </a:solidFill>
+              </a:rPr>
+              <a:t>RNF 28</a:t>
+            </a:r>
+            <a:r>
               <a:rPr b="1" lang="en">
                 <a:solidFill>
                   <a:schemeClr val="dk1"/>
                 </a:solidFill>
               </a:rPr>
-              <a:t>RNF 28: </a:t>
+              <a:t>: </a:t>
             </a:r>
             <a:r>
               <a:rPr lang="en">
@@ -16694,7 +17324,23 @@
                   <a:schemeClr val="dk1"/>
                 </a:solidFill>
               </a:rPr>
-              <a:t>La posició del repartidor es mostra en un mapa utilitzant la interfície de Google Maps. (RNF d’Interfícies Externes). </a:t>
+              <a:t>La posició del repartidor es mostra en un mapa utilitzant la interfície de Google Maps. (RNF </a:t>
+            </a:r>
+            <a:r>
+              <a:rPr lang="en" u="sng">
+                <a:solidFill>
+                  <a:schemeClr val="dk1"/>
+                </a:solidFill>
+              </a:rPr>
+              <a:t>d’Interfícies Externes</a:t>
+            </a:r>
+            <a:r>
+              <a:rPr lang="en">
+                <a:solidFill>
+                  <a:schemeClr val="dk1"/>
+                </a:solidFill>
+              </a:rPr>
+              <a:t>). </a:t>
             </a:r>
             <a:endParaRPr>
               <a:solidFill>
@@ -16736,7 +17382,7 @@
   <p:cSld>
     <p:spTree>
       <p:nvGrpSpPr>
-        <p:cNvPr id="161" name="Shape 161"/>
+        <p:cNvPr id="164" name="Shape 164"/>
         <p:cNvGrpSpPr/>
         <p:nvPr/>
       </p:nvGrpSpPr>
@@ -16750,7 +17396,7 @@
       </p:grpSpPr>
       <p:sp>
         <p:nvSpPr>
-          <p:cNvPr id="162" name="Google Shape;162;p28"/>
+          <p:cNvPr id="165" name="Google Shape;165;p28"/>
           <p:cNvSpPr txBox="1"/>
           <p:nvPr>
             <p:ph type="title"/>
@@ -16790,7 +17436,7 @@
       </p:sp>
       <p:sp>
         <p:nvSpPr>
-          <p:cNvPr id="163" name="Google Shape;163;p28"/>
+          <p:cNvPr id="166" name="Google Shape;166;p28"/>
           <p:cNvSpPr txBox="1"/>
           <p:nvPr/>
         </p:nvSpPr>
@@ -16917,12 +17563,20 @@
               <a:buNone/>
             </a:pPr>
             <a:r>
+              <a:rPr b="1" lang="en" u="sng">
+                <a:solidFill>
+                  <a:schemeClr val="dk1"/>
+                </a:solidFill>
+              </a:rPr>
+              <a:t>RNF 30</a:t>
+            </a:r>
+            <a:r>
               <a:rPr b="1" lang="en">
                 <a:solidFill>
                   <a:schemeClr val="dk1"/>
                 </a:solidFill>
               </a:rPr>
-              <a:t>RNF 30: </a:t>
+              <a:t>: </a:t>
             </a:r>
             <a:r>
               <a:rPr lang="en">
@@ -16930,7 +17584,23 @@
                   <a:schemeClr val="dk1"/>
                 </a:solidFill>
               </a:rPr>
-              <a:t>El sistema s'ha de connectar amb la plataforma de pagament corresponent per autenticar les dades i confirmar la transacció. (RNF d’Interfícies Externes). </a:t>
+              <a:t>El sistema s'ha de connectar amb la plataforma de pagament corresponent per autenticar les dades i confirmar la transacció. (RNF </a:t>
+            </a:r>
+            <a:r>
+              <a:rPr lang="en" u="sng">
+                <a:solidFill>
+                  <a:schemeClr val="dk1"/>
+                </a:solidFill>
+              </a:rPr>
+              <a:t>d’Interfícies Externes</a:t>
+            </a:r>
+            <a:r>
+              <a:rPr lang="en">
+                <a:solidFill>
+                  <a:schemeClr val="dk1"/>
+                </a:solidFill>
+              </a:rPr>
+              <a:t>). </a:t>
             </a:r>
             <a:endParaRPr>
               <a:solidFill>
@@ -16981,12 +17651,20 @@
               <a:buNone/>
             </a:pPr>
             <a:r>
+              <a:rPr b="1" lang="en" u="sng">
+                <a:solidFill>
+                  <a:schemeClr val="dk1"/>
+                </a:solidFill>
+              </a:rPr>
+              <a:t>RNF 32</a:t>
+            </a:r>
+            <a:r>
               <a:rPr b="1" lang="en">
                 <a:solidFill>
                   <a:schemeClr val="dk1"/>
                 </a:solidFill>
               </a:rPr>
-              <a:t>RNF 32: </a:t>
+              <a:t>: </a:t>
             </a:r>
             <a:r>
               <a:rPr lang="en">
@@ -16994,7 +17672,23 @@
                   <a:schemeClr val="dk1"/>
                 </a:solidFill>
               </a:rPr>
-              <a:t>El cuiner i el repartidor han de tenir un compte bancari associat al seu perfil d'usuari. (RNF de Restricció de Disseny, seguretat). </a:t>
+              <a:t>El cuiner i el repartidor han de tenir un compte bancari associat al seu perfil d'usuari. (RNF de </a:t>
+            </a:r>
+            <a:r>
+              <a:rPr lang="en" u="sng">
+                <a:solidFill>
+                  <a:schemeClr val="dk1"/>
+                </a:solidFill>
+              </a:rPr>
+              <a:t>Restricció de Disseny, seguretat</a:t>
+            </a:r>
+            <a:r>
+              <a:rPr lang="en">
+                <a:solidFill>
+                  <a:schemeClr val="dk1"/>
+                </a:solidFill>
+              </a:rPr>
+              <a:t>). </a:t>
             </a:r>
             <a:endParaRPr>
               <a:solidFill>
@@ -17036,7 +17730,7 @@
   <p:cSld>
     <p:spTree>
       <p:nvGrpSpPr>
-        <p:cNvPr id="167" name="Shape 167"/>
+        <p:cNvPr id="170" name="Shape 170"/>
         <p:cNvGrpSpPr/>
         <p:nvPr/>
       </p:nvGrpSpPr>
@@ -17050,7 +17744,7 @@
       </p:grpSpPr>
       <p:sp>
         <p:nvSpPr>
-          <p:cNvPr id="168" name="Google Shape;168;p29"/>
+          <p:cNvPr id="171" name="Google Shape;171;p29"/>
           <p:cNvSpPr txBox="1"/>
           <p:nvPr>
             <p:ph type="title"/>
@@ -17090,7 +17784,7 @@
       </p:sp>
       <p:sp>
         <p:nvSpPr>
-          <p:cNvPr id="169" name="Google Shape;169;p29"/>
+          <p:cNvPr id="172" name="Google Shape;172;p29"/>
           <p:cNvSpPr txBox="1"/>
           <p:nvPr/>
         </p:nvSpPr>
@@ -17267,12 +17961,20 @@
               <a:buNone/>
             </a:pPr>
             <a:r>
+              <a:rPr b="1" lang="en" u="sng">
+                <a:solidFill>
+                  <a:schemeClr val="dk1"/>
+                </a:solidFill>
+              </a:rPr>
+              <a:t>RNF 35</a:t>
+            </a:r>
+            <a:r>
               <a:rPr b="1" lang="en">
                 <a:solidFill>
                   <a:schemeClr val="dk1"/>
                 </a:solidFill>
               </a:rPr>
-              <a:t>RNF 35: </a:t>
+              <a:t>: </a:t>
             </a:r>
             <a:r>
               <a:rPr lang="en">
@@ -17280,7 +17982,23 @@
                   <a:schemeClr val="dk1"/>
                 </a:solidFill>
               </a:rPr>
-              <a:t>Els cuiners recomanats s’ordenen segons la seva valoració (a major valoració, més amunt apareixen). (RNF de Decisió de Disseny). </a:t>
+              <a:t>Els cuiners recomanats s’ordenen segons la seva valoració (a major valoració, més amunt apareixen). (RNF de </a:t>
+            </a:r>
+            <a:r>
+              <a:rPr lang="en" u="sng">
+                <a:solidFill>
+                  <a:schemeClr val="dk1"/>
+                </a:solidFill>
+              </a:rPr>
+              <a:t>Decisió de Disseny</a:t>
+            </a:r>
+            <a:r>
+              <a:rPr lang="en">
+                <a:solidFill>
+                  <a:schemeClr val="dk1"/>
+                </a:solidFill>
+              </a:rPr>
+              <a:t>). </a:t>
             </a:r>
             <a:endParaRPr>
               <a:solidFill>

--- a/Documents/Sprint_Reviews/Sprint_Review01.pptx
+++ b/Documents/Sprint_Reviews/Sprint_Review01.pptx
@@ -2,42 +2,42 @@
 <file path=ppt/presentation.xml><?xml version="1.0" encoding="utf-8"?>
 <p:presentation xmlns:a="http://schemas.openxmlformats.org/drawingml/2006/main" xmlns:r="http://schemas.openxmlformats.org/officeDocument/2006/relationships" xmlns:mc="http://schemas.openxmlformats.org/markup-compatibility/2006" xmlns:mv="urn:schemas-microsoft-com:mac:vml" xmlns:p="http://schemas.openxmlformats.org/presentationml/2006/main" xmlns:c="http://schemas.openxmlformats.org/drawingml/2006/chart" xmlns:dgm="http://schemas.openxmlformats.org/drawingml/2006/diagram" xmlns:o="urn:schemas-microsoft-com:office:office" xmlns:v="urn:schemas-microsoft-com:vml" xmlns:pvml="urn:schemas-microsoft-com:office:powerpoint" xmlns:com="http://schemas.openxmlformats.org/drawingml/2006/compatibility" xmlns:p14="http://schemas.microsoft.com/office/powerpoint/2010/main" xmlns:p15="http://schemas.microsoft.com/office/powerpoint/2012/main" xmlns:ahyp="http://schemas.microsoft.com/office/drawing/2018/hyperlinkcolor" autoCompressPictures="0" embedTrueTypeFonts="1" strictFirstAndLastChars="0" saveSubsetFonts="1">
   <p:sldMasterIdLst>
-    <p:sldMasterId id="2147483667" r:id="rId4"/>
+    <p:sldMasterId id="2147483667" r:id="rId3"/>
   </p:sldMasterIdLst>
   <p:notesMasterIdLst>
-    <p:notesMasterId r:id="rId5"/>
+    <p:notesMasterId r:id="rId4"/>
   </p:notesMasterIdLst>
   <p:sldIdLst>
-    <p:sldId id="256" r:id="rId6"/>
-    <p:sldId id="257" r:id="rId7"/>
-    <p:sldId id="258" r:id="rId8"/>
-    <p:sldId id="259" r:id="rId9"/>
-    <p:sldId id="260" r:id="rId10"/>
-    <p:sldId id="261" r:id="rId11"/>
-    <p:sldId id="262" r:id="rId12"/>
-    <p:sldId id="263" r:id="rId13"/>
-    <p:sldId id="264" r:id="rId14"/>
-    <p:sldId id="265" r:id="rId15"/>
-    <p:sldId id="266" r:id="rId16"/>
-    <p:sldId id="267" r:id="rId17"/>
+    <p:sldId id="256" r:id="rId5"/>
+    <p:sldId id="257" r:id="rId6"/>
+    <p:sldId id="258" r:id="rId7"/>
+    <p:sldId id="259" r:id="rId8"/>
+    <p:sldId id="260" r:id="rId9"/>
+    <p:sldId id="261" r:id="rId10"/>
+    <p:sldId id="262" r:id="rId11"/>
+    <p:sldId id="263" r:id="rId12"/>
+    <p:sldId id="264" r:id="rId13"/>
+    <p:sldId id="265" r:id="rId14"/>
+    <p:sldId id="266" r:id="rId15"/>
+    <p:sldId id="267" r:id="rId16"/>
   </p:sldIdLst>
   <p:sldSz cy="5143500" cx="9144000"/>
   <p:notesSz cx="6858000" cy="9144000"/>
   <p:embeddedFontLst>
     <p:embeddedFont>
       <p:font typeface="Hind"/>
-      <p:regular r:id="rId18"/>
-      <p:bold r:id="rId19"/>
+      <p:regular r:id="rId17"/>
+      <p:bold r:id="rId18"/>
     </p:embeddedFont>
     <p:embeddedFont>
       <p:font typeface="Space Grotesk Medium"/>
-      <p:regular r:id="rId20"/>
-      <p:bold r:id="rId21"/>
+      <p:regular r:id="rId19"/>
+      <p:bold r:id="rId20"/>
     </p:embeddedFont>
     <p:embeddedFont>
       <p:font typeface="Space Grotesk"/>
-      <p:regular r:id="rId22"/>
-      <p:bold r:id="rId23"/>
+      <p:regular r:id="rId21"/>
+      <p:bold r:id="rId22"/>
     </p:embeddedFont>
   </p:embeddedFontLst>
   <p:defaultTextStyle>
@@ -270,26 +270,6 @@
     </a:lvl9pPr>
   </p:defaultTextStyle>
 </p:presentation>
-</file>
-
-<file path=ppt/commentAuthors.xml><?xml version="1.0" encoding="utf-8"?>
-<p:cmAuthorLst xmlns:a="http://schemas.openxmlformats.org/drawingml/2006/main" xmlns:r="http://schemas.openxmlformats.org/officeDocument/2006/relationships" xmlns:mc="http://schemas.openxmlformats.org/markup-compatibility/2006" xmlns:mv="urn:schemas-microsoft-com:mac:vml" xmlns:p="http://schemas.openxmlformats.org/presentationml/2006/main" xmlns:c="http://schemas.openxmlformats.org/drawingml/2006/chart" xmlns:dgm="http://schemas.openxmlformats.org/drawingml/2006/diagram" xmlns:o="urn:schemas-microsoft-com:office:office" xmlns:v="urn:schemas-microsoft-com:vml" xmlns:pvml="urn:schemas-microsoft-com:office:powerpoint" xmlns:com="http://schemas.openxmlformats.org/drawingml/2006/compatibility" xmlns:p14="http://schemas.microsoft.com/office/powerpoint/2010/main" xmlns:p15="http://schemas.microsoft.com/office/powerpoint/2012/main" xmlns:ahyp="http://schemas.microsoft.com/office/drawing/2018/hyperlinkcolor">
-  <p:cmAuthor clrIdx="0" id="0" initials="" lastIdx="1" name="Marina Martín"/>
-</p:cmAuthorLst>
-</file>
-
-<file path=ppt/comments/comment1.xml><?xml version="1.0" encoding="utf-8"?>
-<p:cmLst xmlns:a="http://schemas.openxmlformats.org/drawingml/2006/main" xmlns:r="http://schemas.openxmlformats.org/officeDocument/2006/relationships" xmlns:mc="http://schemas.openxmlformats.org/markup-compatibility/2006" xmlns:mv="urn:schemas-microsoft-com:mac:vml" xmlns:p="http://schemas.openxmlformats.org/presentationml/2006/main" xmlns:c="http://schemas.openxmlformats.org/drawingml/2006/chart" xmlns:dgm="http://schemas.openxmlformats.org/drawingml/2006/diagram" xmlns:o="urn:schemas-microsoft-com:office:office" xmlns:v="urn:schemas-microsoft-com:vml" xmlns:pvml="urn:schemas-microsoft-com:office:powerpoint" xmlns:com="http://schemas.openxmlformats.org/drawingml/2006/compatibility" xmlns:p14="http://schemas.microsoft.com/office/powerpoint/2010/main" xmlns:p15="http://schemas.microsoft.com/office/powerpoint/2012/main" xmlns:ahyp="http://schemas.microsoft.com/office/drawing/2018/hyperlinkcolor">
-  <p:cm authorId="0" idx="1" dt="2026-03-15T11:01:39.703">
-    <p:pos x="6000" y="0"/>
-    <p:text>Tasques: 
-- Identificar requisits
-- Identificar perfils d'usuari
-- Escriure-ho al doc d'especificacions
-- Escriure-ho al powepoint
-- Fer els .md de cada requisit</p:text>
-  </p:cm>
-</p:cmLst>
 </file>
 
 <file path=ppt/notesMasters/notesMaster1.xml><?xml version="1.0" encoding="utf-8"?>
@@ -822,7 +802,7 @@
   <p:cSld>
     <p:spTree>
       <p:nvGrpSpPr>
-        <p:cNvPr id="173" name="Shape 173"/>
+        <p:cNvPr id="167" name="Shape 167"/>
         <p:cNvGrpSpPr/>
         <p:nvPr/>
       </p:nvGrpSpPr>
@@ -836,7 +816,7 @@
       </p:grpSpPr>
       <p:sp>
         <p:nvSpPr>
-          <p:cNvPr id="174" name="Google Shape;174;g396060f51c5_0_26:notes"/>
+          <p:cNvPr id="168" name="Google Shape;168;g396060f51c5_0_26:notes"/>
           <p:cNvSpPr/>
           <p:nvPr>
             <p:ph idx="2" type="sldImg"/>
@@ -871,7 +851,7 @@
       </p:sp>
       <p:sp>
         <p:nvSpPr>
-          <p:cNvPr id="175" name="Google Shape;175;g396060f51c5_0_26:notes"/>
+          <p:cNvPr id="169" name="Google Shape;169;g396060f51c5_0_26:notes"/>
           <p:cNvSpPr txBox="1"/>
           <p:nvPr>
             <p:ph idx="1" type="body"/>
@@ -921,7 +901,7 @@
   <p:cSld>
     <p:spTree>
       <p:nvGrpSpPr>
-        <p:cNvPr id="179" name="Shape 179"/>
+        <p:cNvPr id="173" name="Shape 173"/>
         <p:cNvGrpSpPr/>
         <p:nvPr/>
       </p:nvGrpSpPr>
@@ -935,7 +915,7 @@
       </p:grpSpPr>
       <p:sp>
         <p:nvSpPr>
-          <p:cNvPr id="180" name="Google Shape;180;g396060f51c5_0_31:notes"/>
+          <p:cNvPr id="174" name="Google Shape;174;g396060f51c5_0_31:notes"/>
           <p:cNvSpPr/>
           <p:nvPr>
             <p:ph idx="2" type="sldImg"/>
@@ -970,7 +950,7 @@
       </p:sp>
       <p:sp>
         <p:nvSpPr>
-          <p:cNvPr id="181" name="Google Shape;181;g396060f51c5_0_31:notes"/>
+          <p:cNvPr id="175" name="Google Shape;175;g396060f51c5_0_31:notes"/>
           <p:cNvSpPr txBox="1"/>
           <p:nvPr>
             <p:ph idx="1" type="body"/>
@@ -1020,7 +1000,7 @@
   <p:cSld>
     <p:spTree>
       <p:nvGrpSpPr>
-        <p:cNvPr id="185" name="Shape 185"/>
+        <p:cNvPr id="179" name="Shape 179"/>
         <p:cNvGrpSpPr/>
         <p:nvPr/>
       </p:nvGrpSpPr>
@@ -1034,7 +1014,7 @@
       </p:grpSpPr>
       <p:sp>
         <p:nvSpPr>
-          <p:cNvPr id="186" name="Google Shape;186;g3cf70ef3b9e_0_30:notes"/>
+          <p:cNvPr id="180" name="Google Shape;180;g3cf70ef3b9e_0_30:notes"/>
           <p:cNvSpPr/>
           <p:nvPr>
             <p:ph idx="2" type="sldImg"/>
@@ -1069,7 +1049,7 @@
       </p:sp>
       <p:sp>
         <p:nvSpPr>
-          <p:cNvPr id="187" name="Google Shape;187;g3cf70ef3b9e_0_30:notes"/>
+          <p:cNvPr id="181" name="Google Shape;181;g3cf70ef3b9e_0_30:notes"/>
           <p:cNvSpPr txBox="1"/>
           <p:nvPr>
             <p:ph idx="1" type="body"/>
@@ -1232,7 +1212,7 @@
       </p:grpSpPr>
       <p:sp>
         <p:nvSpPr>
-          <p:cNvPr id="114" name="Google Shape;114;g3cf70ef3b9e_0_10:notes"/>
+          <p:cNvPr id="114" name="Google Shape;114;g3d02d10b557_0_19:notes"/>
           <p:cNvSpPr/>
           <p:nvPr>
             <p:ph idx="2" type="sldImg"/>
@@ -1267,7 +1247,7 @@
       </p:sp>
       <p:sp>
         <p:nvSpPr>
-          <p:cNvPr id="115" name="Google Shape;115;g3cf70ef3b9e_0_10:notes"/>
+          <p:cNvPr id="115" name="Google Shape;115;g3d02d10b557_0_19:notes"/>
           <p:cNvSpPr txBox="1"/>
           <p:nvPr>
             <p:ph idx="1" type="body"/>
@@ -1317,7 +1297,7 @@
   <p:cSld>
     <p:spTree>
       <p:nvGrpSpPr>
-        <p:cNvPr id="126" name="Shape 126"/>
+        <p:cNvPr id="120" name="Shape 120"/>
         <p:cNvGrpSpPr/>
         <p:nvPr/>
       </p:nvGrpSpPr>
@@ -1331,7 +1311,7 @@
       </p:grpSpPr>
       <p:sp>
         <p:nvSpPr>
-          <p:cNvPr id="127" name="Google Shape;127;g3d02b607959_0_2:notes"/>
+          <p:cNvPr id="121" name="Google Shape;121;g3d02b607959_0_2:notes"/>
           <p:cNvSpPr/>
           <p:nvPr>
             <p:ph idx="2" type="sldImg"/>
@@ -1366,7 +1346,7 @@
       </p:sp>
       <p:sp>
         <p:nvSpPr>
-          <p:cNvPr id="128" name="Google Shape;128;g3d02b607959_0_2:notes"/>
+          <p:cNvPr id="122" name="Google Shape;122;g3d02b607959_0_2:notes"/>
           <p:cNvSpPr txBox="1"/>
           <p:nvPr>
             <p:ph idx="1" type="body"/>
@@ -1416,7 +1396,7 @@
   <p:cSld>
     <p:spTree>
       <p:nvGrpSpPr>
-        <p:cNvPr id="143" name="Shape 143"/>
+        <p:cNvPr id="137" name="Shape 137"/>
         <p:cNvGrpSpPr/>
         <p:nvPr/>
       </p:nvGrpSpPr>
@@ -1430,7 +1410,7 @@
       </p:grpSpPr>
       <p:sp>
         <p:nvSpPr>
-          <p:cNvPr id="144" name="Google Shape;144;g3cf70ef3b9e_0_26:notes"/>
+          <p:cNvPr id="138" name="Google Shape;138;g3cf70ef3b9e_0_26:notes"/>
           <p:cNvSpPr/>
           <p:nvPr>
             <p:ph idx="2" type="sldImg"/>
@@ -1465,7 +1445,7 @@
       </p:sp>
       <p:sp>
         <p:nvSpPr>
-          <p:cNvPr id="145" name="Google Shape;145;g3cf70ef3b9e_0_26:notes"/>
+          <p:cNvPr id="139" name="Google Shape;139;g3cf70ef3b9e_0_26:notes"/>
           <p:cNvSpPr txBox="1"/>
           <p:nvPr>
             <p:ph idx="1" type="body"/>
@@ -1515,7 +1495,7 @@
   <p:cSld>
     <p:spTree>
       <p:nvGrpSpPr>
-        <p:cNvPr id="149" name="Shape 149"/>
+        <p:cNvPr id="143" name="Shape 143"/>
         <p:cNvGrpSpPr/>
         <p:nvPr/>
       </p:nvGrpSpPr>
@@ -1529,7 +1509,7 @@
       </p:grpSpPr>
       <p:sp>
         <p:nvSpPr>
-          <p:cNvPr id="150" name="Google Shape;150;g396060f51c5_0_1:notes"/>
+          <p:cNvPr id="144" name="Google Shape;144;g396060f51c5_0_1:notes"/>
           <p:cNvSpPr/>
           <p:nvPr>
             <p:ph idx="2" type="sldImg"/>
@@ -1564,7 +1544,7 @@
       </p:sp>
       <p:sp>
         <p:nvSpPr>
-          <p:cNvPr id="151" name="Google Shape;151;g396060f51c5_0_1:notes"/>
+          <p:cNvPr id="145" name="Google Shape;145;g396060f51c5_0_1:notes"/>
           <p:cNvSpPr txBox="1"/>
           <p:nvPr>
             <p:ph idx="1" type="body"/>
@@ -1614,7 +1594,7 @@
   <p:cSld>
     <p:spTree>
       <p:nvGrpSpPr>
-        <p:cNvPr id="155" name="Shape 155"/>
+        <p:cNvPr id="149" name="Shape 149"/>
         <p:cNvGrpSpPr/>
         <p:nvPr/>
       </p:nvGrpSpPr>
@@ -1628,7 +1608,7 @@
       </p:grpSpPr>
       <p:sp>
         <p:nvSpPr>
-          <p:cNvPr id="156" name="Google Shape;156;g396060f51c5_0_6:notes"/>
+          <p:cNvPr id="150" name="Google Shape;150;g396060f51c5_0_6:notes"/>
           <p:cNvSpPr/>
           <p:nvPr>
             <p:ph idx="2" type="sldImg"/>
@@ -1663,7 +1643,7 @@
       </p:sp>
       <p:sp>
         <p:nvSpPr>
-          <p:cNvPr id="157" name="Google Shape;157;g396060f51c5_0_6:notes"/>
+          <p:cNvPr id="151" name="Google Shape;151;g396060f51c5_0_6:notes"/>
           <p:cNvSpPr txBox="1"/>
           <p:nvPr>
             <p:ph idx="1" type="body"/>
@@ -1713,7 +1693,7 @@
   <p:cSld>
     <p:spTree>
       <p:nvGrpSpPr>
-        <p:cNvPr id="161" name="Shape 161"/>
+        <p:cNvPr id="155" name="Shape 155"/>
         <p:cNvGrpSpPr/>
         <p:nvPr/>
       </p:nvGrpSpPr>
@@ -1727,7 +1707,7 @@
       </p:grpSpPr>
       <p:sp>
         <p:nvSpPr>
-          <p:cNvPr id="162" name="Google Shape;162;g396060f51c5_0_11:notes"/>
+          <p:cNvPr id="156" name="Google Shape;156;g396060f51c5_0_11:notes"/>
           <p:cNvSpPr/>
           <p:nvPr>
             <p:ph idx="2" type="sldImg"/>
@@ -1762,7 +1742,7 @@
       </p:sp>
       <p:sp>
         <p:nvSpPr>
-          <p:cNvPr id="163" name="Google Shape;163;g396060f51c5_0_11:notes"/>
+          <p:cNvPr id="157" name="Google Shape;157;g396060f51c5_0_11:notes"/>
           <p:cNvSpPr txBox="1"/>
           <p:nvPr>
             <p:ph idx="1" type="body"/>
@@ -1812,7 +1792,7 @@
   <p:cSld>
     <p:spTree>
       <p:nvGrpSpPr>
-        <p:cNvPr id="167" name="Shape 167"/>
+        <p:cNvPr id="161" name="Shape 161"/>
         <p:cNvGrpSpPr/>
         <p:nvPr/>
       </p:nvGrpSpPr>
@@ -1826,7 +1806,7 @@
       </p:grpSpPr>
       <p:sp>
         <p:nvSpPr>
-          <p:cNvPr id="168" name="Google Shape;168;g396060f51c5_0_16:notes"/>
+          <p:cNvPr id="162" name="Google Shape;162;g396060f51c5_0_16:notes"/>
           <p:cNvSpPr/>
           <p:nvPr>
             <p:ph idx="2" type="sldImg"/>
@@ -1861,7 +1841,7 @@
       </p:sp>
       <p:sp>
         <p:nvSpPr>
-          <p:cNvPr id="169" name="Google Shape;169;g396060f51c5_0_16:notes"/>
+          <p:cNvPr id="163" name="Google Shape;163;g396060f51c5_0_16:notes"/>
           <p:cNvSpPr txBox="1"/>
           <p:nvPr>
             <p:ph idx="1" type="body"/>
@@ -13095,7 +13075,7 @@
   <p:cSld>
     <p:spTree>
       <p:nvGrpSpPr>
-        <p:cNvPr id="176" name="Shape 176"/>
+        <p:cNvPr id="170" name="Shape 170"/>
         <p:cNvGrpSpPr/>
         <p:nvPr/>
       </p:nvGrpSpPr>
@@ -13109,7 +13089,7 @@
       </p:grpSpPr>
       <p:sp>
         <p:nvSpPr>
-          <p:cNvPr id="177" name="Google Shape;177;p30"/>
+          <p:cNvPr id="171" name="Google Shape;171;p30"/>
           <p:cNvSpPr txBox="1"/>
           <p:nvPr>
             <p:ph type="title"/>
@@ -13149,7 +13129,7 @@
       </p:sp>
       <p:sp>
         <p:nvSpPr>
-          <p:cNvPr id="178" name="Google Shape;178;p30"/>
+          <p:cNvPr id="172" name="Google Shape;172;p30"/>
           <p:cNvSpPr txBox="1"/>
           <p:nvPr/>
         </p:nvSpPr>
@@ -13456,7 +13436,7 @@
   <p:cSld>
     <p:spTree>
       <p:nvGrpSpPr>
-        <p:cNvPr id="182" name="Shape 182"/>
+        <p:cNvPr id="176" name="Shape 176"/>
         <p:cNvGrpSpPr/>
         <p:nvPr/>
       </p:nvGrpSpPr>
@@ -13470,7 +13450,7 @@
       </p:grpSpPr>
       <p:sp>
         <p:nvSpPr>
-          <p:cNvPr id="183" name="Google Shape;183;p31"/>
+          <p:cNvPr id="177" name="Google Shape;177;p31"/>
           <p:cNvSpPr txBox="1"/>
           <p:nvPr>
             <p:ph type="title"/>
@@ -13510,7 +13490,7 @@
       </p:sp>
       <p:sp>
         <p:nvSpPr>
-          <p:cNvPr id="184" name="Google Shape;184;p31"/>
+          <p:cNvPr id="178" name="Google Shape;178;p31"/>
           <p:cNvSpPr txBox="1"/>
           <p:nvPr/>
         </p:nvSpPr>
@@ -14208,7 +14188,7 @@
   <p:cSld>
     <p:spTree>
       <p:nvGrpSpPr>
-        <p:cNvPr id="188" name="Shape 188"/>
+        <p:cNvPr id="182" name="Shape 182"/>
         <p:cNvGrpSpPr/>
         <p:nvPr/>
       </p:nvGrpSpPr>
@@ -14222,7 +14202,7 @@
       </p:grpSpPr>
       <p:sp>
         <p:nvSpPr>
-          <p:cNvPr id="189" name="Google Shape;189;p32"/>
+          <p:cNvPr id="183" name="Google Shape;183;p32"/>
           <p:cNvSpPr txBox="1"/>
           <p:nvPr>
             <p:ph type="title"/>
@@ -14262,7 +14242,7 @@
       </p:sp>
       <p:pic>
         <p:nvPicPr>
-          <p:cNvPr id="190" name="Google Shape;190;p32"/>
+          <p:cNvPr id="184" name="Google Shape;184;p32"/>
           <p:cNvPicPr preferRelativeResize="0"/>
           <p:nvPr/>
         </p:nvPicPr>
@@ -14290,7 +14270,7 @@
       </p:pic>
       <p:pic>
         <p:nvPicPr>
-          <p:cNvPr id="191" name="Google Shape;191;p32"/>
+          <p:cNvPr id="185" name="Google Shape;185;p32"/>
           <p:cNvPicPr preferRelativeResize="0"/>
           <p:nvPr/>
         </p:nvPicPr>
@@ -14733,8 +14713,8 @@
         </p:nvSpPr>
         <p:spPr>
           <a:xfrm>
-            <a:off x="228750" y="903563"/>
-            <a:ext cx="8686500" cy="572700"/>
+            <a:off x="0" y="228600"/>
+            <a:ext cx="5251500" cy="572700"/>
           </a:xfrm>
           <a:prstGeom prst="rect">
             <a:avLst/>
@@ -14757,24 +14737,51 @@
             </a:pPr>
             <a:r>
               <a:rPr lang="en"/>
-              <a:t>Tasques fetes al sprint</a:t>
+              <a:t>Tasques fetes a l’sprint</a:t>
             </a:r>
             <a:endParaRPr/>
           </a:p>
         </p:txBody>
       </p:sp>
+      <p:pic>
+        <p:nvPicPr>
+          <p:cNvPr id="118" name="Google Shape;118;p23"/>
+          <p:cNvPicPr preferRelativeResize="0"/>
+          <p:nvPr/>
+        </p:nvPicPr>
+        <p:blipFill rotWithShape="1">
+          <a:blip r:embed="rId3">
+            <a:alphaModFix/>
+          </a:blip>
+          <a:srcRect b="0" l="0" r="0" t="6638"/>
+          <a:stretch/>
+        </p:blipFill>
+        <p:spPr>
+          <a:xfrm>
+            <a:off x="5251554" y="0"/>
+            <a:ext cx="3892446" cy="5143500"/>
+          </a:xfrm>
+          <a:prstGeom prst="rect">
+            <a:avLst/>
+          </a:prstGeom>
+          <a:noFill/>
+          <a:ln>
+            <a:noFill/>
+          </a:ln>
+        </p:spPr>
+      </p:pic>
       <p:sp>
         <p:nvSpPr>
-          <p:cNvPr id="118" name="Google Shape;118;p23"/>
+          <p:cNvPr id="119" name="Google Shape;119;p23"/>
           <p:cNvSpPr txBox="1"/>
           <p:nvPr>
-            <p:ph idx="1" type="subTitle"/>
+            <p:ph idx="6" type="subTitle"/>
           </p:nvPr>
         </p:nvSpPr>
         <p:spPr>
           <a:xfrm>
-            <a:off x="513206" y="2912938"/>
-            <a:ext cx="3903300" cy="738900"/>
+            <a:off x="785400" y="1405125"/>
+            <a:ext cx="3680700" cy="2910000"/>
           </a:xfrm>
           <a:prstGeom prst="rect">
             <a:avLst/>
@@ -14796,209 +14803,10 @@
               <a:buNone/>
             </a:pPr>
             <a:r>
-              <a:rPr lang="en"/>
-              <a:t>(i escriure’ls al Document d’Especificacions)</a:t>
-            </a:r>
-            <a:endParaRPr/>
-          </a:p>
-        </p:txBody>
-      </p:sp>
-      <p:sp>
-        <p:nvSpPr>
-          <p:cNvPr id="119" name="Google Shape;119;p23"/>
-          <p:cNvSpPr txBox="1"/>
-          <p:nvPr>
-            <p:ph idx="2" type="subTitle"/>
-          </p:nvPr>
-        </p:nvSpPr>
-        <p:spPr>
-          <a:xfrm>
-            <a:off x="4727394" y="2912938"/>
-            <a:ext cx="3903300" cy="738900"/>
-          </a:xfrm>
-          <a:prstGeom prst="rect">
-            <a:avLst/>
-          </a:prstGeom>
-        </p:spPr>
-        <p:txBody>
-          <a:bodyPr anchorCtr="0" anchor="t" bIns="91425" lIns="91425" spcFirstLastPara="1" rIns="91425" wrap="square" tIns="91425">
-            <a:noAutofit/>
-          </a:bodyPr>
-          <a:lstStyle/>
-          <a:p>
-            <a:pPr indent="0" lvl="0" marL="0" rtl="0" algn="ctr">
-              <a:spcBef>
-                <a:spcPts val="0"/>
-              </a:spcBef>
-              <a:spcAft>
-                <a:spcPts val="0"/>
-              </a:spcAft>
-              <a:buNone/>
-            </a:pPr>
-            <a:r>
-              <a:rPr lang="en"/>
-              <a:t>(i escriure’ls al Document d’Especificacions)</a:t>
-            </a:r>
-            <a:endParaRPr/>
-          </a:p>
-        </p:txBody>
-      </p:sp>
-      <p:sp>
-        <p:nvSpPr>
-          <p:cNvPr id="120" name="Google Shape;120;p23"/>
-          <p:cNvSpPr txBox="1"/>
-          <p:nvPr>
-            <p:ph idx="5" type="subTitle"/>
-          </p:nvPr>
-        </p:nvSpPr>
-        <p:spPr>
-          <a:xfrm>
-            <a:off x="513207" y="2558038"/>
-            <a:ext cx="3903300" cy="431100"/>
-          </a:xfrm>
-          <a:prstGeom prst="rect">
-            <a:avLst/>
-          </a:prstGeom>
-        </p:spPr>
-        <p:txBody>
-          <a:bodyPr anchorCtr="0" anchor="b" bIns="91425" lIns="91425" spcFirstLastPara="1" rIns="91425" wrap="square" tIns="91425">
-            <a:noAutofit/>
-          </a:bodyPr>
-          <a:lstStyle/>
-          <a:p>
-            <a:pPr indent="0" lvl="0" marL="0" rtl="0" algn="ctr">
-              <a:spcBef>
-                <a:spcPts val="0"/>
-              </a:spcBef>
-              <a:spcAft>
-                <a:spcPts val="0"/>
-              </a:spcAft>
-              <a:buNone/>
-            </a:pPr>
-            <a:r>
-              <a:rPr lang="en"/>
-              <a:t>3- Identificar Requisits</a:t>
-            </a:r>
-            <a:endParaRPr/>
-          </a:p>
-        </p:txBody>
-      </p:sp>
-      <p:sp>
-        <p:nvSpPr>
-          <p:cNvPr id="121" name="Google Shape;121;p23"/>
-          <p:cNvSpPr txBox="1"/>
-          <p:nvPr>
-            <p:ph idx="6" type="subTitle"/>
-          </p:nvPr>
-        </p:nvSpPr>
-        <p:spPr>
-          <a:xfrm>
-            <a:off x="513282" y="3580838"/>
-            <a:ext cx="3903300" cy="431100"/>
-          </a:xfrm>
-          <a:prstGeom prst="rect">
-            <a:avLst/>
-          </a:prstGeom>
-        </p:spPr>
-        <p:txBody>
-          <a:bodyPr anchorCtr="0" anchor="b" bIns="91425" lIns="91425" spcFirstLastPara="1" rIns="91425" wrap="square" tIns="91425">
-            <a:noAutofit/>
-          </a:bodyPr>
-          <a:lstStyle/>
-          <a:p>
-            <a:pPr indent="0" lvl="0" marL="0" rtl="0" algn="ctr">
-              <a:spcBef>
-                <a:spcPts val="0"/>
-              </a:spcBef>
-              <a:spcAft>
-                <a:spcPts val="0"/>
-              </a:spcAft>
-              <a:buNone/>
-            </a:pPr>
-            <a:r>
-              <a:rPr lang="en"/>
-              <a:t>5- Passar-ho tot al Power Point</a:t>
-            </a:r>
-            <a:endParaRPr/>
-          </a:p>
-        </p:txBody>
-      </p:sp>
-      <p:sp>
-        <p:nvSpPr>
-          <p:cNvPr id="122" name="Google Shape;122;p23"/>
-          <p:cNvSpPr txBox="1"/>
-          <p:nvPr>
-            <p:ph idx="7" type="subTitle"/>
-          </p:nvPr>
-        </p:nvSpPr>
-        <p:spPr>
-          <a:xfrm>
-            <a:off x="4727358" y="2558038"/>
-            <a:ext cx="3903300" cy="431100"/>
-          </a:xfrm>
-          <a:prstGeom prst="rect">
-            <a:avLst/>
-          </a:prstGeom>
-        </p:spPr>
-        <p:txBody>
-          <a:bodyPr anchorCtr="0" anchor="b" bIns="91425" lIns="91425" spcFirstLastPara="1" rIns="91425" wrap="square" tIns="91425">
-            <a:noAutofit/>
-          </a:bodyPr>
-          <a:lstStyle/>
-          <a:p>
-            <a:pPr indent="0" lvl="0" marL="0" rtl="0" algn="ctr">
-              <a:spcBef>
-                <a:spcPts val="0"/>
-              </a:spcBef>
-              <a:spcAft>
-                <a:spcPts val="0"/>
-              </a:spcAft>
-              <a:buNone/>
-            </a:pPr>
-            <a:r>
-              <a:rPr lang="en"/>
-              <a:t>4- Identificar perfils d’usuari</a:t>
-            </a:r>
-            <a:endParaRPr/>
-          </a:p>
-        </p:txBody>
-      </p:sp>
-      <p:sp>
-        <p:nvSpPr>
-          <p:cNvPr id="123" name="Google Shape;123;p23"/>
-          <p:cNvSpPr txBox="1"/>
-          <p:nvPr>
-            <p:ph idx="8" type="subTitle"/>
-          </p:nvPr>
-        </p:nvSpPr>
-        <p:spPr>
-          <a:xfrm>
-            <a:off x="4727425" y="3580838"/>
-            <a:ext cx="3903300" cy="659100"/>
-          </a:xfrm>
-          <a:prstGeom prst="rect">
-            <a:avLst/>
-          </a:prstGeom>
-        </p:spPr>
-        <p:txBody>
-          <a:bodyPr anchorCtr="0" anchor="b" bIns="91425" lIns="91425" spcFirstLastPara="1" rIns="91425" wrap="square" tIns="91425">
-            <a:noAutofit/>
-          </a:bodyPr>
-          <a:lstStyle/>
-          <a:p>
-            <a:pPr indent="0" lvl="0" marL="0" rtl="0" algn="ctr">
-              <a:spcBef>
-                <a:spcPts val="0"/>
-              </a:spcBef>
-              <a:spcAft>
-                <a:spcPts val="0"/>
-              </a:spcAft>
-              <a:buNone/>
-            </a:pPr>
-            <a:r>
-              <a:t/>
-            </a:r>
-            <a:endParaRPr/>
+              <a:rPr lang="en" sz="1300"/>
+              <a:t>1- Fer un repositori en GitHub</a:t>
+            </a:r>
+            <a:endParaRPr sz="1300"/>
           </a:p>
           <a:p>
             <a:pPr indent="0" lvl="0" marL="0" rtl="0" algn="ctr">
@@ -15013,7 +14821,7 @@
             <a:r>
               <a:t/>
             </a:r>
-            <a:endParaRPr/>
+            <a:endParaRPr sz="1300"/>
           </a:p>
           <a:p>
             <a:pPr indent="0" lvl="0" marL="0" rtl="0" algn="ctr">
@@ -15026,9 +14834,14 @@
               <a:buNone/>
             </a:pPr>
             <a:r>
-              <a:t/>
-            </a:r>
-            <a:endParaRPr/>
+              <a:rPr lang="en" sz="1300"/>
+              <a:t>2- </a:t>
+            </a:r>
+            <a:r>
+              <a:rPr lang="en" sz="1300"/>
+              <a:t>Fer un tauler en Trello</a:t>
+            </a:r>
+            <a:endParaRPr sz="1300"/>
           </a:p>
           <a:p>
             <a:pPr indent="0" lvl="0" marL="0" rtl="0" algn="ctr">
@@ -15041,89 +14854,9 @@
               <a:buNone/>
             </a:pPr>
             <a:r>
-              <a:rPr lang="en"/>
-              <a:t>6- Fer el fitxer Markdown de cada requeriment</a:t>
-            </a:r>
-            <a:endParaRPr/>
-          </a:p>
-        </p:txBody>
-      </p:sp>
-      <p:sp>
-        <p:nvSpPr>
-          <p:cNvPr id="124" name="Google Shape;124;p23"/>
-          <p:cNvSpPr txBox="1"/>
-          <p:nvPr>
-            <p:ph idx="6" type="subTitle"/>
-          </p:nvPr>
-        </p:nvSpPr>
-        <p:spPr>
-          <a:xfrm>
-            <a:off x="513357" y="1898925"/>
-            <a:ext cx="3903300" cy="431100"/>
-          </a:xfrm>
-          <a:prstGeom prst="rect">
-            <a:avLst/>
-          </a:prstGeom>
-        </p:spPr>
-        <p:txBody>
-          <a:bodyPr anchorCtr="0" anchor="b" bIns="91425" lIns="91425" spcFirstLastPara="1" rIns="91425" wrap="square" tIns="91425">
-            <a:noAutofit/>
-          </a:bodyPr>
-          <a:lstStyle/>
-          <a:p>
-            <a:pPr indent="0" lvl="0" marL="0" rtl="0" algn="ctr">
-              <a:spcBef>
-                <a:spcPts val="0"/>
-              </a:spcBef>
-              <a:spcAft>
-                <a:spcPts val="0"/>
-              </a:spcAft>
-              <a:buNone/>
-            </a:pPr>
-            <a:r>
-              <a:rPr lang="en"/>
-              <a:t>1- Fer un repositori en GitHub</a:t>
-            </a:r>
-            <a:endParaRPr/>
-          </a:p>
-        </p:txBody>
-      </p:sp>
-      <p:sp>
-        <p:nvSpPr>
-          <p:cNvPr id="125" name="Google Shape;125;p23"/>
-          <p:cNvSpPr txBox="1"/>
-          <p:nvPr>
-            <p:ph idx="8" type="subTitle"/>
-          </p:nvPr>
-        </p:nvSpPr>
-        <p:spPr>
-          <a:xfrm>
-            <a:off x="4727500" y="1898925"/>
-            <a:ext cx="3903300" cy="659100"/>
-          </a:xfrm>
-          <a:prstGeom prst="rect">
-            <a:avLst/>
-          </a:prstGeom>
-        </p:spPr>
-        <p:txBody>
-          <a:bodyPr anchorCtr="0" anchor="b" bIns="91425" lIns="91425" spcFirstLastPara="1" rIns="91425" wrap="square" tIns="91425">
-            <a:noAutofit/>
-          </a:bodyPr>
-          <a:lstStyle/>
-          <a:p>
-            <a:pPr indent="0" lvl="0" marL="0" rtl="0" algn="ctr">
-              <a:spcBef>
-                <a:spcPts val="0"/>
-              </a:spcBef>
-              <a:spcAft>
-                <a:spcPts val="0"/>
-              </a:spcAft>
-              <a:buNone/>
-            </a:pPr>
-            <a:r>
               <a:t/>
             </a:r>
-            <a:endParaRPr/>
+            <a:endParaRPr sz="1300"/>
           </a:p>
           <a:p>
             <a:pPr indent="0" lvl="0" marL="0" rtl="0" algn="ctr">
@@ -15136,9 +14869,14 @@
               <a:buNone/>
             </a:pPr>
             <a:r>
-              <a:t/>
-            </a:r>
-            <a:endParaRPr/>
+              <a:rPr lang="en" sz="1300"/>
+              <a:t>3- </a:t>
+            </a:r>
+            <a:r>
+              <a:rPr lang="en" sz="1300"/>
+              <a:t>Identificar Requisits</a:t>
+            </a:r>
+            <a:endParaRPr sz="1300"/>
           </a:p>
           <a:p>
             <a:pPr indent="0" lvl="0" marL="0" rtl="0" algn="ctr">
@@ -15151,13 +14889,23 @@
               <a:buNone/>
             </a:pPr>
             <a:r>
-              <a:rPr lang="en"/>
-              <a:t>2- Fer un tauler en Trello</a:t>
-            </a:r>
-            <a:endParaRPr/>
+              <a:rPr b="0" lang="en" sz="900">
+                <a:latin typeface="Hind"/>
+                <a:ea typeface="Hind"/>
+                <a:cs typeface="Hind"/>
+                <a:sym typeface="Hind"/>
+              </a:rPr>
+              <a:t>(i escriure’ls al Document d’Especificacions)</a:t>
+            </a:r>
+            <a:endParaRPr b="0" sz="900">
+              <a:latin typeface="Hind"/>
+              <a:ea typeface="Hind"/>
+              <a:cs typeface="Hind"/>
+              <a:sym typeface="Hind"/>
+            </a:endParaRPr>
           </a:p>
           <a:p>
-            <a:pPr indent="0" lvl="0" marL="0" rtl="0" algn="l">
+            <a:pPr indent="0" lvl="0" marL="0" rtl="0" algn="ctr">
               <a:spcBef>
                 <a:spcPts val="0"/>
               </a:spcBef>
@@ -15169,7 +14917,133 @@
             <a:r>
               <a:t/>
             </a:r>
-            <a:endParaRPr/>
+            <a:endParaRPr sz="1300"/>
+          </a:p>
+          <a:p>
+            <a:pPr indent="0" lvl="0" marL="0" rtl="0" algn="ctr">
+              <a:spcBef>
+                <a:spcPts val="0"/>
+              </a:spcBef>
+              <a:spcAft>
+                <a:spcPts val="0"/>
+              </a:spcAft>
+              <a:buNone/>
+            </a:pPr>
+            <a:r>
+              <a:rPr lang="en" sz="1300"/>
+              <a:t>4- </a:t>
+            </a:r>
+            <a:r>
+              <a:rPr lang="en" sz="1300"/>
+              <a:t>Identificar perfils d’usuari</a:t>
+            </a:r>
+            <a:endParaRPr sz="1300"/>
+          </a:p>
+          <a:p>
+            <a:pPr indent="0" lvl="0" marL="0" rtl="0" algn="ctr">
+              <a:spcBef>
+                <a:spcPts val="0"/>
+              </a:spcBef>
+              <a:spcAft>
+                <a:spcPts val="0"/>
+              </a:spcAft>
+              <a:buNone/>
+            </a:pPr>
+            <a:r>
+              <a:rPr b="0" lang="en" sz="900">
+                <a:latin typeface="Hind"/>
+                <a:ea typeface="Hind"/>
+                <a:cs typeface="Hind"/>
+                <a:sym typeface="Hind"/>
+              </a:rPr>
+              <a:t>(i escriure’ls al Document d’Especificacions)</a:t>
+            </a:r>
+            <a:endParaRPr sz="1300"/>
+          </a:p>
+          <a:p>
+            <a:pPr indent="0" lvl="0" marL="0" rtl="0" algn="ctr">
+              <a:spcBef>
+                <a:spcPts val="0"/>
+              </a:spcBef>
+              <a:spcAft>
+                <a:spcPts val="0"/>
+              </a:spcAft>
+              <a:buNone/>
+            </a:pPr>
+            <a:r>
+              <a:t/>
+            </a:r>
+            <a:endParaRPr sz="1300"/>
+          </a:p>
+          <a:p>
+            <a:pPr indent="0" lvl="0" marL="0" rtl="0" algn="ctr">
+              <a:spcBef>
+                <a:spcPts val="0"/>
+              </a:spcBef>
+              <a:spcAft>
+                <a:spcPts val="0"/>
+              </a:spcAft>
+              <a:buNone/>
+            </a:pPr>
+            <a:r>
+              <a:rPr lang="en" sz="1300"/>
+              <a:t>5- </a:t>
+            </a:r>
+            <a:r>
+              <a:rPr lang="en" sz="1300"/>
+              <a:t>Passar-ho tot al Power Point</a:t>
+            </a:r>
+            <a:endParaRPr sz="1300"/>
+          </a:p>
+          <a:p>
+            <a:pPr indent="0" lvl="0" marL="0" rtl="0" algn="ctr">
+              <a:spcBef>
+                <a:spcPts val="0"/>
+              </a:spcBef>
+              <a:spcAft>
+                <a:spcPts val="0"/>
+              </a:spcAft>
+              <a:buNone/>
+            </a:pPr>
+            <a:r>
+              <a:t/>
+            </a:r>
+            <a:endParaRPr sz="1300"/>
+          </a:p>
+          <a:p>
+            <a:pPr indent="0" lvl="0" marL="0" rtl="0" algn="ctr">
+              <a:spcBef>
+                <a:spcPts val="0"/>
+              </a:spcBef>
+              <a:spcAft>
+                <a:spcPts val="0"/>
+              </a:spcAft>
+              <a:buNone/>
+            </a:pPr>
+            <a:r>
+              <a:rPr lang="en" sz="1300"/>
+              <a:t>6- </a:t>
+            </a:r>
+            <a:r>
+              <a:rPr lang="en" sz="1300"/>
+              <a:t>Fer el fitxer Markdown de cada requeriment</a:t>
+            </a:r>
+            <a:endParaRPr sz="1300"/>
+          </a:p>
+          <a:p>
+            <a:pPr indent="0" lvl="0" marL="0" rtl="0" algn="ctr">
+              <a:spcBef>
+                <a:spcPts val="0"/>
+              </a:spcBef>
+              <a:spcAft>
+                <a:spcPts val="0"/>
+              </a:spcAft>
+              <a:buNone/>
+            </a:pPr>
+            <a:r>
+              <a:t/>
+            </a:r>
+            <a:endParaRPr sz="1300"/>
           </a:p>
         </p:txBody>
       </p:sp>
@@ -15186,7 +15060,7 @@
   <p:cSld>
     <p:spTree>
       <p:nvGrpSpPr>
-        <p:cNvPr id="129" name="Shape 129"/>
+        <p:cNvPr id="123" name="Shape 123"/>
         <p:cNvGrpSpPr/>
         <p:nvPr/>
       </p:nvGrpSpPr>
@@ -15200,13 +15074,13 @@
       </p:grpSpPr>
       <p:sp>
         <p:nvSpPr>
-          <p:cNvPr id="130" name="Google Shape;130;p24"/>
+          <p:cNvPr id="124" name="Google Shape;124;p24"/>
           <p:cNvSpPr/>
           <p:nvPr/>
         </p:nvSpPr>
         <p:spPr>
           <a:xfrm>
-            <a:off x="1561338" y="983825"/>
+            <a:off x="3188325" y="2980175"/>
             <a:ext cx="2943300" cy="2013600"/>
           </a:xfrm>
           <a:prstGeom prst="rect">
@@ -15248,7 +15122,7 @@
       </p:sp>
       <p:sp>
         <p:nvSpPr>
-          <p:cNvPr id="131" name="Google Shape;131;p24"/>
+          <p:cNvPr id="125" name="Google Shape;125;p24"/>
           <p:cNvSpPr txBox="1"/>
           <p:nvPr>
             <p:ph type="title"/>
@@ -15288,7 +15162,7 @@
       </p:sp>
       <p:sp>
         <p:nvSpPr>
-          <p:cNvPr id="132" name="Google Shape;132;p24"/>
+          <p:cNvPr id="126" name="Google Shape;126;p24"/>
           <p:cNvSpPr txBox="1"/>
           <p:nvPr>
             <p:ph idx="6" type="subTitle"/>
@@ -15296,7 +15170,7 @@
         </p:nvSpPr>
         <p:spPr>
           <a:xfrm>
-            <a:off x="3040588" y="1067825"/>
+            <a:off x="4667575" y="3064175"/>
             <a:ext cx="1261800" cy="458100"/>
           </a:xfrm>
           <a:prstGeom prst="rect">
@@ -15328,7 +15202,7 @@
       </p:sp>
       <p:sp>
         <p:nvSpPr>
-          <p:cNvPr id="133" name="Google Shape;133;p24"/>
+          <p:cNvPr id="127" name="Google Shape;127;p24"/>
           <p:cNvSpPr txBox="1"/>
           <p:nvPr>
             <p:ph idx="1" type="subTitle"/>
@@ -15336,7 +15210,7 @@
         </p:nvSpPr>
         <p:spPr>
           <a:xfrm>
-            <a:off x="3040588" y="1441963"/>
+            <a:off x="4667575" y="3438313"/>
             <a:ext cx="1404600" cy="1555500"/>
           </a:xfrm>
           <a:prstGeom prst="rect">
@@ -15368,7 +15242,7 @@
             </a:r>
             <a:r>
               <a:rPr lang="en"/>
-              <a:t> des del comicili del Cuiner fins al punt de recollida. Rep pagaments. </a:t>
+              <a:t> des del domicili del Cuiner fins al punt de recollida. Rep pagaments. </a:t>
             </a:r>
             <a:endParaRPr/>
           </a:p>
@@ -15376,14 +15250,14 @@
       </p:sp>
       <p:sp>
         <p:nvSpPr>
-          <p:cNvPr id="134" name="Google Shape;134;p24"/>
+          <p:cNvPr id="128" name="Google Shape;128;p24"/>
           <p:cNvSpPr/>
           <p:nvPr/>
         </p:nvSpPr>
         <p:spPr>
           <a:xfrm>
-            <a:off x="3133800" y="3115450"/>
-            <a:ext cx="2876100" cy="1840500"/>
+            <a:off x="1473188" y="894200"/>
+            <a:ext cx="3194400" cy="2013600"/>
           </a:xfrm>
           <a:prstGeom prst="rect">
             <a:avLst/>
@@ -15424,13 +15298,13 @@
       </p:sp>
       <p:sp>
         <p:nvSpPr>
-          <p:cNvPr id="135" name="Google Shape;135;p24"/>
+          <p:cNvPr id="129" name="Google Shape;129;p24"/>
           <p:cNvSpPr/>
           <p:nvPr/>
         </p:nvSpPr>
         <p:spPr>
           <a:xfrm>
-            <a:off x="4639063" y="983813"/>
+            <a:off x="4727200" y="893088"/>
             <a:ext cx="2943300" cy="2013600"/>
           </a:xfrm>
           <a:prstGeom prst="rect">
@@ -15472,7 +15346,7 @@
       </p:sp>
       <p:sp>
         <p:nvSpPr>
-          <p:cNvPr id="136" name="Google Shape;136;p24"/>
+          <p:cNvPr id="130" name="Google Shape;130;p24"/>
           <p:cNvSpPr txBox="1"/>
           <p:nvPr>
             <p:ph idx="2" type="subTitle"/>
@@ -15480,7 +15354,7 @@
         </p:nvSpPr>
         <p:spPr>
           <a:xfrm>
-            <a:off x="6320438" y="1436213"/>
+            <a:off x="6408575" y="1345488"/>
             <a:ext cx="1261800" cy="1463700"/>
           </a:xfrm>
           <a:prstGeom prst="rect">
@@ -15512,7 +15386,7 @@
       </p:sp>
       <p:sp>
         <p:nvSpPr>
-          <p:cNvPr id="137" name="Google Shape;137;p24"/>
+          <p:cNvPr id="131" name="Google Shape;131;p24"/>
           <p:cNvSpPr txBox="1"/>
           <p:nvPr>
             <p:ph idx="7" type="subTitle"/>
@@ -15520,7 +15394,7 @@
         </p:nvSpPr>
         <p:spPr>
           <a:xfrm>
-            <a:off x="6320437" y="1081313"/>
+            <a:off x="6408575" y="990588"/>
             <a:ext cx="1261800" cy="431100"/>
           </a:xfrm>
           <a:prstGeom prst="rect">
@@ -15552,7 +15426,7 @@
       </p:sp>
       <p:sp>
         <p:nvSpPr>
-          <p:cNvPr id="138" name="Google Shape;138;p24"/>
+          <p:cNvPr id="132" name="Google Shape;132;p24"/>
           <p:cNvSpPr txBox="1"/>
           <p:nvPr>
             <p:ph idx="1" type="subTitle"/>
@@ -15560,8 +15434,8 @@
         </p:nvSpPr>
         <p:spPr>
           <a:xfrm>
-            <a:off x="4605116" y="3739768"/>
-            <a:ext cx="1404600" cy="1011300"/>
+            <a:off x="3107297" y="1577236"/>
+            <a:ext cx="1560000" cy="1106400"/>
           </a:xfrm>
           <a:prstGeom prst="rect">
             <a:avLst/>
@@ -15592,7 +15466,7 @@
       </p:sp>
       <p:sp>
         <p:nvSpPr>
-          <p:cNvPr id="139" name="Google Shape;139;p24"/>
+          <p:cNvPr id="133" name="Google Shape;133;p24"/>
           <p:cNvSpPr txBox="1"/>
           <p:nvPr>
             <p:ph idx="5" type="subTitle"/>
@@ -15600,8 +15474,8 @@
         </p:nvSpPr>
         <p:spPr>
           <a:xfrm>
-            <a:off x="4605123" y="3320484"/>
-            <a:ext cx="1404600" cy="509400"/>
+            <a:off x="3107305" y="1118518"/>
+            <a:ext cx="1560000" cy="557400"/>
           </a:xfrm>
           <a:prstGeom prst="rect">
             <a:avLst/>
@@ -15632,7 +15506,7 @@
       </p:sp>
       <p:pic>
         <p:nvPicPr>
-          <p:cNvPr id="140" name="Google Shape;140;p24" title="Recetas de pasta de Karlos Arguiñano _ Web oficial Antena 3.jpg"/>
+          <p:cNvPr id="134" name="Google Shape;134;p24" title="Recetas de pasta de Karlos Arguiñano _ Web oficial Antena 3.jpg"/>
           <p:cNvPicPr preferRelativeResize="0"/>
           <p:nvPr/>
         </p:nvPicPr>
@@ -15645,7 +15519,7 @@
         </p:blipFill>
         <p:spPr>
           <a:xfrm>
-            <a:off x="4739113" y="1070350"/>
+            <a:off x="4827250" y="979625"/>
             <a:ext cx="1495200" cy="1840525"/>
           </a:xfrm>
           <a:prstGeom prst="rect">
@@ -15661,7 +15535,7 @@
       </p:pic>
       <p:pic>
         <p:nvPicPr>
-          <p:cNvPr id="141" name="Google Shape;141;p24" title="meme drôle.jpg"/>
+          <p:cNvPr id="135" name="Google Shape;135;p24" title="meme drôle.jpg"/>
           <p:cNvPicPr preferRelativeResize="0"/>
           <p:nvPr/>
         </p:nvPicPr>
@@ -15674,8 +15548,8 @@
         </p:blipFill>
         <p:spPr>
           <a:xfrm>
-            <a:off x="3276426" y="3224051"/>
-            <a:ext cx="1174426" cy="1623323"/>
+            <a:off x="1631594" y="1013016"/>
+            <a:ext cx="1304370" cy="1775998"/>
           </a:xfrm>
           <a:prstGeom prst="rect">
             <a:avLst/>
@@ -15690,7 +15564,7 @@
       </p:pic>
       <p:pic>
         <p:nvPicPr>
-          <p:cNvPr id="142" name="Google Shape;142;p24" title="Pizza Delivery Man stock image_ Image of smiling, italian - 7741877.jpg"/>
+          <p:cNvPr id="136" name="Google Shape;136;p24" title="Pizza Delivery Man stock image_ Image of smiling, italian - 7741877.jpg"/>
           <p:cNvPicPr preferRelativeResize="0"/>
           <p:nvPr/>
         </p:nvPicPr>
@@ -15703,7 +15577,7 @@
         </p:blipFill>
         <p:spPr>
           <a:xfrm>
-            <a:off x="1659537" y="1073454"/>
+            <a:off x="3286525" y="3069804"/>
             <a:ext cx="1261800" cy="1818446"/>
           </a:xfrm>
           <a:prstGeom prst="rect">
@@ -15728,7 +15602,7 @@
   <p:cSld>
     <p:spTree>
       <p:nvGrpSpPr>
-        <p:cNvPr id="146" name="Shape 146"/>
+        <p:cNvPr id="140" name="Shape 140"/>
         <p:cNvGrpSpPr/>
         <p:nvPr/>
       </p:nvGrpSpPr>
@@ -15742,7 +15616,7 @@
       </p:grpSpPr>
       <p:sp>
         <p:nvSpPr>
-          <p:cNvPr id="147" name="Google Shape;147;p25"/>
+          <p:cNvPr id="141" name="Google Shape;141;p25"/>
           <p:cNvSpPr txBox="1"/>
           <p:nvPr>
             <p:ph type="title"/>
@@ -15782,7 +15656,7 @@
       </p:sp>
       <p:sp>
         <p:nvSpPr>
-          <p:cNvPr id="148" name="Google Shape;148;p25"/>
+          <p:cNvPr id="142" name="Google Shape;142;p25"/>
           <p:cNvSpPr txBox="1"/>
           <p:nvPr/>
         </p:nvSpPr>
@@ -16377,7 +16251,7 @@
   <p:cSld>
     <p:spTree>
       <p:nvGrpSpPr>
-        <p:cNvPr id="152" name="Shape 152"/>
+        <p:cNvPr id="146" name="Shape 146"/>
         <p:cNvGrpSpPr/>
         <p:nvPr/>
       </p:nvGrpSpPr>
@@ -16391,7 +16265,7 @@
       </p:grpSpPr>
       <p:sp>
         <p:nvSpPr>
-          <p:cNvPr id="153" name="Google Shape;153;p26"/>
+          <p:cNvPr id="147" name="Google Shape;147;p26"/>
           <p:cNvSpPr txBox="1"/>
           <p:nvPr>
             <p:ph type="title"/>
@@ -16431,7 +16305,7 @@
       </p:sp>
       <p:sp>
         <p:nvSpPr>
-          <p:cNvPr id="154" name="Google Shape;154;p26"/>
+          <p:cNvPr id="148" name="Google Shape;148;p26"/>
           <p:cNvSpPr txBox="1"/>
           <p:nvPr/>
         </p:nvSpPr>
@@ -17010,7 +16884,7 @@
   <p:cSld>
     <p:spTree>
       <p:nvGrpSpPr>
-        <p:cNvPr id="158" name="Shape 158"/>
+        <p:cNvPr id="152" name="Shape 152"/>
         <p:cNvGrpSpPr/>
         <p:nvPr/>
       </p:nvGrpSpPr>
@@ -17024,7 +16898,7 @@
       </p:grpSpPr>
       <p:sp>
         <p:nvSpPr>
-          <p:cNvPr id="159" name="Google Shape;159;p27"/>
+          <p:cNvPr id="153" name="Google Shape;153;p27"/>
           <p:cNvSpPr txBox="1"/>
           <p:nvPr>
             <p:ph type="title"/>
@@ -17064,7 +16938,7 @@
       </p:sp>
       <p:sp>
         <p:nvSpPr>
-          <p:cNvPr id="160" name="Google Shape;160;p27"/>
+          <p:cNvPr id="154" name="Google Shape;154;p27"/>
           <p:cNvSpPr txBox="1"/>
           <p:nvPr/>
         </p:nvSpPr>
@@ -17382,7 +17256,7 @@
   <p:cSld>
     <p:spTree>
       <p:nvGrpSpPr>
-        <p:cNvPr id="164" name="Shape 164"/>
+        <p:cNvPr id="158" name="Shape 158"/>
         <p:cNvGrpSpPr/>
         <p:nvPr/>
       </p:nvGrpSpPr>
@@ -17396,7 +17270,7 @@
       </p:grpSpPr>
       <p:sp>
         <p:nvSpPr>
-          <p:cNvPr id="165" name="Google Shape;165;p28"/>
+          <p:cNvPr id="159" name="Google Shape;159;p28"/>
           <p:cNvSpPr txBox="1"/>
           <p:nvPr>
             <p:ph type="title"/>
@@ -17436,7 +17310,7 @@
       </p:sp>
       <p:sp>
         <p:nvSpPr>
-          <p:cNvPr id="166" name="Google Shape;166;p28"/>
+          <p:cNvPr id="160" name="Google Shape;160;p28"/>
           <p:cNvSpPr txBox="1"/>
           <p:nvPr/>
         </p:nvSpPr>
@@ -17730,7 +17604,7 @@
   <p:cSld>
     <p:spTree>
       <p:nvGrpSpPr>
-        <p:cNvPr id="170" name="Shape 170"/>
+        <p:cNvPr id="164" name="Shape 164"/>
         <p:cNvGrpSpPr/>
         <p:nvPr/>
       </p:nvGrpSpPr>
@@ -17744,7 +17618,7 @@
       </p:grpSpPr>
       <p:sp>
         <p:nvSpPr>
-          <p:cNvPr id="171" name="Google Shape;171;p29"/>
+          <p:cNvPr id="165" name="Google Shape;165;p29"/>
           <p:cNvSpPr txBox="1"/>
           <p:nvPr>
             <p:ph type="title"/>
@@ -17784,7 +17658,7 @@
       </p:sp>
       <p:sp>
         <p:nvSpPr>
-          <p:cNvPr id="172" name="Google Shape;172;p29"/>
+          <p:cNvPr id="166" name="Google Shape;166;p29"/>
           <p:cNvSpPr txBox="1"/>
           <p:nvPr/>
         </p:nvSpPr>

--- a/Documents/Sprint_Reviews/Sprint_Review01.pptx
+++ b/Documents/Sprint_Reviews/Sprint_Review01.pptx
@@ -20,24 +20,25 @@
     <p:sldId id="265" r:id="rId14"/>
     <p:sldId id="266" r:id="rId15"/>
     <p:sldId id="267" r:id="rId16"/>
+    <p:sldId id="268" r:id="rId17"/>
   </p:sldIdLst>
   <p:sldSz cy="5143500" cx="9144000"/>
   <p:notesSz cx="6858000" cy="9144000"/>
   <p:embeddedFontLst>
     <p:embeddedFont>
       <p:font typeface="Hind"/>
-      <p:regular r:id="rId17"/>
-      <p:bold r:id="rId18"/>
+      <p:regular r:id="rId18"/>
+      <p:bold r:id="rId19"/>
     </p:embeddedFont>
     <p:embeddedFont>
       <p:font typeface="Space Grotesk Medium"/>
-      <p:regular r:id="rId19"/>
-      <p:bold r:id="rId20"/>
+      <p:regular r:id="rId20"/>
+      <p:bold r:id="rId21"/>
     </p:embeddedFont>
     <p:embeddedFont>
       <p:font typeface="Space Grotesk"/>
-      <p:regular r:id="rId21"/>
-      <p:bold r:id="rId22"/>
+      <p:regular r:id="rId22"/>
+      <p:bold r:id="rId23"/>
     </p:embeddedFont>
   </p:embeddedFontLst>
   <p:defaultTextStyle>
@@ -783,7 +784,8 @@
               <a:buNone/>
             </a:pPr>
             <a:r>
-              <a:t/>
+              <a:rPr lang="en"/>
+              <a:t>-</a:t>
             </a:r>
             <a:endParaRPr/>
           </a:p>
@@ -802,7 +804,7 @@
   <p:cSld>
     <p:spTree>
       <p:nvGrpSpPr>
-        <p:cNvPr id="167" name="Shape 167"/>
+        <p:cNvPr id="172" name="Shape 172"/>
         <p:cNvGrpSpPr/>
         <p:nvPr/>
       </p:nvGrpSpPr>
@@ -816,7 +818,7 @@
       </p:grpSpPr>
       <p:sp>
         <p:nvSpPr>
-          <p:cNvPr id="168" name="Google Shape;168;g396060f51c5_0_26:notes"/>
+          <p:cNvPr id="173" name="Google Shape;173;g396060f51c5_0_16:notes"/>
           <p:cNvSpPr/>
           <p:nvPr>
             <p:ph idx="2" type="sldImg"/>
@@ -851,7 +853,7 @@
       </p:sp>
       <p:sp>
         <p:nvSpPr>
-          <p:cNvPr id="169" name="Google Shape;169;g396060f51c5_0_26:notes"/>
+          <p:cNvPr id="174" name="Google Shape;174;g396060f51c5_0_16:notes"/>
           <p:cNvSpPr txBox="1"/>
           <p:nvPr>
             <p:ph idx="1" type="body"/>
@@ -882,7 +884,8 @@
               <a:buNone/>
             </a:pPr>
             <a:r>
-              <a:t/>
+              <a:rPr lang="en"/>
+              <a:t>-34 fusionat amb 33</a:t>
             </a:r>
             <a:endParaRPr/>
           </a:p>
@@ -901,7 +904,7 @@
   <p:cSld>
     <p:spTree>
       <p:nvGrpSpPr>
-        <p:cNvPr id="173" name="Shape 173"/>
+        <p:cNvPr id="178" name="Shape 178"/>
         <p:cNvGrpSpPr/>
         <p:nvPr/>
       </p:nvGrpSpPr>
@@ -915,7 +918,7 @@
       </p:grpSpPr>
       <p:sp>
         <p:nvSpPr>
-          <p:cNvPr id="174" name="Google Shape;174;g396060f51c5_0_31:notes"/>
+          <p:cNvPr id="179" name="Google Shape;179;g396060f51c5_0_26:notes"/>
           <p:cNvSpPr/>
           <p:nvPr>
             <p:ph idx="2" type="sldImg"/>
@@ -950,7 +953,7 @@
       </p:sp>
       <p:sp>
         <p:nvSpPr>
-          <p:cNvPr id="175" name="Google Shape;175;g396060f51c5_0_31:notes"/>
+          <p:cNvPr id="180" name="Google Shape;180;g396060f51c5_0_26:notes"/>
           <p:cNvSpPr txBox="1"/>
           <p:nvPr>
             <p:ph idx="1" type="body"/>
@@ -981,7 +984,8 @@
               <a:buNone/>
             </a:pPr>
             <a:r>
-              <a:t/>
+              <a:rPr lang="en"/>
+              <a:t>40 fusionar amb fer comanda</a:t>
             </a:r>
             <a:endParaRPr/>
           </a:p>
@@ -1000,7 +1004,7 @@
   <p:cSld>
     <p:spTree>
       <p:nvGrpSpPr>
-        <p:cNvPr id="179" name="Shape 179"/>
+        <p:cNvPr id="184" name="Shape 184"/>
         <p:cNvGrpSpPr/>
         <p:nvPr/>
       </p:nvGrpSpPr>
@@ -1014,7 +1018,7 @@
       </p:grpSpPr>
       <p:sp>
         <p:nvSpPr>
-          <p:cNvPr id="180" name="Google Shape;180;g3cf70ef3b9e_0_30:notes"/>
+          <p:cNvPr id="185" name="Google Shape;185;g396060f51c5_0_31:notes"/>
           <p:cNvSpPr/>
           <p:nvPr>
             <p:ph idx="2" type="sldImg"/>
@@ -1049,7 +1053,7 @@
       </p:sp>
       <p:sp>
         <p:nvSpPr>
-          <p:cNvPr id="181" name="Google Shape;181;g3cf70ef3b9e_0_30:notes"/>
+          <p:cNvPr id="186" name="Google Shape;186;g396060f51c5_0_31:notes"/>
           <p:cNvSpPr txBox="1"/>
           <p:nvPr>
             <p:ph idx="1" type="body"/>
@@ -1080,7 +1084,140 @@
               <a:buNone/>
             </a:pPr>
             <a:r>
-              <a:t/>
+              <a:rPr lang="en"/>
+              <a:t>-</a:t>
+            </a:r>
+            <a:endParaRPr/>
+          </a:p>
+        </p:txBody>
+      </p:sp>
+    </p:spTree>
+  </p:cSld>
+  <p:clrMapOvr>
+    <a:masterClrMapping/>
+  </p:clrMapOvr>
+</p:notes>
+</file>
+
+<file path=ppt/notesSlides/notesSlide13.xml><?xml version="1.0" encoding="utf-8"?>
+<p:notes xmlns:a="http://schemas.openxmlformats.org/drawingml/2006/main" xmlns:r="http://schemas.openxmlformats.org/officeDocument/2006/relationships" xmlns:mc="http://schemas.openxmlformats.org/markup-compatibility/2006" xmlns:mv="urn:schemas-microsoft-com:mac:vml" xmlns:p="http://schemas.openxmlformats.org/presentationml/2006/main" xmlns:c="http://schemas.openxmlformats.org/drawingml/2006/chart" xmlns:dgm="http://schemas.openxmlformats.org/drawingml/2006/diagram" xmlns:o="urn:schemas-microsoft-com:office:office" xmlns:v="urn:schemas-microsoft-com:vml" xmlns:pvml="urn:schemas-microsoft-com:office:powerpoint" xmlns:com="http://schemas.openxmlformats.org/drawingml/2006/compatibility" xmlns:p14="http://schemas.microsoft.com/office/powerpoint/2010/main" xmlns:p15="http://schemas.microsoft.com/office/powerpoint/2012/main" xmlns:ahyp="http://schemas.microsoft.com/office/drawing/2018/hyperlinkcolor" showMasterPhAnim="0" showMasterSp="0">
+  <p:cSld>
+    <p:spTree>
+      <p:nvGrpSpPr>
+        <p:cNvPr id="190" name="Shape 190"/>
+        <p:cNvGrpSpPr/>
+        <p:nvPr/>
+      </p:nvGrpSpPr>
+      <p:grpSpPr>
+        <a:xfrm>
+          <a:off x="0" y="0"/>
+          <a:ext cx="0" cy="0"/>
+          <a:chOff x="0" y="0"/>
+          <a:chExt cx="0" cy="0"/>
+        </a:xfrm>
+      </p:grpSpPr>
+      <p:sp>
+        <p:nvSpPr>
+          <p:cNvPr id="191" name="Google Shape;191;g3cf70ef3b9e_0_30:notes"/>
+          <p:cNvSpPr/>
+          <p:nvPr>
+            <p:ph idx="2" type="sldImg"/>
+          </p:nvPr>
+        </p:nvSpPr>
+        <p:spPr>
+          <a:xfrm>
+            <a:off x="381300" y="685800"/>
+            <a:ext cx="6096000" cy="3429000"/>
+          </a:xfrm>
+          <a:custGeom>
+            <a:rect b="b" l="l" r="r" t="t"/>
+            <a:pathLst>
+              <a:path extrusionOk="0" h="120000" w="120000">
+                <a:moveTo>
+                  <a:pt x="0" y="0"/>
+                </a:moveTo>
+                <a:lnTo>
+                  <a:pt x="120000" y="0"/>
+                </a:lnTo>
+                <a:lnTo>
+                  <a:pt x="120000" y="120000"/>
+                </a:lnTo>
+                <a:lnTo>
+                  <a:pt x="0" y="120000"/>
+                </a:lnTo>
+                <a:close/>
+              </a:path>
+            </a:pathLst>
+          </a:custGeom>
+        </p:spPr>
+      </p:sp>
+      <p:sp>
+        <p:nvSpPr>
+          <p:cNvPr id="192" name="Google Shape;192;g3cf70ef3b9e_0_30:notes"/>
+          <p:cNvSpPr txBox="1"/>
+          <p:nvPr>
+            <p:ph idx="1" type="body"/>
+          </p:nvPr>
+        </p:nvSpPr>
+        <p:spPr>
+          <a:xfrm>
+            <a:off x="685800" y="4343400"/>
+            <a:ext cx="5486400" cy="4114800"/>
+          </a:xfrm>
+          <a:prstGeom prst="rect">
+            <a:avLst/>
+          </a:prstGeom>
+        </p:spPr>
+        <p:txBody>
+          <a:bodyPr anchorCtr="0" anchor="t" bIns="91425" lIns="91425" spcFirstLastPara="1" rIns="91425" wrap="square" tIns="91425">
+            <a:noAutofit/>
+          </a:bodyPr>
+          <a:lstStyle/>
+          <a:p>
+            <a:pPr indent="0" lvl="0" marL="0" rtl="0" algn="l">
+              <a:spcBef>
+                <a:spcPts val="0"/>
+              </a:spcBef>
+              <a:spcAft>
+                <a:spcPts val="0"/>
+              </a:spcAft>
+              <a:buNone/>
+            </a:pPr>
+            <a:r>
+              <a:rPr lang="en"/>
+              <a:t>Tiene que empezar en el día 0 :))  *dia 1*</a:t>
+            </a:r>
+            <a:endParaRPr/>
+          </a:p>
+          <a:p>
+            <a:pPr indent="0" lvl="0" marL="0" rtl="0" algn="l">
+              <a:spcBef>
+                <a:spcPts val="0"/>
+              </a:spcBef>
+              <a:spcAft>
+                <a:spcPts val="0"/>
+              </a:spcAft>
+              <a:buNone/>
+            </a:pPr>
+            <a:r>
+              <a:rPr lang="en"/>
+              <a:t>El sprint acaba el domingo DESPUÉS de la presentación (este debería acabar el 22/03)</a:t>
+            </a:r>
+            <a:endParaRPr/>
+          </a:p>
+          <a:p>
+            <a:pPr indent="0" lvl="0" marL="0" rtl="0" algn="l">
+              <a:spcBef>
+                <a:spcPts val="0"/>
+              </a:spcBef>
+              <a:spcAft>
+                <a:spcPts val="0"/>
+              </a:spcAft>
+              <a:buNone/>
+            </a:pPr>
+            <a:r>
+              <a:rPr lang="en"/>
+              <a:t>Poner tasques en vez de horas de trabajo, o cambiar el titulo “story points” por “hours”</a:t>
             </a:r>
             <a:endParaRPr/>
           </a:p>
@@ -1179,7 +1316,8 @@
               <a:buNone/>
             </a:pPr>
             <a:r>
-              <a:t/>
+              <a:rPr lang="en"/>
+              <a:t>-</a:t>
             </a:r>
             <a:endParaRPr/>
           </a:p>
@@ -1278,7 +1416,8 @@
               <a:buNone/>
             </a:pPr>
             <a:r>
-              <a:t/>
+              <a:rPr lang="en"/>
+              <a:t>-</a:t>
             </a:r>
             <a:endParaRPr/>
           </a:p>
@@ -1377,7 +1516,95 @@
               <a:buNone/>
             </a:pPr>
             <a:r>
+              <a:rPr lang="en"/>
+              <a:t>Perfil d’usuari NO registrat (pot consultar però no fer comandes)</a:t>
+            </a:r>
+            <a:endParaRPr/>
+          </a:p>
+          <a:p>
+            <a:pPr indent="0" lvl="0" marL="0" rtl="0" algn="l">
+              <a:spcBef>
+                <a:spcPts val="0"/>
+              </a:spcBef>
+              <a:spcAft>
+                <a:spcPts val="0"/>
+              </a:spcAft>
+              <a:buNone/>
+            </a:pPr>
+            <a:r>
+              <a:rPr lang="en"/>
+              <a:t>Perfil d’usuari </a:t>
+            </a:r>
+            <a:r>
+              <a:rPr lang="en">
+                <a:solidFill>
+                  <a:schemeClr val="dk1"/>
+                </a:solidFill>
+              </a:rPr>
+              <a:t>registrat </a:t>
+            </a:r>
+            <a:r>
+              <a:rPr lang="en"/>
+              <a:t>(base), dels quals pengen client cuiner i repartidor</a:t>
+            </a:r>
+            <a:endParaRPr/>
+          </a:p>
+          <a:p>
+            <a:pPr indent="0" lvl="0" marL="0" rtl="0" algn="l">
+              <a:spcBef>
+                <a:spcPts val="0"/>
+              </a:spcBef>
+              <a:spcAft>
+                <a:spcPts val="0"/>
+              </a:spcAft>
+              <a:buNone/>
+            </a:pPr>
+            <a:r>
+              <a:rPr lang="en"/>
+              <a:t>Perfils de noseque externes (Google maps, paypal…) → esto de momento no lo hemos hecho en clase, ignorar :D</a:t>
+            </a:r>
+            <a:endParaRPr/>
+          </a:p>
+          <a:p>
+            <a:pPr indent="0" lvl="0" marL="0" rtl="0" algn="l">
+              <a:spcBef>
+                <a:spcPts val="0"/>
+              </a:spcBef>
+              <a:spcAft>
+                <a:spcPts val="0"/>
+              </a:spcAft>
+              <a:buNone/>
+            </a:pPr>
+            <a:r>
               <a:t/>
+            </a:r>
+            <a:endParaRPr/>
+          </a:p>
+          <a:p>
+            <a:pPr indent="0" lvl="0" marL="0" rtl="0" algn="l">
+              <a:spcBef>
+                <a:spcPts val="0"/>
+              </a:spcBef>
+              <a:spcAft>
+                <a:spcPts val="0"/>
+              </a:spcAft>
+              <a:buNone/>
+            </a:pPr>
+            <a:r>
+              <a:rPr lang="en"/>
+              <a:t>Cuiner no </a:t>
+            </a:r>
+            <a:r>
+              <a:rPr lang="en" u="sng"/>
+              <a:t>contracta</a:t>
+            </a:r>
+            <a:r>
+              <a:rPr lang="en"/>
+              <a:t>,</a:t>
+            </a:r>
+            <a:r>
+              <a:rPr lang="en"/>
+              <a:t> es la app.</a:t>
             </a:r>
             <a:endParaRPr/>
           </a:p>
@@ -1396,7 +1623,7 @@
   <p:cSld>
     <p:spTree>
       <p:nvGrpSpPr>
-        <p:cNvPr id="137" name="Shape 137"/>
+        <p:cNvPr id="139" name="Shape 139"/>
         <p:cNvGrpSpPr/>
         <p:nvPr/>
       </p:nvGrpSpPr>
@@ -1410,7 +1637,7 @@
       </p:grpSpPr>
       <p:sp>
         <p:nvSpPr>
-          <p:cNvPr id="138" name="Google Shape;138;g3cf70ef3b9e_0_26:notes"/>
+          <p:cNvPr id="140" name="Google Shape;140;g3d056cbdf61_0_4:notes"/>
           <p:cNvSpPr/>
           <p:nvPr>
             <p:ph idx="2" type="sldImg"/>
@@ -1445,7 +1672,7 @@
       </p:sp>
       <p:sp>
         <p:nvSpPr>
-          <p:cNvPr id="139" name="Google Shape;139;g3cf70ef3b9e_0_26:notes"/>
+          <p:cNvPr id="141" name="Google Shape;141;g3d056cbdf61_0_4:notes"/>
           <p:cNvSpPr txBox="1"/>
           <p:nvPr>
             <p:ph idx="1" type="body"/>
@@ -1476,7 +1703,91 @@
               <a:buNone/>
             </a:pPr>
             <a:r>
+              <a:rPr lang="en"/>
+              <a:t>Perfil d’usuari NO registrat (pot consultar però no fer comandes)</a:t>
+            </a:r>
+            <a:endParaRPr/>
+          </a:p>
+          <a:p>
+            <a:pPr indent="0" lvl="0" marL="0" rtl="0" algn="l">
+              <a:spcBef>
+                <a:spcPts val="0"/>
+              </a:spcBef>
+              <a:spcAft>
+                <a:spcPts val="0"/>
+              </a:spcAft>
+              <a:buNone/>
+            </a:pPr>
+            <a:r>
+              <a:rPr lang="en"/>
+              <a:t>Perfil d’usuari </a:t>
+            </a:r>
+            <a:r>
+              <a:rPr lang="en">
+                <a:solidFill>
+                  <a:schemeClr val="dk1"/>
+                </a:solidFill>
+              </a:rPr>
+              <a:t>registrat </a:t>
+            </a:r>
+            <a:r>
+              <a:rPr lang="en"/>
+              <a:t>(base), dels quals pengen client cuiner i repartidor</a:t>
+            </a:r>
+            <a:endParaRPr/>
+          </a:p>
+          <a:p>
+            <a:pPr indent="0" lvl="0" marL="0" rtl="0" algn="l">
+              <a:spcBef>
+                <a:spcPts val="0"/>
+              </a:spcBef>
+              <a:spcAft>
+                <a:spcPts val="0"/>
+              </a:spcAft>
+              <a:buNone/>
+            </a:pPr>
+            <a:r>
+              <a:rPr lang="en"/>
+              <a:t>Perfils de noseque externes (Google maps, paypal…) → esto de momento no lo hemos hecho en clase, ignorar :D</a:t>
+            </a:r>
+            <a:endParaRPr/>
+          </a:p>
+          <a:p>
+            <a:pPr indent="0" lvl="0" marL="0" rtl="0" algn="l">
+              <a:spcBef>
+                <a:spcPts val="0"/>
+              </a:spcBef>
+              <a:spcAft>
+                <a:spcPts val="0"/>
+              </a:spcAft>
+              <a:buNone/>
+            </a:pPr>
+            <a:r>
               <a:t/>
+            </a:r>
+            <a:endParaRPr/>
+          </a:p>
+          <a:p>
+            <a:pPr indent="0" lvl="0" marL="0" rtl="0" algn="l">
+              <a:spcBef>
+                <a:spcPts val="0"/>
+              </a:spcBef>
+              <a:spcAft>
+                <a:spcPts val="0"/>
+              </a:spcAft>
+              <a:buNone/>
+            </a:pPr>
+            <a:r>
+              <a:rPr lang="en"/>
+              <a:t>Cuiner no </a:t>
+            </a:r>
+            <a:r>
+              <a:rPr lang="en" u="sng"/>
+              <a:t>contracta</a:t>
+            </a:r>
+            <a:r>
+              <a:rPr lang="en"/>
+              <a:t>, es la app.</a:t>
             </a:r>
             <a:endParaRPr/>
           </a:p>
@@ -1495,7 +1806,7 @@
   <p:cSld>
     <p:spTree>
       <p:nvGrpSpPr>
-        <p:cNvPr id="143" name="Shape 143"/>
+        <p:cNvPr id="148" name="Shape 148"/>
         <p:cNvGrpSpPr/>
         <p:nvPr/>
       </p:nvGrpSpPr>
@@ -1509,7 +1820,7 @@
       </p:grpSpPr>
       <p:sp>
         <p:nvSpPr>
-          <p:cNvPr id="144" name="Google Shape;144;g396060f51c5_0_1:notes"/>
+          <p:cNvPr id="149" name="Google Shape;149;g3cf70ef3b9e_0_26:notes"/>
           <p:cNvSpPr/>
           <p:nvPr>
             <p:ph idx="2" type="sldImg"/>
@@ -1544,7 +1855,7 @@
       </p:sp>
       <p:sp>
         <p:nvSpPr>
-          <p:cNvPr id="145" name="Google Shape;145;g396060f51c5_0_1:notes"/>
+          <p:cNvPr id="150" name="Google Shape;150;g3cf70ef3b9e_0_26:notes"/>
           <p:cNvSpPr txBox="1"/>
           <p:nvPr>
             <p:ph idx="1" type="body"/>
@@ -1575,7 +1886,71 @@
               <a:buNone/>
             </a:pPr>
             <a:r>
+              <a:rPr lang="en"/>
+              <a:t>EN LOS MARKDOWN DE TODOS LOS REQUISITOS: Revisar los títulos, tienen que tener verbo. </a:t>
+            </a:r>
+            <a:endParaRPr/>
+          </a:p>
+          <a:p>
+            <a:pPr indent="0" lvl="0" marL="0" rtl="0" algn="l">
+              <a:spcBef>
+                <a:spcPts val="0"/>
+              </a:spcBef>
+              <a:spcAft>
+                <a:spcPts val="0"/>
+              </a:spcAft>
+              <a:buNone/>
+            </a:pPr>
+            <a:r>
+              <a:rPr lang="en"/>
+              <a:t>Cambiar las numeraciones.</a:t>
+            </a:r>
+            <a:endParaRPr/>
+          </a:p>
+          <a:p>
+            <a:pPr indent="0" lvl="0" marL="0" rtl="0" algn="l">
+              <a:spcBef>
+                <a:spcPts val="0"/>
+              </a:spcBef>
+              <a:spcAft>
+                <a:spcPts val="0"/>
+              </a:spcAft>
+              <a:buNone/>
+            </a:pPr>
+            <a:r>
               <a:t/>
+            </a:r>
+            <a:endParaRPr/>
+          </a:p>
+          <a:p>
+            <a:pPr indent="0" lvl="0" marL="0" rtl="0" algn="l">
+              <a:spcBef>
+                <a:spcPts val="0"/>
+              </a:spcBef>
+              <a:spcAft>
+                <a:spcPts val="0"/>
+              </a:spcAft>
+              <a:buNone/>
+            </a:pPr>
+            <a:r>
+              <a:rPr lang="en"/>
+              <a:t>4 i 5 kk (relacionats amb registre de compte, se pueden eliminar)</a:t>
+            </a:r>
+            <a:endParaRPr/>
+          </a:p>
+          <a:p>
+            <a:pPr indent="0" lvl="0" marL="0" rtl="0" algn="l">
+              <a:spcBef>
+                <a:spcPts val="0"/>
+              </a:spcBef>
+              <a:spcAft>
+                <a:spcPts val="0"/>
+              </a:spcAft>
+              <a:buNone/>
+            </a:pPr>
+            <a:r>
+              <a:rPr lang="en"/>
+              <a:t>7 kk (RNF)</a:t>
             </a:r>
             <a:endParaRPr/>
           </a:p>
@@ -1594,7 +1969,7 @@
   <p:cSld>
     <p:spTree>
       <p:nvGrpSpPr>
-        <p:cNvPr id="149" name="Shape 149"/>
+        <p:cNvPr id="154" name="Shape 154"/>
         <p:cNvGrpSpPr/>
         <p:nvPr/>
       </p:nvGrpSpPr>
@@ -1608,7 +1983,7 @@
       </p:grpSpPr>
       <p:sp>
         <p:nvSpPr>
-          <p:cNvPr id="150" name="Google Shape;150;g396060f51c5_0_6:notes"/>
+          <p:cNvPr id="155" name="Google Shape;155;g396060f51c5_0_1:notes"/>
           <p:cNvSpPr/>
           <p:nvPr>
             <p:ph idx="2" type="sldImg"/>
@@ -1643,7 +2018,7 @@
       </p:sp>
       <p:sp>
         <p:nvSpPr>
-          <p:cNvPr id="151" name="Google Shape;151;g396060f51c5_0_6:notes"/>
+          <p:cNvPr id="156" name="Google Shape;156;g396060f51c5_0_1:notes"/>
           <p:cNvSpPr txBox="1"/>
           <p:nvPr>
             <p:ph idx="1" type="body"/>
@@ -1674,7 +2049,8 @@
               <a:buNone/>
             </a:pPr>
             <a:r>
-              <a:t/>
+              <a:rPr lang="en"/>
+              <a:t>-20 tiene funcional</a:t>
             </a:r>
             <a:endParaRPr/>
           </a:p>
@@ -1693,7 +2069,7 @@
   <p:cSld>
     <p:spTree>
       <p:nvGrpSpPr>
-        <p:cNvPr id="155" name="Shape 155"/>
+        <p:cNvPr id="160" name="Shape 160"/>
         <p:cNvGrpSpPr/>
         <p:nvPr/>
       </p:nvGrpSpPr>
@@ -1707,7 +2083,7 @@
       </p:grpSpPr>
       <p:sp>
         <p:nvSpPr>
-          <p:cNvPr id="156" name="Google Shape;156;g396060f51c5_0_11:notes"/>
+          <p:cNvPr id="161" name="Google Shape;161;g396060f51c5_0_6:notes"/>
           <p:cNvSpPr/>
           <p:nvPr>
             <p:ph idx="2" type="sldImg"/>
@@ -1742,7 +2118,7 @@
       </p:sp>
       <p:sp>
         <p:nvSpPr>
-          <p:cNvPr id="157" name="Google Shape;157;g396060f51c5_0_11:notes"/>
+          <p:cNvPr id="162" name="Google Shape;162;g396060f51c5_0_6:notes"/>
           <p:cNvSpPr txBox="1"/>
           <p:nvPr>
             <p:ph idx="1" type="body"/>
@@ -1773,7 +2149,8 @@
               <a:buNone/>
             </a:pPr>
             <a:r>
-              <a:t/>
+              <a:rPr lang="en"/>
+              <a:t>26 fusionar amb 25</a:t>
             </a:r>
             <a:endParaRPr/>
           </a:p>
@@ -1792,7 +2169,7 @@
   <p:cSld>
     <p:spTree>
       <p:nvGrpSpPr>
-        <p:cNvPr id="161" name="Shape 161"/>
+        <p:cNvPr id="166" name="Shape 166"/>
         <p:cNvGrpSpPr/>
         <p:nvPr/>
       </p:nvGrpSpPr>
@@ -1806,7 +2183,7 @@
       </p:grpSpPr>
       <p:sp>
         <p:nvSpPr>
-          <p:cNvPr id="162" name="Google Shape;162;g396060f51c5_0_16:notes"/>
+          <p:cNvPr id="167" name="Google Shape;167;g396060f51c5_0_11:notes"/>
           <p:cNvSpPr/>
           <p:nvPr>
             <p:ph idx="2" type="sldImg"/>
@@ -1841,7 +2218,7 @@
       </p:sp>
       <p:sp>
         <p:nvSpPr>
-          <p:cNvPr id="163" name="Google Shape;163;g396060f51c5_0_16:notes"/>
+          <p:cNvPr id="168" name="Google Shape;168;g396060f51c5_0_11:notes"/>
           <p:cNvSpPr txBox="1"/>
           <p:nvPr>
             <p:ph idx="1" type="body"/>
@@ -1872,7 +2249,24 @@
               <a:buNone/>
             </a:pPr>
             <a:r>
-              <a:t/>
+              <a:rPr lang="en"/>
+              <a:t>31 fusionar con 29</a:t>
+            </a:r>
+            <a:endParaRPr/>
+          </a:p>
+          <a:p>
+            <a:pPr indent="0" lvl="0" marL="0" rtl="0" algn="l">
+              <a:spcBef>
+                <a:spcPts val="0"/>
+              </a:spcBef>
+              <a:spcAft>
+                <a:spcPts val="0"/>
+              </a:spcAft>
+              <a:buNone/>
+            </a:pPr>
+            <a:r>
+              <a:rPr lang="en"/>
+              <a:t>32 lo pondria en creacion de comptes</a:t>
             </a:r>
             <a:endParaRPr/>
           </a:p>
@@ -13075,7 +13469,7 @@
   <p:cSld>
     <p:spTree>
       <p:nvGrpSpPr>
-        <p:cNvPr id="170" name="Shape 170"/>
+        <p:cNvPr id="175" name="Shape 175"/>
         <p:cNvGrpSpPr/>
         <p:nvPr/>
       </p:nvGrpSpPr>
@@ -13089,7 +13483,7 @@
       </p:grpSpPr>
       <p:sp>
         <p:nvSpPr>
-          <p:cNvPr id="171" name="Google Shape;171;p30"/>
+          <p:cNvPr id="176" name="Google Shape;176;p30"/>
           <p:cNvSpPr txBox="1"/>
           <p:nvPr>
             <p:ph type="title"/>
@@ -13129,7 +13523,7 @@
       </p:sp>
       <p:sp>
         <p:nvSpPr>
-          <p:cNvPr id="172" name="Google Shape;172;p30"/>
+          <p:cNvPr id="177" name="Google Shape;177;p30"/>
           <p:cNvSpPr txBox="1"/>
           <p:nvPr/>
         </p:nvSpPr>
@@ -13152,7 +13546,7 @@
           </a:bodyPr>
           <a:lstStyle/>
           <a:p>
-            <a:pPr indent="0" lvl="0" marL="0" rtl="0" algn="just">
+            <a:pPr indent="0" lvl="0" marL="0" rtl="0" algn="ctr">
               <a:lnSpc>
                 <a:spcPct val="115000"/>
               </a:lnSpc>
@@ -13165,9 +13559,14 @@
               <a:buNone/>
             </a:pPr>
             <a:r>
-              <a:t/>
-            </a:r>
-            <a:endParaRPr b="1">
+              <a:rPr b="1" lang="en" sz="1300">
+                <a:solidFill>
+                  <a:schemeClr val="dk1"/>
+                </a:solidFill>
+              </a:rPr>
+              <a:t>GRUP 5: VALORACIÓ DE LA COMANDA</a:t>
+            </a:r>
+            <a:endParaRPr b="1" sz="1300">
               <a:solidFill>
                 <a:schemeClr val="dk1"/>
               </a:solidFill>
@@ -13187,14 +13586,9 @@
               <a:buNone/>
             </a:pPr>
             <a:r>
-              <a:rPr b="1" lang="en">
-                <a:solidFill>
-                  <a:schemeClr val="dk1"/>
-                </a:solidFill>
-              </a:rPr>
-              <a:t>GRUP 6: FUNCIONALITATS ADDICIONALS</a:t>
-            </a:r>
-            <a:endParaRPr b="1">
+              <a:t/>
+            </a:r>
+            <a:endParaRPr b="1" sz="1300">
               <a:solidFill>
                 <a:schemeClr val="dk1"/>
               </a:solidFill>
@@ -13214,9 +13608,22 @@
               <a:buNone/>
             </a:pPr>
             <a:r>
-              <a:t/>
-            </a:r>
-            <a:endParaRPr b="1">
+              <a:rPr b="1" lang="en" sz="1300">
+                <a:solidFill>
+                  <a:schemeClr val="dk1"/>
+                </a:solidFill>
+              </a:rPr>
+              <a:t>RF-5-01: </a:t>
+            </a:r>
+            <a:r>
+              <a:rPr lang="en" sz="1300">
+                <a:solidFill>
+                  <a:schemeClr val="dk1"/>
+                </a:solidFill>
+              </a:rPr>
+              <a:t>El cuiner té associades unes valoracions les quals són escrites pels clients que reben comandes seves, amb camps com “puntualitat” o “estat del menjar”. </a:t>
+            </a:r>
+            <a:endParaRPr sz="1300">
               <a:solidFill>
                 <a:schemeClr val="dk1"/>
               </a:solidFill>
@@ -13236,22 +13643,46 @@
               <a:buNone/>
             </a:pPr>
             <a:r>
-              <a:rPr b="1" lang="en">
-                <a:solidFill>
-                  <a:schemeClr val="dk1"/>
-                </a:solidFill>
-              </a:rPr>
-              <a:t>RF 36: </a:t>
-            </a:r>
-            <a:r>
-              <a:rPr lang="en">
-                <a:solidFill>
-                  <a:schemeClr val="dk1"/>
-                </a:solidFill>
-              </a:rPr>
-              <a:t>Els clients poden proposar els plats que volen consumir i aquests s'afegeixen a un menú específic on un cuiner els accepta.</a:t>
-            </a:r>
-            <a:endParaRPr>
+              <a:rPr b="1" lang="en" sz="1300" u="sng">
+                <a:solidFill>
+                  <a:schemeClr val="dk1"/>
+                </a:solidFill>
+              </a:rPr>
+              <a:t>RNF</a:t>
+            </a:r>
+            <a:r>
+              <a:rPr b="1" lang="en" sz="1300">
+                <a:solidFill>
+                  <a:schemeClr val="dk1"/>
+                </a:solidFill>
+              </a:rPr>
+              <a:t>-5-02: </a:t>
+            </a:r>
+            <a:r>
+              <a:rPr lang="en" sz="1300">
+                <a:solidFill>
+                  <a:schemeClr val="dk1"/>
+                </a:solidFill>
+              </a:rPr>
+              <a:t>Els cuiners recomanats s’ordenen segons la seva valoració (a valoració més alta, més amunt apareixen). RNF de </a:t>
+            </a:r>
+            <a:r>
+              <a:rPr lang="en" sz="1300" u="sng">
+                <a:solidFill>
+                  <a:schemeClr val="dk1"/>
+                </a:solidFill>
+              </a:rPr>
+              <a:t>Decisió de Disseny</a:t>
+            </a:r>
+            <a:r>
+              <a:rPr lang="en" sz="1300">
+                <a:solidFill>
+                  <a:schemeClr val="dk1"/>
+                </a:solidFill>
+              </a:rPr>
+              <a:t>. </a:t>
+            </a:r>
+            <a:endParaRPr sz="1300">
               <a:solidFill>
                 <a:schemeClr val="dk1"/>
               </a:solidFill>
@@ -13271,151 +13702,9 @@
               <a:buNone/>
             </a:pPr>
             <a:r>
-              <a:rPr b="1" lang="en" u="sng">
-                <a:solidFill>
-                  <a:schemeClr val="dk1"/>
-                </a:solidFill>
-              </a:rPr>
-              <a:t>RNF 37</a:t>
-            </a:r>
-            <a:r>
-              <a:rPr b="1" lang="en">
-                <a:solidFill>
-                  <a:schemeClr val="dk1"/>
-                </a:solidFill>
-              </a:rPr>
-              <a:t>: </a:t>
-            </a:r>
-            <a:r>
-              <a:rPr lang="en">
-                <a:solidFill>
-                  <a:schemeClr val="dk1"/>
-                </a:solidFill>
-              </a:rPr>
-              <a:t>Només els cuiners poden accedir al menú especific.(RNF de </a:t>
-            </a:r>
-            <a:r>
-              <a:rPr lang="en" u="sng">
-                <a:solidFill>
-                  <a:schemeClr val="dk1"/>
-                </a:solidFill>
-              </a:rPr>
-              <a:t>Restricció de Disseny, seguretat</a:t>
-            </a:r>
-            <a:r>
-              <a:rPr lang="en">
-                <a:solidFill>
-                  <a:schemeClr val="dk1"/>
-                </a:solidFill>
-              </a:rPr>
-              <a:t>). </a:t>
-            </a:r>
-            <a:endParaRPr>
-              <a:solidFill>
-                <a:schemeClr val="dk1"/>
-              </a:solidFill>
-            </a:endParaRPr>
-          </a:p>
-          <a:p>
-            <a:pPr indent="0" lvl="0" marL="0" rtl="0" algn="just">
-              <a:lnSpc>
-                <a:spcPct val="115000"/>
-              </a:lnSpc>
-              <a:spcBef>
-                <a:spcPts val="0"/>
-              </a:spcBef>
-              <a:spcAft>
-                <a:spcPts val="0"/>
-              </a:spcAft>
-              <a:buNone/>
-            </a:pPr>
-            <a:r>
-              <a:rPr b="1" lang="en">
-                <a:solidFill>
-                  <a:schemeClr val="dk1"/>
-                </a:solidFill>
-              </a:rPr>
-              <a:t>RF 38: </a:t>
-            </a:r>
-            <a:r>
-              <a:rPr lang="en">
-                <a:solidFill>
-                  <a:schemeClr val="dk1"/>
-                </a:solidFill>
-              </a:rPr>
-              <a:t>Hi ha xat client-cuiner per a garantir un bon servei.</a:t>
-            </a:r>
-            <a:endParaRPr>
-              <a:solidFill>
-                <a:schemeClr val="dk1"/>
-              </a:solidFill>
-            </a:endParaRPr>
-          </a:p>
-          <a:p>
-            <a:pPr indent="0" lvl="0" marL="0" rtl="0" algn="just">
-              <a:lnSpc>
-                <a:spcPct val="115000"/>
-              </a:lnSpc>
-              <a:spcBef>
-                <a:spcPts val="0"/>
-              </a:spcBef>
-              <a:spcAft>
-                <a:spcPts val="0"/>
-              </a:spcAft>
-              <a:buNone/>
-            </a:pPr>
-            <a:r>
-              <a:rPr b="1" lang="en">
-                <a:solidFill>
-                  <a:schemeClr val="dk1"/>
-                </a:solidFill>
-              </a:rPr>
-              <a:t>RF 39: </a:t>
-            </a:r>
-            <a:r>
-              <a:rPr lang="en">
-                <a:solidFill>
-                  <a:schemeClr val="dk1"/>
-                </a:solidFill>
-              </a:rPr>
-              <a:t>Els usuaris es poden subscriure un pla mensual amb tarifa d'enviaments i sistema de punts. </a:t>
-            </a:r>
-            <a:endParaRPr>
-              <a:solidFill>
-                <a:schemeClr val="dk1"/>
-              </a:solidFill>
-            </a:endParaRPr>
-          </a:p>
-          <a:p>
-            <a:pPr indent="0" lvl="0" marL="0" rtl="0" algn="just">
-              <a:lnSpc>
-                <a:spcPct val="115000"/>
-              </a:lnSpc>
-              <a:spcBef>
-                <a:spcPts val="0"/>
-              </a:spcBef>
-              <a:spcAft>
-                <a:spcPts val="0"/>
-              </a:spcAft>
-              <a:buNone/>
-            </a:pPr>
-            <a:r>
-              <a:rPr b="1" lang="en">
-                <a:solidFill>
-                  <a:schemeClr val="dk1"/>
-                </a:solidFill>
-              </a:rPr>
-              <a:t>RF 40: </a:t>
-            </a:r>
-            <a:r>
-              <a:rPr lang="en">
-                <a:solidFill>
-                  <a:schemeClr val="dk1"/>
-                </a:solidFill>
-              </a:rPr>
-              <a:t>Si es realitzen comanda es guanyen punts i els punts serveixen per a obtener descomptes.</a:t>
-            </a:r>
-            <a:endParaRPr>
+              <a:t/>
+            </a:r>
+            <a:endParaRPr b="1" sz="1300">
               <a:solidFill>
                 <a:schemeClr val="dk1"/>
               </a:solidFill>
@@ -13436,7 +13725,7 @@
   <p:cSld>
     <p:spTree>
       <p:nvGrpSpPr>
-        <p:cNvPr id="176" name="Shape 176"/>
+        <p:cNvPr id="181" name="Shape 181"/>
         <p:cNvGrpSpPr/>
         <p:nvPr/>
       </p:nvGrpSpPr>
@@ -13450,7 +13739,7 @@
       </p:grpSpPr>
       <p:sp>
         <p:nvSpPr>
-          <p:cNvPr id="177" name="Google Shape;177;p31"/>
+          <p:cNvPr id="182" name="Google Shape;182;p31"/>
           <p:cNvSpPr txBox="1"/>
           <p:nvPr>
             <p:ph type="title"/>
@@ -13490,7 +13779,7 @@
       </p:sp>
       <p:sp>
         <p:nvSpPr>
-          <p:cNvPr id="178" name="Google Shape;178;p31"/>
+          <p:cNvPr id="183" name="Google Shape;183;p31"/>
           <p:cNvSpPr txBox="1"/>
           <p:nvPr/>
         </p:nvSpPr>
@@ -13513,7 +13802,7 @@
           </a:bodyPr>
           <a:lstStyle/>
           <a:p>
-            <a:pPr indent="0" lvl="0" marL="0" rtl="0" algn="just">
+            <a:pPr indent="0" lvl="0" marL="0" rtl="0" algn="ctr">
               <a:lnSpc>
                 <a:spcPct val="115000"/>
               </a:lnSpc>
@@ -13526,14 +13815,14 @@
               <a:buNone/>
             </a:pPr>
             <a:r>
-              <a:rPr b="1" lang="en">
-                <a:solidFill>
-                  <a:schemeClr val="dk1"/>
-                </a:solidFill>
-              </a:rPr>
-              <a:t>ALTRES CONSIDERACIONS</a:t>
-            </a:r>
-            <a:endParaRPr b="1">
+              <a:rPr b="1" lang="en" sz="1300">
+                <a:solidFill>
+                  <a:schemeClr val="dk1"/>
+                </a:solidFill>
+              </a:rPr>
+              <a:t>GRUP 6: FUNCIONALITATS ADDICIONALS</a:t>
+            </a:r>
+            <a:endParaRPr b="1" sz="1300">
               <a:solidFill>
                 <a:schemeClr val="dk1"/>
               </a:solidFill>
@@ -13555,7 +13844,7 @@
             <a:r>
               <a:t/>
             </a:r>
-            <a:endParaRPr b="1">
+            <a:endParaRPr b="1" sz="1300">
               <a:solidFill>
                 <a:schemeClr val="dk1"/>
               </a:solidFill>
@@ -13575,46 +13864,22 @@
               <a:buNone/>
             </a:pPr>
             <a:r>
-              <a:rPr b="1" lang="en" u="sng">
-                <a:solidFill>
-                  <a:schemeClr val="dk1"/>
-                </a:solidFill>
-              </a:rPr>
-              <a:t>RNF 41</a:t>
-            </a:r>
-            <a:r>
-              <a:rPr b="1" lang="en">
-                <a:solidFill>
-                  <a:schemeClr val="dk1"/>
-                </a:solidFill>
-              </a:rPr>
-              <a:t>: </a:t>
-            </a:r>
-            <a:r>
-              <a:rPr lang="en">
-                <a:solidFill>
-                  <a:schemeClr val="dk1"/>
-                </a:solidFill>
-              </a:rPr>
-              <a:t>Es farà servir a l'àrea metropolitana de Barcelona (RNF de </a:t>
-            </a:r>
-            <a:r>
-              <a:rPr lang="en" u="sng">
-                <a:solidFill>
-                  <a:schemeClr val="dk1"/>
-                </a:solidFill>
-              </a:rPr>
-              <a:t>Restricció de Disseny</a:t>
-            </a:r>
-            <a:r>
-              <a:rPr lang="en">
-                <a:solidFill>
-                  <a:schemeClr val="dk1"/>
-                </a:solidFill>
-              </a:rPr>
-              <a:t>).</a:t>
-            </a:r>
-            <a:endParaRPr>
+              <a:rPr b="1" lang="en" sz="1300">
+                <a:solidFill>
+                  <a:schemeClr val="dk1"/>
+                </a:solidFill>
+              </a:rPr>
+              <a:t>RF-6-01: </a:t>
+            </a:r>
+            <a:r>
+              <a:rPr lang="en" sz="1300">
+                <a:solidFill>
+                  <a:schemeClr val="dk1"/>
+                </a:solidFill>
+              </a:rPr>
+              <a:t>Els clients poden proposar els plats que volen consumir i aquests s'afegeixen a un menú específic on un cuiner els accepta.</a:t>
+            </a:r>
+            <a:endParaRPr sz="1300">
               <a:solidFill>
                 <a:schemeClr val="dk1"/>
               </a:solidFill>
@@ -13634,46 +13899,46 @@
               <a:buNone/>
             </a:pPr>
             <a:r>
-              <a:rPr b="1" lang="en" u="sng">
-                <a:solidFill>
-                  <a:schemeClr val="dk1"/>
-                </a:solidFill>
-              </a:rPr>
-              <a:t>RNF 42</a:t>
-            </a:r>
-            <a:r>
-              <a:rPr b="1" lang="en">
-                <a:solidFill>
-                  <a:schemeClr val="dk1"/>
-                </a:solidFill>
-              </a:rPr>
-              <a:t>: </a:t>
-            </a:r>
-            <a:r>
-              <a:rPr lang="en">
-                <a:solidFill>
-                  <a:schemeClr val="dk1"/>
-                </a:solidFill>
-              </a:rPr>
-              <a:t>La interfície serà trilingüe: Espanyol, Català i Anglès (RNF </a:t>
-            </a:r>
-            <a:r>
-              <a:rPr lang="en" u="sng">
-                <a:solidFill>
-                  <a:schemeClr val="dk1"/>
-                </a:solidFill>
-              </a:rPr>
-              <a:t>d’Interfícies Externes</a:t>
-            </a:r>
-            <a:r>
-              <a:rPr lang="en">
-                <a:solidFill>
-                  <a:schemeClr val="dk1"/>
-                </a:solidFill>
-              </a:rPr>
-              <a:t>). </a:t>
-            </a:r>
-            <a:endParaRPr>
+              <a:rPr b="1" lang="en" sz="1300" u="sng">
+                <a:solidFill>
+                  <a:schemeClr val="dk1"/>
+                </a:solidFill>
+              </a:rPr>
+              <a:t>RNF</a:t>
+            </a:r>
+            <a:r>
+              <a:rPr b="1" lang="en" sz="1300">
+                <a:solidFill>
+                  <a:schemeClr val="dk1"/>
+                </a:solidFill>
+              </a:rPr>
+              <a:t>-6-02: </a:t>
+            </a:r>
+            <a:r>
+              <a:rPr lang="en" sz="1300">
+                <a:solidFill>
+                  <a:schemeClr val="dk1"/>
+                </a:solidFill>
+              </a:rPr>
+              <a:t>Només els cuiners poden accedir al menú específic. RNF de </a:t>
+            </a:r>
+            <a:r>
+              <a:rPr lang="en" sz="1300" u="sng">
+                <a:solidFill>
+                  <a:schemeClr val="dk1"/>
+                </a:solidFill>
+              </a:rPr>
+              <a:t>Restricció de Disseny, seguretat.</a:t>
+            </a:r>
+            <a:r>
+              <a:rPr lang="en" sz="1300">
+                <a:solidFill>
+                  <a:schemeClr val="dk1"/>
+                </a:solidFill>
+              </a:rPr>
+              <a:t> </a:t>
+            </a:r>
+            <a:endParaRPr sz="1300">
               <a:solidFill>
                 <a:schemeClr val="dk1"/>
               </a:solidFill>
@@ -13693,46 +13958,22 @@
               <a:buNone/>
             </a:pPr>
             <a:r>
-              <a:rPr b="1" lang="en" u="sng">
-                <a:solidFill>
-                  <a:schemeClr val="dk1"/>
-                </a:solidFill>
-              </a:rPr>
-              <a:t>RNF 43</a:t>
-            </a:r>
-            <a:r>
-              <a:rPr b="1" lang="en">
-                <a:solidFill>
-                  <a:schemeClr val="dk1"/>
-                </a:solidFill>
-              </a:rPr>
-              <a:t>: </a:t>
-            </a:r>
-            <a:r>
-              <a:rPr lang="en">
-                <a:solidFill>
-                  <a:schemeClr val="dk1"/>
-                </a:solidFill>
-              </a:rPr>
-              <a:t>Apte tant per a Web com per a Mòbil (RNF </a:t>
-            </a:r>
-            <a:r>
-              <a:rPr lang="en" u="sng">
-                <a:solidFill>
-                  <a:schemeClr val="dk1"/>
-                </a:solidFill>
-              </a:rPr>
-              <a:t>d’Interfícies Externes</a:t>
-            </a:r>
-            <a:r>
-              <a:rPr lang="en">
-                <a:solidFill>
-                  <a:schemeClr val="dk1"/>
-                </a:solidFill>
-              </a:rPr>
-              <a:t>). </a:t>
-            </a:r>
-            <a:endParaRPr>
+              <a:rPr b="1" lang="en" sz="1300">
+                <a:solidFill>
+                  <a:schemeClr val="dk1"/>
+                </a:solidFill>
+              </a:rPr>
+              <a:t>RF-6-03: </a:t>
+            </a:r>
+            <a:r>
+              <a:rPr lang="en" sz="1300">
+                <a:solidFill>
+                  <a:schemeClr val="dk1"/>
+                </a:solidFill>
+              </a:rPr>
+              <a:t>Hi ha xat client-cuiner per a garantir un bon servei.</a:t>
+            </a:r>
+            <a:endParaRPr sz="1300">
               <a:solidFill>
                 <a:schemeClr val="dk1"/>
               </a:solidFill>
@@ -13752,46 +13993,22 @@
               <a:buNone/>
             </a:pPr>
             <a:r>
-              <a:rPr b="1" lang="en" u="sng">
-                <a:solidFill>
-                  <a:schemeClr val="dk1"/>
-                </a:solidFill>
-              </a:rPr>
-              <a:t>RNF 44</a:t>
-            </a:r>
-            <a:r>
-              <a:rPr b="1" lang="en">
-                <a:solidFill>
-                  <a:schemeClr val="dk1"/>
-                </a:solidFill>
-              </a:rPr>
-              <a:t>: </a:t>
-            </a:r>
-            <a:r>
-              <a:rPr lang="en">
-                <a:solidFill>
-                  <a:schemeClr val="dk1"/>
-                </a:solidFill>
-              </a:rPr>
-              <a:t>Els Mòbils hauran de tenir sistema operatiu IOS o Android (RNF de </a:t>
-            </a:r>
-            <a:r>
-              <a:rPr lang="en" u="sng">
-                <a:solidFill>
-                  <a:schemeClr val="dk1"/>
-                </a:solidFill>
-              </a:rPr>
-              <a:t>Restricció de Disseny, limitació de Hw</a:t>
-            </a:r>
-            <a:r>
-              <a:rPr lang="en">
-                <a:solidFill>
-                  <a:schemeClr val="dk1"/>
-                </a:solidFill>
-              </a:rPr>
-              <a:t>). </a:t>
-            </a:r>
-            <a:endParaRPr>
+              <a:rPr b="1" lang="en" sz="1300">
+                <a:solidFill>
+                  <a:schemeClr val="dk1"/>
+                </a:solidFill>
+              </a:rPr>
+              <a:t>RF-6-04: </a:t>
+            </a:r>
+            <a:r>
+              <a:rPr lang="en" sz="1300">
+                <a:solidFill>
+                  <a:schemeClr val="dk1"/>
+                </a:solidFill>
+              </a:rPr>
+              <a:t>Els usuaris es poden subscriure un pla mensual amb tarifa d'enviaments i sistema de punts. </a:t>
+            </a:r>
+            <a:endParaRPr sz="1300">
               <a:solidFill>
                 <a:schemeClr val="dk1"/>
               </a:solidFill>
@@ -13811,363 +14028,9 @@
               <a:buNone/>
             </a:pPr>
             <a:r>
-              <a:rPr b="1" lang="en" u="sng">
-                <a:solidFill>
-                  <a:schemeClr val="dk1"/>
-                </a:solidFill>
-              </a:rPr>
-              <a:t>RNF 45</a:t>
-            </a:r>
-            <a:r>
-              <a:rPr b="1" lang="en">
-                <a:solidFill>
-                  <a:schemeClr val="dk1"/>
-                </a:solidFill>
-              </a:rPr>
-              <a:t>: </a:t>
-            </a:r>
-            <a:r>
-              <a:rPr lang="en">
-                <a:solidFill>
-                  <a:schemeClr val="dk1"/>
-                </a:solidFill>
-              </a:rPr>
-              <a:t>Lletra Calibri tant a encapçalaments com per a la resta de continguts. (RNF </a:t>
-            </a:r>
-            <a:r>
-              <a:rPr lang="en" u="sng">
-                <a:solidFill>
-                  <a:schemeClr val="dk1"/>
-                </a:solidFill>
-              </a:rPr>
-              <a:t>d’Interfícies Externes</a:t>
-            </a:r>
-            <a:r>
-              <a:rPr lang="en">
-                <a:solidFill>
-                  <a:schemeClr val="dk1"/>
-                </a:solidFill>
-              </a:rPr>
-              <a:t>). </a:t>
-            </a:r>
-            <a:endParaRPr>
-              <a:solidFill>
-                <a:schemeClr val="dk1"/>
-              </a:solidFill>
-            </a:endParaRPr>
-          </a:p>
-          <a:p>
-            <a:pPr indent="0" lvl="0" marL="0" rtl="0" algn="just">
-              <a:lnSpc>
-                <a:spcPct val="115000"/>
-              </a:lnSpc>
-              <a:spcBef>
-                <a:spcPts val="0"/>
-              </a:spcBef>
-              <a:spcAft>
-                <a:spcPts val="0"/>
-              </a:spcAft>
-              <a:buNone/>
-            </a:pPr>
-            <a:r>
-              <a:rPr b="1" lang="en" u="sng">
-                <a:solidFill>
-                  <a:schemeClr val="dk1"/>
-                </a:solidFill>
-              </a:rPr>
-              <a:t>RNF 46</a:t>
-            </a:r>
-            <a:r>
-              <a:rPr b="1" lang="en">
-                <a:solidFill>
-                  <a:schemeClr val="dk1"/>
-                </a:solidFill>
-              </a:rPr>
-              <a:t>: </a:t>
-            </a:r>
-            <a:r>
-              <a:rPr lang="en">
-                <a:solidFill>
-                  <a:schemeClr val="dk1"/>
-                </a:solidFill>
-              </a:rPr>
-              <a:t>Color corporatiu taronja i  El logo ha d'aparèixer a totes les pantalles. (RNF </a:t>
-            </a:r>
-            <a:r>
-              <a:rPr lang="en" u="sng">
-                <a:solidFill>
-                  <a:schemeClr val="dk1"/>
-                </a:solidFill>
-              </a:rPr>
-              <a:t>d’Interfícies Externes</a:t>
-            </a:r>
-            <a:r>
-              <a:rPr lang="en">
-                <a:solidFill>
-                  <a:schemeClr val="dk1"/>
-                </a:solidFill>
-              </a:rPr>
-              <a:t>). </a:t>
-            </a:r>
-            <a:endParaRPr>
-              <a:solidFill>
-                <a:schemeClr val="dk1"/>
-              </a:solidFill>
-            </a:endParaRPr>
-          </a:p>
-          <a:p>
-            <a:pPr indent="0" lvl="0" marL="0" rtl="0" algn="just">
-              <a:lnSpc>
-                <a:spcPct val="115000"/>
-              </a:lnSpc>
-              <a:spcBef>
-                <a:spcPts val="0"/>
-              </a:spcBef>
-              <a:spcAft>
-                <a:spcPts val="0"/>
-              </a:spcAft>
-              <a:buNone/>
-            </a:pPr>
-            <a:r>
-              <a:rPr b="1" lang="en" u="sng">
-                <a:solidFill>
-                  <a:schemeClr val="dk1"/>
-                </a:solidFill>
-              </a:rPr>
-              <a:t>RNF 47</a:t>
-            </a:r>
-            <a:r>
-              <a:rPr b="1" lang="en">
-                <a:solidFill>
-                  <a:schemeClr val="dk1"/>
-                </a:solidFill>
-              </a:rPr>
-              <a:t>: </a:t>
-            </a:r>
-            <a:r>
-              <a:rPr lang="en">
-                <a:solidFill>
-                  <a:schemeClr val="dk1"/>
-                </a:solidFill>
-              </a:rPr>
-              <a:t>La app ha de suportar 1000 usuaris connectats alhora (RNF de </a:t>
-            </a:r>
-            <a:r>
-              <a:rPr lang="en" u="sng">
-                <a:solidFill>
-                  <a:schemeClr val="dk1"/>
-                </a:solidFill>
-              </a:rPr>
-              <a:t>Rendiment estàtic</a:t>
-            </a:r>
-            <a:r>
-              <a:rPr lang="en">
-                <a:solidFill>
-                  <a:schemeClr val="dk1"/>
-                </a:solidFill>
-              </a:rPr>
-              <a:t>).</a:t>
-            </a:r>
-            <a:endParaRPr>
-              <a:solidFill>
-                <a:schemeClr val="dk1"/>
-              </a:solidFill>
-            </a:endParaRPr>
-          </a:p>
-          <a:p>
-            <a:pPr indent="0" lvl="0" marL="0" rtl="0" algn="just">
-              <a:lnSpc>
-                <a:spcPct val="115000"/>
-              </a:lnSpc>
-              <a:spcBef>
-                <a:spcPts val="0"/>
-              </a:spcBef>
-              <a:spcAft>
-                <a:spcPts val="0"/>
-              </a:spcAft>
-              <a:buNone/>
-            </a:pPr>
-            <a:r>
-              <a:rPr b="1" lang="en" u="sng">
-                <a:solidFill>
-                  <a:schemeClr val="dk1"/>
-                </a:solidFill>
-              </a:rPr>
-              <a:t>RNF 48</a:t>
-            </a:r>
-            <a:r>
-              <a:rPr b="1" lang="en">
-                <a:solidFill>
-                  <a:schemeClr val="dk1"/>
-                </a:solidFill>
-              </a:rPr>
-              <a:t>: </a:t>
-            </a:r>
-            <a:r>
-              <a:rPr lang="en">
-                <a:solidFill>
-                  <a:schemeClr val="dk1"/>
-                </a:solidFill>
-              </a:rPr>
-              <a:t>El temps màxim de resposta de la app ha de ser de 5 milisegons (RNF de </a:t>
-            </a:r>
-            <a:r>
-              <a:rPr lang="en" u="sng">
-                <a:solidFill>
-                  <a:schemeClr val="dk1"/>
-                </a:solidFill>
-              </a:rPr>
-              <a:t>Rendiment dinàmic</a:t>
-            </a:r>
-            <a:r>
-              <a:rPr lang="en">
-                <a:solidFill>
-                  <a:schemeClr val="dk1"/>
-                </a:solidFill>
-              </a:rPr>
-              <a:t>).</a:t>
-            </a:r>
-            <a:endParaRPr>
-              <a:solidFill>
-                <a:schemeClr val="dk1"/>
-              </a:solidFill>
-            </a:endParaRPr>
-          </a:p>
-          <a:p>
-            <a:pPr indent="0" lvl="0" marL="0" rtl="0" algn="just">
-              <a:lnSpc>
-                <a:spcPct val="115000"/>
-              </a:lnSpc>
-              <a:spcBef>
-                <a:spcPts val="0"/>
-              </a:spcBef>
-              <a:spcAft>
-                <a:spcPts val="0"/>
-              </a:spcAft>
-              <a:buNone/>
-            </a:pPr>
-            <a:r>
-              <a:rPr b="1" lang="en" u="sng">
-                <a:solidFill>
-                  <a:schemeClr val="dk1"/>
-                </a:solidFill>
-              </a:rPr>
-              <a:t>RNF 49</a:t>
-            </a:r>
-            <a:r>
-              <a:rPr b="1" lang="en">
-                <a:solidFill>
-                  <a:schemeClr val="dk1"/>
-                </a:solidFill>
-              </a:rPr>
-              <a:t>:</a:t>
-            </a:r>
-            <a:r>
-              <a:rPr lang="en">
-                <a:solidFill>
-                  <a:schemeClr val="dk1"/>
-                </a:solidFill>
-              </a:rPr>
-              <a:t> Per a encriptar dades es farà servir el protocol OpenVPN (RNF de </a:t>
-            </a:r>
-            <a:r>
-              <a:rPr lang="en" u="sng">
-                <a:solidFill>
-                  <a:schemeClr val="dk1"/>
-                </a:solidFill>
-              </a:rPr>
-              <a:t>Decisió de Disseny</a:t>
-            </a:r>
-            <a:r>
-              <a:rPr lang="en">
-                <a:solidFill>
-                  <a:schemeClr val="dk1"/>
-                </a:solidFill>
-              </a:rPr>
-              <a:t>).</a:t>
-            </a:r>
-            <a:endParaRPr>
-              <a:solidFill>
-                <a:schemeClr val="dk1"/>
-              </a:solidFill>
-            </a:endParaRPr>
-          </a:p>
-          <a:p>
-            <a:pPr indent="0" lvl="0" marL="0" rtl="0" algn="just">
-              <a:lnSpc>
-                <a:spcPct val="115000"/>
-              </a:lnSpc>
-              <a:spcBef>
-                <a:spcPts val="0"/>
-              </a:spcBef>
-              <a:spcAft>
-                <a:spcPts val="0"/>
-              </a:spcAft>
-              <a:buNone/>
-            </a:pPr>
-            <a:r>
-              <a:rPr b="1" lang="en" u="sng">
-                <a:solidFill>
-                  <a:schemeClr val="dk1"/>
-                </a:solidFill>
-              </a:rPr>
-              <a:t>RNF 50</a:t>
-            </a:r>
-            <a:r>
-              <a:rPr b="1" lang="en">
-                <a:solidFill>
-                  <a:schemeClr val="dk1"/>
-                </a:solidFill>
-              </a:rPr>
-              <a:t>: </a:t>
-            </a:r>
-            <a:r>
-              <a:rPr lang="en">
-                <a:solidFill>
-                  <a:schemeClr val="dk1"/>
-                </a:solidFill>
-              </a:rPr>
-              <a:t>Interfície amigable i responsive. (RNF </a:t>
-            </a:r>
-            <a:r>
-              <a:rPr lang="en" u="sng">
-                <a:solidFill>
-                  <a:schemeClr val="dk1"/>
-                </a:solidFill>
-              </a:rPr>
-              <a:t>d'Objectius de Disseny</a:t>
-            </a:r>
-            <a:r>
-              <a:rPr b="1" lang="en">
-                <a:solidFill>
-                  <a:schemeClr val="dk1"/>
-                </a:solidFill>
-              </a:rPr>
-              <a:t>). </a:t>
-            </a:r>
-            <a:endParaRPr b="1">
-              <a:solidFill>
-                <a:schemeClr val="dk1"/>
-              </a:solidFill>
-            </a:endParaRPr>
-          </a:p>
-          <a:p>
-            <a:pPr indent="0" lvl="0" marL="0" rtl="0" algn="just">
-              <a:lnSpc>
-                <a:spcPct val="115000"/>
-              </a:lnSpc>
-              <a:spcBef>
-                <a:spcPts val="0"/>
-              </a:spcBef>
-              <a:spcAft>
-                <a:spcPts val="0"/>
-              </a:spcAft>
-              <a:buNone/>
-            </a:pPr>
-            <a:r>
               <a:t/>
             </a:r>
-            <a:endParaRPr b="1">
+            <a:endParaRPr b="1" sz="1300">
               <a:solidFill>
                 <a:schemeClr val="dk1"/>
               </a:solidFill>
@@ -14188,7 +14051,7 @@
   <p:cSld>
     <p:spTree>
       <p:nvGrpSpPr>
-        <p:cNvPr id="182" name="Shape 182"/>
+        <p:cNvPr id="187" name="Shape 187"/>
         <p:cNvGrpSpPr/>
         <p:nvPr/>
       </p:nvGrpSpPr>
@@ -14202,7 +14065,7 @@
       </p:grpSpPr>
       <p:sp>
         <p:nvSpPr>
-          <p:cNvPr id="183" name="Google Shape;183;p32"/>
+          <p:cNvPr id="188" name="Google Shape;188;p32"/>
           <p:cNvSpPr txBox="1"/>
           <p:nvPr>
             <p:ph type="title"/>
@@ -14234,6 +14097,742 @@
             </a:pPr>
             <a:r>
               <a:rPr lang="en"/>
+              <a:t>Requisits</a:t>
+            </a:r>
+            <a:endParaRPr/>
+          </a:p>
+        </p:txBody>
+      </p:sp>
+      <p:sp>
+        <p:nvSpPr>
+          <p:cNvPr id="189" name="Google Shape;189;p32"/>
+          <p:cNvSpPr txBox="1"/>
+          <p:nvPr/>
+        </p:nvSpPr>
+        <p:spPr>
+          <a:xfrm>
+            <a:off x="228600" y="801300"/>
+            <a:ext cx="8686800" cy="3827700"/>
+          </a:xfrm>
+          <a:prstGeom prst="rect">
+            <a:avLst/>
+          </a:prstGeom>
+          <a:noFill/>
+          <a:ln>
+            <a:noFill/>
+          </a:ln>
+        </p:spPr>
+        <p:txBody>
+          <a:bodyPr anchorCtr="0" anchor="t" bIns="91425" lIns="91425" spcFirstLastPara="1" rIns="91425" wrap="square" tIns="91425">
+            <a:noAutofit/>
+          </a:bodyPr>
+          <a:lstStyle/>
+          <a:p>
+            <a:pPr indent="0" lvl="0" marL="0" rtl="0" algn="ctr">
+              <a:lnSpc>
+                <a:spcPct val="115000"/>
+              </a:lnSpc>
+              <a:spcBef>
+                <a:spcPts val="0"/>
+              </a:spcBef>
+              <a:spcAft>
+                <a:spcPts val="0"/>
+              </a:spcAft>
+              <a:buNone/>
+            </a:pPr>
+            <a:r>
+              <a:rPr b="1" lang="en" sz="1300">
+                <a:solidFill>
+                  <a:schemeClr val="dk1"/>
+                </a:solidFill>
+              </a:rPr>
+              <a:t>GRUP 7: ALTRES CONSIDERACIONS</a:t>
+            </a:r>
+            <a:endParaRPr b="1" sz="1300">
+              <a:solidFill>
+                <a:schemeClr val="dk1"/>
+              </a:solidFill>
+            </a:endParaRPr>
+          </a:p>
+          <a:p>
+            <a:pPr indent="0" lvl="0" marL="0" rtl="0" algn="just">
+              <a:lnSpc>
+                <a:spcPct val="115000"/>
+              </a:lnSpc>
+              <a:spcBef>
+                <a:spcPts val="0"/>
+              </a:spcBef>
+              <a:spcAft>
+                <a:spcPts val="0"/>
+              </a:spcAft>
+              <a:buNone/>
+            </a:pPr>
+            <a:r>
+              <a:t/>
+            </a:r>
+            <a:endParaRPr b="1" sz="1300">
+              <a:solidFill>
+                <a:schemeClr val="dk1"/>
+              </a:solidFill>
+            </a:endParaRPr>
+          </a:p>
+          <a:p>
+            <a:pPr indent="0" lvl="0" marL="0" rtl="0" algn="just">
+              <a:lnSpc>
+                <a:spcPct val="115000"/>
+              </a:lnSpc>
+              <a:spcBef>
+                <a:spcPts val="0"/>
+              </a:spcBef>
+              <a:spcAft>
+                <a:spcPts val="0"/>
+              </a:spcAft>
+              <a:buNone/>
+            </a:pPr>
+            <a:r>
+              <a:rPr b="1" lang="en" sz="1300" u="sng">
+                <a:solidFill>
+                  <a:schemeClr val="dk1"/>
+                </a:solidFill>
+              </a:rPr>
+              <a:t>RNF</a:t>
+            </a:r>
+            <a:r>
+              <a:rPr b="1" lang="en" sz="1300">
+                <a:solidFill>
+                  <a:schemeClr val="dk1"/>
+                </a:solidFill>
+              </a:rPr>
+              <a:t>-7-01: </a:t>
+            </a:r>
+            <a:r>
+              <a:rPr lang="en" sz="1300">
+                <a:solidFill>
+                  <a:schemeClr val="dk1"/>
+                </a:solidFill>
+              </a:rPr>
+              <a:t>Es farà servir a l'àrea metropolitana de Barcelona. RNF de </a:t>
+            </a:r>
+            <a:r>
+              <a:rPr lang="en" sz="1300" u="sng">
+                <a:solidFill>
+                  <a:schemeClr val="dk1"/>
+                </a:solidFill>
+              </a:rPr>
+              <a:t>Restricció de Disseny</a:t>
+            </a:r>
+            <a:r>
+              <a:rPr lang="en" sz="1300">
+                <a:solidFill>
+                  <a:schemeClr val="dk1"/>
+                </a:solidFill>
+              </a:rPr>
+              <a:t>.</a:t>
+            </a:r>
+            <a:endParaRPr sz="1300">
+              <a:solidFill>
+                <a:schemeClr val="dk1"/>
+              </a:solidFill>
+            </a:endParaRPr>
+          </a:p>
+          <a:p>
+            <a:pPr indent="0" lvl="0" marL="0" rtl="0" algn="just">
+              <a:lnSpc>
+                <a:spcPct val="115000"/>
+              </a:lnSpc>
+              <a:spcBef>
+                <a:spcPts val="0"/>
+              </a:spcBef>
+              <a:spcAft>
+                <a:spcPts val="0"/>
+              </a:spcAft>
+              <a:buNone/>
+            </a:pPr>
+            <a:r>
+              <a:rPr b="1" lang="en" sz="1300" u="sng">
+                <a:solidFill>
+                  <a:schemeClr val="dk1"/>
+                </a:solidFill>
+              </a:rPr>
+              <a:t>RNF</a:t>
+            </a:r>
+            <a:r>
+              <a:rPr b="1" lang="en" sz="1300">
+                <a:solidFill>
+                  <a:schemeClr val="dk1"/>
+                </a:solidFill>
+              </a:rPr>
+              <a:t>-7-02: </a:t>
+            </a:r>
+            <a:r>
+              <a:rPr lang="en" sz="1300">
+                <a:solidFill>
+                  <a:schemeClr val="dk1"/>
+                </a:solidFill>
+              </a:rPr>
+              <a:t>La interfície serà trilingüe: Espanyol, Català i Anglès. RNF d’</a:t>
+            </a:r>
+            <a:r>
+              <a:rPr lang="en" sz="1300" u="sng">
+                <a:solidFill>
+                  <a:schemeClr val="dk1"/>
+                </a:solidFill>
+              </a:rPr>
+              <a:t>Interfícies Externes</a:t>
+            </a:r>
+            <a:r>
+              <a:rPr lang="en" sz="1300">
+                <a:solidFill>
+                  <a:schemeClr val="dk1"/>
+                </a:solidFill>
+              </a:rPr>
+              <a:t>. </a:t>
+            </a:r>
+            <a:endParaRPr sz="1300">
+              <a:solidFill>
+                <a:schemeClr val="dk1"/>
+              </a:solidFill>
+            </a:endParaRPr>
+          </a:p>
+          <a:p>
+            <a:pPr indent="0" lvl="0" marL="0" rtl="0" algn="just">
+              <a:lnSpc>
+                <a:spcPct val="115000"/>
+              </a:lnSpc>
+              <a:spcBef>
+                <a:spcPts val="0"/>
+              </a:spcBef>
+              <a:spcAft>
+                <a:spcPts val="0"/>
+              </a:spcAft>
+              <a:buNone/>
+            </a:pPr>
+            <a:r>
+              <a:rPr b="1" lang="en" sz="1300" u="sng">
+                <a:solidFill>
+                  <a:schemeClr val="dk1"/>
+                </a:solidFill>
+              </a:rPr>
+              <a:t>RNF</a:t>
+            </a:r>
+            <a:r>
+              <a:rPr b="1" lang="en" sz="1300">
+                <a:solidFill>
+                  <a:schemeClr val="dk1"/>
+                </a:solidFill>
+              </a:rPr>
+              <a:t>-7-03: </a:t>
+            </a:r>
+            <a:r>
+              <a:rPr lang="en" sz="1300">
+                <a:solidFill>
+                  <a:schemeClr val="dk1"/>
+                </a:solidFill>
+              </a:rPr>
+              <a:t>Apte tant per a Web com per a Mòbil. RNF d’Interfícies Externes. </a:t>
+            </a:r>
+            <a:endParaRPr sz="1300">
+              <a:solidFill>
+                <a:schemeClr val="dk1"/>
+              </a:solidFill>
+            </a:endParaRPr>
+          </a:p>
+          <a:p>
+            <a:pPr indent="0" lvl="0" marL="0" rtl="0" algn="just">
+              <a:lnSpc>
+                <a:spcPct val="115000"/>
+              </a:lnSpc>
+              <a:spcBef>
+                <a:spcPts val="0"/>
+              </a:spcBef>
+              <a:spcAft>
+                <a:spcPts val="0"/>
+              </a:spcAft>
+              <a:buNone/>
+            </a:pPr>
+            <a:r>
+              <a:rPr b="1" lang="en" sz="1300" u="sng">
+                <a:solidFill>
+                  <a:schemeClr val="dk1"/>
+                </a:solidFill>
+              </a:rPr>
+              <a:t>RNF</a:t>
+            </a:r>
+            <a:r>
+              <a:rPr b="1" lang="en" sz="1300">
+                <a:solidFill>
+                  <a:schemeClr val="dk1"/>
+                </a:solidFill>
+              </a:rPr>
+              <a:t>-7-04: </a:t>
+            </a:r>
+            <a:r>
+              <a:rPr lang="en" sz="1300">
+                <a:solidFill>
+                  <a:schemeClr val="dk1"/>
+                </a:solidFill>
+              </a:rPr>
+              <a:t>Els Mòbils hauran de tenir sistema operatiu iOS o Android. RNF de </a:t>
+            </a:r>
+            <a:r>
+              <a:rPr lang="en" sz="1300" u="sng">
+                <a:solidFill>
+                  <a:schemeClr val="dk1"/>
+                </a:solidFill>
+              </a:rPr>
+              <a:t>Restricció de Disseny, limitació de Hw</a:t>
+            </a:r>
+            <a:r>
+              <a:rPr lang="en" sz="1300">
+                <a:solidFill>
+                  <a:schemeClr val="dk1"/>
+                </a:solidFill>
+              </a:rPr>
+              <a:t>. </a:t>
+            </a:r>
+            <a:endParaRPr sz="1300">
+              <a:solidFill>
+                <a:schemeClr val="dk1"/>
+              </a:solidFill>
+            </a:endParaRPr>
+          </a:p>
+          <a:p>
+            <a:pPr indent="0" lvl="0" marL="0" rtl="0" algn="just">
+              <a:lnSpc>
+                <a:spcPct val="115000"/>
+              </a:lnSpc>
+              <a:spcBef>
+                <a:spcPts val="0"/>
+              </a:spcBef>
+              <a:spcAft>
+                <a:spcPts val="0"/>
+              </a:spcAft>
+              <a:buNone/>
+            </a:pPr>
+            <a:r>
+              <a:rPr b="1" lang="en" sz="1300" u="sng">
+                <a:solidFill>
+                  <a:schemeClr val="dk1"/>
+                </a:solidFill>
+              </a:rPr>
+              <a:t>RNF</a:t>
+            </a:r>
+            <a:r>
+              <a:rPr b="1" lang="en" sz="1300">
+                <a:solidFill>
+                  <a:schemeClr val="dk1"/>
+                </a:solidFill>
+              </a:rPr>
+              <a:t>-7-05: </a:t>
+            </a:r>
+            <a:r>
+              <a:rPr lang="en" sz="1300">
+                <a:solidFill>
+                  <a:schemeClr val="dk1"/>
+                </a:solidFill>
+              </a:rPr>
+              <a:t>Lletra Calibri tant a encapçalaments com per a la resta de continguts. </a:t>
+            </a:r>
+            <a:r>
+              <a:rPr lang="en" sz="1300" u="sng">
+                <a:solidFill>
+                  <a:schemeClr val="dk1"/>
+                </a:solidFill>
+              </a:rPr>
+              <a:t>RNF d’Interfícies Externes</a:t>
+            </a:r>
+            <a:r>
+              <a:rPr lang="en" sz="1300">
+                <a:solidFill>
+                  <a:schemeClr val="dk1"/>
+                </a:solidFill>
+              </a:rPr>
+              <a:t>. </a:t>
+            </a:r>
+            <a:endParaRPr sz="1300">
+              <a:solidFill>
+                <a:schemeClr val="dk1"/>
+              </a:solidFill>
+            </a:endParaRPr>
+          </a:p>
+          <a:p>
+            <a:pPr indent="0" lvl="0" marL="0" rtl="0" algn="just">
+              <a:lnSpc>
+                <a:spcPct val="115000"/>
+              </a:lnSpc>
+              <a:spcBef>
+                <a:spcPts val="0"/>
+              </a:spcBef>
+              <a:spcAft>
+                <a:spcPts val="0"/>
+              </a:spcAft>
+              <a:buNone/>
+            </a:pPr>
+            <a:r>
+              <a:rPr b="1" lang="en" sz="1300" u="sng">
+                <a:solidFill>
+                  <a:schemeClr val="dk1"/>
+                </a:solidFill>
+              </a:rPr>
+              <a:t>RNF</a:t>
+            </a:r>
+            <a:r>
+              <a:rPr b="1" lang="en" sz="1300">
+                <a:solidFill>
+                  <a:schemeClr val="dk1"/>
+                </a:solidFill>
+              </a:rPr>
+              <a:t>-7-06: </a:t>
+            </a:r>
+            <a:r>
+              <a:rPr lang="en" sz="1300">
+                <a:solidFill>
+                  <a:schemeClr val="dk1"/>
+                </a:solidFill>
+              </a:rPr>
+              <a:t>Color corporatiu taronja i  El logo ha d'aparèixer a totes les pantalles. RNF d’</a:t>
+            </a:r>
+            <a:r>
+              <a:rPr lang="en" sz="1300" u="sng">
+                <a:solidFill>
+                  <a:schemeClr val="dk1"/>
+                </a:solidFill>
+              </a:rPr>
+              <a:t>Interfícies Externes</a:t>
+            </a:r>
+            <a:r>
+              <a:rPr lang="en" sz="1300">
+                <a:solidFill>
+                  <a:schemeClr val="dk1"/>
+                </a:solidFill>
+              </a:rPr>
+              <a:t>. </a:t>
+            </a:r>
+            <a:endParaRPr sz="1300">
+              <a:solidFill>
+                <a:schemeClr val="dk1"/>
+              </a:solidFill>
+            </a:endParaRPr>
+          </a:p>
+          <a:p>
+            <a:pPr indent="0" lvl="0" marL="0" rtl="0" algn="just">
+              <a:lnSpc>
+                <a:spcPct val="115000"/>
+              </a:lnSpc>
+              <a:spcBef>
+                <a:spcPts val="0"/>
+              </a:spcBef>
+              <a:spcAft>
+                <a:spcPts val="0"/>
+              </a:spcAft>
+              <a:buNone/>
+            </a:pPr>
+            <a:r>
+              <a:rPr b="1" lang="en" sz="1300" u="sng">
+                <a:solidFill>
+                  <a:schemeClr val="dk1"/>
+                </a:solidFill>
+              </a:rPr>
+              <a:t>RNF</a:t>
+            </a:r>
+            <a:r>
+              <a:rPr b="1" lang="en" sz="1300">
+                <a:solidFill>
+                  <a:schemeClr val="dk1"/>
+                </a:solidFill>
+              </a:rPr>
+              <a:t>-7-07: </a:t>
+            </a:r>
+            <a:r>
+              <a:rPr lang="en" sz="1300">
+                <a:solidFill>
+                  <a:schemeClr val="dk1"/>
+                </a:solidFill>
+              </a:rPr>
+              <a:t>L’aplicació ha de suportar 1000 usuaris connectats alhora. RNF de </a:t>
+            </a:r>
+            <a:r>
+              <a:rPr lang="en" sz="1300" u="sng">
+                <a:solidFill>
+                  <a:schemeClr val="dk1"/>
+                </a:solidFill>
+              </a:rPr>
+              <a:t>Rendiment estàtic</a:t>
+            </a:r>
+            <a:r>
+              <a:rPr lang="en" sz="1300">
+                <a:solidFill>
+                  <a:schemeClr val="dk1"/>
+                </a:solidFill>
+              </a:rPr>
+              <a:t>.</a:t>
+            </a:r>
+            <a:endParaRPr sz="1300">
+              <a:solidFill>
+                <a:schemeClr val="dk1"/>
+              </a:solidFill>
+            </a:endParaRPr>
+          </a:p>
+          <a:p>
+            <a:pPr indent="0" lvl="0" marL="0" rtl="0" algn="just">
+              <a:lnSpc>
+                <a:spcPct val="115000"/>
+              </a:lnSpc>
+              <a:spcBef>
+                <a:spcPts val="0"/>
+              </a:spcBef>
+              <a:spcAft>
+                <a:spcPts val="0"/>
+              </a:spcAft>
+              <a:buNone/>
+            </a:pPr>
+            <a:r>
+              <a:rPr b="1" lang="en" sz="1300" u="sng">
+                <a:solidFill>
+                  <a:schemeClr val="dk1"/>
+                </a:solidFill>
+              </a:rPr>
+              <a:t>RNF</a:t>
+            </a:r>
+            <a:r>
+              <a:rPr b="1" lang="en" sz="1300">
+                <a:solidFill>
+                  <a:schemeClr val="dk1"/>
+                </a:solidFill>
+              </a:rPr>
+              <a:t>-7-08: </a:t>
+            </a:r>
+            <a:r>
+              <a:rPr lang="en" sz="1300">
+                <a:solidFill>
+                  <a:schemeClr val="dk1"/>
+                </a:solidFill>
+              </a:rPr>
+              <a:t>El temps màxim de resposta de l’aplicació ha de ser de 5 mil·lisegons. RNF de </a:t>
+            </a:r>
+            <a:r>
+              <a:rPr lang="en" sz="1300" u="sng">
+                <a:solidFill>
+                  <a:schemeClr val="dk1"/>
+                </a:solidFill>
+              </a:rPr>
+              <a:t>Rendiment dinàmic</a:t>
+            </a:r>
+            <a:r>
+              <a:rPr lang="en" sz="1300">
+                <a:solidFill>
+                  <a:schemeClr val="dk1"/>
+                </a:solidFill>
+              </a:rPr>
+              <a:t>.</a:t>
+            </a:r>
+            <a:endParaRPr sz="1300">
+              <a:solidFill>
+                <a:schemeClr val="dk1"/>
+              </a:solidFill>
+            </a:endParaRPr>
+          </a:p>
+          <a:p>
+            <a:pPr indent="0" lvl="0" marL="0" rtl="0" algn="just">
+              <a:lnSpc>
+                <a:spcPct val="115000"/>
+              </a:lnSpc>
+              <a:spcBef>
+                <a:spcPts val="0"/>
+              </a:spcBef>
+              <a:spcAft>
+                <a:spcPts val="0"/>
+              </a:spcAft>
+              <a:buNone/>
+            </a:pPr>
+            <a:r>
+              <a:rPr b="1" lang="en" sz="1300" u="sng">
+                <a:solidFill>
+                  <a:schemeClr val="dk1"/>
+                </a:solidFill>
+              </a:rPr>
+              <a:t>RNF</a:t>
+            </a:r>
+            <a:r>
+              <a:rPr b="1" lang="en" sz="1300">
+                <a:solidFill>
+                  <a:schemeClr val="dk1"/>
+                </a:solidFill>
+              </a:rPr>
+              <a:t>-7-09: </a:t>
+            </a:r>
+            <a:r>
+              <a:rPr lang="en" sz="1300">
+                <a:solidFill>
+                  <a:schemeClr val="dk1"/>
+                </a:solidFill>
+              </a:rPr>
+              <a:t>Per a encriptar dades es farà servir el protocol OpenVPN. RNF de </a:t>
+            </a:r>
+            <a:r>
+              <a:rPr lang="en" sz="1300" u="sng">
+                <a:solidFill>
+                  <a:schemeClr val="dk1"/>
+                </a:solidFill>
+              </a:rPr>
+              <a:t>Decisió de Disseny</a:t>
+            </a:r>
+            <a:r>
+              <a:rPr lang="en" sz="1300">
+                <a:solidFill>
+                  <a:schemeClr val="dk1"/>
+                </a:solidFill>
+              </a:rPr>
+              <a:t>.</a:t>
+            </a:r>
+            <a:endParaRPr sz="1300">
+              <a:solidFill>
+                <a:schemeClr val="dk1"/>
+              </a:solidFill>
+            </a:endParaRPr>
+          </a:p>
+          <a:p>
+            <a:pPr indent="0" lvl="0" marL="0" rtl="0" algn="just">
+              <a:lnSpc>
+                <a:spcPct val="115000"/>
+              </a:lnSpc>
+              <a:spcBef>
+                <a:spcPts val="0"/>
+              </a:spcBef>
+              <a:spcAft>
+                <a:spcPts val="0"/>
+              </a:spcAft>
+              <a:buNone/>
+            </a:pPr>
+            <a:r>
+              <a:rPr b="1" lang="en" sz="1300" u="sng">
+                <a:solidFill>
+                  <a:schemeClr val="dk1"/>
+                </a:solidFill>
+              </a:rPr>
+              <a:t>RNF</a:t>
+            </a:r>
+            <a:r>
+              <a:rPr b="1" lang="en" sz="1300">
+                <a:solidFill>
+                  <a:schemeClr val="dk1"/>
+                </a:solidFill>
+              </a:rPr>
+              <a:t>-7-10: </a:t>
+            </a:r>
+            <a:r>
+              <a:rPr lang="en" sz="1300">
+                <a:solidFill>
+                  <a:schemeClr val="dk1"/>
+                </a:solidFill>
+              </a:rPr>
+              <a:t>Interfície amigable i responsive. RNF d'</a:t>
+            </a:r>
+            <a:r>
+              <a:rPr lang="en" sz="1300" u="sng">
+                <a:solidFill>
+                  <a:schemeClr val="dk1"/>
+                </a:solidFill>
+              </a:rPr>
+              <a:t>Objectius de Disseny</a:t>
+            </a:r>
+            <a:r>
+              <a:rPr lang="en" sz="1300">
+                <a:solidFill>
+                  <a:schemeClr val="dk1"/>
+                </a:solidFill>
+              </a:rPr>
+              <a:t>. </a:t>
+            </a:r>
+            <a:endParaRPr sz="1300">
+              <a:solidFill>
+                <a:schemeClr val="dk1"/>
+              </a:solidFill>
+            </a:endParaRPr>
+          </a:p>
+          <a:p>
+            <a:pPr indent="0" lvl="0" marL="0" rtl="0" algn="just">
+              <a:lnSpc>
+                <a:spcPct val="115000"/>
+              </a:lnSpc>
+              <a:spcBef>
+                <a:spcPts val="0"/>
+              </a:spcBef>
+              <a:spcAft>
+                <a:spcPts val="0"/>
+              </a:spcAft>
+              <a:buNone/>
+            </a:pPr>
+            <a:r>
+              <a:t/>
+            </a:r>
+            <a:endParaRPr b="1" sz="1300">
+              <a:solidFill>
+                <a:schemeClr val="dk1"/>
+              </a:solidFill>
+            </a:endParaRPr>
+          </a:p>
+        </p:txBody>
+      </p:sp>
+    </p:spTree>
+  </p:cSld>
+  <p:clrMapOvr>
+    <a:masterClrMapping/>
+  </p:clrMapOvr>
+</p:sld>
+</file>
+
+<file path=ppt/slides/slide13.xml><?xml version="1.0" encoding="utf-8"?>
+<p:sld xmlns:a="http://schemas.openxmlformats.org/drawingml/2006/main" xmlns:r="http://schemas.openxmlformats.org/officeDocument/2006/relationships" xmlns:mc="http://schemas.openxmlformats.org/markup-compatibility/2006" xmlns:mv="urn:schemas-microsoft-com:mac:vml" xmlns:p="http://schemas.openxmlformats.org/presentationml/2006/main" xmlns:c="http://schemas.openxmlformats.org/drawingml/2006/chart" xmlns:dgm="http://schemas.openxmlformats.org/drawingml/2006/diagram" xmlns:o="urn:schemas-microsoft-com:office:office" xmlns:v="urn:schemas-microsoft-com:vml" xmlns:pvml="urn:schemas-microsoft-com:office:powerpoint" xmlns:com="http://schemas.openxmlformats.org/drawingml/2006/compatibility" xmlns:p14="http://schemas.microsoft.com/office/powerpoint/2010/main" xmlns:p15="http://schemas.microsoft.com/office/powerpoint/2012/main" xmlns:ahyp="http://schemas.microsoft.com/office/drawing/2018/hyperlinkcolor">
+  <p:cSld>
+    <p:spTree>
+      <p:nvGrpSpPr>
+        <p:cNvPr id="193" name="Shape 193"/>
+        <p:cNvGrpSpPr/>
+        <p:nvPr/>
+      </p:nvGrpSpPr>
+      <p:grpSpPr>
+        <a:xfrm>
+          <a:off x="0" y="0"/>
+          <a:ext cx="0" cy="0"/>
+          <a:chOff x="0" y="0"/>
+          <a:chExt cx="0" cy="0"/>
+        </a:xfrm>
+      </p:grpSpPr>
+      <p:sp>
+        <p:nvSpPr>
+          <p:cNvPr id="194" name="Google Shape;194;p33"/>
+          <p:cNvSpPr txBox="1"/>
+          <p:nvPr>
+            <p:ph type="title"/>
+          </p:nvPr>
+        </p:nvSpPr>
+        <p:spPr>
+          <a:xfrm>
+            <a:off x="228600" y="228600"/>
+            <a:ext cx="8686800" cy="572700"/>
+          </a:xfrm>
+          <a:prstGeom prst="rect">
+            <a:avLst/>
+          </a:prstGeom>
+        </p:spPr>
+        <p:txBody>
+          <a:bodyPr anchorCtr="0" anchor="t" bIns="91425" lIns="91425" spcFirstLastPara="1" rIns="91425" wrap="square" tIns="91425">
+            <a:noAutofit/>
+          </a:bodyPr>
+          <a:lstStyle/>
+          <a:p>
+            <a:pPr indent="0" lvl="0" marL="0" rtl="0" algn="ctr">
+              <a:spcBef>
+                <a:spcPts val="0"/>
+              </a:spcBef>
+              <a:spcAft>
+                <a:spcPts val="0"/>
+              </a:spcAft>
+              <a:buNone/>
+            </a:pPr>
+            <a:r>
+              <a:rPr lang="en"/>
               <a:t>Burn-down chart</a:t>
             </a:r>
             <a:endParaRPr/>
@@ -14242,7 +14841,7 @@
       </p:sp>
       <p:pic>
         <p:nvPicPr>
-          <p:cNvPr id="184" name="Google Shape;184;p32"/>
+          <p:cNvPr id="195" name="Google Shape;195;p33"/>
           <p:cNvPicPr preferRelativeResize="0"/>
           <p:nvPr/>
         </p:nvPicPr>
@@ -14270,7 +14869,7 @@
       </p:pic>
       <p:pic>
         <p:nvPicPr>
-          <p:cNvPr id="185" name="Google Shape;185;p32"/>
+          <p:cNvPr id="196" name="Google Shape;196;p33"/>
           <p:cNvPicPr preferRelativeResize="0"/>
           <p:nvPr/>
         </p:nvPicPr>
@@ -15080,7 +15679,7 @@
         </p:nvSpPr>
         <p:spPr>
           <a:xfrm>
-            <a:off x="3188325" y="2980175"/>
+            <a:off x="1594750" y="2884275"/>
             <a:ext cx="2943300" cy="2013600"/>
           </a:xfrm>
           <a:prstGeom prst="rect">
@@ -15170,7 +15769,7 @@
         </p:nvSpPr>
         <p:spPr>
           <a:xfrm>
-            <a:off x="4667575" y="3064175"/>
+            <a:off x="3074000" y="2968275"/>
             <a:ext cx="1261800" cy="458100"/>
           </a:xfrm>
           <a:prstGeom prst="rect">
@@ -15210,7 +15809,7 @@
         </p:nvSpPr>
         <p:spPr>
           <a:xfrm>
-            <a:off x="4667575" y="3438313"/>
+            <a:off x="3074000" y="3342413"/>
             <a:ext cx="1404600" cy="1555500"/>
           </a:xfrm>
           <a:prstGeom prst="rect">
@@ -15256,55 +15855,7 @@
         </p:nvSpPr>
         <p:spPr>
           <a:xfrm>
-            <a:off x="1473188" y="894200"/>
-            <a:ext cx="3194400" cy="2013600"/>
-          </a:xfrm>
-          <a:prstGeom prst="rect">
-            <a:avLst/>
-          </a:prstGeom>
-          <a:solidFill>
-            <a:srgbClr val="434343"/>
-          </a:solidFill>
-          <a:ln>
-            <a:noFill/>
-          </a:ln>
-        </p:spPr>
-        <p:txBody>
-          <a:bodyPr anchorCtr="0" anchor="ctr" bIns="91425" lIns="91425" spcFirstLastPara="1" rIns="91425" wrap="square" tIns="91425">
-            <a:noAutofit/>
-          </a:bodyPr>
-          <a:lstStyle/>
-          <a:p>
-            <a:pPr indent="0" lvl="0" marL="0" rtl="0" algn="ctr">
-              <a:spcBef>
-                <a:spcPts val="0"/>
-              </a:spcBef>
-              <a:spcAft>
-                <a:spcPts val="0"/>
-              </a:spcAft>
-              <a:buNone/>
-            </a:pPr>
-            <a:r>
-              <a:t/>
-            </a:r>
-            <a:endParaRPr>
-              <a:latin typeface="Hind"/>
-              <a:ea typeface="Hind"/>
-              <a:cs typeface="Hind"/>
-              <a:sym typeface="Hind"/>
-            </a:endParaRPr>
-          </a:p>
-        </p:txBody>
-      </p:sp>
-      <p:sp>
-        <p:nvSpPr>
-          <p:cNvPr id="129" name="Google Shape;129;p24"/>
-          <p:cNvSpPr/>
-          <p:nvPr/>
-        </p:nvSpPr>
-        <p:spPr>
-          <a:xfrm>
-            <a:off x="4727200" y="893088"/>
+            <a:off x="1594750" y="801300"/>
             <a:ext cx="2943300" cy="2013600"/>
           </a:xfrm>
           <a:prstGeom prst="rect">
@@ -15346,6 +15897,54 @@
       </p:sp>
       <p:sp>
         <p:nvSpPr>
+          <p:cNvPr id="129" name="Google Shape;129;p24"/>
+          <p:cNvSpPr/>
+          <p:nvPr/>
+        </p:nvSpPr>
+        <p:spPr>
+          <a:xfrm>
+            <a:off x="4605950" y="801288"/>
+            <a:ext cx="2943300" cy="2013600"/>
+          </a:xfrm>
+          <a:prstGeom prst="rect">
+            <a:avLst/>
+          </a:prstGeom>
+          <a:solidFill>
+            <a:srgbClr val="434343"/>
+          </a:solidFill>
+          <a:ln>
+            <a:noFill/>
+          </a:ln>
+        </p:spPr>
+        <p:txBody>
+          <a:bodyPr anchorCtr="0" anchor="ctr" bIns="91425" lIns="91425" spcFirstLastPara="1" rIns="91425" wrap="square" tIns="91425">
+            <a:noAutofit/>
+          </a:bodyPr>
+          <a:lstStyle/>
+          <a:p>
+            <a:pPr indent="0" lvl="0" marL="0" rtl="0" algn="ctr">
+              <a:spcBef>
+                <a:spcPts val="0"/>
+              </a:spcBef>
+              <a:spcAft>
+                <a:spcPts val="0"/>
+              </a:spcAft>
+              <a:buNone/>
+            </a:pPr>
+            <a:r>
+              <a:t/>
+            </a:r>
+            <a:endParaRPr>
+              <a:latin typeface="Hind"/>
+              <a:ea typeface="Hind"/>
+              <a:cs typeface="Hind"/>
+              <a:sym typeface="Hind"/>
+            </a:endParaRPr>
+          </a:p>
+        </p:txBody>
+      </p:sp>
+      <p:sp>
+        <p:nvSpPr>
           <p:cNvPr id="130" name="Google Shape;130;p24"/>
           <p:cNvSpPr txBox="1"/>
           <p:nvPr>
@@ -15354,7 +15953,7 @@
         </p:nvSpPr>
         <p:spPr>
           <a:xfrm>
-            <a:off x="6408575" y="1345488"/>
+            <a:off x="6287325" y="1253688"/>
             <a:ext cx="1261800" cy="1463700"/>
           </a:xfrm>
           <a:prstGeom prst="rect">
@@ -15394,7 +15993,7 @@
         </p:nvSpPr>
         <p:spPr>
           <a:xfrm>
-            <a:off x="6408575" y="990588"/>
+            <a:off x="6287325" y="898788"/>
             <a:ext cx="1261800" cy="431100"/>
           </a:xfrm>
           <a:prstGeom prst="rect">
@@ -15434,8 +16033,8 @@
         </p:nvSpPr>
         <p:spPr>
           <a:xfrm>
-            <a:off x="3107297" y="1577236"/>
-            <a:ext cx="1560000" cy="1106400"/>
+            <a:off x="3100407" y="1484323"/>
+            <a:ext cx="1437300" cy="1106400"/>
           </a:xfrm>
           <a:prstGeom prst="rect">
             <a:avLst/>
@@ -15474,8 +16073,8 @@
         </p:nvSpPr>
         <p:spPr>
           <a:xfrm>
-            <a:off x="3107305" y="1118518"/>
-            <a:ext cx="1560000" cy="557400"/>
+            <a:off x="3100414" y="1025606"/>
+            <a:ext cx="1437300" cy="557400"/>
           </a:xfrm>
           <a:prstGeom prst="rect">
             <a:avLst/>
@@ -15519,7 +16118,7 @@
         </p:blipFill>
         <p:spPr>
           <a:xfrm>
-            <a:off x="4827250" y="979625"/>
+            <a:off x="4706000" y="887825"/>
             <a:ext cx="1495200" cy="1840525"/>
           </a:xfrm>
           <a:prstGeom prst="rect">
@@ -15543,13 +16142,13 @@
           <a:blip r:embed="rId4">
             <a:alphaModFix/>
           </a:blip>
-          <a:srcRect b="0" l="5000" r="-5000" t="6533"/>
+          <a:srcRect b="0" l="4762" r="-10" t="4607"/>
           <a:stretch/>
         </p:blipFill>
         <p:spPr>
           <a:xfrm>
-            <a:off x="1631594" y="1013016"/>
-            <a:ext cx="1304370" cy="1775998"/>
+            <a:off x="1740700" y="920113"/>
+            <a:ext cx="1201800" cy="1776001"/>
           </a:xfrm>
           <a:prstGeom prst="rect">
             <a:avLst/>
@@ -15577,8 +16176,331 @@
         </p:blipFill>
         <p:spPr>
           <a:xfrm>
-            <a:off x="3286525" y="3069804"/>
+            <a:off x="1692950" y="2973904"/>
             <a:ext cx="1261800" cy="1818446"/>
+          </a:xfrm>
+          <a:prstGeom prst="rect">
+            <a:avLst/>
+          </a:prstGeom>
+          <a:noFill/>
+          <a:ln>
+            <a:noFill/>
+          </a:ln>
+        </p:spPr>
+      </p:pic>
+      <p:sp>
+        <p:nvSpPr>
+          <p:cNvPr id="137" name="Google Shape;137;p24"/>
+          <p:cNvSpPr/>
+          <p:nvPr/>
+        </p:nvSpPr>
+        <p:spPr>
+          <a:xfrm>
+            <a:off x="4605950" y="2884288"/>
+            <a:ext cx="2943300" cy="2013600"/>
+          </a:xfrm>
+          <a:prstGeom prst="rect">
+            <a:avLst/>
+          </a:prstGeom>
+          <a:solidFill>
+            <a:srgbClr val="434343"/>
+          </a:solidFill>
+          <a:ln>
+            <a:noFill/>
+          </a:ln>
+        </p:spPr>
+        <p:txBody>
+          <a:bodyPr anchorCtr="0" anchor="ctr" bIns="91425" lIns="91425" spcFirstLastPara="1" rIns="91425" wrap="square" tIns="91425">
+            <a:noAutofit/>
+          </a:bodyPr>
+          <a:lstStyle/>
+          <a:p>
+            <a:pPr indent="0" lvl="0" marL="0" rtl="0" algn="ctr">
+              <a:spcBef>
+                <a:spcPts val="0"/>
+              </a:spcBef>
+              <a:spcAft>
+                <a:spcPts val="0"/>
+              </a:spcAft>
+              <a:buNone/>
+            </a:pPr>
+            <a:r>
+              <a:t/>
+            </a:r>
+            <a:endParaRPr>
+              <a:latin typeface="Hind"/>
+              <a:ea typeface="Hind"/>
+              <a:cs typeface="Hind"/>
+              <a:sym typeface="Hind"/>
+            </a:endParaRPr>
+          </a:p>
+        </p:txBody>
+      </p:sp>
+      <p:sp>
+        <p:nvSpPr>
+          <p:cNvPr id="138" name="Google Shape;138;p24"/>
+          <p:cNvSpPr txBox="1"/>
+          <p:nvPr>
+            <p:ph idx="6" type="subTitle"/>
+          </p:nvPr>
+        </p:nvSpPr>
+        <p:spPr>
+          <a:xfrm>
+            <a:off x="4800350" y="3586275"/>
+            <a:ext cx="2554500" cy="458100"/>
+          </a:xfrm>
+          <a:prstGeom prst="rect">
+            <a:avLst/>
+          </a:prstGeom>
+        </p:spPr>
+        <p:txBody>
+          <a:bodyPr anchorCtr="0" anchor="ctr" bIns="91425" lIns="91425" spcFirstLastPara="1" rIns="91425" wrap="square" tIns="91425">
+            <a:noAutofit/>
+          </a:bodyPr>
+          <a:lstStyle/>
+          <a:p>
+            <a:pPr indent="0" lvl="0" marL="0" rtl="0" algn="ctr">
+              <a:spcBef>
+                <a:spcPts val="0"/>
+              </a:spcBef>
+              <a:spcAft>
+                <a:spcPts val="0"/>
+              </a:spcAft>
+              <a:buNone/>
+            </a:pPr>
+            <a:r>
+              <a:rPr lang="en" sz="2700"/>
+              <a:t>Usuaris Registrats</a:t>
+            </a:r>
+            <a:endParaRPr sz="2700"/>
+          </a:p>
+        </p:txBody>
+      </p:sp>
+    </p:spTree>
+  </p:cSld>
+  <p:clrMapOvr>
+    <a:masterClrMapping/>
+  </p:clrMapOvr>
+</p:sld>
+</file>
+
+<file path=ppt/slides/slide5.xml><?xml version="1.0" encoding="utf-8"?>
+<p:sld xmlns:a="http://schemas.openxmlformats.org/drawingml/2006/main" xmlns:r="http://schemas.openxmlformats.org/officeDocument/2006/relationships" xmlns:mc="http://schemas.openxmlformats.org/markup-compatibility/2006" xmlns:mv="urn:schemas-microsoft-com:mac:vml" xmlns:p="http://schemas.openxmlformats.org/presentationml/2006/main" xmlns:c="http://schemas.openxmlformats.org/drawingml/2006/chart" xmlns:dgm="http://schemas.openxmlformats.org/drawingml/2006/diagram" xmlns:o="urn:schemas-microsoft-com:office:office" xmlns:v="urn:schemas-microsoft-com:vml" xmlns:pvml="urn:schemas-microsoft-com:office:powerpoint" xmlns:com="http://schemas.openxmlformats.org/drawingml/2006/compatibility" xmlns:p14="http://schemas.microsoft.com/office/powerpoint/2010/main" xmlns:p15="http://schemas.microsoft.com/office/powerpoint/2012/main" xmlns:ahyp="http://schemas.microsoft.com/office/drawing/2018/hyperlinkcolor">
+  <p:cSld>
+    <p:spTree>
+      <p:nvGrpSpPr>
+        <p:cNvPr id="142" name="Shape 142"/>
+        <p:cNvGrpSpPr/>
+        <p:nvPr/>
+      </p:nvGrpSpPr>
+      <p:grpSpPr>
+        <a:xfrm>
+          <a:off x="0" y="0"/>
+          <a:ext cx="0" cy="0"/>
+          <a:chOff x="0" y="0"/>
+          <a:chExt cx="0" cy="0"/>
+        </a:xfrm>
+      </p:grpSpPr>
+      <p:sp>
+        <p:nvSpPr>
+          <p:cNvPr id="143" name="Google Shape;143;p25"/>
+          <p:cNvSpPr txBox="1"/>
+          <p:nvPr>
+            <p:ph type="title"/>
+          </p:nvPr>
+        </p:nvSpPr>
+        <p:spPr>
+          <a:xfrm>
+            <a:off x="228600" y="228600"/>
+            <a:ext cx="8686500" cy="572700"/>
+          </a:xfrm>
+          <a:prstGeom prst="rect">
+            <a:avLst/>
+          </a:prstGeom>
+        </p:spPr>
+        <p:txBody>
+          <a:bodyPr anchorCtr="0" anchor="t" bIns="91425" lIns="91425" spcFirstLastPara="1" rIns="91425" wrap="square" tIns="91425">
+            <a:noAutofit/>
+          </a:bodyPr>
+          <a:lstStyle/>
+          <a:p>
+            <a:pPr indent="0" lvl="0" marL="0" rtl="0" algn="ctr">
+              <a:spcBef>
+                <a:spcPts val="0"/>
+              </a:spcBef>
+              <a:spcAft>
+                <a:spcPts val="0"/>
+              </a:spcAft>
+              <a:buNone/>
+            </a:pPr>
+            <a:r>
+              <a:rPr lang="en"/>
+              <a:t>Perfils d’usuari a l’aplicació QUEMENGES</a:t>
+            </a:r>
+            <a:endParaRPr/>
+          </a:p>
+        </p:txBody>
+      </p:sp>
+      <p:sp>
+        <p:nvSpPr>
+          <p:cNvPr id="144" name="Google Shape;144;p25"/>
+          <p:cNvSpPr/>
+          <p:nvPr/>
+        </p:nvSpPr>
+        <p:spPr>
+          <a:xfrm>
+            <a:off x="1822950" y="1245150"/>
+            <a:ext cx="2943300" cy="2653200"/>
+          </a:xfrm>
+          <a:prstGeom prst="rect">
+            <a:avLst/>
+          </a:prstGeom>
+          <a:solidFill>
+            <a:srgbClr val="434343"/>
+          </a:solidFill>
+          <a:ln>
+            <a:noFill/>
+          </a:ln>
+        </p:spPr>
+        <p:txBody>
+          <a:bodyPr anchorCtr="0" anchor="ctr" bIns="91425" lIns="91425" spcFirstLastPara="1" rIns="91425" wrap="square" tIns="91425">
+            <a:noAutofit/>
+          </a:bodyPr>
+          <a:lstStyle/>
+          <a:p>
+            <a:pPr indent="0" lvl="0" marL="0" rtl="0" algn="ctr">
+              <a:spcBef>
+                <a:spcPts val="0"/>
+              </a:spcBef>
+              <a:spcAft>
+                <a:spcPts val="0"/>
+              </a:spcAft>
+              <a:buNone/>
+            </a:pPr>
+            <a:r>
+              <a:t/>
+            </a:r>
+            <a:endParaRPr>
+              <a:latin typeface="Hind"/>
+              <a:ea typeface="Hind"/>
+              <a:cs typeface="Hind"/>
+              <a:sym typeface="Hind"/>
+            </a:endParaRPr>
+          </a:p>
+        </p:txBody>
+      </p:sp>
+      <p:sp>
+        <p:nvSpPr>
+          <p:cNvPr id="145" name="Google Shape;145;p25"/>
+          <p:cNvSpPr txBox="1"/>
+          <p:nvPr>
+            <p:ph idx="6" type="subTitle"/>
+          </p:nvPr>
+        </p:nvSpPr>
+        <p:spPr>
+          <a:xfrm>
+            <a:off x="2017350" y="1668994"/>
+            <a:ext cx="2554500" cy="744000"/>
+          </a:xfrm>
+          <a:prstGeom prst="rect">
+            <a:avLst/>
+          </a:prstGeom>
+        </p:spPr>
+        <p:txBody>
+          <a:bodyPr anchorCtr="0" anchor="ctr" bIns="91425" lIns="91425" spcFirstLastPara="1" rIns="91425" wrap="square" tIns="91425">
+            <a:noAutofit/>
+          </a:bodyPr>
+          <a:lstStyle/>
+          <a:p>
+            <a:pPr indent="0" lvl="0" marL="0" rtl="0" algn="l">
+              <a:spcBef>
+                <a:spcPts val="0"/>
+              </a:spcBef>
+              <a:spcAft>
+                <a:spcPts val="0"/>
+              </a:spcAft>
+              <a:buNone/>
+            </a:pPr>
+            <a:r>
+              <a:rPr lang="en" sz="2700"/>
+              <a:t>Usuari No Registrat</a:t>
+            </a:r>
+            <a:endParaRPr sz="2700"/>
+          </a:p>
+        </p:txBody>
+      </p:sp>
+      <p:sp>
+        <p:nvSpPr>
+          <p:cNvPr id="146" name="Google Shape;146;p25"/>
+          <p:cNvSpPr txBox="1"/>
+          <p:nvPr>
+            <p:ph idx="1" type="subTitle"/>
+          </p:nvPr>
+        </p:nvSpPr>
+        <p:spPr>
+          <a:xfrm>
+            <a:off x="2017350" y="2565200"/>
+            <a:ext cx="1979700" cy="909300"/>
+          </a:xfrm>
+          <a:prstGeom prst="rect">
+            <a:avLst/>
+          </a:prstGeom>
+        </p:spPr>
+        <p:txBody>
+          <a:bodyPr anchorCtr="0" anchor="t" bIns="91425" lIns="91425" spcFirstLastPara="1" rIns="91425" wrap="square" tIns="91425">
+            <a:noAutofit/>
+          </a:bodyPr>
+          <a:lstStyle/>
+          <a:p>
+            <a:pPr indent="0" lvl="0" marL="0" rtl="0" algn="l">
+              <a:spcBef>
+                <a:spcPts val="0"/>
+              </a:spcBef>
+              <a:spcAft>
+                <a:spcPts val="0"/>
+              </a:spcAft>
+              <a:buNone/>
+            </a:pPr>
+            <a:r>
+              <a:rPr lang="en"/>
+              <a:t>Pot navegar per l’aplicació, però no pot fer cap comanda ni preparar cap plat. </a:t>
+            </a:r>
+            <a:endParaRPr/>
+          </a:p>
+          <a:p>
+            <a:pPr indent="0" lvl="0" marL="0" rtl="0" algn="l">
+              <a:spcBef>
+                <a:spcPts val="0"/>
+              </a:spcBef>
+              <a:spcAft>
+                <a:spcPts val="0"/>
+              </a:spcAft>
+              <a:buNone/>
+            </a:pPr>
+            <a:r>
+              <a:t/>
+            </a:r>
+            <a:endParaRPr/>
+          </a:p>
+        </p:txBody>
+      </p:sp>
+      <p:pic>
+        <p:nvPicPr>
+          <p:cNvPr id="147" name="Google Shape;147;p25"/>
+          <p:cNvPicPr preferRelativeResize="0"/>
+          <p:nvPr/>
+        </p:nvPicPr>
+        <p:blipFill rotWithShape="1">
+          <a:blip r:embed="rId3">
+            <a:alphaModFix/>
+          </a:blip>
+          <a:srcRect b="0" l="21429" r="14546" t="0"/>
+          <a:stretch/>
+        </p:blipFill>
+        <p:spPr>
+          <a:xfrm>
+            <a:off x="4766250" y="1245150"/>
+            <a:ext cx="2554500" cy="2653200"/>
           </a:xfrm>
           <a:prstGeom prst="rect">
             <a:avLst/>
@@ -15597,12 +16519,12 @@
 </p:sld>
 </file>
 
-<file path=ppt/slides/slide5.xml><?xml version="1.0" encoding="utf-8"?>
+<file path=ppt/slides/slide6.xml><?xml version="1.0" encoding="utf-8"?>
 <p:sld xmlns:a="http://schemas.openxmlformats.org/drawingml/2006/main" xmlns:r="http://schemas.openxmlformats.org/officeDocument/2006/relationships" xmlns:mc="http://schemas.openxmlformats.org/markup-compatibility/2006" xmlns:mv="urn:schemas-microsoft-com:mac:vml" xmlns:p="http://schemas.openxmlformats.org/presentationml/2006/main" xmlns:c="http://schemas.openxmlformats.org/drawingml/2006/chart" xmlns:dgm="http://schemas.openxmlformats.org/drawingml/2006/diagram" xmlns:o="urn:schemas-microsoft-com:office:office" xmlns:v="urn:schemas-microsoft-com:vml" xmlns:pvml="urn:schemas-microsoft-com:office:powerpoint" xmlns:com="http://schemas.openxmlformats.org/drawingml/2006/compatibility" xmlns:p14="http://schemas.microsoft.com/office/powerpoint/2010/main" xmlns:p15="http://schemas.microsoft.com/office/powerpoint/2012/main" xmlns:ahyp="http://schemas.microsoft.com/office/drawing/2018/hyperlinkcolor">
   <p:cSld>
     <p:spTree>
       <p:nvGrpSpPr>
-        <p:cNvPr id="140" name="Shape 140"/>
+        <p:cNvPr id="151" name="Shape 151"/>
         <p:cNvGrpSpPr/>
         <p:nvPr/>
       </p:nvGrpSpPr>
@@ -15616,7 +16538,7 @@
       </p:grpSpPr>
       <p:sp>
         <p:nvSpPr>
-          <p:cNvPr id="141" name="Google Shape;141;p25"/>
+          <p:cNvPr id="152" name="Google Shape;152;p26"/>
           <p:cNvSpPr txBox="1"/>
           <p:nvPr>
             <p:ph type="title"/>
@@ -15656,7 +16578,7 @@
       </p:sp>
       <p:sp>
         <p:nvSpPr>
-          <p:cNvPr id="142" name="Google Shape;142;p25"/>
+          <p:cNvPr id="153" name="Google Shape;153;p26"/>
           <p:cNvSpPr txBox="1"/>
           <p:nvPr/>
         </p:nvSpPr>
@@ -15679,7 +16601,7 @@
           </a:bodyPr>
           <a:lstStyle/>
           <a:p>
-            <a:pPr indent="0" lvl="0" marL="0" rtl="0" algn="l">
+            <a:pPr indent="0" lvl="0" marL="0" rtl="0" algn="ctr">
               <a:spcBef>
                 <a:spcPts val="0"/>
               </a:spcBef>
@@ -15689,9 +16611,14 @@
               <a:buNone/>
             </a:pPr>
             <a:r>
-              <a:t/>
-            </a:r>
-            <a:endParaRPr b="1">
+              <a:rPr b="1" lang="en" sz="1300">
+                <a:solidFill>
+                  <a:schemeClr val="dk1"/>
+                </a:solidFill>
+              </a:rPr>
+              <a:t>GRUP 1: GESTIÓ DE COMPTES I CREACIÓ DE PERFILS D'USUARI</a:t>
+            </a:r>
+            <a:endParaRPr b="1" sz="1300">
               <a:solidFill>
                 <a:schemeClr val="dk1"/>
               </a:solidFill>
@@ -15708,14 +16635,9 @@
               <a:buNone/>
             </a:pPr>
             <a:r>
-              <a:rPr b="1" lang="en">
-                <a:solidFill>
-                  <a:schemeClr val="dk1"/>
-                </a:solidFill>
-              </a:rPr>
-              <a:t>GRUP 1: GESTIÓ DE COMPTES I CREACIÓ DE PERFILS D'USUARI</a:t>
-            </a:r>
-            <a:endParaRPr b="1">
+              <a:t/>
+            </a:r>
+            <a:endParaRPr b="1" sz="1300">
               <a:solidFill>
                 <a:schemeClr val="dk1"/>
               </a:solidFill>
@@ -15732,9 +16654,38 @@
               <a:buNone/>
             </a:pPr>
             <a:r>
-              <a:t/>
-            </a:r>
-            <a:endParaRPr b="1">
+              <a:rPr b="1" lang="en" sz="1300">
+                <a:solidFill>
+                  <a:schemeClr val="dk1"/>
+                </a:solidFill>
+              </a:rPr>
+              <a:t>RF-1-01: </a:t>
+            </a:r>
+            <a:r>
+              <a:rPr lang="en" sz="1300">
+                <a:solidFill>
+                  <a:schemeClr val="dk1"/>
+                </a:solidFill>
+              </a:rPr>
+              <a:t>Els usuaris podran registrar-se amb </a:t>
+            </a:r>
+            <a:r>
+              <a:rPr lang="en" sz="1300">
+                <a:solidFill>
+                  <a:schemeClr val="dk1"/>
+                </a:solidFill>
+              </a:rPr>
+              <a:t>c</a:t>
+            </a:r>
+            <a:r>
+              <a:rPr lang="en" sz="1300">
+                <a:solidFill>
+                  <a:schemeClr val="dk1"/>
+                </a:solidFill>
+              </a:rPr>
+              <a:t>orreu. </a:t>
+            </a:r>
+            <a:endParaRPr sz="1300">
               <a:solidFill>
                 <a:schemeClr val="dk1"/>
               </a:solidFill>
@@ -15751,22 +16702,30 @@
               <a:buNone/>
             </a:pPr>
             <a:r>
-              <a:rPr b="1" lang="en">
-                <a:solidFill>
-                  <a:schemeClr val="dk1"/>
-                </a:solidFill>
-              </a:rPr>
-              <a:t>RF 1: </a:t>
-            </a:r>
-            <a:r>
-              <a:rPr lang="en">
-                <a:solidFill>
-                  <a:schemeClr val="dk1"/>
-                </a:solidFill>
-              </a:rPr>
-              <a:t>Els usuaris podran registrar-se amb correu. </a:t>
-            </a:r>
-            <a:endParaRPr>
+              <a:rPr b="1" lang="en" sz="1300">
+                <a:solidFill>
+                  <a:schemeClr val="dk1"/>
+                </a:solidFill>
+              </a:rPr>
+              <a:t>RF-1-02: </a:t>
+            </a:r>
+            <a:r>
+              <a:rPr lang="en" sz="1300">
+                <a:solidFill>
+                  <a:schemeClr val="dk1"/>
+                </a:solidFill>
+              </a:rPr>
+              <a:t>Només els usuaris registrats podran fer comandes.</a:t>
+            </a:r>
+            <a:r>
+              <a:rPr lang="en" sz="1300">
+                <a:solidFill>
+                  <a:schemeClr val="dk1"/>
+                </a:solidFill>
+              </a:rPr>
+              <a:t> </a:t>
+            </a:r>
+            <a:endParaRPr sz="1300">
               <a:solidFill>
                 <a:schemeClr val="dk1"/>
               </a:solidFill>
@@ -15783,22 +16742,46 @@
               <a:buNone/>
             </a:pPr>
             <a:r>
-              <a:rPr b="1" lang="en">
-                <a:solidFill>
-                  <a:schemeClr val="dk1"/>
-                </a:solidFill>
-              </a:rPr>
-              <a:t>RF 2: </a:t>
-            </a:r>
-            <a:r>
-              <a:rPr lang="en">
-                <a:solidFill>
-                  <a:schemeClr val="dk1"/>
-                </a:solidFill>
-              </a:rPr>
-              <a:t>Només els usuaris registrats podran realitzar comandes. </a:t>
-            </a:r>
-            <a:endParaRPr>
+              <a:rPr b="1" lang="en" sz="1300" u="sng">
+                <a:solidFill>
+                  <a:schemeClr val="dk1"/>
+                </a:solidFill>
+              </a:rPr>
+              <a:t>RNF</a:t>
+            </a:r>
+            <a:r>
+              <a:rPr b="1" lang="en" sz="1300">
+                <a:solidFill>
+                  <a:schemeClr val="dk1"/>
+                </a:solidFill>
+              </a:rPr>
+              <a:t>-1-03: </a:t>
+            </a:r>
+            <a:r>
+              <a:rPr lang="en" sz="1300">
+                <a:solidFill>
+                  <a:schemeClr val="dk1"/>
+                </a:solidFill>
+              </a:rPr>
+              <a:t>Els clients podran registrar-se amb Gmail o amb Outlook. RNF de </a:t>
+            </a:r>
+            <a:r>
+              <a:rPr lang="en" sz="1300" u="sng">
+                <a:solidFill>
+                  <a:schemeClr val="dk1"/>
+                </a:solidFill>
+              </a:rPr>
+              <a:t>Decisió de Disseny</a:t>
+            </a:r>
+            <a:r>
+              <a:rPr lang="en" sz="1300">
+                <a:solidFill>
+                  <a:schemeClr val="dk1"/>
+                </a:solidFill>
+              </a:rPr>
+              <a:t>.</a:t>
+            </a:r>
+            <a:endParaRPr sz="1300">
               <a:solidFill>
                 <a:schemeClr val="dk1"/>
               </a:solidFill>
@@ -15815,46 +16798,46 @@
               <a:buNone/>
             </a:pPr>
             <a:r>
-              <a:rPr b="1" lang="en" u="sng">
-                <a:solidFill>
-                  <a:schemeClr val="dk1"/>
-                </a:solidFill>
-              </a:rPr>
-              <a:t>RNF 3</a:t>
-            </a:r>
-            <a:r>
-              <a:rPr b="1" lang="en">
-                <a:solidFill>
-                  <a:schemeClr val="dk1"/>
-                </a:solidFill>
-              </a:rPr>
-              <a:t>: </a:t>
-            </a:r>
-            <a:r>
-              <a:rPr lang="en">
-                <a:solidFill>
-                  <a:schemeClr val="dk1"/>
-                </a:solidFill>
-              </a:rPr>
-              <a:t>Els clients podran registrar-se amb Gmail o amb Outlook (RNF de </a:t>
-            </a:r>
-            <a:r>
-              <a:rPr lang="en" u="sng">
-                <a:solidFill>
-                  <a:schemeClr val="dk1"/>
-                </a:solidFill>
-              </a:rPr>
-              <a:t>Decisió de disseny</a:t>
-            </a:r>
-            <a:r>
-              <a:rPr lang="en">
-                <a:solidFill>
-                  <a:schemeClr val="dk1"/>
-                </a:solidFill>
-              </a:rPr>
-              <a:t>). </a:t>
-            </a:r>
-            <a:endParaRPr>
+              <a:rPr b="1" lang="en" sz="1300" u="sng">
+                <a:solidFill>
+                  <a:schemeClr val="dk1"/>
+                </a:solidFill>
+              </a:rPr>
+              <a:t>RNF</a:t>
+            </a:r>
+            <a:r>
+              <a:rPr b="1" lang="en" sz="1300">
+                <a:solidFill>
+                  <a:schemeClr val="dk1"/>
+                </a:solidFill>
+              </a:rPr>
+              <a:t>-1-04: </a:t>
+            </a:r>
+            <a:r>
+              <a:rPr lang="en" sz="1300">
+                <a:solidFill>
+                  <a:schemeClr val="dk1"/>
+                </a:solidFill>
+              </a:rPr>
+              <a:t>Els usuaris hauran d’indicar l'adreça de recollida. RNF de </a:t>
+            </a:r>
+            <a:r>
+              <a:rPr lang="en" sz="1300" u="sng">
+                <a:solidFill>
+                  <a:schemeClr val="dk1"/>
+                </a:solidFill>
+              </a:rPr>
+              <a:t>Restricció de Disseny</a:t>
+            </a:r>
+            <a:r>
+              <a:rPr lang="en" sz="1300">
+                <a:solidFill>
+                  <a:schemeClr val="dk1"/>
+                </a:solidFill>
+              </a:rPr>
+              <a:t>.</a:t>
+            </a:r>
+            <a:endParaRPr sz="1300">
               <a:solidFill>
                 <a:schemeClr val="dk1"/>
               </a:solidFill>
@@ -15871,22 +16854,46 @@
               <a:buNone/>
             </a:pPr>
             <a:r>
-              <a:rPr b="1" lang="en">
-                <a:solidFill>
-                  <a:schemeClr val="dk1"/>
-                </a:solidFill>
-              </a:rPr>
-              <a:t>RF 4: </a:t>
-            </a:r>
-            <a:r>
-              <a:rPr lang="en">
-                <a:solidFill>
-                  <a:schemeClr val="dk1"/>
-                </a:solidFill>
-              </a:rPr>
-              <a:t>Els usuaris hauran d’indicar l'adreça de recollida. </a:t>
-            </a:r>
-            <a:endParaRPr>
+              <a:rPr b="1" lang="en" sz="1300" u="sng">
+                <a:solidFill>
+                  <a:schemeClr val="dk1"/>
+                </a:solidFill>
+              </a:rPr>
+              <a:t>RNF</a:t>
+            </a:r>
+            <a:r>
+              <a:rPr b="1" lang="en" sz="1300">
+                <a:solidFill>
+                  <a:schemeClr val="dk1"/>
+                </a:solidFill>
+              </a:rPr>
+              <a:t>-1-05: </a:t>
+            </a:r>
+            <a:r>
+              <a:rPr lang="en" sz="1300">
+                <a:solidFill>
+                  <a:schemeClr val="dk1"/>
+                </a:solidFill>
+              </a:rPr>
+              <a:t>Els usuaris hauran de definir un nom d'usuari que no estigui repetit dins del sistema. RNF de </a:t>
+            </a:r>
+            <a:r>
+              <a:rPr lang="en" sz="1300" u="sng">
+                <a:solidFill>
+                  <a:schemeClr val="dk1"/>
+                </a:solidFill>
+              </a:rPr>
+              <a:t>Restricció de Disseny</a:t>
+            </a:r>
+            <a:r>
+              <a:rPr lang="en" sz="1300">
+                <a:solidFill>
+                  <a:schemeClr val="dk1"/>
+                </a:solidFill>
+              </a:rPr>
+              <a:t>. </a:t>
+            </a:r>
+            <a:endParaRPr sz="1300">
               <a:solidFill>
                 <a:schemeClr val="dk1"/>
               </a:solidFill>
@@ -15903,30 +16910,46 @@
               <a:buNone/>
             </a:pPr>
             <a:r>
-              <a:rPr b="1" lang="en">
-                <a:solidFill>
-                  <a:schemeClr val="dk1"/>
-                </a:solidFill>
-              </a:rPr>
-              <a:t>RF 5: </a:t>
-            </a:r>
-            <a:r>
-              <a:rPr lang="en">
-                <a:solidFill>
-                  <a:schemeClr val="dk1"/>
-                </a:solidFill>
-              </a:rPr>
-              <a:t>Els usuaris hauran de definir el seu nom d'usuari.</a:t>
-            </a:r>
-            <a:r>
-              <a:rPr b="1" lang="en">
-                <a:solidFill>
-                  <a:schemeClr val="dk1"/>
-                </a:solidFill>
-              </a:rPr>
-              <a:t> </a:t>
-            </a:r>
-            <a:endParaRPr b="1">
+              <a:rPr b="1" lang="en" sz="1300" u="sng">
+                <a:solidFill>
+                  <a:schemeClr val="dk1"/>
+                </a:solidFill>
+              </a:rPr>
+              <a:t>RNF</a:t>
+            </a:r>
+            <a:r>
+              <a:rPr b="1" lang="en" sz="1300">
+                <a:solidFill>
+                  <a:schemeClr val="dk1"/>
+                </a:solidFill>
+              </a:rPr>
+              <a:t>-1-06: </a:t>
+            </a:r>
+            <a:r>
+              <a:rPr lang="en" sz="1300">
+                <a:solidFill>
+                  <a:schemeClr val="dk1"/>
+                </a:solidFill>
+              </a:rPr>
+              <a:t>El nom d’usuari ha de tenir més de 5 caràcters. RNF de </a:t>
+            </a:r>
+            <a:r>
+              <a:rPr lang="en" sz="1300" u="sng">
+                <a:solidFill>
+                  <a:schemeClr val="dk1"/>
+                </a:solidFill>
+              </a:rPr>
+              <a:t>Decisió de Disseny</a:t>
+            </a:r>
+            <a:r>
+              <a:rPr lang="en" sz="1300">
+                <a:solidFill>
+                  <a:schemeClr val="dk1"/>
+                </a:solidFill>
+              </a:rPr>
+              <a:t>. </a:t>
+            </a:r>
+            <a:endParaRPr sz="1300">
               <a:solidFill>
                 <a:schemeClr val="dk1"/>
               </a:solidFill>
@@ -15943,46 +16966,46 @@
               <a:buNone/>
             </a:pPr>
             <a:r>
-              <a:rPr b="1" lang="en" u="sng">
-                <a:solidFill>
-                  <a:schemeClr val="dk1"/>
-                </a:solidFill>
-              </a:rPr>
-              <a:t>RNF 6</a:t>
-            </a:r>
-            <a:r>
-              <a:rPr b="1" lang="en">
-                <a:solidFill>
-                  <a:schemeClr val="dk1"/>
-                </a:solidFill>
-              </a:rPr>
-              <a:t>: </a:t>
-            </a:r>
-            <a:r>
-              <a:rPr lang="en">
-                <a:solidFill>
-                  <a:schemeClr val="dk1"/>
-                </a:solidFill>
-              </a:rPr>
-              <a:t>El nom d’usuari ha de tenir més de 5 caràcters (RNF de </a:t>
-            </a:r>
-            <a:r>
-              <a:rPr lang="en" u="sng">
-                <a:solidFill>
-                  <a:schemeClr val="dk1"/>
-                </a:solidFill>
-              </a:rPr>
-              <a:t>Decisió de disseny</a:t>
-            </a:r>
-            <a:r>
-              <a:rPr lang="en">
-                <a:solidFill>
-                  <a:schemeClr val="dk1"/>
-                </a:solidFill>
-              </a:rPr>
-              <a:t>). </a:t>
-            </a:r>
-            <a:endParaRPr>
+              <a:rPr b="1" lang="en" sz="1300" u="sng">
+                <a:solidFill>
+                  <a:schemeClr val="dk1"/>
+                </a:solidFill>
+              </a:rPr>
+              <a:t>RNF</a:t>
+            </a:r>
+            <a:r>
+              <a:rPr b="1" lang="en" sz="1300">
+                <a:solidFill>
+                  <a:schemeClr val="dk1"/>
+                </a:solidFill>
+              </a:rPr>
+              <a:t>-1-07: </a:t>
+            </a:r>
+            <a:r>
+              <a:rPr lang="en" sz="1300">
+                <a:solidFill>
+                  <a:schemeClr val="dk1"/>
+                </a:solidFill>
+              </a:rPr>
+              <a:t>La contrasenya ha de tenir més de 8 caràcters, tenir 2 majúscules i més de 2 caràcters especials. RNF de </a:t>
+            </a:r>
+            <a:r>
+              <a:rPr lang="en" sz="1300" u="sng">
+                <a:solidFill>
+                  <a:schemeClr val="dk1"/>
+                </a:solidFill>
+              </a:rPr>
+              <a:t>Decisió de Disseny</a:t>
+            </a:r>
+            <a:r>
+              <a:rPr lang="en" sz="1300">
+                <a:solidFill>
+                  <a:schemeClr val="dk1"/>
+                </a:solidFill>
+              </a:rPr>
+              <a:t>. </a:t>
+            </a:r>
+            <a:endParaRPr sz="1300">
               <a:solidFill>
                 <a:schemeClr val="dk1"/>
               </a:solidFill>
@@ -15999,22 +17022,22 @@
               <a:buNone/>
             </a:pPr>
             <a:r>
-              <a:rPr b="1" lang="en">
-                <a:solidFill>
-                  <a:schemeClr val="dk1"/>
-                </a:solidFill>
-              </a:rPr>
-              <a:t>RN 7: </a:t>
-            </a:r>
-            <a:r>
-              <a:rPr lang="en">
-                <a:solidFill>
-                  <a:schemeClr val="dk1"/>
-                </a:solidFill>
-              </a:rPr>
-              <a:t>El nom d’usuari no pot estar repetit dins del sistema. </a:t>
-            </a:r>
-            <a:endParaRPr>
+              <a:rPr b="1" lang="en" sz="1300">
+                <a:solidFill>
+                  <a:schemeClr val="dk1"/>
+                </a:solidFill>
+              </a:rPr>
+              <a:t>RF-1-08: </a:t>
+            </a:r>
+            <a:r>
+              <a:rPr lang="en" sz="1300">
+                <a:solidFill>
+                  <a:schemeClr val="dk1"/>
+                </a:solidFill>
+              </a:rPr>
+              <a:t>El perfil s’ha de poder actualitzar. </a:t>
+            </a:r>
+            <a:endParaRPr sz="1300">
               <a:solidFill>
                 <a:schemeClr val="dk1"/>
               </a:solidFill>
@@ -16031,46 +17054,30 @@
               <a:buNone/>
             </a:pPr>
             <a:r>
-              <a:rPr b="1" lang="en" u="sng">
-                <a:solidFill>
-                  <a:schemeClr val="dk1"/>
-                </a:solidFill>
-              </a:rPr>
-              <a:t>RNF 8</a:t>
-            </a:r>
-            <a:r>
-              <a:rPr b="1" lang="en">
-                <a:solidFill>
-                  <a:schemeClr val="dk1"/>
-                </a:solidFill>
-              </a:rPr>
-              <a:t>: </a:t>
-            </a:r>
-            <a:r>
-              <a:rPr lang="en">
-                <a:solidFill>
-                  <a:schemeClr val="dk1"/>
-                </a:solidFill>
-              </a:rPr>
-              <a:t>La contrasenya ha de tenir més de 8 caràcters, tenir 2 majúscules i més de 2 caràcters especials. (RNF de </a:t>
-            </a:r>
-            <a:r>
-              <a:rPr lang="en" u="sng">
-                <a:solidFill>
-                  <a:schemeClr val="dk1"/>
-                </a:solidFill>
-              </a:rPr>
-              <a:t>Decisió de disseny</a:t>
-            </a:r>
-            <a:r>
-              <a:rPr lang="en">
-                <a:solidFill>
-                  <a:schemeClr val="dk1"/>
-                </a:solidFill>
-              </a:rPr>
-              <a:t>). </a:t>
-            </a:r>
-            <a:endParaRPr>
+              <a:rPr b="1" lang="en" sz="1300">
+                <a:solidFill>
+                  <a:schemeClr val="dk1"/>
+                </a:solidFill>
+              </a:rPr>
+              <a:t>RF-1-09: </a:t>
+            </a:r>
+            <a:r>
+              <a:rPr lang="en" sz="1300">
+                <a:solidFill>
+                  <a:schemeClr val="dk1"/>
+                </a:solidFill>
+              </a:rPr>
+              <a:t>El perfil s’ha d’eliminar quan el donem de baixa.</a:t>
+            </a:r>
+            <a:r>
+              <a:rPr b="1" lang="en" sz="1300">
+                <a:solidFill>
+                  <a:schemeClr val="dk1"/>
+                </a:solidFill>
+              </a:rPr>
+              <a:t> </a:t>
+            </a:r>
+            <a:endParaRPr b="1" sz="1300">
               <a:solidFill>
                 <a:schemeClr val="dk1"/>
               </a:solidFill>
@@ -16087,22 +17094,22 @@
               <a:buNone/>
             </a:pPr>
             <a:r>
-              <a:rPr b="1" lang="en">
-                <a:solidFill>
-                  <a:schemeClr val="dk1"/>
-                </a:solidFill>
-              </a:rPr>
-              <a:t>RF 9: </a:t>
-            </a:r>
-            <a:r>
-              <a:rPr lang="en">
-                <a:solidFill>
-                  <a:schemeClr val="dk1"/>
-                </a:solidFill>
-              </a:rPr>
-              <a:t>El perfil s’ha de poder actualitzar. </a:t>
-            </a:r>
-            <a:endParaRPr>
+              <a:rPr b="1" lang="en" sz="1300">
+                <a:solidFill>
+                  <a:schemeClr val="dk1"/>
+                </a:solidFill>
+              </a:rPr>
+              <a:t>RF-1-10: </a:t>
+            </a:r>
+            <a:r>
+              <a:rPr lang="en" sz="1300">
+                <a:solidFill>
+                  <a:schemeClr val="dk1"/>
+                </a:solidFill>
+              </a:rPr>
+              <a:t>S’ha d’indicar el tipus de compte que es vol crear (client, repartidor o cuiner). </a:t>
+            </a:r>
+            <a:endParaRPr sz="1300">
               <a:solidFill>
                 <a:schemeClr val="dk1"/>
               </a:solidFill>
@@ -16119,30 +17126,46 @@
               <a:buNone/>
             </a:pPr>
             <a:r>
-              <a:rPr b="1" lang="en">
-                <a:solidFill>
-                  <a:schemeClr val="dk1"/>
-                </a:solidFill>
-              </a:rPr>
-              <a:t>RF 10: </a:t>
-            </a:r>
-            <a:r>
-              <a:rPr lang="en">
-                <a:solidFill>
-                  <a:schemeClr val="dk1"/>
-                </a:solidFill>
-              </a:rPr>
-              <a:t>El perfil s’ha d’eliminar quan el donem de baixa.</a:t>
-            </a:r>
-            <a:r>
-              <a:rPr b="1" lang="en">
-                <a:solidFill>
-                  <a:schemeClr val="dk1"/>
-                </a:solidFill>
-              </a:rPr>
-              <a:t> </a:t>
-            </a:r>
-            <a:endParaRPr b="1">
+              <a:rPr b="1" lang="en" sz="1300" u="sng">
+                <a:solidFill>
+                  <a:schemeClr val="dk1"/>
+                </a:solidFill>
+              </a:rPr>
+              <a:t>RNF</a:t>
+            </a:r>
+            <a:r>
+              <a:rPr b="1" lang="en" sz="1300">
+                <a:solidFill>
+                  <a:schemeClr val="dk1"/>
+                </a:solidFill>
+              </a:rPr>
+              <a:t>-1-11: </a:t>
+            </a:r>
+            <a:r>
+              <a:rPr lang="en" sz="1300">
+                <a:solidFill>
+                  <a:schemeClr val="dk1"/>
+                </a:solidFill>
+              </a:rPr>
+              <a:t>Els rols que s'han assumit es poden modificar en qualsevol moment. RNF de </a:t>
+            </a:r>
+            <a:r>
+              <a:rPr lang="en" sz="1300" u="sng">
+                <a:solidFill>
+                  <a:schemeClr val="dk1"/>
+                </a:solidFill>
+              </a:rPr>
+              <a:t>Decisió de Disseny</a:t>
+            </a:r>
+            <a:r>
+              <a:rPr lang="en" sz="1300">
+                <a:solidFill>
+                  <a:schemeClr val="dk1"/>
+                </a:solidFill>
+              </a:rPr>
+              <a:t>. </a:t>
+            </a:r>
+            <a:endParaRPr sz="1300">
               <a:solidFill>
                 <a:schemeClr val="dk1"/>
               </a:solidFill>
@@ -16159,22 +17182,22 @@
               <a:buNone/>
             </a:pPr>
             <a:r>
-              <a:rPr b="1" lang="en">
-                <a:solidFill>
-                  <a:schemeClr val="dk1"/>
-                </a:solidFill>
-              </a:rPr>
-              <a:t>RF 11: </a:t>
-            </a:r>
-            <a:r>
-              <a:rPr lang="en">
-                <a:solidFill>
-                  <a:schemeClr val="dk1"/>
-                </a:solidFill>
-              </a:rPr>
-              <a:t>S’ha d’indicar el tipus de compte que es vol crear (client, repartidor o cuiner). </a:t>
-            </a:r>
-            <a:endParaRPr>
+              <a:rPr b="1" lang="en" sz="1300">
+                <a:solidFill>
+                  <a:schemeClr val="dk1"/>
+                </a:solidFill>
+              </a:rPr>
+              <a:t>RF-1-12: </a:t>
+            </a:r>
+            <a:r>
+              <a:rPr lang="en" sz="1300">
+                <a:solidFill>
+                  <a:schemeClr val="dk1"/>
+                </a:solidFill>
+              </a:rPr>
+              <a:t>Es poden indicar restriccions alimentàries al perfil. </a:t>
+            </a:r>
+            <a:endParaRPr sz="1300">
               <a:solidFill>
                 <a:schemeClr val="dk1"/>
               </a:solidFill>
@@ -16191,46 +17214,65 @@
               <a:buNone/>
             </a:pPr>
             <a:r>
-              <a:rPr b="1" lang="en" u="sng">
-                <a:solidFill>
-                  <a:schemeClr val="dk1"/>
-                </a:solidFill>
-              </a:rPr>
-              <a:t>RNF 12</a:t>
-            </a:r>
-            <a:r>
-              <a:rPr b="1" lang="en">
-                <a:solidFill>
-                  <a:schemeClr val="dk1"/>
-                </a:solidFill>
-              </a:rPr>
-              <a:t>: </a:t>
-            </a:r>
-            <a:r>
-              <a:rPr lang="en">
-                <a:solidFill>
-                  <a:schemeClr val="dk1"/>
-                </a:solidFill>
-              </a:rPr>
-              <a:t>Els rols que s'han assumit es poden modificar en qualsevol moment. (RNF de </a:t>
-            </a:r>
-            <a:r>
-              <a:rPr lang="en" u="sng">
-                <a:solidFill>
-                  <a:schemeClr val="dk1"/>
-                </a:solidFill>
-              </a:rPr>
-              <a:t>Decisió de disseny</a:t>
-            </a:r>
-            <a:r>
-              <a:rPr lang="en">
-                <a:solidFill>
-                  <a:schemeClr val="dk1"/>
-                </a:solidFill>
-              </a:rPr>
-              <a:t>).</a:t>
-            </a:r>
-            <a:endParaRPr>
+              <a:rPr b="1" lang="en" sz="1300" u="sng">
+                <a:solidFill>
+                  <a:schemeClr val="dk1"/>
+                </a:solidFill>
+              </a:rPr>
+              <a:t>RNF</a:t>
+            </a:r>
+            <a:r>
+              <a:rPr b="1" lang="en" sz="1300">
+                <a:solidFill>
+                  <a:schemeClr val="dk1"/>
+                </a:solidFill>
+              </a:rPr>
+              <a:t>-1-13: </a:t>
+            </a:r>
+            <a:r>
+              <a:rPr lang="en" sz="1300">
+                <a:solidFill>
+                  <a:schemeClr val="dk1"/>
+                </a:solidFill>
+              </a:rPr>
+              <a:t>El cuiner i el repartidor han de tenir un compte bancari associat al seu perfil d'usuari. RNF de </a:t>
+            </a:r>
+            <a:r>
+              <a:rPr lang="en" sz="1300" u="sng">
+                <a:solidFill>
+                  <a:schemeClr val="dk1"/>
+                </a:solidFill>
+              </a:rPr>
+              <a:t>Restricció de Disseny, seguretat</a:t>
+            </a:r>
+            <a:r>
+              <a:rPr lang="en" sz="1300">
+                <a:solidFill>
+                  <a:schemeClr val="dk1"/>
+                </a:solidFill>
+              </a:rPr>
+              <a:t>.</a:t>
+            </a:r>
+            <a:endParaRPr sz="1300">
+              <a:solidFill>
+                <a:schemeClr val="dk1"/>
+              </a:solidFill>
+            </a:endParaRPr>
+          </a:p>
+          <a:p>
+            <a:pPr indent="0" lvl="0" marL="0" rtl="0" algn="l">
+              <a:spcBef>
+                <a:spcPts val="0"/>
+              </a:spcBef>
+              <a:spcAft>
+                <a:spcPts val="0"/>
+              </a:spcAft>
+              <a:buNone/>
+            </a:pPr>
+            <a:r>
+              <a:t/>
+            </a:r>
+            <a:endParaRPr b="1" sz="1300">
               <a:solidFill>
                 <a:schemeClr val="dk1"/>
               </a:solidFill>
@@ -16246,12 +17288,12 @@
 </p:sld>
 </file>
 
-<file path=ppt/slides/slide6.xml><?xml version="1.0" encoding="utf-8"?>
+<file path=ppt/slides/slide7.xml><?xml version="1.0" encoding="utf-8"?>
 <p:sld xmlns:a="http://schemas.openxmlformats.org/drawingml/2006/main" xmlns:r="http://schemas.openxmlformats.org/officeDocument/2006/relationships" xmlns:mc="http://schemas.openxmlformats.org/markup-compatibility/2006" xmlns:mv="urn:schemas-microsoft-com:mac:vml" xmlns:p="http://schemas.openxmlformats.org/presentationml/2006/main" xmlns:c="http://schemas.openxmlformats.org/drawingml/2006/chart" xmlns:dgm="http://schemas.openxmlformats.org/drawingml/2006/diagram" xmlns:o="urn:schemas-microsoft-com:office:office" xmlns:v="urn:schemas-microsoft-com:vml" xmlns:pvml="urn:schemas-microsoft-com:office:powerpoint" xmlns:com="http://schemas.openxmlformats.org/drawingml/2006/compatibility" xmlns:p14="http://schemas.microsoft.com/office/powerpoint/2010/main" xmlns:p15="http://schemas.microsoft.com/office/powerpoint/2012/main" xmlns:ahyp="http://schemas.microsoft.com/office/drawing/2018/hyperlinkcolor">
   <p:cSld>
     <p:spTree>
       <p:nvGrpSpPr>
-        <p:cNvPr id="146" name="Shape 146"/>
+        <p:cNvPr id="157" name="Shape 157"/>
         <p:cNvGrpSpPr/>
         <p:nvPr/>
       </p:nvGrpSpPr>
@@ -16265,7 +17307,7 @@
       </p:grpSpPr>
       <p:sp>
         <p:nvSpPr>
-          <p:cNvPr id="147" name="Google Shape;147;p26"/>
+          <p:cNvPr id="158" name="Google Shape;158;p27"/>
           <p:cNvSpPr txBox="1"/>
           <p:nvPr>
             <p:ph type="title"/>
@@ -16305,7 +17347,7 @@
       </p:sp>
       <p:sp>
         <p:nvSpPr>
-          <p:cNvPr id="148" name="Google Shape;148;p26"/>
+          <p:cNvPr id="159" name="Google Shape;159;p27"/>
           <p:cNvSpPr txBox="1"/>
           <p:nvPr/>
         </p:nvSpPr>
@@ -16328,7 +17370,7 @@
           </a:bodyPr>
           <a:lstStyle/>
           <a:p>
-            <a:pPr indent="0" lvl="0" marL="0" rtl="0" algn="l">
+            <a:pPr indent="0" lvl="0" marL="0" rtl="0" algn="ctr">
               <a:spcBef>
                 <a:spcPts val="0"/>
               </a:spcBef>
@@ -16386,7 +17428,7 @@
                   <a:schemeClr val="dk1"/>
                 </a:solidFill>
               </a:rPr>
-              <a:t>RF 13: </a:t>
+              <a:t>RF-2-01: </a:t>
             </a:r>
             <a:r>
               <a:rPr lang="en" sz="1300">
@@ -16394,7 +17436,7 @@
                   <a:schemeClr val="dk1"/>
                 </a:solidFill>
               </a:rPr>
-              <a:t>Es poden indicar restriccions alimentaries al perfil. </a:t>
+              <a:t>Els clients poden consultar tots els plats i menús que són oferits en el moment. </a:t>
             </a:r>
             <a:endParaRPr sz="1300">
               <a:solidFill>
@@ -16413,12 +17455,20 @@
               <a:buNone/>
             </a:pPr>
             <a:r>
+              <a:rPr b="1" lang="en" sz="1300" u="sng">
+                <a:solidFill>
+                  <a:schemeClr val="dk1"/>
+                </a:solidFill>
+              </a:rPr>
+              <a:t>RNF</a:t>
+            </a:r>
+            <a:r>
               <a:rPr b="1" lang="en" sz="1300">
                 <a:solidFill>
                   <a:schemeClr val="dk1"/>
                 </a:solidFill>
               </a:rPr>
-              <a:t>RF 14: </a:t>
+              <a:t>-2-02: </a:t>
             </a:r>
             <a:r>
               <a:rPr lang="en" sz="1300">
@@ -16426,7 +17476,23 @@
                   <a:schemeClr val="dk1"/>
                 </a:solidFill>
               </a:rPr>
-              <a:t>Els clients poden consultar tots els plats i menús que son oferits en el moment. </a:t>
+              <a:t>Es mostraran primer els plats i menús que compleixen amb les restriccions alimentàries indicades al perfil. RNF de </a:t>
+            </a:r>
+            <a:r>
+              <a:rPr lang="en" sz="1300" u="sng">
+                <a:solidFill>
+                  <a:schemeClr val="dk1"/>
+                </a:solidFill>
+              </a:rPr>
+              <a:t>Decisió de Disseny</a:t>
+            </a:r>
+            <a:r>
+              <a:rPr lang="en" sz="1300">
+                <a:solidFill>
+                  <a:schemeClr val="dk1"/>
+                </a:solidFill>
+              </a:rPr>
+              <a:t>. </a:t>
             </a:r>
             <a:endParaRPr sz="1300">
               <a:solidFill>
@@ -16450,7 +17516,7 @@
                   <a:schemeClr val="dk1"/>
                 </a:solidFill>
               </a:rPr>
-              <a:t>RNF 15</a:t>
+              <a:t>RNF</a:t>
             </a:r>
             <a:r>
               <a:rPr b="1" lang="en" sz="1300">
@@ -16458,7 +17524,7 @@
                   <a:schemeClr val="dk1"/>
                 </a:solidFill>
               </a:rPr>
-              <a:t>: </a:t>
+              <a:t>-2-03: </a:t>
             </a:r>
             <a:r>
               <a:rPr lang="en" sz="1300">
@@ -16466,7 +17532,7 @@
                   <a:schemeClr val="dk1"/>
                 </a:solidFill>
               </a:rPr>
-              <a:t>Es mostraran primer els plats i menús que compleixen amb les restriccions alimentaries indicades al perfil. (RNF de </a:t>
+              <a:t>També es visualitza el temps estimat d'entrega. RNF d’</a:t>
             </a:r>
             <a:r>
               <a:rPr lang="en" sz="1300" u="sng">
@@ -16474,7 +17540,7 @@
                   <a:schemeClr val="dk1"/>
                 </a:solidFill>
               </a:rPr>
-              <a:t>Decisió de disseny</a:t>
+              <a:t>Interfície Externa</a:t>
             </a:r>
             <a:r>
               <a:rPr lang="en" sz="1300">
@@ -16482,7 +17548,47 @@
                   <a:schemeClr val="dk1"/>
                 </a:solidFill>
               </a:rPr>
-              <a:t>). </a:t>
+              <a:t>.</a:t>
+            </a:r>
+            <a:r>
+              <a:rPr b="1" lang="en" sz="1300">
+                <a:solidFill>
+                  <a:schemeClr val="dk1"/>
+                </a:solidFill>
+              </a:rPr>
+              <a:t> </a:t>
+            </a:r>
+            <a:endParaRPr b="1" sz="1300">
+              <a:solidFill>
+                <a:schemeClr val="dk1"/>
+              </a:solidFill>
+            </a:endParaRPr>
+          </a:p>
+          <a:p>
+            <a:pPr indent="0" lvl="0" marL="0" rtl="0" algn="l">
+              <a:spcBef>
+                <a:spcPts val="0"/>
+              </a:spcBef>
+              <a:spcAft>
+                <a:spcPts val="0"/>
+              </a:spcAft>
+              <a:buNone/>
+            </a:pPr>
+            <a:r>
+              <a:rPr b="1" lang="en" sz="1300">
+                <a:solidFill>
+                  <a:schemeClr val="dk1"/>
+                </a:solidFill>
+              </a:rPr>
+              <a:t>RF-2-04: </a:t>
+            </a:r>
+            <a:r>
+              <a:rPr lang="en" sz="1300">
+                <a:solidFill>
+                  <a:schemeClr val="dk1"/>
+                </a:solidFill>
+              </a:rPr>
+              <a:t>Els usuaris poden escollir entre dues vistes: Un llistat de plats i menús, o un llistat dels usuaris que ofereixen serveis en aquell moment, dels quals el client pot veure els plats oferits.</a:t>
             </a:r>
             <a:endParaRPr sz="1300">
               <a:solidFill>
@@ -16506,7 +17612,7 @@
                   <a:schemeClr val="dk1"/>
                 </a:solidFill>
               </a:rPr>
-              <a:t>RNF 16</a:t>
+              <a:t>RNF</a:t>
             </a:r>
             <a:r>
               <a:rPr b="1" lang="en" sz="1300">
@@ -16514,7 +17620,7 @@
                   <a:schemeClr val="dk1"/>
                 </a:solidFill>
               </a:rPr>
-              <a:t>: </a:t>
+              <a:t>-2-05: </a:t>
             </a:r>
             <a:r>
               <a:rPr lang="en" sz="1300">
@@ -16522,7 +17628,7 @@
                   <a:schemeClr val="dk1"/>
                 </a:solidFill>
               </a:rPr>
-              <a:t>També es visualitza el temps estimat d'entrega (RNF de </a:t>
+              <a:t>Les dues llistes seran ordenades segons la distància física entre client i cuiner. RNF de </a:t>
             </a:r>
             <a:r>
               <a:rPr lang="en" sz="1300" u="sng">
@@ -16530,7 +17636,7 @@
                   <a:schemeClr val="dk1"/>
                 </a:solidFill>
               </a:rPr>
-              <a:t>Interfície externa</a:t>
+              <a:t>Decisió de Disseny</a:t>
             </a:r>
             <a:r>
               <a:rPr lang="en" sz="1300">
@@ -16538,7 +17644,7 @@
                   <a:schemeClr val="dk1"/>
                 </a:solidFill>
               </a:rPr>
-              <a:t>). </a:t>
+              <a:t>. </a:t>
             </a:r>
             <a:endParaRPr sz="1300">
               <a:solidFill>
@@ -16562,7 +17668,7 @@
                   <a:schemeClr val="dk1"/>
                 </a:solidFill>
               </a:rPr>
-              <a:t>RF 17: </a:t>
+              <a:t>RF-2-06: </a:t>
             </a:r>
             <a:r>
               <a:rPr lang="en" sz="1300">
@@ -16570,7 +17676,7 @@
                   <a:schemeClr val="dk1"/>
                 </a:solidFill>
               </a:rPr>
-              <a:t>Els usuaris poden escollir entre dos vistes: Un llistat de plats i menús, o un llistat dels usuaris que ofereixen serveis en aquell moment, dels quals el client pot veure els plats oferits.</a:t>
+              <a:t>Els clients poden cercar per nom un plat o cuiner específics i reservar una comanda per a una hora en què el cuiner estigui disponible.</a:t>
             </a:r>
             <a:endParaRPr sz="1300">
               <a:solidFill>
@@ -16589,20 +17695,12 @@
               <a:buNone/>
             </a:pPr>
             <a:r>
-              <a:rPr b="1" lang="en" sz="1300" u="sng">
-                <a:solidFill>
-                  <a:schemeClr val="dk1"/>
-                </a:solidFill>
-              </a:rPr>
-              <a:t>RNF 18</a:t>
-            </a:r>
-            <a:r>
               <a:rPr b="1" lang="en" sz="1300">
                 <a:solidFill>
                   <a:schemeClr val="dk1"/>
                 </a:solidFill>
               </a:rPr>
-              <a:t>: </a:t>
+              <a:t>RF-2-07: </a:t>
             </a:r>
             <a:r>
               <a:rPr lang="en" sz="1300">
@@ -16610,63 +17708,7 @@
                   <a:schemeClr val="dk1"/>
                 </a:solidFill>
               </a:rPr>
-              <a:t>Les dos llistes seran ordenades segons la distància física entre client i cuiner (RNF de </a:t>
-            </a:r>
-            <a:r>
-              <a:rPr lang="en" sz="1300" u="sng">
-                <a:solidFill>
-                  <a:schemeClr val="dk1"/>
-                </a:solidFill>
-              </a:rPr>
-              <a:t>Decisió de disseny</a:t>
-            </a:r>
-            <a:r>
-              <a:rPr lang="en" sz="1300">
-                <a:solidFill>
-                  <a:schemeClr val="dk1"/>
-                </a:solidFill>
-              </a:rPr>
-              <a:t>).</a:t>
-            </a:r>
-            <a:r>
-              <a:rPr b="1" lang="en" sz="1300">
-                <a:solidFill>
-                  <a:schemeClr val="dk1"/>
-                </a:solidFill>
-              </a:rPr>
-              <a:t> </a:t>
-            </a:r>
-            <a:endParaRPr b="1" sz="1300">
-              <a:solidFill>
-                <a:schemeClr val="dk1"/>
-              </a:solidFill>
-            </a:endParaRPr>
-          </a:p>
-          <a:p>
-            <a:pPr indent="0" lvl="0" marL="0" rtl="0" algn="l">
-              <a:spcBef>
-                <a:spcPts val="0"/>
-              </a:spcBef>
-              <a:spcAft>
-                <a:spcPts val="0"/>
-              </a:spcAft>
-              <a:buNone/>
-            </a:pPr>
-            <a:r>
-              <a:rPr b="1" lang="en" sz="1300">
-                <a:solidFill>
-                  <a:schemeClr val="dk1"/>
-                </a:solidFill>
-              </a:rPr>
-              <a:t>RF 19: </a:t>
-            </a:r>
-            <a:r>
-              <a:rPr lang="en" sz="1300">
-                <a:solidFill>
-                  <a:schemeClr val="dk1"/>
-                </a:solidFill>
-              </a:rPr>
-              <a:t>Els clients poden cercar per nom un plat o cuiner específics i reservar una comanda per a una hora en què el cuiner estigui disponible.</a:t>
+              <a:t>Els cuiners poden indicar l'hora en què poden acceptar comandes. </a:t>
             </a:r>
             <a:endParaRPr sz="1300">
               <a:solidFill>
@@ -16690,7 +17732,7 @@
                   <a:schemeClr val="dk1"/>
                 </a:solidFill>
               </a:rPr>
-              <a:t>RNF 20</a:t>
+              <a:t>RNF</a:t>
             </a:r>
             <a:r>
               <a:rPr b="1" lang="en" sz="1300">
@@ -16698,7 +17740,7 @@
                   <a:schemeClr val="dk1"/>
                 </a:solidFill>
               </a:rPr>
-              <a:t>: </a:t>
+              <a:t>-2-08: </a:t>
             </a:r>
             <a:r>
               <a:rPr lang="en" sz="1300">
@@ -16706,7 +17748,7 @@
                   <a:schemeClr val="dk1"/>
                 </a:solidFill>
               </a:rPr>
-              <a:t>Els cuiners poden aparèixer en el llistat com a no disponibles, indicant l'hora en què poden acceptar comandes. (RNF de </a:t>
+              <a:t>Els cuiners poden aparèixer en el llistat com a no disponibles. RNF de </a:t>
             </a:r>
             <a:r>
               <a:rPr lang="en" sz="1300" u="sng">
@@ -16714,7 +17756,7 @@
                   <a:schemeClr val="dk1"/>
                 </a:solidFill>
               </a:rPr>
-              <a:t>Decisió de disseny</a:t>
+              <a:t>Decisió de Disseny</a:t>
             </a:r>
             <a:r>
               <a:rPr lang="en" sz="1300">
@@ -16722,7 +17764,7 @@
                   <a:schemeClr val="dk1"/>
                 </a:solidFill>
               </a:rPr>
-              <a:t>). </a:t>
+              <a:t>. </a:t>
             </a:r>
             <a:endParaRPr sz="1300">
               <a:solidFill>
@@ -16746,7 +17788,7 @@
                   <a:schemeClr val="dk1"/>
                 </a:solidFill>
               </a:rPr>
-              <a:t>RF 21: </a:t>
+              <a:t>RF-2-09: </a:t>
             </a:r>
             <a:r>
               <a:rPr lang="en" sz="1300">
@@ -16778,7 +17820,7 @@
                   <a:schemeClr val="dk1"/>
                 </a:solidFill>
               </a:rPr>
-              <a:t>RNF 22</a:t>
+              <a:t>RNF</a:t>
             </a:r>
             <a:r>
               <a:rPr b="1" lang="en" sz="1300">
@@ -16786,7 +17828,7 @@
                   <a:schemeClr val="dk1"/>
                 </a:solidFill>
               </a:rPr>
-              <a:t>: </a:t>
+              <a:t>-2-10: </a:t>
             </a:r>
             <a:r>
               <a:rPr lang="en" sz="1300">
@@ -16794,7 +17836,7 @@
                   <a:schemeClr val="dk1"/>
                 </a:solidFill>
               </a:rPr>
-              <a:t>Un mateix client no podrà tenir més de tres comandes actives alhora. (RNF de </a:t>
+              <a:t>Un mateix client no podrà tenir més de tres comandes actives alhora. RNF de </a:t>
             </a:r>
             <a:r>
               <a:rPr lang="en" sz="1300" u="sng">
@@ -16810,7 +17852,7 @@
                   <a:schemeClr val="dk1"/>
                 </a:solidFill>
               </a:rPr>
-              <a:t>). </a:t>
+              <a:t>. </a:t>
             </a:r>
             <a:endParaRPr sz="1300">
               <a:solidFill>
@@ -16834,7 +17876,7 @@
                   <a:schemeClr val="dk1"/>
                 </a:solidFill>
               </a:rPr>
-              <a:t>RF 23: </a:t>
+              <a:t>RF-2-11:</a:t>
             </a:r>
             <a:r>
               <a:rPr lang="en" sz="1300">
@@ -16842,7 +17884,39 @@
                   <a:schemeClr val="dk1"/>
                 </a:solidFill>
               </a:rPr>
-              <a:t>Els clients podran consultar el seu historial de comandes, i repetir una comanda previa si està disponible en el moment. </a:t>
+              <a:t> Els clients podran consultar el seu historial de comandes, i repetir una comanda prèvia si està disponible en el moment. </a:t>
+            </a:r>
+            <a:endParaRPr sz="1300">
+              <a:solidFill>
+                <a:schemeClr val="dk1"/>
+              </a:solidFill>
+            </a:endParaRPr>
+          </a:p>
+          <a:p>
+            <a:pPr indent="0" lvl="0" marL="0" rtl="0" algn="l">
+              <a:spcBef>
+                <a:spcPts val="0"/>
+              </a:spcBef>
+              <a:spcAft>
+                <a:spcPts val="0"/>
+              </a:spcAft>
+              <a:buNone/>
+            </a:pPr>
+            <a:r>
+              <a:rPr b="1" lang="en" sz="1300">
+                <a:solidFill>
+                  <a:schemeClr val="dk1"/>
+                </a:solidFill>
+              </a:rPr>
+              <a:t>RF-2-12: </a:t>
+            </a:r>
+            <a:r>
+              <a:rPr lang="en" sz="1300">
+                <a:solidFill>
+                  <a:schemeClr val="dk1"/>
+                </a:solidFill>
+              </a:rPr>
+              <a:t>Si es fan comandes es guanyen punts que serveixen per a obtenir descomptes.</a:t>
             </a:r>
             <a:endParaRPr sz="1300">
               <a:solidFill>
@@ -16879,12 +17953,12 @@
 </p:sld>
 </file>
 
-<file path=ppt/slides/slide7.xml><?xml version="1.0" encoding="utf-8"?>
+<file path=ppt/slides/slide8.xml><?xml version="1.0" encoding="utf-8"?>
 <p:sld xmlns:a="http://schemas.openxmlformats.org/drawingml/2006/main" xmlns:r="http://schemas.openxmlformats.org/officeDocument/2006/relationships" xmlns:mc="http://schemas.openxmlformats.org/markup-compatibility/2006" xmlns:mv="urn:schemas-microsoft-com:mac:vml" xmlns:p="http://schemas.openxmlformats.org/presentationml/2006/main" xmlns:c="http://schemas.openxmlformats.org/drawingml/2006/chart" xmlns:dgm="http://schemas.openxmlformats.org/drawingml/2006/diagram" xmlns:o="urn:schemas-microsoft-com:office:office" xmlns:v="urn:schemas-microsoft-com:vml" xmlns:pvml="urn:schemas-microsoft-com:office:powerpoint" xmlns:com="http://schemas.openxmlformats.org/drawingml/2006/compatibility" xmlns:p14="http://schemas.microsoft.com/office/powerpoint/2010/main" xmlns:p15="http://schemas.microsoft.com/office/powerpoint/2012/main" xmlns:ahyp="http://schemas.microsoft.com/office/drawing/2018/hyperlinkcolor">
   <p:cSld>
     <p:spTree>
       <p:nvGrpSpPr>
-        <p:cNvPr id="152" name="Shape 152"/>
+        <p:cNvPr id="163" name="Shape 163"/>
         <p:cNvGrpSpPr/>
         <p:nvPr/>
       </p:nvGrpSpPr>
@@ -16898,7 +17972,7 @@
       </p:grpSpPr>
       <p:sp>
         <p:nvSpPr>
-          <p:cNvPr id="153" name="Google Shape;153;p27"/>
+          <p:cNvPr id="164" name="Google Shape;164;p28"/>
           <p:cNvSpPr txBox="1"/>
           <p:nvPr>
             <p:ph type="title"/>
@@ -16938,7 +18012,7 @@
       </p:sp>
       <p:sp>
         <p:nvSpPr>
-          <p:cNvPr id="154" name="Google Shape;154;p27"/>
+          <p:cNvPr id="165" name="Google Shape;165;p28"/>
           <p:cNvSpPr txBox="1"/>
           <p:nvPr/>
         </p:nvSpPr>
@@ -16961,7 +18035,7 @@
           </a:bodyPr>
           <a:lstStyle/>
           <a:p>
-            <a:pPr indent="0" lvl="0" marL="0" rtl="0" algn="l">
+            <a:pPr indent="0" lvl="0" marL="0" rtl="0" algn="ctr">
               <a:spcBef>
                 <a:spcPts val="0"/>
               </a:spcBef>
@@ -16971,9 +18045,14 @@
               <a:buNone/>
             </a:pPr>
             <a:r>
-              <a:t/>
-            </a:r>
-            <a:endParaRPr b="1">
+              <a:rPr b="1" lang="en" sz="1300">
+                <a:solidFill>
+                  <a:schemeClr val="dk1"/>
+                </a:solidFill>
+              </a:rPr>
+              <a:t>GRUP 3: ENVIAMENT DE COMANDES</a:t>
+            </a:r>
+            <a:endParaRPr b="1" sz="1300">
               <a:solidFill>
                 <a:schemeClr val="dk1"/>
               </a:solidFill>
@@ -16990,14 +18069,9 @@
               <a:buNone/>
             </a:pPr>
             <a:r>
-              <a:rPr b="1" lang="en">
-                <a:solidFill>
-                  <a:schemeClr val="dk1"/>
-                </a:solidFill>
-              </a:rPr>
-              <a:t>GRUP 3: ENVIAMENT DE COMANDES</a:t>
-            </a:r>
-            <a:endParaRPr b="1">
+              <a:t/>
+            </a:r>
+            <a:endParaRPr b="1" sz="1300">
               <a:solidFill>
                 <a:schemeClr val="dk1"/>
               </a:solidFill>
@@ -17014,9 +18088,22 @@
               <a:buNone/>
             </a:pPr>
             <a:r>
-              <a:t/>
-            </a:r>
-            <a:endParaRPr b="1">
+              <a:rPr b="1" lang="en" sz="1300">
+                <a:solidFill>
+                  <a:schemeClr val="dk1"/>
+                </a:solidFill>
+              </a:rPr>
+              <a:t>RF-3-01: </a:t>
+            </a:r>
+            <a:r>
+              <a:rPr lang="en" sz="1300">
+                <a:solidFill>
+                  <a:schemeClr val="dk1"/>
+                </a:solidFill>
+              </a:rPr>
+              <a:t>Es pot escollir entre tres tipus d’enviament (que l’enviï el cuiner, un repartidor, o que el busqui el client).  </a:t>
+            </a:r>
+            <a:endParaRPr sz="1300">
               <a:solidFill>
                 <a:schemeClr val="dk1"/>
               </a:solidFill>
@@ -17033,22 +18120,9 @@
               <a:buNone/>
             </a:pPr>
             <a:r>
-              <a:rPr b="1" lang="en">
-                <a:solidFill>
-                  <a:schemeClr val="dk1"/>
-                </a:solidFill>
-              </a:rPr>
-              <a:t>RF 24: </a:t>
-            </a:r>
-            <a:r>
-              <a:rPr lang="en">
-                <a:solidFill>
-                  <a:schemeClr val="dk1"/>
-                </a:solidFill>
-              </a:rPr>
-              <a:t>Es pot escollir entre tres tipus d’enviament (que l’envii el cuiner, un repartidor, o que el busqui el client).  </a:t>
-            </a:r>
-            <a:endParaRPr>
+              <a:t/>
+            </a:r>
+            <a:endParaRPr b="1" sz="1300">
               <a:solidFill>
                 <a:schemeClr val="dk1"/>
               </a:solidFill>
@@ -17065,38 +18139,22 @@
               <a:buNone/>
             </a:pPr>
             <a:r>
-              <a:rPr b="1" lang="en">
-                <a:solidFill>
-                  <a:schemeClr val="dk1"/>
-                </a:solidFill>
-              </a:rPr>
-              <a:t>RF 25: </a:t>
-            </a:r>
-            <a:r>
-              <a:rPr lang="en">
-                <a:solidFill>
-                  <a:schemeClr val="dk1"/>
-                </a:solidFill>
-              </a:rPr>
-              <a:t>El cost de l’enviament es calcula segons la distància entre el cuiner i el</a:t>
-            </a:r>
-            <a:r>
-              <a:rPr b="1" lang="en">
-                <a:solidFill>
-                  <a:schemeClr val="dk1"/>
-                </a:solidFill>
-              </a:rPr>
-              <a:t> </a:t>
-            </a:r>
-            <a:r>
-              <a:rPr lang="en">
-                <a:solidFill>
-                  <a:schemeClr val="dk1"/>
-                </a:solidFill>
-              </a:rPr>
-              <a:t>lloc de lliurament.</a:t>
-            </a:r>
-            <a:endParaRPr>
+              <a:rPr b="1" lang="en" sz="1300">
+                <a:solidFill>
+                  <a:schemeClr val="dk1"/>
+                </a:solidFill>
+              </a:rPr>
+              <a:t>RF-3-02: </a:t>
+            </a:r>
+            <a:r>
+              <a:rPr lang="en" sz="1300">
+                <a:solidFill>
+                  <a:schemeClr val="dk1"/>
+                </a:solidFill>
+              </a:rPr>
+              <a:t>El cost de l’enviament es calcula segons la distància entre el cuiner i el lloc de lliurament, sent gratuït si el client recull la comanda al domicili del cuiner. </a:t>
+            </a:r>
+            <a:endParaRPr sz="1300">
               <a:solidFill>
                 <a:schemeClr val="dk1"/>
               </a:solidFill>
@@ -17113,22 +18171,9 @@
               <a:buNone/>
             </a:pPr>
             <a:r>
-              <a:rPr b="1" lang="en">
-                <a:solidFill>
-                  <a:schemeClr val="dk1"/>
-                </a:solidFill>
-              </a:rPr>
-              <a:t>RF 26: </a:t>
-            </a:r>
-            <a:r>
-              <a:rPr lang="en">
-                <a:solidFill>
-                  <a:schemeClr val="dk1"/>
-                </a:solidFill>
-              </a:rPr>
-              <a:t>L’enviament és gratuït quan el client recull la comanda al domicili del cuiner.</a:t>
-            </a:r>
-            <a:endParaRPr>
+              <a:t/>
+            </a:r>
+            <a:endParaRPr b="1" sz="1300">
               <a:solidFill>
                 <a:schemeClr val="dk1"/>
               </a:solidFill>
@@ -17145,22 +18190,22 @@
               <a:buNone/>
             </a:pPr>
             <a:r>
-              <a:rPr b="1" lang="en">
-                <a:solidFill>
-                  <a:schemeClr val="dk1"/>
-                </a:solidFill>
-              </a:rPr>
-              <a:t>RF 27: </a:t>
-            </a:r>
-            <a:r>
-              <a:rPr lang="en">
+              <a:rPr b="1" lang="en" sz="1300">
+                <a:solidFill>
+                  <a:schemeClr val="dk1"/>
+                </a:solidFill>
+              </a:rPr>
+              <a:t>RF-3-03: </a:t>
+            </a:r>
+            <a:r>
+              <a:rPr lang="en" sz="1300">
                 <a:solidFill>
                   <a:schemeClr val="dk1"/>
                 </a:solidFill>
               </a:rPr>
               <a:t>El client pot seguir el progrés de l’entrega un cop l’enviament ha començat.</a:t>
             </a:r>
-            <a:endParaRPr>
+            <a:endParaRPr sz="1300">
               <a:solidFill>
                 <a:schemeClr val="dk1"/>
               </a:solidFill>
@@ -17177,46 +18222,9 @@
               <a:buNone/>
             </a:pPr>
             <a:r>
-              <a:rPr b="1" lang="en" u="sng">
-                <a:solidFill>
-                  <a:schemeClr val="dk1"/>
-                </a:solidFill>
-              </a:rPr>
-              <a:t>RNF 28</a:t>
-            </a:r>
-            <a:r>
-              <a:rPr b="1" lang="en">
-                <a:solidFill>
-                  <a:schemeClr val="dk1"/>
-                </a:solidFill>
-              </a:rPr>
-              <a:t>: </a:t>
-            </a:r>
-            <a:r>
-              <a:rPr lang="en">
-                <a:solidFill>
-                  <a:schemeClr val="dk1"/>
-                </a:solidFill>
-              </a:rPr>
-              <a:t>La posició del repartidor es mostra en un mapa utilitzant la interfície de Google Maps. (RNF </a:t>
-            </a:r>
-            <a:r>
-              <a:rPr lang="en" u="sng">
-                <a:solidFill>
-                  <a:schemeClr val="dk1"/>
-                </a:solidFill>
-              </a:rPr>
-              <a:t>d’Interfícies Externes</a:t>
-            </a:r>
-            <a:r>
-              <a:rPr lang="en">
-                <a:solidFill>
-                  <a:schemeClr val="dk1"/>
-                </a:solidFill>
-              </a:rPr>
-              <a:t>). </a:t>
-            </a:r>
-            <a:endParaRPr>
+              <a:t/>
+            </a:r>
+            <a:endParaRPr b="1" sz="1300" u="sng">
               <a:solidFill>
                 <a:schemeClr val="dk1"/>
               </a:solidFill>
@@ -17233,9 +18241,65 @@
               <a:buNone/>
             </a:pPr>
             <a:r>
+              <a:rPr b="1" lang="en" sz="1300" u="sng">
+                <a:solidFill>
+                  <a:schemeClr val="dk1"/>
+                </a:solidFill>
+              </a:rPr>
+              <a:t>RNF</a:t>
+            </a:r>
+            <a:r>
+              <a:rPr b="1" lang="en" sz="1300">
+                <a:solidFill>
+                  <a:schemeClr val="dk1"/>
+                </a:solidFill>
+              </a:rPr>
+              <a:t>-3-04: </a:t>
+            </a:r>
+            <a:r>
+              <a:rPr lang="en" sz="1300">
+                <a:solidFill>
+                  <a:schemeClr val="dk1"/>
+                </a:solidFill>
+              </a:rPr>
+              <a:t>La posició del repartidor es mostra en un mapa utilitzant la interfície de Google Maps. RNF d’</a:t>
+            </a:r>
+            <a:r>
+              <a:rPr lang="en" sz="1300" u="sng">
+                <a:solidFill>
+                  <a:schemeClr val="dk1"/>
+                </a:solidFill>
+              </a:rPr>
+              <a:t>Interfícies Externes.</a:t>
+            </a:r>
+            <a:r>
+              <a:rPr lang="en" sz="1300">
+                <a:solidFill>
+                  <a:schemeClr val="dk1"/>
+                </a:solidFill>
+              </a:rPr>
+              <a:t> </a:t>
+            </a:r>
+            <a:endParaRPr sz="1300">
+              <a:solidFill>
+                <a:schemeClr val="dk1"/>
+              </a:solidFill>
+            </a:endParaRPr>
+          </a:p>
+          <a:p>
+            <a:pPr indent="0" lvl="0" marL="0" rtl="0" algn="l">
+              <a:spcBef>
+                <a:spcPts val="0"/>
+              </a:spcBef>
+              <a:spcAft>
+                <a:spcPts val="0"/>
+              </a:spcAft>
+              <a:buNone/>
+            </a:pPr>
+            <a:r>
               <a:t/>
             </a:r>
-            <a:endParaRPr b="1">
+            <a:endParaRPr b="1" sz="1300">
               <a:solidFill>
                 <a:schemeClr val="dk1"/>
               </a:solidFill>
@@ -17251,12 +18315,12 @@
 </p:sld>
 </file>
 
-<file path=ppt/slides/slide8.xml><?xml version="1.0" encoding="utf-8"?>
+<file path=ppt/slides/slide9.xml><?xml version="1.0" encoding="utf-8"?>
 <p:sld xmlns:a="http://schemas.openxmlformats.org/drawingml/2006/main" xmlns:r="http://schemas.openxmlformats.org/officeDocument/2006/relationships" xmlns:mc="http://schemas.openxmlformats.org/markup-compatibility/2006" xmlns:mv="urn:schemas-microsoft-com:mac:vml" xmlns:p="http://schemas.openxmlformats.org/presentationml/2006/main" xmlns:c="http://schemas.openxmlformats.org/drawingml/2006/chart" xmlns:dgm="http://schemas.openxmlformats.org/drawingml/2006/diagram" xmlns:o="urn:schemas-microsoft-com:office:office" xmlns:v="urn:schemas-microsoft-com:vml" xmlns:pvml="urn:schemas-microsoft-com:office:powerpoint" xmlns:com="http://schemas.openxmlformats.org/drawingml/2006/compatibility" xmlns:p14="http://schemas.microsoft.com/office/powerpoint/2010/main" xmlns:p15="http://schemas.microsoft.com/office/powerpoint/2012/main" xmlns:ahyp="http://schemas.microsoft.com/office/drawing/2018/hyperlinkcolor">
   <p:cSld>
     <p:spTree>
       <p:nvGrpSpPr>
-        <p:cNvPr id="158" name="Shape 158"/>
+        <p:cNvPr id="169" name="Shape 169"/>
         <p:cNvGrpSpPr/>
         <p:nvPr/>
       </p:nvGrpSpPr>
@@ -17270,7 +18334,7 @@
       </p:grpSpPr>
       <p:sp>
         <p:nvSpPr>
-          <p:cNvPr id="159" name="Google Shape;159;p28"/>
+          <p:cNvPr id="170" name="Google Shape;170;p29"/>
           <p:cNvSpPr txBox="1"/>
           <p:nvPr>
             <p:ph type="title"/>
@@ -17310,7 +18374,7 @@
       </p:sp>
       <p:sp>
         <p:nvSpPr>
-          <p:cNvPr id="160" name="Google Shape;160;p28"/>
+          <p:cNvPr id="171" name="Google Shape;171;p29"/>
           <p:cNvSpPr txBox="1"/>
           <p:nvPr/>
         </p:nvSpPr>
@@ -17333,7 +18397,7 @@
           </a:bodyPr>
           <a:lstStyle/>
           <a:p>
-            <a:pPr indent="0" lvl="0" marL="0" rtl="0" algn="l">
+            <a:pPr indent="0" lvl="0" marL="0" rtl="0" algn="ctr">
               <a:spcBef>
                 <a:spcPts val="0"/>
               </a:spcBef>
@@ -17343,9 +18407,14 @@
               <a:buNone/>
             </a:pPr>
             <a:r>
-              <a:t/>
-            </a:r>
-            <a:endParaRPr b="1">
+              <a:rPr b="1" lang="en" sz="1300">
+                <a:solidFill>
+                  <a:schemeClr val="dk1"/>
+                </a:solidFill>
+              </a:rPr>
+              <a:t>GRUP 4: PAGAMENT DE LA COMANDA</a:t>
+            </a:r>
+            <a:endParaRPr b="1" sz="1300">
               <a:solidFill>
                 <a:schemeClr val="dk1"/>
               </a:solidFill>
@@ -17362,14 +18431,9 @@
               <a:buNone/>
             </a:pPr>
             <a:r>
-              <a:rPr b="1" lang="en">
-                <a:solidFill>
-                  <a:schemeClr val="dk1"/>
-                </a:solidFill>
-              </a:rPr>
-              <a:t>GRUP 4: PAGAMENT DE LA COMANDA</a:t>
-            </a:r>
-            <a:endParaRPr b="1">
+              <a:t/>
+            </a:r>
+            <a:endParaRPr b="1" sz="1300">
               <a:solidFill>
                 <a:schemeClr val="dk1"/>
               </a:solidFill>
@@ -17386,9 +18450,30 @@
               <a:buNone/>
             </a:pPr>
             <a:r>
-              <a:t/>
-            </a:r>
-            <a:endParaRPr b="1">
+              <a:rPr b="1" lang="en" sz="1300">
+                <a:solidFill>
+                  <a:schemeClr val="dk1"/>
+                </a:solidFill>
+              </a:rPr>
+              <a:t>RF-4-01: </a:t>
+            </a:r>
+            <a:r>
+              <a:rPr lang="en" sz="1300">
+                <a:solidFill>
+                  <a:schemeClr val="dk1"/>
+                </a:solidFill>
+              </a:rPr>
+              <a:t>El cuiner i repartidor reben l’ingrés de la comanda un cop s’ha pagat a la mateixa aplicació amb targeta bancària o PayPal</a:t>
+            </a:r>
+            <a:r>
+              <a:rPr b="1" lang="en" sz="1300">
+                <a:solidFill>
+                  <a:schemeClr val="dk1"/>
+                </a:solidFill>
+              </a:rPr>
+              <a:t>. </a:t>
+            </a:r>
+            <a:endParaRPr b="1" sz="1300">
               <a:solidFill>
                 <a:schemeClr val="dk1"/>
               </a:solidFill>
@@ -17405,22 +18490,9 @@
               <a:buNone/>
             </a:pPr>
             <a:r>
-              <a:rPr b="1" lang="en">
-                <a:solidFill>
-                  <a:schemeClr val="dk1"/>
-                </a:solidFill>
-              </a:rPr>
-              <a:t>RF 29:</a:t>
-            </a:r>
-            <a:r>
-              <a:rPr lang="en">
-                <a:solidFill>
-                  <a:schemeClr val="dk1"/>
-                </a:solidFill>
-              </a:rPr>
-              <a:t> El pagament de la comanda es fa des de la mateixa aplicació amb targeta bancària o Paypal. </a:t>
-            </a:r>
-            <a:endParaRPr>
+              <a:t/>
+            </a:r>
+            <a:endParaRPr b="1" sz="1300">
               <a:solidFill>
                 <a:schemeClr val="dk1"/>
               </a:solidFill>
@@ -17437,46 +18509,46 @@
               <a:buNone/>
             </a:pPr>
             <a:r>
-              <a:rPr b="1" lang="en" u="sng">
-                <a:solidFill>
-                  <a:schemeClr val="dk1"/>
-                </a:solidFill>
-              </a:rPr>
-              <a:t>RNF 30</a:t>
-            </a:r>
-            <a:r>
-              <a:rPr b="1" lang="en">
-                <a:solidFill>
-                  <a:schemeClr val="dk1"/>
-                </a:solidFill>
-              </a:rPr>
-              <a:t>: </a:t>
-            </a:r>
-            <a:r>
-              <a:rPr lang="en">
-                <a:solidFill>
-                  <a:schemeClr val="dk1"/>
-                </a:solidFill>
-              </a:rPr>
-              <a:t>El sistema s'ha de connectar amb la plataforma de pagament corresponent per autenticar les dades i confirmar la transacció. (RNF </a:t>
-            </a:r>
-            <a:r>
-              <a:rPr lang="en" u="sng">
-                <a:solidFill>
-                  <a:schemeClr val="dk1"/>
-                </a:solidFill>
-              </a:rPr>
-              <a:t>d’Interfícies Externes</a:t>
-            </a:r>
-            <a:r>
-              <a:rPr lang="en">
-                <a:solidFill>
-                  <a:schemeClr val="dk1"/>
-                </a:solidFill>
-              </a:rPr>
-              <a:t>). </a:t>
-            </a:r>
-            <a:endParaRPr>
+              <a:rPr b="1" lang="en" sz="1300" u="sng">
+                <a:solidFill>
+                  <a:schemeClr val="dk1"/>
+                </a:solidFill>
+              </a:rPr>
+              <a:t>RNF</a:t>
+            </a:r>
+            <a:r>
+              <a:rPr b="1" lang="en" sz="1300">
+                <a:solidFill>
+                  <a:schemeClr val="dk1"/>
+                </a:solidFill>
+              </a:rPr>
+              <a:t>-4-02: </a:t>
+            </a:r>
+            <a:r>
+              <a:rPr lang="en" sz="1300">
+                <a:solidFill>
+                  <a:schemeClr val="dk1"/>
+                </a:solidFill>
+              </a:rPr>
+              <a:t>El sistema s'ha de connectar amb la plataforma de pagament corresponent per autenticar les dades i confirmar la transacció. RNF d’</a:t>
+            </a:r>
+            <a:r>
+              <a:rPr lang="en" sz="1300" u="sng">
+                <a:solidFill>
+                  <a:schemeClr val="dk1"/>
+                </a:solidFill>
+              </a:rPr>
+              <a:t>Interfícies Externes</a:t>
+            </a:r>
+            <a:r>
+              <a:rPr lang="en" sz="1300">
+                <a:solidFill>
+                  <a:schemeClr val="dk1"/>
+                </a:solidFill>
+              </a:rPr>
+              <a:t>. </a:t>
+            </a:r>
+            <a:endParaRPr sz="1300">
               <a:solidFill>
                 <a:schemeClr val="dk1"/>
               </a:solidFill>
@@ -17493,22 +18565,9 @@
               <a:buNone/>
             </a:pPr>
             <a:r>
-              <a:rPr b="1" lang="en">
-                <a:solidFill>
-                  <a:schemeClr val="dk1"/>
-                </a:solidFill>
-              </a:rPr>
-              <a:t>RF 31: </a:t>
-            </a:r>
-            <a:r>
-              <a:rPr lang="en">
-                <a:solidFill>
-                  <a:schemeClr val="dk1"/>
-                </a:solidFill>
-              </a:rPr>
-              <a:t>Un cop pagada la comanda, el sistema realitza l'ingrés al cuiner i al repartidor. </a:t>
-            </a:r>
-            <a:endParaRPr>
+              <a:t/>
+            </a:r>
+            <a:endParaRPr sz="1300">
               <a:solidFill>
                 <a:schemeClr val="dk1"/>
               </a:solidFill>
@@ -17525,378 +18584,9 @@
               <a:buNone/>
             </a:pPr>
             <a:r>
-              <a:rPr b="1" lang="en" u="sng">
-                <a:solidFill>
-                  <a:schemeClr val="dk1"/>
-                </a:solidFill>
-              </a:rPr>
-              <a:t>RNF 32</a:t>
-            </a:r>
-            <a:r>
-              <a:rPr b="1" lang="en">
-                <a:solidFill>
-                  <a:schemeClr val="dk1"/>
-                </a:solidFill>
-              </a:rPr>
-              <a:t>: </a:t>
-            </a:r>
-            <a:r>
-              <a:rPr lang="en">
-                <a:solidFill>
-                  <a:schemeClr val="dk1"/>
-                </a:solidFill>
-              </a:rPr>
-              <a:t>El cuiner i el repartidor han de tenir un compte bancari associat al seu perfil d'usuari. (RNF de </a:t>
-            </a:r>
-            <a:r>
-              <a:rPr lang="en" u="sng">
-                <a:solidFill>
-                  <a:schemeClr val="dk1"/>
-                </a:solidFill>
-              </a:rPr>
-              <a:t>Restricció de Disseny, seguretat</a:t>
-            </a:r>
-            <a:r>
-              <a:rPr lang="en">
-                <a:solidFill>
-                  <a:schemeClr val="dk1"/>
-                </a:solidFill>
-              </a:rPr>
-              <a:t>). </a:t>
-            </a:r>
-            <a:endParaRPr>
-              <a:solidFill>
-                <a:schemeClr val="dk1"/>
-              </a:solidFill>
-            </a:endParaRPr>
-          </a:p>
-          <a:p>
-            <a:pPr indent="0" lvl="0" marL="0" rtl="0" algn="l">
-              <a:spcBef>
-                <a:spcPts val="0"/>
-              </a:spcBef>
-              <a:spcAft>
-                <a:spcPts val="0"/>
-              </a:spcAft>
-              <a:buNone/>
-            </a:pPr>
-            <a:r>
               <a:t/>
             </a:r>
-            <a:endParaRPr b="1">
-              <a:solidFill>
-                <a:schemeClr val="dk1"/>
-              </a:solidFill>
-            </a:endParaRPr>
-          </a:p>
-        </p:txBody>
-      </p:sp>
-    </p:spTree>
-  </p:cSld>
-  <p:clrMapOvr>
-    <a:masterClrMapping/>
-  </p:clrMapOvr>
-</p:sld>
-</file>
-
-<file path=ppt/slides/slide9.xml><?xml version="1.0" encoding="utf-8"?>
-<p:sld xmlns:a="http://schemas.openxmlformats.org/drawingml/2006/main" xmlns:r="http://schemas.openxmlformats.org/officeDocument/2006/relationships" xmlns:mc="http://schemas.openxmlformats.org/markup-compatibility/2006" xmlns:mv="urn:schemas-microsoft-com:mac:vml" xmlns:p="http://schemas.openxmlformats.org/presentationml/2006/main" xmlns:c="http://schemas.openxmlformats.org/drawingml/2006/chart" xmlns:dgm="http://schemas.openxmlformats.org/drawingml/2006/diagram" xmlns:o="urn:schemas-microsoft-com:office:office" xmlns:v="urn:schemas-microsoft-com:vml" xmlns:pvml="urn:schemas-microsoft-com:office:powerpoint" xmlns:com="http://schemas.openxmlformats.org/drawingml/2006/compatibility" xmlns:p14="http://schemas.microsoft.com/office/powerpoint/2010/main" xmlns:p15="http://schemas.microsoft.com/office/powerpoint/2012/main" xmlns:ahyp="http://schemas.microsoft.com/office/drawing/2018/hyperlinkcolor">
-  <p:cSld>
-    <p:spTree>
-      <p:nvGrpSpPr>
-        <p:cNvPr id="164" name="Shape 164"/>
-        <p:cNvGrpSpPr/>
-        <p:nvPr/>
-      </p:nvGrpSpPr>
-      <p:grpSpPr>
-        <a:xfrm>
-          <a:off x="0" y="0"/>
-          <a:ext cx="0" cy="0"/>
-          <a:chOff x="0" y="0"/>
-          <a:chExt cx="0" cy="0"/>
-        </a:xfrm>
-      </p:grpSpPr>
-      <p:sp>
-        <p:nvSpPr>
-          <p:cNvPr id="165" name="Google Shape;165;p29"/>
-          <p:cNvSpPr txBox="1"/>
-          <p:nvPr>
-            <p:ph type="title"/>
-          </p:nvPr>
-        </p:nvSpPr>
-        <p:spPr>
-          <a:xfrm>
-            <a:off x="228600" y="228600"/>
-            <a:ext cx="8686800" cy="572700"/>
-          </a:xfrm>
-          <a:prstGeom prst="rect">
-            <a:avLst/>
-          </a:prstGeom>
-        </p:spPr>
-        <p:txBody>
-          <a:bodyPr anchorCtr="0" anchor="t" bIns="91425" lIns="91425" spcFirstLastPara="1" rIns="91425" wrap="square" tIns="91425">
-            <a:noAutofit/>
-          </a:bodyPr>
-          <a:lstStyle/>
-          <a:p>
-            <a:pPr indent="0" lvl="0" marL="0" rtl="0" algn="ctr">
-              <a:spcBef>
-                <a:spcPts val="0"/>
-              </a:spcBef>
-              <a:spcAft>
-                <a:spcPts val="0"/>
-              </a:spcAft>
-              <a:buNone/>
-            </a:pPr>
-            <a:r>
-              <a:rPr lang="en"/>
-              <a:t>Requisits</a:t>
-            </a:r>
-            <a:endParaRPr/>
-          </a:p>
-        </p:txBody>
-      </p:sp>
-      <p:sp>
-        <p:nvSpPr>
-          <p:cNvPr id="166" name="Google Shape;166;p29"/>
-          <p:cNvSpPr txBox="1"/>
-          <p:nvPr/>
-        </p:nvSpPr>
-        <p:spPr>
-          <a:xfrm>
-            <a:off x="228600" y="801300"/>
-            <a:ext cx="8686800" cy="3827700"/>
-          </a:xfrm>
-          <a:prstGeom prst="rect">
-            <a:avLst/>
-          </a:prstGeom>
-          <a:noFill/>
-          <a:ln>
-            <a:noFill/>
-          </a:ln>
-        </p:spPr>
-        <p:txBody>
-          <a:bodyPr anchorCtr="0" anchor="t" bIns="91425" lIns="91425" spcFirstLastPara="1" rIns="91425" wrap="square" tIns="91425">
-            <a:noAutofit/>
-          </a:bodyPr>
-          <a:lstStyle/>
-          <a:p>
-            <a:pPr indent="0" lvl="0" marL="0" rtl="0" algn="just">
-              <a:lnSpc>
-                <a:spcPct val="115000"/>
-              </a:lnSpc>
-              <a:spcBef>
-                <a:spcPts val="0"/>
-              </a:spcBef>
-              <a:spcAft>
-                <a:spcPts val="0"/>
-              </a:spcAft>
-              <a:buNone/>
-            </a:pPr>
-            <a:r>
-              <a:t/>
-            </a:r>
-            <a:endParaRPr b="1">
-              <a:solidFill>
-                <a:schemeClr val="dk1"/>
-              </a:solidFill>
-            </a:endParaRPr>
-          </a:p>
-          <a:p>
-            <a:pPr indent="0" lvl="0" marL="0" rtl="0" algn="just">
-              <a:lnSpc>
-                <a:spcPct val="115000"/>
-              </a:lnSpc>
-              <a:spcBef>
-                <a:spcPts val="0"/>
-              </a:spcBef>
-              <a:spcAft>
-                <a:spcPts val="0"/>
-              </a:spcAft>
-              <a:buNone/>
-            </a:pPr>
-            <a:r>
-              <a:rPr b="1" lang="en">
-                <a:solidFill>
-                  <a:schemeClr val="dk1"/>
-                </a:solidFill>
-              </a:rPr>
-              <a:t>GRUP 5: VALORACIÓ DE LA COMANDA</a:t>
-            </a:r>
-            <a:endParaRPr b="1">
-              <a:solidFill>
-                <a:schemeClr val="dk1"/>
-              </a:solidFill>
-            </a:endParaRPr>
-          </a:p>
-          <a:p>
-            <a:pPr indent="0" lvl="0" marL="0" rtl="0" algn="just">
-              <a:lnSpc>
-                <a:spcPct val="115000"/>
-              </a:lnSpc>
-              <a:spcBef>
-                <a:spcPts val="0"/>
-              </a:spcBef>
-              <a:spcAft>
-                <a:spcPts val="0"/>
-              </a:spcAft>
-              <a:buNone/>
-            </a:pPr>
-            <a:r>
-              <a:t/>
-            </a:r>
-            <a:endParaRPr>
-              <a:solidFill>
-                <a:schemeClr val="dk1"/>
-              </a:solidFill>
-            </a:endParaRPr>
-          </a:p>
-          <a:p>
-            <a:pPr indent="0" lvl="0" marL="0" rtl="0" algn="just">
-              <a:lnSpc>
-                <a:spcPct val="115000"/>
-              </a:lnSpc>
-              <a:spcBef>
-                <a:spcPts val="0"/>
-              </a:spcBef>
-              <a:spcAft>
-                <a:spcPts val="0"/>
-              </a:spcAft>
-              <a:buNone/>
-            </a:pPr>
-            <a:r>
-              <a:rPr b="1" lang="en">
-                <a:solidFill>
-                  <a:schemeClr val="dk1"/>
-                </a:solidFill>
-              </a:rPr>
-              <a:t>RF 33: </a:t>
-            </a:r>
-            <a:r>
-              <a:rPr lang="en">
-                <a:solidFill>
-                  <a:schemeClr val="dk1"/>
-                </a:solidFill>
-              </a:rPr>
-              <a:t>El client pot valorar una comanda un cop l'ha rebut en camps com "puntualitat" i "estat del menjar".</a:t>
-            </a:r>
-            <a:endParaRPr>
-              <a:solidFill>
-                <a:schemeClr val="dk1"/>
-              </a:solidFill>
-            </a:endParaRPr>
-          </a:p>
-          <a:p>
-            <a:pPr indent="0" lvl="0" marL="0" rtl="0" algn="just">
-              <a:lnSpc>
-                <a:spcPct val="115000"/>
-              </a:lnSpc>
-              <a:spcBef>
-                <a:spcPts val="0"/>
-              </a:spcBef>
-              <a:spcAft>
-                <a:spcPts val="0"/>
-              </a:spcAft>
-              <a:buNone/>
-            </a:pPr>
-            <a:r>
-              <a:rPr b="1" lang="en">
-                <a:solidFill>
-                  <a:schemeClr val="dk1"/>
-                </a:solidFill>
-              </a:rPr>
-              <a:t>RF 34: </a:t>
-            </a:r>
-            <a:r>
-              <a:rPr lang="en">
-                <a:solidFill>
-                  <a:schemeClr val="dk1"/>
-                </a:solidFill>
-              </a:rPr>
-              <a:t>Les valoracions s'associen al cuiner que ha preparat el plat. </a:t>
-            </a:r>
-            <a:endParaRPr>
-              <a:solidFill>
-                <a:schemeClr val="dk1"/>
-              </a:solidFill>
-            </a:endParaRPr>
-          </a:p>
-          <a:p>
-            <a:pPr indent="0" lvl="0" marL="0" rtl="0" algn="just">
-              <a:lnSpc>
-                <a:spcPct val="115000"/>
-              </a:lnSpc>
-              <a:spcBef>
-                <a:spcPts val="0"/>
-              </a:spcBef>
-              <a:spcAft>
-                <a:spcPts val="0"/>
-              </a:spcAft>
-              <a:buNone/>
-            </a:pPr>
-            <a:r>
-              <a:rPr b="1" lang="en" u="sng">
-                <a:solidFill>
-                  <a:schemeClr val="dk1"/>
-                </a:solidFill>
-              </a:rPr>
-              <a:t>RNF 35</a:t>
-            </a:r>
-            <a:r>
-              <a:rPr b="1" lang="en">
-                <a:solidFill>
-                  <a:schemeClr val="dk1"/>
-                </a:solidFill>
-              </a:rPr>
-              <a:t>: </a:t>
-            </a:r>
-            <a:r>
-              <a:rPr lang="en">
-                <a:solidFill>
-                  <a:schemeClr val="dk1"/>
-                </a:solidFill>
-              </a:rPr>
-              <a:t>Els cuiners recomanats s’ordenen segons la seva valoració (a major valoració, més amunt apareixen). (RNF de </a:t>
-            </a:r>
-            <a:r>
-              <a:rPr lang="en" u="sng">
-                <a:solidFill>
-                  <a:schemeClr val="dk1"/>
-                </a:solidFill>
-              </a:rPr>
-              <a:t>Decisió de Disseny</a:t>
-            </a:r>
-            <a:r>
-              <a:rPr lang="en">
-                <a:solidFill>
-                  <a:schemeClr val="dk1"/>
-                </a:solidFill>
-              </a:rPr>
-              <a:t>). </a:t>
-            </a:r>
-            <a:endParaRPr>
-              <a:solidFill>
-                <a:schemeClr val="dk1"/>
-              </a:solidFill>
-            </a:endParaRPr>
-          </a:p>
-          <a:p>
-            <a:pPr indent="0" lvl="0" marL="0" rtl="0" algn="just">
-              <a:lnSpc>
-                <a:spcPct val="115000"/>
-              </a:lnSpc>
-              <a:spcBef>
-                <a:spcPts val="0"/>
-              </a:spcBef>
-              <a:spcAft>
-                <a:spcPts val="0"/>
-              </a:spcAft>
-              <a:buNone/>
-            </a:pPr>
-            <a:r>
-              <a:t/>
-            </a:r>
-            <a:endParaRPr>
+            <a:endParaRPr b="1" sz="1300">
               <a:solidFill>
                 <a:schemeClr val="dk1"/>
               </a:solidFill>

--- a/Documents/Sprint_Reviews/Sprint_Review01.pptx
+++ b/Documents/Sprint_Reviews/Sprint_Review01.pptx
@@ -21,24 +21,26 @@
     <p:sldId id="266" r:id="rId15"/>
     <p:sldId id="267" r:id="rId16"/>
     <p:sldId id="268" r:id="rId17"/>
+    <p:sldId id="269" r:id="rId18"/>
+    <p:sldId id="270" r:id="rId19"/>
   </p:sldIdLst>
   <p:sldSz cy="5143500" cx="9144000"/>
   <p:notesSz cx="6858000" cy="9144000"/>
   <p:embeddedFontLst>
     <p:embeddedFont>
       <p:font typeface="Hind"/>
-      <p:regular r:id="rId18"/>
-      <p:bold r:id="rId19"/>
-    </p:embeddedFont>
-    <p:embeddedFont>
-      <p:font typeface="Space Grotesk Medium"/>
       <p:regular r:id="rId20"/>
       <p:bold r:id="rId21"/>
     </p:embeddedFont>
     <p:embeddedFont>
-      <p:font typeface="Space Grotesk"/>
+      <p:font typeface="Space Grotesk Medium"/>
       <p:regular r:id="rId22"/>
       <p:bold r:id="rId23"/>
+    </p:embeddedFont>
+    <p:embeddedFont>
+      <p:font typeface="Space Grotesk"/>
+      <p:regular r:id="rId24"/>
+      <p:bold r:id="rId25"/>
     </p:embeddedFont>
   </p:embeddedFontLst>
   <p:defaultTextStyle>
@@ -804,7 +806,7 @@
   <p:cSld>
     <p:spTree>
       <p:nvGrpSpPr>
-        <p:cNvPr id="172" name="Shape 172"/>
+        <p:cNvPr id="173" name="Shape 173"/>
         <p:cNvGrpSpPr/>
         <p:nvPr/>
       </p:nvGrpSpPr>
@@ -818,7 +820,7 @@
       </p:grpSpPr>
       <p:sp>
         <p:nvSpPr>
-          <p:cNvPr id="173" name="Google Shape;173;g396060f51c5_0_16:notes"/>
+          <p:cNvPr id="174" name="Google Shape;174;g3d0e79b5b18_0_16:notes"/>
           <p:cNvSpPr/>
           <p:nvPr>
             <p:ph idx="2" type="sldImg"/>
@@ -853,7 +855,7 @@
       </p:sp>
       <p:sp>
         <p:nvSpPr>
-          <p:cNvPr id="174" name="Google Shape;174;g396060f51c5_0_16:notes"/>
+          <p:cNvPr id="175" name="Google Shape;175;g3d0e79b5b18_0_16:notes"/>
           <p:cNvSpPr txBox="1"/>
           <p:nvPr>
             <p:ph idx="1" type="body"/>
@@ -884,8 +886,85 @@
               <a:buNone/>
             </a:pPr>
             <a:r>
+              <a:rPr lang="en">
+                <a:solidFill>
+                  <a:schemeClr val="dk1"/>
+                </a:solidFill>
+              </a:rPr>
+              <a:t>Feedback de la 1a presentación: </a:t>
+            </a:r>
+            <a:endParaRPr/>
+          </a:p>
+          <a:p>
+            <a:pPr indent="-298450" lvl="0" marL="457200" rtl="0" algn="l">
+              <a:spcBef>
+                <a:spcPts val="0"/>
+              </a:spcBef>
+              <a:spcAft>
+                <a:spcPts val="0"/>
+              </a:spcAft>
+              <a:buSzPts val="1100"/>
+              <a:buChar char="-"/>
+            </a:pPr>
+            <a:r>
               <a:rPr lang="en"/>
-              <a:t>-34 fusionat amb 33</a:t>
+              <a:t>26 fusionar amb 25</a:t>
+            </a:r>
+            <a:endParaRPr/>
+          </a:p>
+          <a:p>
+            <a:pPr indent="0" lvl="0" marL="457200" rtl="0" algn="l">
+              <a:spcBef>
+                <a:spcPts val="0"/>
+              </a:spcBef>
+              <a:spcAft>
+                <a:spcPts val="0"/>
+              </a:spcAft>
+              <a:buNone/>
+            </a:pPr>
+            <a:r>
+              <a:t/>
+            </a:r>
+            <a:endParaRPr/>
+          </a:p>
+          <a:p>
+            <a:pPr indent="0" lvl="0" marL="0" rtl="0" algn="l">
+              <a:spcBef>
+                <a:spcPts val="0"/>
+              </a:spcBef>
+              <a:spcAft>
+                <a:spcPts val="0"/>
+              </a:spcAft>
+              <a:buNone/>
+            </a:pPr>
+            <a:r>
+              <a:rPr lang="en"/>
+              <a:t>Cambio:</a:t>
+            </a:r>
+            <a:endParaRPr/>
+          </a:p>
+          <a:p>
+            <a:pPr indent="-298450" lvl="0" marL="457200" rtl="0" algn="l">
+              <a:spcBef>
+                <a:spcPts val="0"/>
+              </a:spcBef>
+              <a:spcAft>
+                <a:spcPts val="0"/>
+              </a:spcAft>
+              <a:buSzPts val="1100"/>
+              <a:buChar char="-"/>
+            </a:pPr>
+            <a:r>
+              <a:rPr lang="en"/>
+              <a:t>“</a:t>
+            </a:r>
+            <a:r>
+              <a:rPr lang="en"/>
+              <a:t>Cálculo</a:t>
+            </a:r>
+            <a:r>
+              <a:rPr lang="en"/>
+              <a:t> de costes de envío” + “envío gratis” en un solo requisito</a:t>
             </a:r>
             <a:endParaRPr/>
           </a:p>
@@ -904,7 +983,7 @@
   <p:cSld>
     <p:spTree>
       <p:nvGrpSpPr>
-        <p:cNvPr id="178" name="Shape 178"/>
+        <p:cNvPr id="179" name="Shape 179"/>
         <p:cNvGrpSpPr/>
         <p:nvPr/>
       </p:nvGrpSpPr>
@@ -918,7 +997,7 @@
       </p:grpSpPr>
       <p:sp>
         <p:nvSpPr>
-          <p:cNvPr id="179" name="Google Shape;179;g396060f51c5_0_26:notes"/>
+          <p:cNvPr id="180" name="Google Shape;180;g396060f51c5_0_11:notes"/>
           <p:cNvSpPr/>
           <p:nvPr>
             <p:ph idx="2" type="sldImg"/>
@@ -953,7 +1032,7 @@
       </p:sp>
       <p:sp>
         <p:nvSpPr>
-          <p:cNvPr id="180" name="Google Shape;180;g396060f51c5_0_26:notes"/>
+          <p:cNvPr id="181" name="Google Shape;181;g396060f51c5_0_11:notes"/>
           <p:cNvSpPr txBox="1"/>
           <p:nvPr>
             <p:ph idx="1" type="body"/>
@@ -984,8 +1063,94 @@
               <a:buNone/>
             </a:pPr>
             <a:r>
+              <a:rPr lang="en">
+                <a:solidFill>
+                  <a:schemeClr val="dk1"/>
+                </a:solidFill>
+              </a:rPr>
+              <a:t>Feedback de la 1a presentación: </a:t>
+            </a:r>
+            <a:endParaRPr/>
+          </a:p>
+          <a:p>
+            <a:pPr indent="-298450" lvl="0" marL="457200" rtl="0" algn="l">
+              <a:spcBef>
+                <a:spcPts val="0"/>
+              </a:spcBef>
+              <a:spcAft>
+                <a:spcPts val="0"/>
+              </a:spcAft>
+              <a:buSzPts val="1100"/>
+              <a:buChar char="-"/>
+            </a:pPr>
+            <a:r>
               <a:rPr lang="en"/>
-              <a:t>40 fusionar amb fer comanda</a:t>
+              <a:t>31 fusionar con 29</a:t>
+            </a:r>
+            <a:endParaRPr/>
+          </a:p>
+          <a:p>
+            <a:pPr indent="-298450" lvl="0" marL="457200" rtl="0" algn="l">
+              <a:spcBef>
+                <a:spcPts val="0"/>
+              </a:spcBef>
+              <a:spcAft>
+                <a:spcPts val="0"/>
+              </a:spcAft>
+              <a:buSzPts val="1100"/>
+              <a:buChar char="-"/>
+            </a:pPr>
+            <a:r>
+              <a:rPr lang="en"/>
+              <a:t>32 lo pondria en creacion de comptes</a:t>
+            </a:r>
+            <a:endParaRPr/>
+          </a:p>
+          <a:p>
+            <a:pPr indent="0" lvl="0" marL="0" rtl="0" algn="l">
+              <a:spcBef>
+                <a:spcPts val="0"/>
+              </a:spcBef>
+              <a:spcAft>
+                <a:spcPts val="0"/>
+              </a:spcAft>
+              <a:buNone/>
+            </a:pPr>
+            <a:r>
+              <a:t/>
+            </a:r>
+            <a:endParaRPr/>
+          </a:p>
+          <a:p>
+            <a:pPr indent="0" lvl="0" marL="0" rtl="0" algn="l">
+              <a:spcBef>
+                <a:spcPts val="0"/>
+              </a:spcBef>
+              <a:spcAft>
+                <a:spcPts val="0"/>
+              </a:spcAft>
+              <a:buNone/>
+            </a:pPr>
+            <a:r>
+              <a:rPr lang="en"/>
+              <a:t>Cambio: </a:t>
+            </a:r>
+            <a:endParaRPr/>
+          </a:p>
+          <a:p>
+            <a:pPr indent="-298450" lvl="0" marL="457200" rtl="0" algn="l">
+              <a:spcBef>
+                <a:spcPts val="0"/>
+              </a:spcBef>
+              <a:spcAft>
+                <a:spcPts val="0"/>
+              </a:spcAft>
+              <a:buSzPts val="1100"/>
+              <a:buChar char="-"/>
+            </a:pPr>
+            <a:r>
+              <a:rPr lang="en"/>
+              <a:t>“Pago con tarjeta/PayPal” + “cocinero y repartidor reciben ingreso”</a:t>
             </a:r>
             <a:endParaRPr/>
           </a:p>
@@ -1004,7 +1169,7 @@
   <p:cSld>
     <p:spTree>
       <p:nvGrpSpPr>
-        <p:cNvPr id="184" name="Shape 184"/>
+        <p:cNvPr id="185" name="Shape 185"/>
         <p:cNvGrpSpPr/>
         <p:nvPr/>
       </p:nvGrpSpPr>
@@ -1018,7 +1183,7 @@
       </p:grpSpPr>
       <p:sp>
         <p:nvSpPr>
-          <p:cNvPr id="185" name="Google Shape;185;g396060f51c5_0_31:notes"/>
+          <p:cNvPr id="186" name="Google Shape;186;g396060f51c5_0_16:notes"/>
           <p:cNvSpPr/>
           <p:nvPr>
             <p:ph idx="2" type="sldImg"/>
@@ -1053,7 +1218,7 @@
       </p:sp>
       <p:sp>
         <p:nvSpPr>
-          <p:cNvPr id="186" name="Google Shape;186;g396060f51c5_0_31:notes"/>
+          <p:cNvPr id="187" name="Google Shape;187;g396060f51c5_0_16:notes"/>
           <p:cNvSpPr txBox="1"/>
           <p:nvPr>
             <p:ph idx="1" type="body"/>
@@ -1084,8 +1249,77 @@
               <a:buNone/>
             </a:pPr>
             <a:r>
+              <a:rPr lang="en">
+                <a:solidFill>
+                  <a:schemeClr val="dk1"/>
+                </a:solidFill>
+              </a:rPr>
+              <a:t>Feedback de la 1a presentación: </a:t>
+            </a:r>
+            <a:endParaRPr/>
+          </a:p>
+          <a:p>
+            <a:pPr indent="-298450" lvl="0" marL="457200" rtl="0" algn="l">
+              <a:spcBef>
+                <a:spcPts val="0"/>
+              </a:spcBef>
+              <a:spcAft>
+                <a:spcPts val="0"/>
+              </a:spcAft>
+              <a:buSzPts val="1100"/>
+              <a:buChar char="-"/>
+            </a:pPr>
+            <a:r>
               <a:rPr lang="en"/>
-              <a:t>-</a:t>
+              <a:t>34 fusionat amb 33</a:t>
+            </a:r>
+            <a:endParaRPr/>
+          </a:p>
+          <a:p>
+            <a:pPr indent="0" lvl="0" marL="0" rtl="0" algn="l">
+              <a:spcBef>
+                <a:spcPts val="0"/>
+              </a:spcBef>
+              <a:spcAft>
+                <a:spcPts val="0"/>
+              </a:spcAft>
+              <a:buNone/>
+            </a:pPr>
+            <a:r>
+              <a:t/>
+            </a:r>
+            <a:endParaRPr/>
+          </a:p>
+          <a:p>
+            <a:pPr indent="0" lvl="0" marL="0" rtl="0" algn="l">
+              <a:spcBef>
+                <a:spcPts val="0"/>
+              </a:spcBef>
+              <a:spcAft>
+                <a:spcPts val="0"/>
+              </a:spcAft>
+              <a:buNone/>
+            </a:pPr>
+            <a:r>
+              <a:rPr lang="en"/>
+              <a:t>Cambio: </a:t>
+            </a:r>
+            <a:endParaRPr/>
+          </a:p>
+          <a:p>
+            <a:pPr indent="-298450" lvl="0" marL="457200" rtl="0" algn="l">
+              <a:spcBef>
+                <a:spcPts val="0"/>
+              </a:spcBef>
+              <a:spcAft>
+                <a:spcPts val="0"/>
+              </a:spcAft>
+              <a:buSzPts val="1100"/>
+              <a:buChar char="-"/>
+            </a:pPr>
+            <a:r>
+              <a:rPr lang="en"/>
+              <a:t>“Cliente escribe valoración” + ·Valoración asociada al cocinero”</a:t>
             </a:r>
             <a:endParaRPr/>
           </a:p>
@@ -1104,7 +1338,7 @@
   <p:cSld>
     <p:spTree>
       <p:nvGrpSpPr>
-        <p:cNvPr id="190" name="Shape 190"/>
+        <p:cNvPr id="191" name="Shape 191"/>
         <p:cNvGrpSpPr/>
         <p:nvPr/>
       </p:nvGrpSpPr>
@@ -1118,7 +1352,7 @@
       </p:grpSpPr>
       <p:sp>
         <p:nvSpPr>
-          <p:cNvPr id="191" name="Google Shape;191;g3cf70ef3b9e_0_30:notes"/>
+          <p:cNvPr id="192" name="Google Shape;192;g396060f51c5_0_26:notes"/>
           <p:cNvSpPr/>
           <p:nvPr>
             <p:ph idx="2" type="sldImg"/>
@@ -1153,7 +1387,289 @@
       </p:sp>
       <p:sp>
         <p:nvSpPr>
-          <p:cNvPr id="192" name="Google Shape;192;g3cf70ef3b9e_0_30:notes"/>
+          <p:cNvPr id="193" name="Google Shape;193;g396060f51c5_0_26:notes"/>
+          <p:cNvSpPr txBox="1"/>
+          <p:nvPr>
+            <p:ph idx="1" type="body"/>
+          </p:nvPr>
+        </p:nvSpPr>
+        <p:spPr>
+          <a:xfrm>
+            <a:off x="685800" y="4343400"/>
+            <a:ext cx="5486400" cy="4114800"/>
+          </a:xfrm>
+          <a:prstGeom prst="rect">
+            <a:avLst/>
+          </a:prstGeom>
+        </p:spPr>
+        <p:txBody>
+          <a:bodyPr anchorCtr="0" anchor="t" bIns="91425" lIns="91425" spcFirstLastPara="1" rIns="91425" wrap="square" tIns="91425">
+            <a:noAutofit/>
+          </a:bodyPr>
+          <a:lstStyle/>
+          <a:p>
+            <a:pPr indent="0" lvl="0" marL="0" rtl="0" algn="l">
+              <a:spcBef>
+                <a:spcPts val="0"/>
+              </a:spcBef>
+              <a:spcAft>
+                <a:spcPts val="0"/>
+              </a:spcAft>
+              <a:buNone/>
+            </a:pPr>
+            <a:r>
+              <a:rPr lang="en">
+                <a:solidFill>
+                  <a:schemeClr val="dk1"/>
+                </a:solidFill>
+              </a:rPr>
+              <a:t>Feedback de la 1a presentación: </a:t>
+            </a:r>
+            <a:endParaRPr/>
+          </a:p>
+          <a:p>
+            <a:pPr indent="-298450" lvl="0" marL="457200" rtl="0" algn="l">
+              <a:spcBef>
+                <a:spcPts val="0"/>
+              </a:spcBef>
+              <a:spcAft>
+                <a:spcPts val="0"/>
+              </a:spcAft>
+              <a:buSzPts val="1100"/>
+              <a:buChar char="-"/>
+            </a:pPr>
+            <a:r>
+              <a:rPr lang="en"/>
+              <a:t>40 fusionar amb fer comanda</a:t>
+            </a:r>
+            <a:endParaRPr/>
+          </a:p>
+          <a:p>
+            <a:pPr indent="0" lvl="0" marL="0" rtl="0" algn="l">
+              <a:spcBef>
+                <a:spcPts val="0"/>
+              </a:spcBef>
+              <a:spcAft>
+                <a:spcPts val="0"/>
+              </a:spcAft>
+              <a:buNone/>
+            </a:pPr>
+            <a:r>
+              <a:t/>
+            </a:r>
+            <a:endParaRPr/>
+          </a:p>
+          <a:p>
+            <a:pPr indent="0" lvl="0" marL="0" rtl="0" algn="l">
+              <a:spcBef>
+                <a:spcPts val="0"/>
+              </a:spcBef>
+              <a:spcAft>
+                <a:spcPts val="0"/>
+              </a:spcAft>
+              <a:buNone/>
+            </a:pPr>
+            <a:r>
+              <a:rPr lang="en"/>
+              <a:t>Cambio: se añadió al GRUP 2 (RF-2-12: Si es fan comandes es guanyen punts que serveixen per a obtenir descomptes.)</a:t>
+            </a:r>
+            <a:endParaRPr/>
+          </a:p>
+        </p:txBody>
+      </p:sp>
+    </p:spTree>
+  </p:cSld>
+  <p:clrMapOvr>
+    <a:masterClrMapping/>
+  </p:clrMapOvr>
+</p:notes>
+</file>
+
+<file path=ppt/notesSlides/notesSlide14.xml><?xml version="1.0" encoding="utf-8"?>
+<p:notes xmlns:a="http://schemas.openxmlformats.org/drawingml/2006/main" xmlns:r="http://schemas.openxmlformats.org/officeDocument/2006/relationships" xmlns:mc="http://schemas.openxmlformats.org/markup-compatibility/2006" xmlns:mv="urn:schemas-microsoft-com:mac:vml" xmlns:p="http://schemas.openxmlformats.org/presentationml/2006/main" xmlns:c="http://schemas.openxmlformats.org/drawingml/2006/chart" xmlns:dgm="http://schemas.openxmlformats.org/drawingml/2006/diagram" xmlns:o="urn:schemas-microsoft-com:office:office" xmlns:v="urn:schemas-microsoft-com:vml" xmlns:pvml="urn:schemas-microsoft-com:office:powerpoint" xmlns:com="http://schemas.openxmlformats.org/drawingml/2006/compatibility" xmlns:p14="http://schemas.microsoft.com/office/powerpoint/2010/main" xmlns:p15="http://schemas.microsoft.com/office/powerpoint/2012/main" xmlns:ahyp="http://schemas.microsoft.com/office/drawing/2018/hyperlinkcolor" showMasterPhAnim="0" showMasterSp="0">
+  <p:cSld>
+    <p:spTree>
+      <p:nvGrpSpPr>
+        <p:cNvPr id="197" name="Shape 197"/>
+        <p:cNvGrpSpPr/>
+        <p:nvPr/>
+      </p:nvGrpSpPr>
+      <p:grpSpPr>
+        <a:xfrm>
+          <a:off x="0" y="0"/>
+          <a:ext cx="0" cy="0"/>
+          <a:chOff x="0" y="0"/>
+          <a:chExt cx="0" cy="0"/>
+        </a:xfrm>
+      </p:grpSpPr>
+      <p:sp>
+        <p:nvSpPr>
+          <p:cNvPr id="198" name="Google Shape;198;g396060f51c5_0_31:notes"/>
+          <p:cNvSpPr/>
+          <p:nvPr>
+            <p:ph idx="2" type="sldImg"/>
+          </p:nvPr>
+        </p:nvSpPr>
+        <p:spPr>
+          <a:xfrm>
+            <a:off x="381300" y="685800"/>
+            <a:ext cx="6096000" cy="3429000"/>
+          </a:xfrm>
+          <a:custGeom>
+            <a:rect b="b" l="l" r="r" t="t"/>
+            <a:pathLst>
+              <a:path extrusionOk="0" h="120000" w="120000">
+                <a:moveTo>
+                  <a:pt x="0" y="0"/>
+                </a:moveTo>
+                <a:lnTo>
+                  <a:pt x="120000" y="0"/>
+                </a:lnTo>
+                <a:lnTo>
+                  <a:pt x="120000" y="120000"/>
+                </a:lnTo>
+                <a:lnTo>
+                  <a:pt x="0" y="120000"/>
+                </a:lnTo>
+                <a:close/>
+              </a:path>
+            </a:pathLst>
+          </a:custGeom>
+        </p:spPr>
+      </p:sp>
+      <p:sp>
+        <p:nvSpPr>
+          <p:cNvPr id="199" name="Google Shape;199;g396060f51c5_0_31:notes"/>
+          <p:cNvSpPr txBox="1"/>
+          <p:nvPr>
+            <p:ph idx="1" type="body"/>
+          </p:nvPr>
+        </p:nvSpPr>
+        <p:spPr>
+          <a:xfrm>
+            <a:off x="685800" y="4343400"/>
+            <a:ext cx="5486400" cy="4114800"/>
+          </a:xfrm>
+          <a:prstGeom prst="rect">
+            <a:avLst/>
+          </a:prstGeom>
+        </p:spPr>
+        <p:txBody>
+          <a:bodyPr anchorCtr="0" anchor="t" bIns="91425" lIns="91425" spcFirstLastPara="1" rIns="91425" wrap="square" tIns="91425">
+            <a:noAutofit/>
+          </a:bodyPr>
+          <a:lstStyle/>
+          <a:p>
+            <a:pPr indent="0" lvl="0" marL="0" rtl="0" algn="l">
+              <a:spcBef>
+                <a:spcPts val="0"/>
+              </a:spcBef>
+              <a:spcAft>
+                <a:spcPts val="0"/>
+              </a:spcAft>
+              <a:buClr>
+                <a:schemeClr val="dk1"/>
+              </a:buClr>
+              <a:buSzPts val="1100"/>
+              <a:buFont typeface="Arial"/>
+              <a:buNone/>
+            </a:pPr>
+            <a:r>
+              <a:rPr lang="en">
+                <a:solidFill>
+                  <a:schemeClr val="dk1"/>
+                </a:solidFill>
+              </a:rPr>
+              <a:t>Feedback de la 1a presentación: </a:t>
+            </a:r>
+            <a:endParaRPr>
+              <a:solidFill>
+                <a:schemeClr val="dk1"/>
+              </a:solidFill>
+            </a:endParaRPr>
+          </a:p>
+          <a:p>
+            <a:pPr indent="-298450" lvl="0" marL="457200" rtl="0" algn="l">
+              <a:spcBef>
+                <a:spcPts val="0"/>
+              </a:spcBef>
+              <a:spcAft>
+                <a:spcPts val="0"/>
+              </a:spcAft>
+              <a:buSzPts val="1100"/>
+              <a:buChar char="-"/>
+            </a:pPr>
+            <a:r>
+              <a:rPr lang="en"/>
+              <a:t>Todo ok</a:t>
+            </a:r>
+            <a:endParaRPr/>
+          </a:p>
+        </p:txBody>
+      </p:sp>
+    </p:spTree>
+  </p:cSld>
+  <p:clrMapOvr>
+    <a:masterClrMapping/>
+  </p:clrMapOvr>
+</p:notes>
+</file>
+
+<file path=ppt/notesSlides/notesSlide15.xml><?xml version="1.0" encoding="utf-8"?>
+<p:notes xmlns:a="http://schemas.openxmlformats.org/drawingml/2006/main" xmlns:r="http://schemas.openxmlformats.org/officeDocument/2006/relationships" xmlns:mc="http://schemas.openxmlformats.org/markup-compatibility/2006" xmlns:mv="urn:schemas-microsoft-com:mac:vml" xmlns:p="http://schemas.openxmlformats.org/presentationml/2006/main" xmlns:c="http://schemas.openxmlformats.org/drawingml/2006/chart" xmlns:dgm="http://schemas.openxmlformats.org/drawingml/2006/diagram" xmlns:o="urn:schemas-microsoft-com:office:office" xmlns:v="urn:schemas-microsoft-com:vml" xmlns:pvml="urn:schemas-microsoft-com:office:powerpoint" xmlns:com="http://schemas.openxmlformats.org/drawingml/2006/compatibility" xmlns:p14="http://schemas.microsoft.com/office/powerpoint/2010/main" xmlns:p15="http://schemas.microsoft.com/office/powerpoint/2012/main" xmlns:ahyp="http://schemas.microsoft.com/office/drawing/2018/hyperlinkcolor" showMasterPhAnim="0" showMasterSp="0">
+  <p:cSld>
+    <p:spTree>
+      <p:nvGrpSpPr>
+        <p:cNvPr id="203" name="Shape 203"/>
+        <p:cNvGrpSpPr/>
+        <p:nvPr/>
+      </p:nvGrpSpPr>
+      <p:grpSpPr>
+        <a:xfrm>
+          <a:off x="0" y="0"/>
+          <a:ext cx="0" cy="0"/>
+          <a:chOff x="0" y="0"/>
+          <a:chExt cx="0" cy="0"/>
+        </a:xfrm>
+      </p:grpSpPr>
+      <p:sp>
+        <p:nvSpPr>
+          <p:cNvPr id="204" name="Google Shape;204;g3cf70ef3b9e_0_30:notes"/>
+          <p:cNvSpPr/>
+          <p:nvPr>
+            <p:ph idx="2" type="sldImg"/>
+          </p:nvPr>
+        </p:nvSpPr>
+        <p:spPr>
+          <a:xfrm>
+            <a:off x="381300" y="685800"/>
+            <a:ext cx="6096000" cy="3429000"/>
+          </a:xfrm>
+          <a:custGeom>
+            <a:rect b="b" l="l" r="r" t="t"/>
+            <a:pathLst>
+              <a:path extrusionOk="0" h="120000" w="120000">
+                <a:moveTo>
+                  <a:pt x="0" y="0"/>
+                </a:moveTo>
+                <a:lnTo>
+                  <a:pt x="120000" y="0"/>
+                </a:lnTo>
+                <a:lnTo>
+                  <a:pt x="120000" y="120000"/>
+                </a:lnTo>
+                <a:lnTo>
+                  <a:pt x="0" y="120000"/>
+                </a:lnTo>
+                <a:close/>
+              </a:path>
+            </a:pathLst>
+          </a:custGeom>
+        </p:spPr>
+      </p:sp>
+      <p:sp>
+        <p:nvSpPr>
+          <p:cNvPr id="205" name="Google Shape;205;g3cf70ef3b9e_0_30:notes"/>
           <p:cNvSpPr txBox="1"/>
           <p:nvPr>
             <p:ph idx="1" type="body"/>
@@ -1517,78 +2033,83 @@
             </a:pPr>
             <a:r>
               <a:rPr lang="en"/>
-              <a:t>Perfil d’usuari NO registrat (pot consultar però no fer comandes)</a:t>
+              <a:t>Feedback de la 1a interview: </a:t>
             </a:r>
             <a:endParaRPr/>
           </a:p>
           <a:p>
-            <a:pPr indent="0" lvl="0" marL="0" rtl="0" algn="l">
-              <a:spcBef>
-                <a:spcPts val="0"/>
-              </a:spcBef>
-              <a:spcAft>
-                <a:spcPts val="0"/>
-              </a:spcAft>
-              <a:buNone/>
+            <a:pPr indent="-298450" lvl="0" marL="457200" rtl="0" algn="l">
+              <a:spcBef>
+                <a:spcPts val="0"/>
+              </a:spcBef>
+              <a:spcAft>
+                <a:spcPts val="0"/>
+              </a:spcAft>
+              <a:buSzPts val="1100"/>
+              <a:buChar char="-"/>
             </a:pPr>
             <a:r>
               <a:rPr lang="en"/>
-              <a:t>Perfil d’usuari </a:t>
-            </a:r>
-            <a:r>
-              <a:rPr lang="en">
-                <a:solidFill>
-                  <a:schemeClr val="dk1"/>
-                </a:solidFill>
-              </a:rPr>
-              <a:t>registrat </a:t>
-            </a:r>
-            <a:r>
-              <a:rPr lang="en"/>
-              <a:t>(base), dels quals pengen client cuiner i repartidor</a:t>
+              <a:t>Perfil d’usuari NO registrat (pot consultar però no fer comandes)</a:t>
             </a:r>
             <a:endParaRPr/>
           </a:p>
           <a:p>
-            <a:pPr indent="0" lvl="0" marL="0" rtl="0" algn="l">
-              <a:spcBef>
-                <a:spcPts val="0"/>
-              </a:spcBef>
-              <a:spcAft>
-                <a:spcPts val="0"/>
-              </a:spcAft>
-              <a:buNone/>
+            <a:pPr indent="-298450" lvl="0" marL="457200" rtl="0" algn="l">
+              <a:spcBef>
+                <a:spcPts val="0"/>
+              </a:spcBef>
+              <a:spcAft>
+                <a:spcPts val="0"/>
+              </a:spcAft>
+              <a:buSzPts val="1100"/>
+              <a:buChar char="-"/>
             </a:pPr>
             <a:r>
               <a:rPr lang="en"/>
-              <a:t>Perfils de noseque externes (Google maps, paypal…) → esto de momento no lo hemos hecho en clase, ignorar :D</a:t>
+              <a:t>Perfil d’usuari </a:t>
+            </a:r>
+            <a:r>
+              <a:rPr lang="en">
+                <a:solidFill>
+                  <a:schemeClr val="dk1"/>
+                </a:solidFill>
+              </a:rPr>
+              <a:t>registrat </a:t>
+            </a:r>
+            <a:r>
+              <a:rPr lang="en"/>
+              <a:t>(base), dels quals pengen client cuiner i repartidor</a:t>
             </a:r>
             <a:endParaRPr/>
           </a:p>
           <a:p>
-            <a:pPr indent="0" lvl="0" marL="0" rtl="0" algn="l">
-              <a:spcBef>
-                <a:spcPts val="0"/>
-              </a:spcBef>
-              <a:spcAft>
-                <a:spcPts val="0"/>
-              </a:spcAft>
-              <a:buNone/>
+            <a:pPr indent="-298450" lvl="0" marL="457200" rtl="0" algn="l">
+              <a:spcBef>
+                <a:spcPts val="0"/>
+              </a:spcBef>
+              <a:spcAft>
+                <a:spcPts val="0"/>
+              </a:spcAft>
+              <a:buSzPts val="1100"/>
+              <a:buChar char="-"/>
             </a:pPr>
             <a:r>
-              <a:t/>
+              <a:rPr lang="en"/>
+              <a:t>Perfils de noseque externes (Google maps, paypal…) → esto de momento no lo hemos hecho en clase, ignorar :D</a:t>
             </a:r>
             <a:endParaRPr/>
           </a:p>
           <a:p>
-            <a:pPr indent="0" lvl="0" marL="0" rtl="0" algn="l">
-              <a:spcBef>
-                <a:spcPts val="0"/>
-              </a:spcBef>
-              <a:spcAft>
-                <a:spcPts val="0"/>
-              </a:spcAft>
-              <a:buNone/>
+            <a:pPr indent="-298450" lvl="0" marL="457200" rtl="0" algn="l">
+              <a:spcBef>
+                <a:spcPts val="0"/>
+              </a:spcBef>
+              <a:spcAft>
+                <a:spcPts val="0"/>
+              </a:spcAft>
+              <a:buSzPts val="1100"/>
+              <a:buChar char="-"/>
             </a:pPr>
             <a:r>
               <a:rPr lang="en"/>
@@ -1704,90 +2225,24 @@
             </a:pPr>
             <a:r>
               <a:rPr lang="en"/>
-              <a:t>Perfil d’usuari NO registrat (pot consultar però no fer comandes)</a:t>
+              <a:t>Cambios:</a:t>
             </a:r>
             <a:endParaRPr/>
           </a:p>
           <a:p>
-            <a:pPr indent="0" lvl="0" marL="0" rtl="0" algn="l">
-              <a:spcBef>
-                <a:spcPts val="0"/>
-              </a:spcBef>
-              <a:spcAft>
-                <a:spcPts val="0"/>
-              </a:spcAft>
-              <a:buNone/>
+            <a:pPr indent="-298450" lvl="0" marL="457200" rtl="0" algn="l">
+              <a:spcBef>
+                <a:spcPts val="0"/>
+              </a:spcBef>
+              <a:spcAft>
+                <a:spcPts val="0"/>
+              </a:spcAft>
+              <a:buSzPts val="1100"/>
+              <a:buChar char="-"/>
             </a:pPr>
             <a:r>
               <a:rPr lang="en"/>
-              <a:t>Perfil d’usuari </a:t>
-            </a:r>
-            <a:r>
-              <a:rPr lang="en">
-                <a:solidFill>
-                  <a:schemeClr val="dk1"/>
-                </a:solidFill>
-              </a:rPr>
-              <a:t>registrat </a:t>
-            </a:r>
-            <a:r>
-              <a:rPr lang="en"/>
-              <a:t>(base), dels quals pengen client cuiner i repartidor</a:t>
-            </a:r>
-            <a:endParaRPr/>
-          </a:p>
-          <a:p>
-            <a:pPr indent="0" lvl="0" marL="0" rtl="0" algn="l">
-              <a:spcBef>
-                <a:spcPts val="0"/>
-              </a:spcBef>
-              <a:spcAft>
-                <a:spcPts val="0"/>
-              </a:spcAft>
-              <a:buNone/>
-            </a:pPr>
-            <a:r>
-              <a:rPr lang="en"/>
-              <a:t>Perfils de noseque externes (Google maps, paypal…) → esto de momento no lo hemos hecho en clase, ignorar :D</a:t>
-            </a:r>
-            <a:endParaRPr/>
-          </a:p>
-          <a:p>
-            <a:pPr indent="0" lvl="0" marL="0" rtl="0" algn="l">
-              <a:spcBef>
-                <a:spcPts val="0"/>
-              </a:spcBef>
-              <a:spcAft>
-                <a:spcPts val="0"/>
-              </a:spcAft>
-              <a:buNone/>
-            </a:pPr>
-            <a:r>
-              <a:t/>
-            </a:r>
-            <a:endParaRPr/>
-          </a:p>
-          <a:p>
-            <a:pPr indent="0" lvl="0" marL="0" rtl="0" algn="l">
-              <a:spcBef>
-                <a:spcPts val="0"/>
-              </a:spcBef>
-              <a:spcAft>
-                <a:spcPts val="0"/>
-              </a:spcAft>
-              <a:buNone/>
-            </a:pPr>
-            <a:r>
-              <a:rPr lang="en"/>
-              <a:t>Cuiner no </a:t>
-            </a:r>
-            <a:r>
-              <a:rPr lang="en" u="sng"/>
-              <a:t>contracta</a:t>
-            </a:r>
-            <a:r>
-              <a:rPr lang="en"/>
-              <a:t>, es la app.</a:t>
+              <a:t>Definición de un perfil de usuario no registrado</a:t>
             </a:r>
             <a:endParaRPr/>
           </a:p>
@@ -1806,7 +2261,7 @@
   <p:cSld>
     <p:spTree>
       <p:nvGrpSpPr>
-        <p:cNvPr id="148" name="Shape 148"/>
+        <p:cNvPr id="149" name="Shape 149"/>
         <p:cNvGrpSpPr/>
         <p:nvPr/>
       </p:nvGrpSpPr>
@@ -1820,7 +2275,7 @@
       </p:grpSpPr>
       <p:sp>
         <p:nvSpPr>
-          <p:cNvPr id="149" name="Google Shape;149;g3cf70ef3b9e_0_26:notes"/>
+          <p:cNvPr id="150" name="Google Shape;150;g3cf70ef3b9e_0_26:notes"/>
           <p:cNvSpPr/>
           <p:nvPr>
             <p:ph idx="2" type="sldImg"/>
@@ -1855,7 +2310,7 @@
       </p:sp>
       <p:sp>
         <p:nvSpPr>
-          <p:cNvPr id="150" name="Google Shape;150;g3cf70ef3b9e_0_26:notes"/>
+          <p:cNvPr id="151" name="Google Shape;151;g3cf70ef3b9e_0_26:notes"/>
           <p:cNvSpPr txBox="1"/>
           <p:nvPr>
             <p:ph idx="1" type="body"/>
@@ -1886,51 +2341,59 @@
               <a:buNone/>
             </a:pPr>
             <a:r>
-              <a:rPr lang="en"/>
-              <a:t>EN LOS MARKDOWN DE TODOS LOS REQUISITOS: Revisar los títulos, tienen que tener verbo. </a:t>
+              <a:rPr lang="en">
+                <a:solidFill>
+                  <a:schemeClr val="dk1"/>
+                </a:solidFill>
+              </a:rPr>
+              <a:t>Feedback de la 1a presentación: </a:t>
             </a:r>
             <a:endParaRPr/>
           </a:p>
           <a:p>
-            <a:pPr indent="0" lvl="0" marL="0" rtl="0" algn="l">
-              <a:spcBef>
-                <a:spcPts val="0"/>
-              </a:spcBef>
-              <a:spcAft>
-                <a:spcPts val="0"/>
-              </a:spcAft>
-              <a:buNone/>
+            <a:pPr indent="-298450" lvl="0" marL="457200" rtl="0" algn="l">
+              <a:spcBef>
+                <a:spcPts val="0"/>
+              </a:spcBef>
+              <a:spcAft>
+                <a:spcPts val="0"/>
+              </a:spcAft>
+              <a:buSzPts val="1100"/>
+              <a:buChar char="-"/>
             </a:pPr>
             <a:r>
               <a:rPr lang="en"/>
-              <a:t>Cambiar las numeraciones.</a:t>
+              <a:t>EN LOS MARKDOWN DE TODOS LOS REQUISITOS: Revisar los títulos, tienen que tener verbo. </a:t>
             </a:r>
             <a:endParaRPr/>
           </a:p>
           <a:p>
-            <a:pPr indent="0" lvl="0" marL="0" rtl="0" algn="l">
-              <a:spcBef>
-                <a:spcPts val="0"/>
-              </a:spcBef>
-              <a:spcAft>
-                <a:spcPts val="0"/>
-              </a:spcAft>
-              <a:buNone/>
+            <a:pPr indent="-298450" lvl="0" marL="457200" rtl="0" algn="l">
+              <a:spcBef>
+                <a:spcPts val="0"/>
+              </a:spcBef>
+              <a:spcAft>
+                <a:spcPts val="0"/>
+              </a:spcAft>
+              <a:buSzPts val="1100"/>
+              <a:buChar char="-"/>
             </a:pPr>
             <a:r>
-              <a:t/>
+              <a:rPr lang="en"/>
+              <a:t>Cambiar las numeraciones.</a:t>
             </a:r>
             <a:endParaRPr/>
           </a:p>
           <a:p>
-            <a:pPr indent="0" lvl="0" marL="0" rtl="0" algn="l">
-              <a:spcBef>
-                <a:spcPts val="0"/>
-              </a:spcBef>
-              <a:spcAft>
-                <a:spcPts val="0"/>
-              </a:spcAft>
-              <a:buNone/>
+            <a:pPr indent="-298450" lvl="0" marL="457200" rtl="0" algn="l">
+              <a:spcBef>
+                <a:spcPts val="0"/>
+              </a:spcBef>
+              <a:spcAft>
+                <a:spcPts val="0"/>
+              </a:spcAft>
+              <a:buSzPts val="1100"/>
+              <a:buChar char="-"/>
             </a:pPr>
             <a:r>
               <a:rPr lang="en"/>
@@ -1939,14 +2402,15 @@
             <a:endParaRPr/>
           </a:p>
           <a:p>
-            <a:pPr indent="0" lvl="0" marL="0" rtl="0" algn="l">
-              <a:spcBef>
-                <a:spcPts val="0"/>
-              </a:spcBef>
-              <a:spcAft>
-                <a:spcPts val="0"/>
-              </a:spcAft>
-              <a:buNone/>
+            <a:pPr indent="-298450" lvl="0" marL="457200" rtl="0" algn="l">
+              <a:spcBef>
+                <a:spcPts val="0"/>
+              </a:spcBef>
+              <a:spcAft>
+                <a:spcPts val="0"/>
+              </a:spcAft>
+              <a:buSzPts val="1100"/>
+              <a:buChar char="-"/>
             </a:pPr>
             <a:r>
               <a:rPr lang="en"/>
@@ -1969,7 +2433,7 @@
   <p:cSld>
     <p:spTree>
       <p:nvGrpSpPr>
-        <p:cNvPr id="154" name="Shape 154"/>
+        <p:cNvPr id="155" name="Shape 155"/>
         <p:cNvGrpSpPr/>
         <p:nvPr/>
       </p:nvGrpSpPr>
@@ -1983,7 +2447,7 @@
       </p:grpSpPr>
       <p:sp>
         <p:nvSpPr>
-          <p:cNvPr id="155" name="Google Shape;155;g396060f51c5_0_1:notes"/>
+          <p:cNvPr id="156" name="Google Shape;156;g3d0e79b5b18_0_1:notes"/>
           <p:cNvSpPr/>
           <p:nvPr>
             <p:ph idx="2" type="sldImg"/>
@@ -2018,7 +2482,7 @@
       </p:sp>
       <p:sp>
         <p:nvSpPr>
-          <p:cNvPr id="156" name="Google Shape;156;g396060f51c5_0_1:notes"/>
+          <p:cNvPr id="157" name="Google Shape;157;g3d0e79b5b18_0_1:notes"/>
           <p:cNvSpPr txBox="1"/>
           <p:nvPr>
             <p:ph idx="1" type="body"/>
@@ -2050,7 +2514,41 @@
             </a:pPr>
             <a:r>
               <a:rPr lang="en"/>
-              <a:t>-20 tiene funcional</a:t>
+              <a:t>Cambio: </a:t>
+            </a:r>
+            <a:endParaRPr/>
+          </a:p>
+          <a:p>
+            <a:pPr indent="-298450" lvl="0" marL="457200" rtl="0" algn="l">
+              <a:spcBef>
+                <a:spcPts val="0"/>
+              </a:spcBef>
+              <a:spcAft>
+                <a:spcPts val="0"/>
+              </a:spcAft>
+              <a:buSzPts val="1100"/>
+              <a:buChar char="-"/>
+            </a:pPr>
+            <a:r>
+              <a:rPr lang="en"/>
+              <a:t>Dijimos que eran RF, pero son RNF.</a:t>
+            </a:r>
+            <a:endParaRPr/>
+          </a:p>
+          <a:p>
+            <a:pPr indent="-298450" lvl="0" marL="457200" rtl="0" algn="l">
+              <a:spcBef>
+                <a:spcPts val="0"/>
+              </a:spcBef>
+              <a:spcAft>
+                <a:spcPts val="0"/>
+              </a:spcAft>
+              <a:buSzPts val="1100"/>
+              <a:buChar char="-"/>
+            </a:pPr>
+            <a:r>
+              <a:rPr lang="en"/>
+              <a:t>Hemos fusionado “definir nom” + “que no estigui repetit”</a:t>
             </a:r>
             <a:endParaRPr/>
           </a:p>
@@ -2069,7 +2567,7 @@
   <p:cSld>
     <p:spTree>
       <p:nvGrpSpPr>
-        <p:cNvPr id="160" name="Shape 160"/>
+        <p:cNvPr id="161" name="Shape 161"/>
         <p:cNvGrpSpPr/>
         <p:nvPr/>
       </p:nvGrpSpPr>
@@ -2083,7 +2581,7 @@
       </p:grpSpPr>
       <p:sp>
         <p:nvSpPr>
-          <p:cNvPr id="161" name="Google Shape;161;g396060f51c5_0_6:notes"/>
+          <p:cNvPr id="162" name="Google Shape;162;g396060f51c5_0_1:notes"/>
           <p:cNvSpPr/>
           <p:nvPr>
             <p:ph idx="2" type="sldImg"/>
@@ -2118,7 +2616,7 @@
       </p:sp>
       <p:sp>
         <p:nvSpPr>
-          <p:cNvPr id="162" name="Google Shape;162;g396060f51c5_0_6:notes"/>
+          <p:cNvPr id="163" name="Google Shape;163;g396060f51c5_0_1:notes"/>
           <p:cNvSpPr txBox="1"/>
           <p:nvPr>
             <p:ph idx="1" type="body"/>
@@ -2150,7 +2648,24 @@
             </a:pPr>
             <a:r>
               <a:rPr lang="en"/>
-              <a:t>26 fusionar amb 25</a:t>
+              <a:t>Feedback de la 1a presentación: </a:t>
+            </a:r>
+            <a:endParaRPr/>
+          </a:p>
+          <a:p>
+            <a:pPr indent="-298450" lvl="0" marL="457200" rtl="0" algn="l">
+              <a:spcBef>
+                <a:spcPts val="0"/>
+              </a:spcBef>
+              <a:spcAft>
+                <a:spcPts val="0"/>
+              </a:spcAft>
+              <a:buSzPts val="1100"/>
+              <a:buChar char="-"/>
+            </a:pPr>
+            <a:r>
+              <a:rPr lang="en"/>
+              <a:t>20 tiene funcional</a:t>
             </a:r>
             <a:endParaRPr/>
           </a:p>
@@ -2169,7 +2684,7 @@
   <p:cSld>
     <p:spTree>
       <p:nvGrpSpPr>
-        <p:cNvPr id="166" name="Shape 166"/>
+        <p:cNvPr id="167" name="Shape 167"/>
         <p:cNvGrpSpPr/>
         <p:nvPr/>
       </p:nvGrpSpPr>
@@ -2183,7 +2698,7 @@
       </p:grpSpPr>
       <p:sp>
         <p:nvSpPr>
-          <p:cNvPr id="167" name="Google Shape;167;g396060f51c5_0_11:notes"/>
+          <p:cNvPr id="168" name="Google Shape;168;g3d0e79b5b18_0_11:notes"/>
           <p:cNvSpPr/>
           <p:nvPr>
             <p:ph idx="2" type="sldImg"/>
@@ -2218,7 +2733,7 @@
       </p:sp>
       <p:sp>
         <p:nvSpPr>
-          <p:cNvPr id="168" name="Google Shape;168;g396060f51c5_0_11:notes"/>
+          <p:cNvPr id="169" name="Google Shape;169;g3d0e79b5b18_0_11:notes"/>
           <p:cNvSpPr txBox="1"/>
           <p:nvPr>
             <p:ph idx="1" type="body"/>
@@ -2250,7 +2765,24 @@
             </a:pPr>
             <a:r>
               <a:rPr lang="en"/>
-              <a:t>31 fusionar con 29</a:t>
+              <a:t>Feedback de la 1a presentación: </a:t>
+            </a:r>
+            <a:endParaRPr/>
+          </a:p>
+          <a:p>
+            <a:pPr indent="-298450" lvl="0" marL="457200" rtl="0" algn="l">
+              <a:spcBef>
+                <a:spcPts val="0"/>
+              </a:spcBef>
+              <a:spcAft>
+                <a:spcPts val="0"/>
+              </a:spcAft>
+              <a:buSzPts val="1100"/>
+              <a:buChar char="-"/>
+            </a:pPr>
+            <a:r>
+              <a:rPr lang="en"/>
+              <a:t>20 tiene funcional</a:t>
             </a:r>
             <a:endParaRPr/>
           </a:p>
@@ -2265,8 +2797,40 @@
               <a:buNone/>
             </a:pPr>
             <a:r>
+              <a:t/>
+            </a:r>
+            <a:endParaRPr/>
+          </a:p>
+          <a:p>
+            <a:pPr indent="0" lvl="0" marL="0" rtl="0" algn="l">
+              <a:spcBef>
+                <a:spcPts val="0"/>
+              </a:spcBef>
+              <a:spcAft>
+                <a:spcPts val="0"/>
+              </a:spcAft>
+              <a:buNone/>
+            </a:pPr>
+            <a:r>
               <a:rPr lang="en"/>
-              <a:t>32 lo pondria en creacion de comptes</a:t>
+              <a:t>Cambio:</a:t>
+            </a:r>
+            <a:endParaRPr/>
+          </a:p>
+          <a:p>
+            <a:pPr indent="-298450" lvl="0" marL="457200" rtl="0" algn="l">
+              <a:spcBef>
+                <a:spcPts val="0"/>
+              </a:spcBef>
+              <a:spcAft>
+                <a:spcPts val="0"/>
+              </a:spcAft>
+              <a:buSzPts val="1100"/>
+              <a:buChar char="-"/>
+            </a:pPr>
+            <a:r>
+              <a:rPr lang="en"/>
+              <a:t>Separar en 2 requisitos diferentes</a:t>
             </a:r>
             <a:endParaRPr/>
           </a:p>
@@ -13469,7 +14033,7 @@
   <p:cSld>
     <p:spTree>
       <p:nvGrpSpPr>
-        <p:cNvPr id="175" name="Shape 175"/>
+        <p:cNvPr id="176" name="Shape 176"/>
         <p:cNvGrpSpPr/>
         <p:nvPr/>
       </p:nvGrpSpPr>
@@ -13483,7 +14047,7 @@
       </p:grpSpPr>
       <p:sp>
         <p:nvSpPr>
-          <p:cNvPr id="176" name="Google Shape;176;p30"/>
+          <p:cNvPr id="177" name="Google Shape;177;p30"/>
           <p:cNvSpPr txBox="1"/>
           <p:nvPr>
             <p:ph type="title"/>
@@ -13523,7 +14087,7 @@
       </p:sp>
       <p:sp>
         <p:nvSpPr>
-          <p:cNvPr id="177" name="Google Shape;177;p30"/>
+          <p:cNvPr id="178" name="Google Shape;178;p30"/>
           <p:cNvSpPr txBox="1"/>
           <p:nvPr/>
         </p:nvSpPr>
@@ -13547,9 +14111,6 @@
           <a:lstStyle/>
           <a:p>
             <a:pPr indent="0" lvl="0" marL="0" rtl="0" algn="ctr">
-              <a:lnSpc>
-                <a:spcPct val="115000"/>
-              </a:lnSpc>
               <a:spcBef>
                 <a:spcPts val="0"/>
               </a:spcBef>
@@ -13559,24 +14120,21 @@
               <a:buNone/>
             </a:pPr>
             <a:r>
-              <a:rPr b="1" lang="en" sz="1300">
-                <a:solidFill>
-                  <a:schemeClr val="dk1"/>
-                </a:solidFill>
-              </a:rPr>
-              <a:t>GRUP 5: VALORACIÓ DE LA COMANDA</a:t>
-            </a:r>
-            <a:endParaRPr b="1" sz="1300">
+              <a:rPr b="1" lang="en" sz="1600">
+                <a:solidFill>
+                  <a:schemeClr val="dk1"/>
+                </a:solidFill>
+              </a:rPr>
+              <a:t>GRUP 3: ENVIAMENT DE COMANDES</a:t>
+            </a:r>
+            <a:endParaRPr b="1" sz="1600">
               <a:solidFill>
                 <a:schemeClr val="dk1"/>
               </a:solidFill>
             </a:endParaRPr>
           </a:p>
           <a:p>
-            <a:pPr indent="0" lvl="0" marL="0" rtl="0" algn="just">
-              <a:lnSpc>
-                <a:spcPct val="115000"/>
-              </a:lnSpc>
+            <a:pPr indent="0" lvl="0" marL="0" rtl="0" algn="l">
               <a:spcBef>
                 <a:spcPts val="0"/>
               </a:spcBef>
@@ -13588,17 +14146,14 @@
             <a:r>
               <a:t/>
             </a:r>
-            <a:endParaRPr b="1" sz="1300">
+            <a:endParaRPr b="1" sz="1600">
               <a:solidFill>
                 <a:schemeClr val="dk1"/>
               </a:solidFill>
             </a:endParaRPr>
           </a:p>
           <a:p>
-            <a:pPr indent="0" lvl="0" marL="0" rtl="0" algn="just">
-              <a:lnSpc>
-                <a:spcPct val="115000"/>
-              </a:lnSpc>
+            <a:pPr indent="0" lvl="0" marL="0" rtl="0" algn="l">
               <a:spcBef>
                 <a:spcPts val="0"/>
               </a:spcBef>
@@ -13608,32 +14163,29 @@
               <a:buNone/>
             </a:pPr>
             <a:r>
-              <a:rPr b="1" lang="en" sz="1300">
-                <a:solidFill>
-                  <a:schemeClr val="dk1"/>
-                </a:solidFill>
-              </a:rPr>
-              <a:t>RF-5-01: </a:t>
-            </a:r>
-            <a:r>
-              <a:rPr lang="en" sz="1300">
-                <a:solidFill>
-                  <a:schemeClr val="dk1"/>
-                </a:solidFill>
-              </a:rPr>
-              <a:t>El cuiner té associades unes valoracions les quals són escrites pels clients que reben comandes seves, amb camps com “puntualitat” o “estat del menjar”. </a:t>
-            </a:r>
-            <a:endParaRPr sz="1300">
+              <a:rPr b="1" lang="en" sz="1600">
+                <a:solidFill>
+                  <a:schemeClr val="dk1"/>
+                </a:solidFill>
+              </a:rPr>
+              <a:t>RF-3-01: </a:t>
+            </a:r>
+            <a:r>
+              <a:rPr lang="en" sz="1600">
+                <a:solidFill>
+                  <a:schemeClr val="dk1"/>
+                </a:solidFill>
+              </a:rPr>
+              <a:t>Es pot escollir entre tres tipus d’enviament (que l’enviï el cuiner, un repartidor, o que el busqui el client).  </a:t>
+            </a:r>
+            <a:endParaRPr sz="1600">
               <a:solidFill>
                 <a:schemeClr val="dk1"/>
               </a:solidFill>
             </a:endParaRPr>
           </a:p>
           <a:p>
-            <a:pPr indent="0" lvl="0" marL="0" rtl="0" algn="just">
-              <a:lnSpc>
-                <a:spcPct val="115000"/>
-              </a:lnSpc>
+            <a:pPr indent="0" lvl="0" marL="0" rtl="0" algn="l">
               <a:spcBef>
                 <a:spcPts val="0"/>
               </a:spcBef>
@@ -13643,56 +14195,16 @@
               <a:buNone/>
             </a:pPr>
             <a:r>
-              <a:rPr b="1" lang="en" sz="1300" u="sng">
-                <a:solidFill>
-                  <a:schemeClr val="dk1"/>
-                </a:solidFill>
-              </a:rPr>
-              <a:t>RNF</a:t>
-            </a:r>
-            <a:r>
-              <a:rPr b="1" lang="en" sz="1300">
-                <a:solidFill>
-                  <a:schemeClr val="dk1"/>
-                </a:solidFill>
-              </a:rPr>
-              <a:t>-5-02: </a:t>
-            </a:r>
-            <a:r>
-              <a:rPr lang="en" sz="1300">
-                <a:solidFill>
-                  <a:schemeClr val="dk1"/>
-                </a:solidFill>
-              </a:rPr>
-              <a:t>Els cuiners recomanats s’ordenen segons la seva valoració (a valoració més alta, més amunt apareixen). RNF de </a:t>
-            </a:r>
-            <a:r>
-              <a:rPr lang="en" sz="1300" u="sng">
-                <a:solidFill>
-                  <a:schemeClr val="dk1"/>
-                </a:solidFill>
-              </a:rPr>
-              <a:t>Decisió de Disseny</a:t>
-            </a:r>
-            <a:r>
-              <a:rPr lang="en" sz="1300">
-                <a:solidFill>
-                  <a:schemeClr val="dk1"/>
-                </a:solidFill>
-              </a:rPr>
-              <a:t>. </a:t>
-            </a:r>
-            <a:endParaRPr sz="1300">
+              <a:t/>
+            </a:r>
+            <a:endParaRPr b="1" sz="1600">
               <a:solidFill>
                 <a:schemeClr val="dk1"/>
               </a:solidFill>
             </a:endParaRPr>
           </a:p>
           <a:p>
-            <a:pPr indent="0" lvl="0" marL="0" rtl="0" algn="just">
-              <a:lnSpc>
-                <a:spcPct val="115000"/>
-              </a:lnSpc>
+            <a:pPr indent="0" lvl="0" marL="0" rtl="0" algn="l">
               <a:spcBef>
                 <a:spcPts val="0"/>
               </a:spcBef>
@@ -13702,9 +14214,183 @@
               <a:buNone/>
             </a:pPr>
             <a:r>
+              <a:rPr b="1" lang="en" sz="1600" u="sng">
+                <a:solidFill>
+                  <a:srgbClr val="FF0000"/>
+                </a:solidFill>
+              </a:rPr>
+              <a:t>(Modificat!!!)</a:t>
+            </a:r>
+            <a:r>
+              <a:rPr b="1" lang="en" sz="1600">
+                <a:solidFill>
+                  <a:srgbClr val="FF0000"/>
+                </a:solidFill>
+              </a:rPr>
+              <a:t> </a:t>
+            </a:r>
+            <a:r>
+              <a:rPr b="1" lang="en" sz="1600">
+                <a:solidFill>
+                  <a:schemeClr val="dk1"/>
+                </a:solidFill>
+              </a:rPr>
+              <a:t>RF-3-02: </a:t>
+            </a:r>
+            <a:r>
+              <a:rPr lang="en" sz="1600">
+                <a:solidFill>
+                  <a:schemeClr val="dk1"/>
+                </a:solidFill>
+              </a:rPr>
+              <a:t>El cost de l’enviament es calcula segons la distància entre el cuiner i el lloc de lliurament, sent gratuït si el client recull la comanda al domicili del cuiner. </a:t>
+            </a:r>
+            <a:endParaRPr sz="1600">
+              <a:solidFill>
+                <a:schemeClr val="dk1"/>
+              </a:solidFill>
+            </a:endParaRPr>
+          </a:p>
+          <a:p>
+            <a:pPr indent="0" lvl="0" marL="0" rtl="0" algn="l">
+              <a:spcBef>
+                <a:spcPts val="0"/>
+              </a:spcBef>
+              <a:spcAft>
+                <a:spcPts val="0"/>
+              </a:spcAft>
+              <a:buNone/>
+            </a:pPr>
+            <a:r>
               <a:t/>
             </a:r>
-            <a:endParaRPr b="1" sz="1300">
+            <a:endParaRPr b="1" sz="1600">
+              <a:solidFill>
+                <a:schemeClr val="dk1"/>
+              </a:solidFill>
+            </a:endParaRPr>
+          </a:p>
+          <a:p>
+            <a:pPr indent="0" lvl="0" marL="0" rtl="0" algn="l">
+              <a:spcBef>
+                <a:spcPts val="0"/>
+              </a:spcBef>
+              <a:spcAft>
+                <a:spcPts val="0"/>
+              </a:spcAft>
+              <a:buNone/>
+            </a:pPr>
+            <a:r>
+              <a:rPr b="1" lang="en" sz="1600">
+                <a:solidFill>
+                  <a:schemeClr val="dk1"/>
+                </a:solidFill>
+              </a:rPr>
+              <a:t>RF-3-03: </a:t>
+            </a:r>
+            <a:r>
+              <a:rPr lang="en" sz="1600">
+                <a:solidFill>
+                  <a:schemeClr val="dk1"/>
+                </a:solidFill>
+              </a:rPr>
+              <a:t>El client pot seguir el progrés de l’entrega un cop l’enviament ha començat.</a:t>
+            </a:r>
+            <a:endParaRPr sz="1600">
+              <a:solidFill>
+                <a:schemeClr val="dk1"/>
+              </a:solidFill>
+            </a:endParaRPr>
+          </a:p>
+          <a:p>
+            <a:pPr indent="0" lvl="0" marL="0" rtl="0" algn="l">
+              <a:spcBef>
+                <a:spcPts val="0"/>
+              </a:spcBef>
+              <a:spcAft>
+                <a:spcPts val="0"/>
+              </a:spcAft>
+              <a:buNone/>
+            </a:pPr>
+            <a:r>
+              <a:t/>
+            </a:r>
+            <a:endParaRPr b="1" sz="1600" u="sng">
+              <a:solidFill>
+                <a:schemeClr val="dk1"/>
+              </a:solidFill>
+            </a:endParaRPr>
+          </a:p>
+          <a:p>
+            <a:pPr indent="0" lvl="0" marL="0" rtl="0" algn="l">
+              <a:spcBef>
+                <a:spcPts val="0"/>
+              </a:spcBef>
+              <a:spcAft>
+                <a:spcPts val="0"/>
+              </a:spcAft>
+              <a:buNone/>
+            </a:pPr>
+            <a:r>
+              <a:rPr b="1" lang="en" sz="1600" u="sng">
+                <a:solidFill>
+                  <a:schemeClr val="dk1"/>
+                </a:solidFill>
+              </a:rPr>
+              <a:t>RNF</a:t>
+            </a:r>
+            <a:r>
+              <a:rPr b="1" lang="en" sz="1600">
+                <a:solidFill>
+                  <a:schemeClr val="dk1"/>
+                </a:solidFill>
+              </a:rPr>
+              <a:t>-3-04: </a:t>
+            </a:r>
+            <a:r>
+              <a:rPr lang="en" sz="1600">
+                <a:solidFill>
+                  <a:schemeClr val="dk1"/>
+                </a:solidFill>
+              </a:rPr>
+              <a:t>La posició del repartidor es mostra en un mapa utilitzant la interfície de Google Maps. RNF d’</a:t>
+            </a:r>
+            <a:r>
+              <a:rPr lang="en" sz="1600" u="sng">
+                <a:solidFill>
+                  <a:schemeClr val="dk1"/>
+                </a:solidFill>
+              </a:rPr>
+              <a:t>Interfícies Externes.</a:t>
+            </a:r>
+            <a:r>
+              <a:rPr lang="en" sz="1600">
+                <a:solidFill>
+                  <a:schemeClr val="dk1"/>
+                </a:solidFill>
+              </a:rPr>
+              <a:t> </a:t>
+            </a:r>
+            <a:endParaRPr sz="1600">
+              <a:solidFill>
+                <a:schemeClr val="dk1"/>
+              </a:solidFill>
+            </a:endParaRPr>
+          </a:p>
+          <a:p>
+            <a:pPr indent="0" lvl="0" marL="0" rtl="0" algn="l">
+              <a:spcBef>
+                <a:spcPts val="0"/>
+              </a:spcBef>
+              <a:spcAft>
+                <a:spcPts val="0"/>
+              </a:spcAft>
+              <a:buNone/>
+            </a:pPr>
+            <a:r>
+              <a:t/>
+            </a:r>
+            <a:endParaRPr b="1" sz="1600">
               <a:solidFill>
                 <a:schemeClr val="dk1"/>
               </a:solidFill>
@@ -13725,7 +14411,7 @@
   <p:cSld>
     <p:spTree>
       <p:nvGrpSpPr>
-        <p:cNvPr id="181" name="Shape 181"/>
+        <p:cNvPr id="182" name="Shape 182"/>
         <p:cNvGrpSpPr/>
         <p:nvPr/>
       </p:nvGrpSpPr>
@@ -13739,7 +14425,7 @@
       </p:grpSpPr>
       <p:sp>
         <p:nvSpPr>
-          <p:cNvPr id="182" name="Google Shape;182;p31"/>
+          <p:cNvPr id="183" name="Google Shape;183;p31"/>
           <p:cNvSpPr txBox="1"/>
           <p:nvPr>
             <p:ph type="title"/>
@@ -13779,7 +14465,7 @@
       </p:sp>
       <p:sp>
         <p:nvSpPr>
-          <p:cNvPr id="183" name="Google Shape;183;p31"/>
+          <p:cNvPr id="184" name="Google Shape;184;p31"/>
           <p:cNvSpPr txBox="1"/>
           <p:nvPr/>
         </p:nvSpPr>
@@ -13803,9 +14489,6 @@
           <a:lstStyle/>
           <a:p>
             <a:pPr indent="0" lvl="0" marL="0" rtl="0" algn="ctr">
-              <a:lnSpc>
-                <a:spcPct val="115000"/>
-              </a:lnSpc>
               <a:spcBef>
                 <a:spcPts val="0"/>
               </a:spcBef>
@@ -13815,24 +14498,21 @@
               <a:buNone/>
             </a:pPr>
             <a:r>
-              <a:rPr b="1" lang="en" sz="1300">
-                <a:solidFill>
-                  <a:schemeClr val="dk1"/>
-                </a:solidFill>
-              </a:rPr>
-              <a:t>GRUP 6: FUNCIONALITATS ADDICIONALS</a:t>
-            </a:r>
-            <a:endParaRPr b="1" sz="1300">
+              <a:rPr b="1" lang="en" sz="1600">
+                <a:solidFill>
+                  <a:schemeClr val="dk1"/>
+                </a:solidFill>
+              </a:rPr>
+              <a:t>GRUP 4: PAGAMENT DE LA COMANDA</a:t>
+            </a:r>
+            <a:endParaRPr b="1" sz="1600">
               <a:solidFill>
                 <a:schemeClr val="dk1"/>
               </a:solidFill>
             </a:endParaRPr>
           </a:p>
           <a:p>
-            <a:pPr indent="0" lvl="0" marL="0" rtl="0" algn="just">
-              <a:lnSpc>
-                <a:spcPct val="115000"/>
-              </a:lnSpc>
+            <a:pPr indent="0" lvl="0" marL="0" rtl="0" algn="l">
               <a:spcBef>
                 <a:spcPts val="0"/>
               </a:spcBef>
@@ -13844,17 +14524,14 @@
             <a:r>
               <a:t/>
             </a:r>
-            <a:endParaRPr b="1" sz="1300">
+            <a:endParaRPr b="1" sz="1600">
               <a:solidFill>
                 <a:schemeClr val="dk1"/>
               </a:solidFill>
             </a:endParaRPr>
           </a:p>
           <a:p>
-            <a:pPr indent="0" lvl="0" marL="0" rtl="0" algn="just">
-              <a:lnSpc>
-                <a:spcPct val="115000"/>
-              </a:lnSpc>
+            <a:pPr indent="0" lvl="0" marL="0" rtl="0" algn="l">
               <a:spcBef>
                 <a:spcPts val="0"/>
               </a:spcBef>
@@ -13864,32 +14541,53 @@
               <a:buNone/>
             </a:pPr>
             <a:r>
-              <a:rPr b="1" lang="en" sz="1300">
-                <a:solidFill>
-                  <a:schemeClr val="dk1"/>
-                </a:solidFill>
-              </a:rPr>
-              <a:t>RF-6-01: </a:t>
-            </a:r>
-            <a:r>
-              <a:rPr lang="en" sz="1300">
-                <a:solidFill>
-                  <a:schemeClr val="dk1"/>
-                </a:solidFill>
-              </a:rPr>
-              <a:t>Els clients poden proposar els plats que volen consumir i aquests s'afegeixen a un menú específic on un cuiner els accepta.</a:t>
-            </a:r>
-            <a:endParaRPr sz="1300">
+              <a:rPr b="1" lang="en" sz="1600" u="sng">
+                <a:solidFill>
+                  <a:srgbClr val="FF0000"/>
+                </a:solidFill>
+              </a:rPr>
+              <a:t>(Modificat!!!)</a:t>
+            </a:r>
+            <a:r>
+              <a:rPr b="1" lang="en" sz="1600">
+                <a:solidFill>
+                  <a:srgbClr val="00FFFF"/>
+                </a:solidFill>
+              </a:rPr>
+              <a:t> </a:t>
+            </a:r>
+            <a:r>
+              <a:rPr b="1" lang="en" sz="1600">
+                <a:solidFill>
+                  <a:schemeClr val="dk1"/>
+                </a:solidFill>
+              </a:rPr>
+              <a:t>RF-4-01: </a:t>
+            </a:r>
+            <a:r>
+              <a:rPr lang="en" sz="1600">
+                <a:solidFill>
+                  <a:schemeClr val="dk1"/>
+                </a:solidFill>
+              </a:rPr>
+              <a:t>El cuiner i repartidor reben l’ingrés de la comanda un cop s’ha pagat a la mateixa aplicació amb targeta bancària o PayPal</a:t>
+            </a:r>
+            <a:r>
+              <a:rPr b="1" lang="en" sz="1600">
+                <a:solidFill>
+                  <a:schemeClr val="dk1"/>
+                </a:solidFill>
+              </a:rPr>
+              <a:t>. </a:t>
+            </a:r>
+            <a:endParaRPr b="1" sz="1600">
               <a:solidFill>
                 <a:schemeClr val="dk1"/>
               </a:solidFill>
             </a:endParaRPr>
           </a:p>
           <a:p>
-            <a:pPr indent="0" lvl="0" marL="0" rtl="0" algn="just">
-              <a:lnSpc>
-                <a:spcPct val="115000"/>
-              </a:lnSpc>
+            <a:pPr indent="0" lvl="0" marL="0" rtl="0" algn="l">
               <a:spcBef>
                 <a:spcPts val="0"/>
               </a:spcBef>
@@ -13899,56 +14597,16 @@
               <a:buNone/>
             </a:pPr>
             <a:r>
-              <a:rPr b="1" lang="en" sz="1300" u="sng">
-                <a:solidFill>
-                  <a:schemeClr val="dk1"/>
-                </a:solidFill>
-              </a:rPr>
-              <a:t>RNF</a:t>
-            </a:r>
-            <a:r>
-              <a:rPr b="1" lang="en" sz="1300">
-                <a:solidFill>
-                  <a:schemeClr val="dk1"/>
-                </a:solidFill>
-              </a:rPr>
-              <a:t>-6-02: </a:t>
-            </a:r>
-            <a:r>
-              <a:rPr lang="en" sz="1300">
-                <a:solidFill>
-                  <a:schemeClr val="dk1"/>
-                </a:solidFill>
-              </a:rPr>
-              <a:t>Només els cuiners poden accedir al menú específic. RNF de </a:t>
-            </a:r>
-            <a:r>
-              <a:rPr lang="en" sz="1300" u="sng">
-                <a:solidFill>
-                  <a:schemeClr val="dk1"/>
-                </a:solidFill>
-              </a:rPr>
-              <a:t>Restricció de Disseny, seguretat.</a:t>
-            </a:r>
-            <a:r>
-              <a:rPr lang="en" sz="1300">
-                <a:solidFill>
-                  <a:schemeClr val="dk1"/>
-                </a:solidFill>
-              </a:rPr>
-              <a:t> </a:t>
-            </a:r>
-            <a:endParaRPr sz="1300">
+              <a:t/>
+            </a:r>
+            <a:endParaRPr b="1" sz="1600">
               <a:solidFill>
                 <a:schemeClr val="dk1"/>
               </a:solidFill>
             </a:endParaRPr>
           </a:p>
           <a:p>
-            <a:pPr indent="0" lvl="0" marL="0" rtl="0" algn="just">
-              <a:lnSpc>
-                <a:spcPct val="115000"/>
-              </a:lnSpc>
+            <a:pPr indent="0" lvl="0" marL="0" rtl="0" algn="l">
               <a:spcBef>
                 <a:spcPts val="0"/>
               </a:spcBef>
@@ -13958,32 +14616,53 @@
               <a:buNone/>
             </a:pPr>
             <a:r>
-              <a:rPr b="1" lang="en" sz="1300">
-                <a:solidFill>
-                  <a:schemeClr val="dk1"/>
-                </a:solidFill>
-              </a:rPr>
-              <a:t>RF-6-03: </a:t>
-            </a:r>
-            <a:r>
-              <a:rPr lang="en" sz="1300">
-                <a:solidFill>
-                  <a:schemeClr val="dk1"/>
-                </a:solidFill>
-              </a:rPr>
-              <a:t>Hi ha xat client-cuiner per a garantir un bon servei.</a:t>
-            </a:r>
-            <a:endParaRPr sz="1300">
+              <a:rPr b="1" lang="en" sz="1600" u="sng">
+                <a:solidFill>
+                  <a:schemeClr val="dk1"/>
+                </a:solidFill>
+              </a:rPr>
+              <a:t>RNF</a:t>
+            </a:r>
+            <a:r>
+              <a:rPr b="1" lang="en" sz="1600">
+                <a:solidFill>
+                  <a:schemeClr val="dk1"/>
+                </a:solidFill>
+              </a:rPr>
+              <a:t>-4-02: </a:t>
+            </a:r>
+            <a:r>
+              <a:rPr lang="en" sz="1600">
+                <a:solidFill>
+                  <a:schemeClr val="dk1"/>
+                </a:solidFill>
+              </a:rPr>
+              <a:t>El sistema s'ha de connectar amb la plataforma de pagament corresponent per autenticar les dades i confirmar la transacció. RNF d’</a:t>
+            </a:r>
+            <a:r>
+              <a:rPr lang="en" sz="1600" u="sng">
+                <a:solidFill>
+                  <a:schemeClr val="dk1"/>
+                </a:solidFill>
+              </a:rPr>
+              <a:t>Interfícies Externes</a:t>
+            </a:r>
+            <a:r>
+              <a:rPr lang="en" sz="1600">
+                <a:solidFill>
+                  <a:schemeClr val="dk1"/>
+                </a:solidFill>
+              </a:rPr>
+              <a:t>. </a:t>
+            </a:r>
+            <a:endParaRPr sz="1600">
               <a:solidFill>
                 <a:schemeClr val="dk1"/>
               </a:solidFill>
             </a:endParaRPr>
           </a:p>
           <a:p>
-            <a:pPr indent="0" lvl="0" marL="0" rtl="0" algn="just">
-              <a:lnSpc>
-                <a:spcPct val="115000"/>
-              </a:lnSpc>
+            <a:pPr indent="0" lvl="0" marL="0" rtl="0" algn="l">
               <a:spcBef>
                 <a:spcPts val="0"/>
               </a:spcBef>
@@ -13993,32 +14672,16 @@
               <a:buNone/>
             </a:pPr>
             <a:r>
-              <a:rPr b="1" lang="en" sz="1300">
-                <a:solidFill>
-                  <a:schemeClr val="dk1"/>
-                </a:solidFill>
-              </a:rPr>
-              <a:t>RF-6-04: </a:t>
-            </a:r>
-            <a:r>
-              <a:rPr lang="en" sz="1300">
-                <a:solidFill>
-                  <a:schemeClr val="dk1"/>
-                </a:solidFill>
-              </a:rPr>
-              <a:t>Els usuaris es poden subscriure un pla mensual amb tarifa d'enviaments i sistema de punts. </a:t>
-            </a:r>
-            <a:endParaRPr sz="1300">
+              <a:t/>
+            </a:r>
+            <a:endParaRPr sz="1600">
               <a:solidFill>
                 <a:schemeClr val="dk1"/>
               </a:solidFill>
             </a:endParaRPr>
           </a:p>
           <a:p>
-            <a:pPr indent="0" lvl="0" marL="0" rtl="0" algn="just">
-              <a:lnSpc>
-                <a:spcPct val="115000"/>
-              </a:lnSpc>
+            <a:pPr indent="0" lvl="0" marL="0" rtl="0" algn="l">
               <a:spcBef>
                 <a:spcPts val="0"/>
               </a:spcBef>
@@ -14030,7 +14693,7 @@
             <a:r>
               <a:t/>
             </a:r>
-            <a:endParaRPr b="1" sz="1300">
+            <a:endParaRPr b="1" sz="1600">
               <a:solidFill>
                 <a:schemeClr val="dk1"/>
               </a:solidFill>
@@ -14051,7 +14714,7 @@
   <p:cSld>
     <p:spTree>
       <p:nvGrpSpPr>
-        <p:cNvPr id="187" name="Shape 187"/>
+        <p:cNvPr id="188" name="Shape 188"/>
         <p:cNvGrpSpPr/>
         <p:nvPr/>
       </p:nvGrpSpPr>
@@ -14065,7 +14728,7 @@
       </p:grpSpPr>
       <p:sp>
         <p:nvSpPr>
-          <p:cNvPr id="188" name="Google Shape;188;p32"/>
+          <p:cNvPr id="189" name="Google Shape;189;p32"/>
           <p:cNvSpPr txBox="1"/>
           <p:nvPr>
             <p:ph type="title"/>
@@ -14105,7 +14768,7 @@
       </p:sp>
       <p:sp>
         <p:nvSpPr>
-          <p:cNvPr id="189" name="Google Shape;189;p32"/>
+          <p:cNvPr id="190" name="Google Shape;190;p32"/>
           <p:cNvSpPr txBox="1"/>
           <p:nvPr/>
         </p:nvSpPr>
@@ -14141,14 +14804,14 @@
               <a:buNone/>
             </a:pPr>
             <a:r>
-              <a:rPr b="1" lang="en" sz="1300">
-                <a:solidFill>
-                  <a:schemeClr val="dk1"/>
-                </a:solidFill>
-              </a:rPr>
-              <a:t>GRUP 7: ALTRES CONSIDERACIONS</a:t>
-            </a:r>
-            <a:endParaRPr b="1" sz="1300">
+              <a:rPr b="1" lang="en" sz="1600">
+                <a:solidFill>
+                  <a:schemeClr val="dk1"/>
+                </a:solidFill>
+              </a:rPr>
+              <a:t>GRUP 5: VALORACIÓ DE LA COMANDA</a:t>
+            </a:r>
+            <a:endParaRPr b="1" sz="1600">
               <a:solidFill>
                 <a:schemeClr val="dk1"/>
               </a:solidFill>
@@ -14170,7 +14833,7 @@
             <a:r>
               <a:t/>
             </a:r>
-            <a:endParaRPr b="1" sz="1300">
+            <a:endParaRPr b="1" sz="1600">
               <a:solidFill>
                 <a:schemeClr val="dk1"/>
               </a:solidFill>
@@ -14190,46 +14853,30 @@
               <a:buNone/>
             </a:pPr>
             <a:r>
-              <a:rPr b="1" lang="en" sz="1300" u="sng">
-                <a:solidFill>
-                  <a:schemeClr val="dk1"/>
-                </a:solidFill>
-              </a:rPr>
-              <a:t>RNF</a:t>
-            </a:r>
-            <a:r>
-              <a:rPr b="1" lang="en" sz="1300">
-                <a:solidFill>
-                  <a:schemeClr val="dk1"/>
-                </a:solidFill>
-              </a:rPr>
-              <a:t>-7-01: </a:t>
-            </a:r>
-            <a:r>
-              <a:rPr lang="en" sz="1300">
-                <a:solidFill>
-                  <a:schemeClr val="dk1"/>
-                </a:solidFill>
-              </a:rPr>
-              <a:t>Es farà servir a l'àrea metropolitana de Barcelona. RNF de </a:t>
-            </a:r>
-            <a:r>
-              <a:rPr lang="en" sz="1300" u="sng">
-                <a:solidFill>
-                  <a:schemeClr val="dk1"/>
-                </a:solidFill>
-              </a:rPr>
-              <a:t>Restricció de Disseny</a:t>
-            </a:r>
-            <a:r>
-              <a:rPr lang="en" sz="1300">
-                <a:solidFill>
-                  <a:schemeClr val="dk1"/>
-                </a:solidFill>
-              </a:rPr>
-              <a:t>.</a:t>
-            </a:r>
-            <a:endParaRPr sz="1300">
+              <a:rPr b="1" lang="en" sz="1600" u="sng">
+                <a:solidFill>
+                  <a:srgbClr val="FF0000"/>
+                </a:solidFill>
+              </a:rPr>
+              <a:t>(Modificat!!!)</a:t>
+            </a:r>
+            <a:r>
+              <a:rPr b="1" lang="en" sz="1600">
+                <a:solidFill>
+                  <a:schemeClr val="dk1"/>
+                </a:solidFill>
+              </a:rPr>
+              <a:t> RF-5-01: </a:t>
+            </a:r>
+            <a:r>
+              <a:rPr lang="en" sz="1600">
+                <a:solidFill>
+                  <a:schemeClr val="dk1"/>
+                </a:solidFill>
+              </a:rPr>
+              <a:t>El cuiner té associades unes valoracions les quals són escrites pels clients que reben comandes seves, amb camps com “puntualitat” o “estat del menjar”. </a:t>
+            </a:r>
+            <a:endParaRPr sz="1600">
               <a:solidFill>
                 <a:schemeClr val="dk1"/>
               </a:solidFill>
@@ -14249,46 +14896,9 @@
               <a:buNone/>
             </a:pPr>
             <a:r>
-              <a:rPr b="1" lang="en" sz="1300" u="sng">
-                <a:solidFill>
-                  <a:schemeClr val="dk1"/>
-                </a:solidFill>
-              </a:rPr>
-              <a:t>RNF</a:t>
-            </a:r>
-            <a:r>
-              <a:rPr b="1" lang="en" sz="1300">
-                <a:solidFill>
-                  <a:schemeClr val="dk1"/>
-                </a:solidFill>
-              </a:rPr>
-              <a:t>-7-02: </a:t>
-            </a:r>
-            <a:r>
-              <a:rPr lang="en" sz="1300">
-                <a:solidFill>
-                  <a:schemeClr val="dk1"/>
-                </a:solidFill>
-              </a:rPr>
-              <a:t>La interfície serà trilingüe: Espanyol, Català i Anglès. RNF d’</a:t>
-            </a:r>
-            <a:r>
-              <a:rPr lang="en" sz="1300" u="sng">
-                <a:solidFill>
-                  <a:schemeClr val="dk1"/>
-                </a:solidFill>
-              </a:rPr>
-              <a:t>Interfícies Externes</a:t>
-            </a:r>
-            <a:r>
-              <a:rPr lang="en" sz="1300">
-                <a:solidFill>
-                  <a:schemeClr val="dk1"/>
-                </a:solidFill>
-              </a:rPr>
-              <a:t>. </a:t>
-            </a:r>
-            <a:endParaRPr sz="1300">
+              <a:t/>
+            </a:r>
+            <a:endParaRPr b="1" sz="1600" u="sng">
               <a:solidFill>
                 <a:schemeClr val="dk1"/>
               </a:solidFill>
@@ -14308,7 +14918,7 @@
               <a:buNone/>
             </a:pPr>
             <a:r>
-              <a:rPr b="1" lang="en" sz="1300" u="sng">
+              <a:rPr b="1" lang="en" sz="1600" u="sng">
                 <a:solidFill>
                   <a:schemeClr val="dk1"/>
                 </a:solidFill>
@@ -14316,22 +14926,38 @@
               <a:t>RNF</a:t>
             </a:r>
             <a:r>
-              <a:rPr b="1" lang="en" sz="1300">
-                <a:solidFill>
-                  <a:schemeClr val="dk1"/>
-                </a:solidFill>
-              </a:rPr>
-              <a:t>-7-03: </a:t>
-            </a:r>
-            <a:r>
-              <a:rPr lang="en" sz="1300">
-                <a:solidFill>
-                  <a:schemeClr val="dk1"/>
-                </a:solidFill>
-              </a:rPr>
-              <a:t>Apte tant per a Web com per a Mòbil. RNF d’Interfícies Externes. </a:t>
-            </a:r>
-            <a:endParaRPr sz="1300">
+              <a:rPr b="1" lang="en" sz="1600">
+                <a:solidFill>
+                  <a:schemeClr val="dk1"/>
+                </a:solidFill>
+              </a:rPr>
+              <a:t>-5-02: </a:t>
+            </a:r>
+            <a:r>
+              <a:rPr lang="en" sz="1600">
+                <a:solidFill>
+                  <a:schemeClr val="dk1"/>
+                </a:solidFill>
+              </a:rPr>
+              <a:t>Els cuiners recomanats s’ordenen segons la seva valoració (a valoració més alta, més amunt apareixen). RNF de </a:t>
+            </a:r>
+            <a:r>
+              <a:rPr lang="en" sz="1600" u="sng">
+                <a:solidFill>
+                  <a:schemeClr val="dk1"/>
+                </a:solidFill>
+              </a:rPr>
+              <a:t>Decisió de Disseny</a:t>
+            </a:r>
+            <a:r>
+              <a:rPr lang="en" sz="1600">
+                <a:solidFill>
+                  <a:schemeClr val="dk1"/>
+                </a:solidFill>
+              </a:rPr>
+              <a:t>. </a:t>
+            </a:r>
+            <a:endParaRPr sz="1600">
               <a:solidFill>
                 <a:schemeClr val="dk1"/>
               </a:solidFill>
@@ -14351,422 +14977,9 @@
               <a:buNone/>
             </a:pPr>
             <a:r>
-              <a:rPr b="1" lang="en" sz="1300" u="sng">
-                <a:solidFill>
-                  <a:schemeClr val="dk1"/>
-                </a:solidFill>
-              </a:rPr>
-              <a:t>RNF</a:t>
-            </a:r>
-            <a:r>
-              <a:rPr b="1" lang="en" sz="1300">
-                <a:solidFill>
-                  <a:schemeClr val="dk1"/>
-                </a:solidFill>
-              </a:rPr>
-              <a:t>-7-04: </a:t>
-            </a:r>
-            <a:r>
-              <a:rPr lang="en" sz="1300">
-                <a:solidFill>
-                  <a:schemeClr val="dk1"/>
-                </a:solidFill>
-              </a:rPr>
-              <a:t>Els Mòbils hauran de tenir sistema operatiu iOS o Android. RNF de </a:t>
-            </a:r>
-            <a:r>
-              <a:rPr lang="en" sz="1300" u="sng">
-                <a:solidFill>
-                  <a:schemeClr val="dk1"/>
-                </a:solidFill>
-              </a:rPr>
-              <a:t>Restricció de Disseny, limitació de Hw</a:t>
-            </a:r>
-            <a:r>
-              <a:rPr lang="en" sz="1300">
-                <a:solidFill>
-                  <a:schemeClr val="dk1"/>
-                </a:solidFill>
-              </a:rPr>
-              <a:t>. </a:t>
-            </a:r>
-            <a:endParaRPr sz="1300">
-              <a:solidFill>
-                <a:schemeClr val="dk1"/>
-              </a:solidFill>
-            </a:endParaRPr>
-          </a:p>
-          <a:p>
-            <a:pPr indent="0" lvl="0" marL="0" rtl="0" algn="just">
-              <a:lnSpc>
-                <a:spcPct val="115000"/>
-              </a:lnSpc>
-              <a:spcBef>
-                <a:spcPts val="0"/>
-              </a:spcBef>
-              <a:spcAft>
-                <a:spcPts val="0"/>
-              </a:spcAft>
-              <a:buNone/>
-            </a:pPr>
-            <a:r>
-              <a:rPr b="1" lang="en" sz="1300" u="sng">
-                <a:solidFill>
-                  <a:schemeClr val="dk1"/>
-                </a:solidFill>
-              </a:rPr>
-              <a:t>RNF</a:t>
-            </a:r>
-            <a:r>
-              <a:rPr b="1" lang="en" sz="1300">
-                <a:solidFill>
-                  <a:schemeClr val="dk1"/>
-                </a:solidFill>
-              </a:rPr>
-              <a:t>-7-05: </a:t>
-            </a:r>
-            <a:r>
-              <a:rPr lang="en" sz="1300">
-                <a:solidFill>
-                  <a:schemeClr val="dk1"/>
-                </a:solidFill>
-              </a:rPr>
-              <a:t>Lletra Calibri tant a encapçalaments com per a la resta de continguts. </a:t>
-            </a:r>
-            <a:r>
-              <a:rPr lang="en" sz="1300" u="sng">
-                <a:solidFill>
-                  <a:schemeClr val="dk1"/>
-                </a:solidFill>
-              </a:rPr>
-              <a:t>RNF d’Interfícies Externes</a:t>
-            </a:r>
-            <a:r>
-              <a:rPr lang="en" sz="1300">
-                <a:solidFill>
-                  <a:schemeClr val="dk1"/>
-                </a:solidFill>
-              </a:rPr>
-              <a:t>. </a:t>
-            </a:r>
-            <a:endParaRPr sz="1300">
-              <a:solidFill>
-                <a:schemeClr val="dk1"/>
-              </a:solidFill>
-            </a:endParaRPr>
-          </a:p>
-          <a:p>
-            <a:pPr indent="0" lvl="0" marL="0" rtl="0" algn="just">
-              <a:lnSpc>
-                <a:spcPct val="115000"/>
-              </a:lnSpc>
-              <a:spcBef>
-                <a:spcPts val="0"/>
-              </a:spcBef>
-              <a:spcAft>
-                <a:spcPts val="0"/>
-              </a:spcAft>
-              <a:buNone/>
-            </a:pPr>
-            <a:r>
-              <a:rPr b="1" lang="en" sz="1300" u="sng">
-                <a:solidFill>
-                  <a:schemeClr val="dk1"/>
-                </a:solidFill>
-              </a:rPr>
-              <a:t>RNF</a:t>
-            </a:r>
-            <a:r>
-              <a:rPr b="1" lang="en" sz="1300">
-                <a:solidFill>
-                  <a:schemeClr val="dk1"/>
-                </a:solidFill>
-              </a:rPr>
-              <a:t>-7-06: </a:t>
-            </a:r>
-            <a:r>
-              <a:rPr lang="en" sz="1300">
-                <a:solidFill>
-                  <a:schemeClr val="dk1"/>
-                </a:solidFill>
-              </a:rPr>
-              <a:t>Color corporatiu taronja i  El logo ha d'aparèixer a totes les pantalles. RNF d’</a:t>
-            </a:r>
-            <a:r>
-              <a:rPr lang="en" sz="1300" u="sng">
-                <a:solidFill>
-                  <a:schemeClr val="dk1"/>
-                </a:solidFill>
-              </a:rPr>
-              <a:t>Interfícies Externes</a:t>
-            </a:r>
-            <a:r>
-              <a:rPr lang="en" sz="1300">
-                <a:solidFill>
-                  <a:schemeClr val="dk1"/>
-                </a:solidFill>
-              </a:rPr>
-              <a:t>. </a:t>
-            </a:r>
-            <a:endParaRPr sz="1300">
-              <a:solidFill>
-                <a:schemeClr val="dk1"/>
-              </a:solidFill>
-            </a:endParaRPr>
-          </a:p>
-          <a:p>
-            <a:pPr indent="0" lvl="0" marL="0" rtl="0" algn="just">
-              <a:lnSpc>
-                <a:spcPct val="115000"/>
-              </a:lnSpc>
-              <a:spcBef>
-                <a:spcPts val="0"/>
-              </a:spcBef>
-              <a:spcAft>
-                <a:spcPts val="0"/>
-              </a:spcAft>
-              <a:buNone/>
-            </a:pPr>
-            <a:r>
-              <a:rPr b="1" lang="en" sz="1300" u="sng">
-                <a:solidFill>
-                  <a:schemeClr val="dk1"/>
-                </a:solidFill>
-              </a:rPr>
-              <a:t>RNF</a:t>
-            </a:r>
-            <a:r>
-              <a:rPr b="1" lang="en" sz="1300">
-                <a:solidFill>
-                  <a:schemeClr val="dk1"/>
-                </a:solidFill>
-              </a:rPr>
-              <a:t>-7-07: </a:t>
-            </a:r>
-            <a:r>
-              <a:rPr lang="en" sz="1300">
-                <a:solidFill>
-                  <a:schemeClr val="dk1"/>
-                </a:solidFill>
-              </a:rPr>
-              <a:t>L’aplicació ha de suportar 1000 usuaris connectats alhora. RNF de </a:t>
-            </a:r>
-            <a:r>
-              <a:rPr lang="en" sz="1300" u="sng">
-                <a:solidFill>
-                  <a:schemeClr val="dk1"/>
-                </a:solidFill>
-              </a:rPr>
-              <a:t>Rendiment estàtic</a:t>
-            </a:r>
-            <a:r>
-              <a:rPr lang="en" sz="1300">
-                <a:solidFill>
-                  <a:schemeClr val="dk1"/>
-                </a:solidFill>
-              </a:rPr>
-              <a:t>.</a:t>
-            </a:r>
-            <a:endParaRPr sz="1300">
-              <a:solidFill>
-                <a:schemeClr val="dk1"/>
-              </a:solidFill>
-            </a:endParaRPr>
-          </a:p>
-          <a:p>
-            <a:pPr indent="0" lvl="0" marL="0" rtl="0" algn="just">
-              <a:lnSpc>
-                <a:spcPct val="115000"/>
-              </a:lnSpc>
-              <a:spcBef>
-                <a:spcPts val="0"/>
-              </a:spcBef>
-              <a:spcAft>
-                <a:spcPts val="0"/>
-              </a:spcAft>
-              <a:buNone/>
-            </a:pPr>
-            <a:r>
-              <a:rPr b="1" lang="en" sz="1300" u="sng">
-                <a:solidFill>
-                  <a:schemeClr val="dk1"/>
-                </a:solidFill>
-              </a:rPr>
-              <a:t>RNF</a:t>
-            </a:r>
-            <a:r>
-              <a:rPr b="1" lang="en" sz="1300">
-                <a:solidFill>
-                  <a:schemeClr val="dk1"/>
-                </a:solidFill>
-              </a:rPr>
-              <a:t>-7-08: </a:t>
-            </a:r>
-            <a:r>
-              <a:rPr lang="en" sz="1300">
-                <a:solidFill>
-                  <a:schemeClr val="dk1"/>
-                </a:solidFill>
-              </a:rPr>
-              <a:t>El temps màxim de resposta de l’aplicació ha de ser de 5 mil·lisegons. RNF de </a:t>
-            </a:r>
-            <a:r>
-              <a:rPr lang="en" sz="1300" u="sng">
-                <a:solidFill>
-                  <a:schemeClr val="dk1"/>
-                </a:solidFill>
-              </a:rPr>
-              <a:t>Rendiment dinàmic</a:t>
-            </a:r>
-            <a:r>
-              <a:rPr lang="en" sz="1300">
-                <a:solidFill>
-                  <a:schemeClr val="dk1"/>
-                </a:solidFill>
-              </a:rPr>
-              <a:t>.</a:t>
-            </a:r>
-            <a:endParaRPr sz="1300">
-              <a:solidFill>
-                <a:schemeClr val="dk1"/>
-              </a:solidFill>
-            </a:endParaRPr>
-          </a:p>
-          <a:p>
-            <a:pPr indent="0" lvl="0" marL="0" rtl="0" algn="just">
-              <a:lnSpc>
-                <a:spcPct val="115000"/>
-              </a:lnSpc>
-              <a:spcBef>
-                <a:spcPts val="0"/>
-              </a:spcBef>
-              <a:spcAft>
-                <a:spcPts val="0"/>
-              </a:spcAft>
-              <a:buNone/>
-            </a:pPr>
-            <a:r>
-              <a:rPr b="1" lang="en" sz="1300" u="sng">
-                <a:solidFill>
-                  <a:schemeClr val="dk1"/>
-                </a:solidFill>
-              </a:rPr>
-              <a:t>RNF</a:t>
-            </a:r>
-            <a:r>
-              <a:rPr b="1" lang="en" sz="1300">
-                <a:solidFill>
-                  <a:schemeClr val="dk1"/>
-                </a:solidFill>
-              </a:rPr>
-              <a:t>-7-09: </a:t>
-            </a:r>
-            <a:r>
-              <a:rPr lang="en" sz="1300">
-                <a:solidFill>
-                  <a:schemeClr val="dk1"/>
-                </a:solidFill>
-              </a:rPr>
-              <a:t>Per a encriptar dades es farà servir el protocol OpenVPN. RNF de </a:t>
-            </a:r>
-            <a:r>
-              <a:rPr lang="en" sz="1300" u="sng">
-                <a:solidFill>
-                  <a:schemeClr val="dk1"/>
-                </a:solidFill>
-              </a:rPr>
-              <a:t>Decisió de Disseny</a:t>
-            </a:r>
-            <a:r>
-              <a:rPr lang="en" sz="1300">
-                <a:solidFill>
-                  <a:schemeClr val="dk1"/>
-                </a:solidFill>
-              </a:rPr>
-              <a:t>.</a:t>
-            </a:r>
-            <a:endParaRPr sz="1300">
-              <a:solidFill>
-                <a:schemeClr val="dk1"/>
-              </a:solidFill>
-            </a:endParaRPr>
-          </a:p>
-          <a:p>
-            <a:pPr indent="0" lvl="0" marL="0" rtl="0" algn="just">
-              <a:lnSpc>
-                <a:spcPct val="115000"/>
-              </a:lnSpc>
-              <a:spcBef>
-                <a:spcPts val="0"/>
-              </a:spcBef>
-              <a:spcAft>
-                <a:spcPts val="0"/>
-              </a:spcAft>
-              <a:buNone/>
-            </a:pPr>
-            <a:r>
-              <a:rPr b="1" lang="en" sz="1300" u="sng">
-                <a:solidFill>
-                  <a:schemeClr val="dk1"/>
-                </a:solidFill>
-              </a:rPr>
-              <a:t>RNF</a:t>
-            </a:r>
-            <a:r>
-              <a:rPr b="1" lang="en" sz="1300">
-                <a:solidFill>
-                  <a:schemeClr val="dk1"/>
-                </a:solidFill>
-              </a:rPr>
-              <a:t>-7-10: </a:t>
-            </a:r>
-            <a:r>
-              <a:rPr lang="en" sz="1300">
-                <a:solidFill>
-                  <a:schemeClr val="dk1"/>
-                </a:solidFill>
-              </a:rPr>
-              <a:t>Interfície amigable i responsive. RNF d'</a:t>
-            </a:r>
-            <a:r>
-              <a:rPr lang="en" sz="1300" u="sng">
-                <a:solidFill>
-                  <a:schemeClr val="dk1"/>
-                </a:solidFill>
-              </a:rPr>
-              <a:t>Objectius de Disseny</a:t>
-            </a:r>
-            <a:r>
-              <a:rPr lang="en" sz="1300">
-                <a:solidFill>
-                  <a:schemeClr val="dk1"/>
-                </a:solidFill>
-              </a:rPr>
-              <a:t>. </a:t>
-            </a:r>
-            <a:endParaRPr sz="1300">
-              <a:solidFill>
-                <a:schemeClr val="dk1"/>
-              </a:solidFill>
-            </a:endParaRPr>
-          </a:p>
-          <a:p>
-            <a:pPr indent="0" lvl="0" marL="0" rtl="0" algn="just">
-              <a:lnSpc>
-                <a:spcPct val="115000"/>
-              </a:lnSpc>
-              <a:spcBef>
-                <a:spcPts val="0"/>
-              </a:spcBef>
-              <a:spcAft>
-                <a:spcPts val="0"/>
-              </a:spcAft>
-              <a:buNone/>
-            </a:pPr>
-            <a:r>
               <a:t/>
             </a:r>
-            <a:endParaRPr b="1" sz="1300">
+            <a:endParaRPr b="1" sz="1600">
               <a:solidFill>
                 <a:schemeClr val="dk1"/>
               </a:solidFill>
@@ -14787,7 +15000,7 @@
   <p:cSld>
     <p:spTree>
       <p:nvGrpSpPr>
-        <p:cNvPr id="193" name="Shape 193"/>
+        <p:cNvPr id="194" name="Shape 194"/>
         <p:cNvGrpSpPr/>
         <p:nvPr/>
       </p:nvGrpSpPr>
@@ -14801,7 +15014,7 @@
       </p:grpSpPr>
       <p:sp>
         <p:nvSpPr>
-          <p:cNvPr id="194" name="Google Shape;194;p33"/>
+          <p:cNvPr id="195" name="Google Shape;195;p33"/>
           <p:cNvSpPr txBox="1"/>
           <p:nvPr>
             <p:ph type="title"/>
@@ -14833,6 +15046,1134 @@
             </a:pPr>
             <a:r>
               <a:rPr lang="en"/>
+              <a:t>Requisits</a:t>
+            </a:r>
+            <a:endParaRPr/>
+          </a:p>
+        </p:txBody>
+      </p:sp>
+      <p:sp>
+        <p:nvSpPr>
+          <p:cNvPr id="196" name="Google Shape;196;p33"/>
+          <p:cNvSpPr txBox="1"/>
+          <p:nvPr/>
+        </p:nvSpPr>
+        <p:spPr>
+          <a:xfrm>
+            <a:off x="228600" y="801300"/>
+            <a:ext cx="8686800" cy="3827700"/>
+          </a:xfrm>
+          <a:prstGeom prst="rect">
+            <a:avLst/>
+          </a:prstGeom>
+          <a:noFill/>
+          <a:ln>
+            <a:noFill/>
+          </a:ln>
+        </p:spPr>
+        <p:txBody>
+          <a:bodyPr anchorCtr="0" anchor="t" bIns="91425" lIns="91425" spcFirstLastPara="1" rIns="91425" wrap="square" tIns="91425">
+            <a:noAutofit/>
+          </a:bodyPr>
+          <a:lstStyle/>
+          <a:p>
+            <a:pPr indent="0" lvl="0" marL="0" rtl="0" algn="ctr">
+              <a:lnSpc>
+                <a:spcPct val="115000"/>
+              </a:lnSpc>
+              <a:spcBef>
+                <a:spcPts val="0"/>
+              </a:spcBef>
+              <a:spcAft>
+                <a:spcPts val="0"/>
+              </a:spcAft>
+              <a:buNone/>
+            </a:pPr>
+            <a:r>
+              <a:rPr b="1" lang="en" sz="1600">
+                <a:solidFill>
+                  <a:schemeClr val="dk1"/>
+                </a:solidFill>
+              </a:rPr>
+              <a:t>GRUP 6: FUNCIONALITATS ADDICIONALS</a:t>
+            </a:r>
+            <a:endParaRPr b="1" sz="1600">
+              <a:solidFill>
+                <a:schemeClr val="dk1"/>
+              </a:solidFill>
+            </a:endParaRPr>
+          </a:p>
+          <a:p>
+            <a:pPr indent="0" lvl="0" marL="0" rtl="0" algn="just">
+              <a:lnSpc>
+                <a:spcPct val="115000"/>
+              </a:lnSpc>
+              <a:spcBef>
+                <a:spcPts val="0"/>
+              </a:spcBef>
+              <a:spcAft>
+                <a:spcPts val="0"/>
+              </a:spcAft>
+              <a:buNone/>
+            </a:pPr>
+            <a:r>
+              <a:t/>
+            </a:r>
+            <a:endParaRPr b="1" sz="1600">
+              <a:solidFill>
+                <a:schemeClr val="dk1"/>
+              </a:solidFill>
+            </a:endParaRPr>
+          </a:p>
+          <a:p>
+            <a:pPr indent="0" lvl="0" marL="0" rtl="0" algn="just">
+              <a:lnSpc>
+                <a:spcPct val="115000"/>
+              </a:lnSpc>
+              <a:spcBef>
+                <a:spcPts val="0"/>
+              </a:spcBef>
+              <a:spcAft>
+                <a:spcPts val="0"/>
+              </a:spcAft>
+              <a:buNone/>
+            </a:pPr>
+            <a:r>
+              <a:rPr b="1" lang="en" sz="1600">
+                <a:solidFill>
+                  <a:schemeClr val="dk1"/>
+                </a:solidFill>
+              </a:rPr>
+              <a:t>RF-6-01: </a:t>
+            </a:r>
+            <a:r>
+              <a:rPr lang="en" sz="1600">
+                <a:solidFill>
+                  <a:schemeClr val="dk1"/>
+                </a:solidFill>
+              </a:rPr>
+              <a:t>Els clients poden proposar els plats que volen consumir i aquests s'afegeixen a un menú específic on un cuiner els accepta.</a:t>
+            </a:r>
+            <a:endParaRPr sz="1600">
+              <a:solidFill>
+                <a:schemeClr val="dk1"/>
+              </a:solidFill>
+            </a:endParaRPr>
+          </a:p>
+          <a:p>
+            <a:pPr indent="0" lvl="0" marL="0" rtl="0" algn="just">
+              <a:lnSpc>
+                <a:spcPct val="115000"/>
+              </a:lnSpc>
+              <a:spcBef>
+                <a:spcPts val="0"/>
+              </a:spcBef>
+              <a:spcAft>
+                <a:spcPts val="0"/>
+              </a:spcAft>
+              <a:buNone/>
+            </a:pPr>
+            <a:r>
+              <a:t/>
+            </a:r>
+            <a:endParaRPr b="1" sz="1600" u="sng">
+              <a:solidFill>
+                <a:schemeClr val="dk1"/>
+              </a:solidFill>
+            </a:endParaRPr>
+          </a:p>
+          <a:p>
+            <a:pPr indent="0" lvl="0" marL="0" rtl="0" algn="just">
+              <a:lnSpc>
+                <a:spcPct val="115000"/>
+              </a:lnSpc>
+              <a:spcBef>
+                <a:spcPts val="0"/>
+              </a:spcBef>
+              <a:spcAft>
+                <a:spcPts val="0"/>
+              </a:spcAft>
+              <a:buNone/>
+            </a:pPr>
+            <a:r>
+              <a:rPr b="1" lang="en" sz="1600" u="sng">
+                <a:solidFill>
+                  <a:schemeClr val="dk1"/>
+                </a:solidFill>
+              </a:rPr>
+              <a:t>RNF</a:t>
+            </a:r>
+            <a:r>
+              <a:rPr b="1" lang="en" sz="1600">
+                <a:solidFill>
+                  <a:schemeClr val="dk1"/>
+                </a:solidFill>
+              </a:rPr>
+              <a:t>-6-02: </a:t>
+            </a:r>
+            <a:r>
+              <a:rPr lang="en" sz="1600">
+                <a:solidFill>
+                  <a:schemeClr val="dk1"/>
+                </a:solidFill>
+              </a:rPr>
+              <a:t>Només els cuiners poden accedir al menú específic. RNF de </a:t>
+            </a:r>
+            <a:r>
+              <a:rPr lang="en" sz="1600" u="sng">
+                <a:solidFill>
+                  <a:schemeClr val="dk1"/>
+                </a:solidFill>
+              </a:rPr>
+              <a:t>Restricció de Disseny, seguretat.</a:t>
+            </a:r>
+            <a:r>
+              <a:rPr lang="en" sz="1600">
+                <a:solidFill>
+                  <a:schemeClr val="dk1"/>
+                </a:solidFill>
+              </a:rPr>
+              <a:t> </a:t>
+            </a:r>
+            <a:endParaRPr sz="1600">
+              <a:solidFill>
+                <a:schemeClr val="dk1"/>
+              </a:solidFill>
+            </a:endParaRPr>
+          </a:p>
+          <a:p>
+            <a:pPr indent="0" lvl="0" marL="0" rtl="0" algn="just">
+              <a:lnSpc>
+                <a:spcPct val="115000"/>
+              </a:lnSpc>
+              <a:spcBef>
+                <a:spcPts val="0"/>
+              </a:spcBef>
+              <a:spcAft>
+                <a:spcPts val="0"/>
+              </a:spcAft>
+              <a:buNone/>
+            </a:pPr>
+            <a:r>
+              <a:t/>
+            </a:r>
+            <a:endParaRPr b="1" sz="1600">
+              <a:solidFill>
+                <a:schemeClr val="dk1"/>
+              </a:solidFill>
+            </a:endParaRPr>
+          </a:p>
+          <a:p>
+            <a:pPr indent="0" lvl="0" marL="0" rtl="0" algn="just">
+              <a:lnSpc>
+                <a:spcPct val="115000"/>
+              </a:lnSpc>
+              <a:spcBef>
+                <a:spcPts val="0"/>
+              </a:spcBef>
+              <a:spcAft>
+                <a:spcPts val="0"/>
+              </a:spcAft>
+              <a:buNone/>
+            </a:pPr>
+            <a:r>
+              <a:rPr b="1" lang="en" sz="1600">
+                <a:solidFill>
+                  <a:schemeClr val="dk1"/>
+                </a:solidFill>
+              </a:rPr>
+              <a:t>RF-6-03: </a:t>
+            </a:r>
+            <a:r>
+              <a:rPr lang="en" sz="1600">
+                <a:solidFill>
+                  <a:schemeClr val="dk1"/>
+                </a:solidFill>
+              </a:rPr>
+              <a:t>Hi ha xat client-cuiner per a garantir un bon servei.</a:t>
+            </a:r>
+            <a:endParaRPr sz="1600">
+              <a:solidFill>
+                <a:schemeClr val="dk1"/>
+              </a:solidFill>
+            </a:endParaRPr>
+          </a:p>
+          <a:p>
+            <a:pPr indent="0" lvl="0" marL="0" rtl="0" algn="just">
+              <a:lnSpc>
+                <a:spcPct val="115000"/>
+              </a:lnSpc>
+              <a:spcBef>
+                <a:spcPts val="0"/>
+              </a:spcBef>
+              <a:spcAft>
+                <a:spcPts val="0"/>
+              </a:spcAft>
+              <a:buNone/>
+            </a:pPr>
+            <a:r>
+              <a:t/>
+            </a:r>
+            <a:endParaRPr b="1" sz="1600">
+              <a:solidFill>
+                <a:schemeClr val="dk1"/>
+              </a:solidFill>
+            </a:endParaRPr>
+          </a:p>
+          <a:p>
+            <a:pPr indent="0" lvl="0" marL="0" rtl="0" algn="just">
+              <a:lnSpc>
+                <a:spcPct val="115000"/>
+              </a:lnSpc>
+              <a:spcBef>
+                <a:spcPts val="0"/>
+              </a:spcBef>
+              <a:spcAft>
+                <a:spcPts val="0"/>
+              </a:spcAft>
+              <a:buNone/>
+            </a:pPr>
+            <a:r>
+              <a:rPr b="1" lang="en" sz="1600">
+                <a:solidFill>
+                  <a:schemeClr val="dk1"/>
+                </a:solidFill>
+              </a:rPr>
+              <a:t>RF-6-04: </a:t>
+            </a:r>
+            <a:r>
+              <a:rPr lang="en" sz="1600">
+                <a:solidFill>
+                  <a:schemeClr val="dk1"/>
+                </a:solidFill>
+              </a:rPr>
+              <a:t>Els usuaris es poden subscriure un pla mensual amb tarifa d'enviaments i sistema de punts. </a:t>
+            </a:r>
+            <a:endParaRPr sz="1600">
+              <a:solidFill>
+                <a:schemeClr val="dk1"/>
+              </a:solidFill>
+            </a:endParaRPr>
+          </a:p>
+          <a:p>
+            <a:pPr indent="0" lvl="0" marL="0" rtl="0" algn="just">
+              <a:lnSpc>
+                <a:spcPct val="115000"/>
+              </a:lnSpc>
+              <a:spcBef>
+                <a:spcPts val="0"/>
+              </a:spcBef>
+              <a:spcAft>
+                <a:spcPts val="0"/>
+              </a:spcAft>
+              <a:buNone/>
+            </a:pPr>
+            <a:r>
+              <a:t/>
+            </a:r>
+            <a:endParaRPr b="1" sz="1600">
+              <a:solidFill>
+                <a:schemeClr val="dk1"/>
+              </a:solidFill>
+            </a:endParaRPr>
+          </a:p>
+        </p:txBody>
+      </p:sp>
+    </p:spTree>
+  </p:cSld>
+  <p:clrMapOvr>
+    <a:masterClrMapping/>
+  </p:clrMapOvr>
+</p:sld>
+</file>
+
+<file path=ppt/slides/slide14.xml><?xml version="1.0" encoding="utf-8"?>
+<p:sld xmlns:a="http://schemas.openxmlformats.org/drawingml/2006/main" xmlns:r="http://schemas.openxmlformats.org/officeDocument/2006/relationships" xmlns:mc="http://schemas.openxmlformats.org/markup-compatibility/2006" xmlns:mv="urn:schemas-microsoft-com:mac:vml" xmlns:p="http://schemas.openxmlformats.org/presentationml/2006/main" xmlns:c="http://schemas.openxmlformats.org/drawingml/2006/chart" xmlns:dgm="http://schemas.openxmlformats.org/drawingml/2006/diagram" xmlns:o="urn:schemas-microsoft-com:office:office" xmlns:v="urn:schemas-microsoft-com:vml" xmlns:pvml="urn:schemas-microsoft-com:office:powerpoint" xmlns:com="http://schemas.openxmlformats.org/drawingml/2006/compatibility" xmlns:p14="http://schemas.microsoft.com/office/powerpoint/2010/main" xmlns:p15="http://schemas.microsoft.com/office/powerpoint/2012/main" xmlns:ahyp="http://schemas.microsoft.com/office/drawing/2018/hyperlinkcolor">
+  <p:cSld>
+    <p:spTree>
+      <p:nvGrpSpPr>
+        <p:cNvPr id="200" name="Shape 200"/>
+        <p:cNvGrpSpPr/>
+        <p:nvPr/>
+      </p:nvGrpSpPr>
+      <p:grpSpPr>
+        <a:xfrm>
+          <a:off x="0" y="0"/>
+          <a:ext cx="0" cy="0"/>
+          <a:chOff x="0" y="0"/>
+          <a:chExt cx="0" cy="0"/>
+        </a:xfrm>
+      </p:grpSpPr>
+      <p:sp>
+        <p:nvSpPr>
+          <p:cNvPr id="201" name="Google Shape;201;p34"/>
+          <p:cNvSpPr txBox="1"/>
+          <p:nvPr>
+            <p:ph type="title"/>
+          </p:nvPr>
+        </p:nvSpPr>
+        <p:spPr>
+          <a:xfrm>
+            <a:off x="228600" y="228600"/>
+            <a:ext cx="8686800" cy="572700"/>
+          </a:xfrm>
+          <a:prstGeom prst="rect">
+            <a:avLst/>
+          </a:prstGeom>
+        </p:spPr>
+        <p:txBody>
+          <a:bodyPr anchorCtr="0" anchor="t" bIns="91425" lIns="91425" spcFirstLastPara="1" rIns="91425" wrap="square" tIns="91425">
+            <a:noAutofit/>
+          </a:bodyPr>
+          <a:lstStyle/>
+          <a:p>
+            <a:pPr indent="0" lvl="0" marL="0" rtl="0" algn="ctr">
+              <a:spcBef>
+                <a:spcPts val="0"/>
+              </a:spcBef>
+              <a:spcAft>
+                <a:spcPts val="0"/>
+              </a:spcAft>
+              <a:buNone/>
+            </a:pPr>
+            <a:r>
+              <a:rPr lang="en"/>
+              <a:t>Requisits</a:t>
+            </a:r>
+            <a:endParaRPr/>
+          </a:p>
+        </p:txBody>
+      </p:sp>
+      <p:sp>
+        <p:nvSpPr>
+          <p:cNvPr id="202" name="Google Shape;202;p34"/>
+          <p:cNvSpPr txBox="1"/>
+          <p:nvPr/>
+        </p:nvSpPr>
+        <p:spPr>
+          <a:xfrm>
+            <a:off x="228600" y="801300"/>
+            <a:ext cx="8686800" cy="3827700"/>
+          </a:xfrm>
+          <a:prstGeom prst="rect">
+            <a:avLst/>
+          </a:prstGeom>
+          <a:noFill/>
+          <a:ln>
+            <a:noFill/>
+          </a:ln>
+        </p:spPr>
+        <p:txBody>
+          <a:bodyPr anchorCtr="0" anchor="t" bIns="91425" lIns="91425" spcFirstLastPara="1" rIns="91425" wrap="square" tIns="91425">
+            <a:noAutofit/>
+          </a:bodyPr>
+          <a:lstStyle/>
+          <a:p>
+            <a:pPr indent="0" lvl="0" marL="0" rtl="0" algn="ctr">
+              <a:lnSpc>
+                <a:spcPct val="115000"/>
+              </a:lnSpc>
+              <a:spcBef>
+                <a:spcPts val="0"/>
+              </a:spcBef>
+              <a:spcAft>
+                <a:spcPts val="0"/>
+              </a:spcAft>
+              <a:buNone/>
+            </a:pPr>
+            <a:r>
+              <a:rPr b="1" lang="en">
+                <a:solidFill>
+                  <a:schemeClr val="dk1"/>
+                </a:solidFill>
+              </a:rPr>
+              <a:t>GRUP 7: ALTRES CONSIDERACIONS</a:t>
+            </a:r>
+            <a:endParaRPr b="1">
+              <a:solidFill>
+                <a:schemeClr val="dk1"/>
+              </a:solidFill>
+            </a:endParaRPr>
+          </a:p>
+          <a:p>
+            <a:pPr indent="0" lvl="0" marL="0" rtl="0" algn="just">
+              <a:lnSpc>
+                <a:spcPct val="115000"/>
+              </a:lnSpc>
+              <a:spcBef>
+                <a:spcPts val="0"/>
+              </a:spcBef>
+              <a:spcAft>
+                <a:spcPts val="0"/>
+              </a:spcAft>
+              <a:buNone/>
+            </a:pPr>
+            <a:r>
+              <a:t/>
+            </a:r>
+            <a:endParaRPr b="1">
+              <a:solidFill>
+                <a:schemeClr val="dk1"/>
+              </a:solidFill>
+            </a:endParaRPr>
+          </a:p>
+          <a:p>
+            <a:pPr indent="0" lvl="0" marL="0" rtl="0" algn="just">
+              <a:lnSpc>
+                <a:spcPct val="115000"/>
+              </a:lnSpc>
+              <a:spcBef>
+                <a:spcPts val="0"/>
+              </a:spcBef>
+              <a:spcAft>
+                <a:spcPts val="0"/>
+              </a:spcAft>
+              <a:buNone/>
+            </a:pPr>
+            <a:r>
+              <a:rPr b="1" lang="en" u="sng">
+                <a:solidFill>
+                  <a:schemeClr val="dk1"/>
+                </a:solidFill>
+              </a:rPr>
+              <a:t>RNF</a:t>
+            </a:r>
+            <a:r>
+              <a:rPr b="1" lang="en">
+                <a:solidFill>
+                  <a:schemeClr val="dk1"/>
+                </a:solidFill>
+              </a:rPr>
+              <a:t>-7-01: </a:t>
+            </a:r>
+            <a:r>
+              <a:rPr lang="en">
+                <a:solidFill>
+                  <a:schemeClr val="dk1"/>
+                </a:solidFill>
+              </a:rPr>
+              <a:t>Es farà servir a l'àrea metropolitana de Barcelona. RNF de </a:t>
+            </a:r>
+            <a:r>
+              <a:rPr lang="en" u="sng">
+                <a:solidFill>
+                  <a:schemeClr val="dk1"/>
+                </a:solidFill>
+              </a:rPr>
+              <a:t>Restricció de Disseny</a:t>
+            </a:r>
+            <a:r>
+              <a:rPr lang="en">
+                <a:solidFill>
+                  <a:schemeClr val="dk1"/>
+                </a:solidFill>
+              </a:rPr>
+              <a:t>.</a:t>
+            </a:r>
+            <a:endParaRPr>
+              <a:solidFill>
+                <a:schemeClr val="dk1"/>
+              </a:solidFill>
+            </a:endParaRPr>
+          </a:p>
+          <a:p>
+            <a:pPr indent="0" lvl="0" marL="0" rtl="0" algn="just">
+              <a:lnSpc>
+                <a:spcPct val="115000"/>
+              </a:lnSpc>
+              <a:spcBef>
+                <a:spcPts val="0"/>
+              </a:spcBef>
+              <a:spcAft>
+                <a:spcPts val="0"/>
+              </a:spcAft>
+              <a:buNone/>
+            </a:pPr>
+            <a:r>
+              <a:rPr b="1" lang="en" u="sng">
+                <a:solidFill>
+                  <a:schemeClr val="dk1"/>
+                </a:solidFill>
+              </a:rPr>
+              <a:t>RNF</a:t>
+            </a:r>
+            <a:r>
+              <a:rPr b="1" lang="en">
+                <a:solidFill>
+                  <a:schemeClr val="dk1"/>
+                </a:solidFill>
+              </a:rPr>
+              <a:t>-7-02: </a:t>
+            </a:r>
+            <a:r>
+              <a:rPr lang="en">
+                <a:solidFill>
+                  <a:schemeClr val="dk1"/>
+                </a:solidFill>
+              </a:rPr>
+              <a:t>La interfície serà trilingüe: Espanyol, Català i Anglès. RNF d’</a:t>
+            </a:r>
+            <a:r>
+              <a:rPr lang="en" u="sng">
+                <a:solidFill>
+                  <a:schemeClr val="dk1"/>
+                </a:solidFill>
+              </a:rPr>
+              <a:t>Interfícies Externes</a:t>
+            </a:r>
+            <a:r>
+              <a:rPr lang="en">
+                <a:solidFill>
+                  <a:schemeClr val="dk1"/>
+                </a:solidFill>
+              </a:rPr>
+              <a:t>. </a:t>
+            </a:r>
+            <a:endParaRPr>
+              <a:solidFill>
+                <a:schemeClr val="dk1"/>
+              </a:solidFill>
+            </a:endParaRPr>
+          </a:p>
+          <a:p>
+            <a:pPr indent="0" lvl="0" marL="0" rtl="0" algn="just">
+              <a:lnSpc>
+                <a:spcPct val="115000"/>
+              </a:lnSpc>
+              <a:spcBef>
+                <a:spcPts val="0"/>
+              </a:spcBef>
+              <a:spcAft>
+                <a:spcPts val="0"/>
+              </a:spcAft>
+              <a:buNone/>
+            </a:pPr>
+            <a:r>
+              <a:rPr b="1" lang="en" u="sng">
+                <a:solidFill>
+                  <a:schemeClr val="dk1"/>
+                </a:solidFill>
+              </a:rPr>
+              <a:t>RNF</a:t>
+            </a:r>
+            <a:r>
+              <a:rPr b="1" lang="en">
+                <a:solidFill>
+                  <a:schemeClr val="dk1"/>
+                </a:solidFill>
+              </a:rPr>
+              <a:t>-7-03: </a:t>
+            </a:r>
+            <a:r>
+              <a:rPr lang="en">
+                <a:solidFill>
+                  <a:schemeClr val="dk1"/>
+                </a:solidFill>
+              </a:rPr>
+              <a:t>Apte tant per a Web com per a Mòbil. RNF d’Interfícies Externes. </a:t>
+            </a:r>
+            <a:endParaRPr>
+              <a:solidFill>
+                <a:schemeClr val="dk1"/>
+              </a:solidFill>
+            </a:endParaRPr>
+          </a:p>
+          <a:p>
+            <a:pPr indent="0" lvl="0" marL="0" rtl="0" algn="just">
+              <a:lnSpc>
+                <a:spcPct val="115000"/>
+              </a:lnSpc>
+              <a:spcBef>
+                <a:spcPts val="0"/>
+              </a:spcBef>
+              <a:spcAft>
+                <a:spcPts val="0"/>
+              </a:spcAft>
+              <a:buNone/>
+            </a:pPr>
+            <a:r>
+              <a:rPr b="1" lang="en" u="sng">
+                <a:solidFill>
+                  <a:schemeClr val="dk1"/>
+                </a:solidFill>
+              </a:rPr>
+              <a:t>RNF</a:t>
+            </a:r>
+            <a:r>
+              <a:rPr b="1" lang="en">
+                <a:solidFill>
+                  <a:schemeClr val="dk1"/>
+                </a:solidFill>
+              </a:rPr>
+              <a:t>-7-04: </a:t>
+            </a:r>
+            <a:r>
+              <a:rPr lang="en">
+                <a:solidFill>
+                  <a:schemeClr val="dk1"/>
+                </a:solidFill>
+              </a:rPr>
+              <a:t>Els Mòbils hauran de tenir sistema operatiu iOS o Android. RNF de </a:t>
+            </a:r>
+            <a:r>
+              <a:rPr lang="en" u="sng">
+                <a:solidFill>
+                  <a:schemeClr val="dk1"/>
+                </a:solidFill>
+              </a:rPr>
+              <a:t>Restricció de Disseny, limitació de Hw</a:t>
+            </a:r>
+            <a:r>
+              <a:rPr lang="en">
+                <a:solidFill>
+                  <a:schemeClr val="dk1"/>
+                </a:solidFill>
+              </a:rPr>
+              <a:t>. </a:t>
+            </a:r>
+            <a:endParaRPr>
+              <a:solidFill>
+                <a:schemeClr val="dk1"/>
+              </a:solidFill>
+            </a:endParaRPr>
+          </a:p>
+          <a:p>
+            <a:pPr indent="0" lvl="0" marL="0" rtl="0" algn="just">
+              <a:lnSpc>
+                <a:spcPct val="115000"/>
+              </a:lnSpc>
+              <a:spcBef>
+                <a:spcPts val="0"/>
+              </a:spcBef>
+              <a:spcAft>
+                <a:spcPts val="0"/>
+              </a:spcAft>
+              <a:buNone/>
+            </a:pPr>
+            <a:r>
+              <a:rPr b="1" lang="en" u="sng">
+                <a:solidFill>
+                  <a:schemeClr val="dk1"/>
+                </a:solidFill>
+              </a:rPr>
+              <a:t>RNF</a:t>
+            </a:r>
+            <a:r>
+              <a:rPr b="1" lang="en">
+                <a:solidFill>
+                  <a:schemeClr val="dk1"/>
+                </a:solidFill>
+              </a:rPr>
+              <a:t>-7-05: </a:t>
+            </a:r>
+            <a:r>
+              <a:rPr lang="en">
+                <a:solidFill>
+                  <a:schemeClr val="dk1"/>
+                </a:solidFill>
+              </a:rPr>
+              <a:t>Lletra Calibri tant a encapçalaments com per a la resta de continguts. </a:t>
+            </a:r>
+            <a:r>
+              <a:rPr lang="en" u="sng">
+                <a:solidFill>
+                  <a:schemeClr val="dk1"/>
+                </a:solidFill>
+              </a:rPr>
+              <a:t>RNF d’Interfícies Externes</a:t>
+            </a:r>
+            <a:r>
+              <a:rPr lang="en">
+                <a:solidFill>
+                  <a:schemeClr val="dk1"/>
+                </a:solidFill>
+              </a:rPr>
+              <a:t>. </a:t>
+            </a:r>
+            <a:endParaRPr>
+              <a:solidFill>
+                <a:schemeClr val="dk1"/>
+              </a:solidFill>
+            </a:endParaRPr>
+          </a:p>
+          <a:p>
+            <a:pPr indent="0" lvl="0" marL="0" rtl="0" algn="just">
+              <a:lnSpc>
+                <a:spcPct val="115000"/>
+              </a:lnSpc>
+              <a:spcBef>
+                <a:spcPts val="0"/>
+              </a:spcBef>
+              <a:spcAft>
+                <a:spcPts val="0"/>
+              </a:spcAft>
+              <a:buNone/>
+            </a:pPr>
+            <a:r>
+              <a:rPr b="1" lang="en" u="sng">
+                <a:solidFill>
+                  <a:schemeClr val="dk1"/>
+                </a:solidFill>
+              </a:rPr>
+              <a:t>RNF</a:t>
+            </a:r>
+            <a:r>
+              <a:rPr b="1" lang="en">
+                <a:solidFill>
+                  <a:schemeClr val="dk1"/>
+                </a:solidFill>
+              </a:rPr>
+              <a:t>-7-06: </a:t>
+            </a:r>
+            <a:r>
+              <a:rPr lang="en">
+                <a:solidFill>
+                  <a:schemeClr val="dk1"/>
+                </a:solidFill>
+              </a:rPr>
+              <a:t>Color corporatiu taronja i  El logo ha d'aparèixer a totes les pantalles. RNF d’</a:t>
+            </a:r>
+            <a:r>
+              <a:rPr lang="en" u="sng">
+                <a:solidFill>
+                  <a:schemeClr val="dk1"/>
+                </a:solidFill>
+              </a:rPr>
+              <a:t>Interfícies Externes</a:t>
+            </a:r>
+            <a:r>
+              <a:rPr lang="en">
+                <a:solidFill>
+                  <a:schemeClr val="dk1"/>
+                </a:solidFill>
+              </a:rPr>
+              <a:t>. </a:t>
+            </a:r>
+            <a:endParaRPr>
+              <a:solidFill>
+                <a:schemeClr val="dk1"/>
+              </a:solidFill>
+            </a:endParaRPr>
+          </a:p>
+          <a:p>
+            <a:pPr indent="0" lvl="0" marL="0" rtl="0" algn="just">
+              <a:lnSpc>
+                <a:spcPct val="115000"/>
+              </a:lnSpc>
+              <a:spcBef>
+                <a:spcPts val="0"/>
+              </a:spcBef>
+              <a:spcAft>
+                <a:spcPts val="0"/>
+              </a:spcAft>
+              <a:buNone/>
+            </a:pPr>
+            <a:r>
+              <a:rPr b="1" lang="en" u="sng">
+                <a:solidFill>
+                  <a:schemeClr val="dk1"/>
+                </a:solidFill>
+              </a:rPr>
+              <a:t>RNF</a:t>
+            </a:r>
+            <a:r>
+              <a:rPr b="1" lang="en">
+                <a:solidFill>
+                  <a:schemeClr val="dk1"/>
+                </a:solidFill>
+              </a:rPr>
+              <a:t>-7-07: </a:t>
+            </a:r>
+            <a:r>
+              <a:rPr lang="en">
+                <a:solidFill>
+                  <a:schemeClr val="dk1"/>
+                </a:solidFill>
+              </a:rPr>
+              <a:t>L’aplicació ha de suportar 1000 usuaris connectats alhora. RNF de </a:t>
+            </a:r>
+            <a:r>
+              <a:rPr lang="en" u="sng">
+                <a:solidFill>
+                  <a:schemeClr val="dk1"/>
+                </a:solidFill>
+              </a:rPr>
+              <a:t>Rendiment estàtic</a:t>
+            </a:r>
+            <a:r>
+              <a:rPr lang="en">
+                <a:solidFill>
+                  <a:schemeClr val="dk1"/>
+                </a:solidFill>
+              </a:rPr>
+              <a:t>.</a:t>
+            </a:r>
+            <a:endParaRPr>
+              <a:solidFill>
+                <a:schemeClr val="dk1"/>
+              </a:solidFill>
+            </a:endParaRPr>
+          </a:p>
+          <a:p>
+            <a:pPr indent="0" lvl="0" marL="0" rtl="0" algn="just">
+              <a:lnSpc>
+                <a:spcPct val="115000"/>
+              </a:lnSpc>
+              <a:spcBef>
+                <a:spcPts val="0"/>
+              </a:spcBef>
+              <a:spcAft>
+                <a:spcPts val="0"/>
+              </a:spcAft>
+              <a:buNone/>
+            </a:pPr>
+            <a:r>
+              <a:rPr b="1" lang="en" u="sng">
+                <a:solidFill>
+                  <a:schemeClr val="dk1"/>
+                </a:solidFill>
+              </a:rPr>
+              <a:t>RNF</a:t>
+            </a:r>
+            <a:r>
+              <a:rPr b="1" lang="en">
+                <a:solidFill>
+                  <a:schemeClr val="dk1"/>
+                </a:solidFill>
+              </a:rPr>
+              <a:t>-7-08: </a:t>
+            </a:r>
+            <a:r>
+              <a:rPr lang="en">
+                <a:solidFill>
+                  <a:schemeClr val="dk1"/>
+                </a:solidFill>
+              </a:rPr>
+              <a:t>El temps màxim de resposta de l’aplicació ha de ser de 5 mil·lisegons. RNF de </a:t>
+            </a:r>
+            <a:r>
+              <a:rPr lang="en" u="sng">
+                <a:solidFill>
+                  <a:schemeClr val="dk1"/>
+                </a:solidFill>
+              </a:rPr>
+              <a:t>Rendiment dinàmic</a:t>
+            </a:r>
+            <a:r>
+              <a:rPr lang="en">
+                <a:solidFill>
+                  <a:schemeClr val="dk1"/>
+                </a:solidFill>
+              </a:rPr>
+              <a:t>.</a:t>
+            </a:r>
+            <a:endParaRPr>
+              <a:solidFill>
+                <a:schemeClr val="dk1"/>
+              </a:solidFill>
+            </a:endParaRPr>
+          </a:p>
+          <a:p>
+            <a:pPr indent="0" lvl="0" marL="0" rtl="0" algn="just">
+              <a:lnSpc>
+                <a:spcPct val="115000"/>
+              </a:lnSpc>
+              <a:spcBef>
+                <a:spcPts val="0"/>
+              </a:spcBef>
+              <a:spcAft>
+                <a:spcPts val="0"/>
+              </a:spcAft>
+              <a:buNone/>
+            </a:pPr>
+            <a:r>
+              <a:rPr b="1" lang="en" u="sng">
+                <a:solidFill>
+                  <a:schemeClr val="dk1"/>
+                </a:solidFill>
+              </a:rPr>
+              <a:t>RNF</a:t>
+            </a:r>
+            <a:r>
+              <a:rPr b="1" lang="en">
+                <a:solidFill>
+                  <a:schemeClr val="dk1"/>
+                </a:solidFill>
+              </a:rPr>
+              <a:t>-7-09: </a:t>
+            </a:r>
+            <a:r>
+              <a:rPr lang="en">
+                <a:solidFill>
+                  <a:schemeClr val="dk1"/>
+                </a:solidFill>
+              </a:rPr>
+              <a:t>Per a encriptar dades es farà servir el protocol OpenVPN. RNF de </a:t>
+            </a:r>
+            <a:r>
+              <a:rPr lang="en" u="sng">
+                <a:solidFill>
+                  <a:schemeClr val="dk1"/>
+                </a:solidFill>
+              </a:rPr>
+              <a:t>Decisió de Disseny</a:t>
+            </a:r>
+            <a:r>
+              <a:rPr lang="en">
+                <a:solidFill>
+                  <a:schemeClr val="dk1"/>
+                </a:solidFill>
+              </a:rPr>
+              <a:t>.</a:t>
+            </a:r>
+            <a:endParaRPr>
+              <a:solidFill>
+                <a:schemeClr val="dk1"/>
+              </a:solidFill>
+            </a:endParaRPr>
+          </a:p>
+          <a:p>
+            <a:pPr indent="0" lvl="0" marL="0" rtl="0" algn="just">
+              <a:lnSpc>
+                <a:spcPct val="115000"/>
+              </a:lnSpc>
+              <a:spcBef>
+                <a:spcPts val="0"/>
+              </a:spcBef>
+              <a:spcAft>
+                <a:spcPts val="0"/>
+              </a:spcAft>
+              <a:buNone/>
+            </a:pPr>
+            <a:r>
+              <a:rPr b="1" lang="en" u="sng">
+                <a:solidFill>
+                  <a:schemeClr val="dk1"/>
+                </a:solidFill>
+              </a:rPr>
+              <a:t>RNF</a:t>
+            </a:r>
+            <a:r>
+              <a:rPr b="1" lang="en">
+                <a:solidFill>
+                  <a:schemeClr val="dk1"/>
+                </a:solidFill>
+              </a:rPr>
+              <a:t>-7-10: </a:t>
+            </a:r>
+            <a:r>
+              <a:rPr lang="en">
+                <a:solidFill>
+                  <a:schemeClr val="dk1"/>
+                </a:solidFill>
+              </a:rPr>
+              <a:t>Interfície amigable i responsive. RNF d'</a:t>
+            </a:r>
+            <a:r>
+              <a:rPr lang="en" u="sng">
+                <a:solidFill>
+                  <a:schemeClr val="dk1"/>
+                </a:solidFill>
+              </a:rPr>
+              <a:t>Objectius de Disseny</a:t>
+            </a:r>
+            <a:r>
+              <a:rPr lang="en">
+                <a:solidFill>
+                  <a:schemeClr val="dk1"/>
+                </a:solidFill>
+              </a:rPr>
+              <a:t>. </a:t>
+            </a:r>
+            <a:endParaRPr>
+              <a:solidFill>
+                <a:schemeClr val="dk1"/>
+              </a:solidFill>
+            </a:endParaRPr>
+          </a:p>
+          <a:p>
+            <a:pPr indent="0" lvl="0" marL="0" rtl="0" algn="just">
+              <a:lnSpc>
+                <a:spcPct val="115000"/>
+              </a:lnSpc>
+              <a:spcBef>
+                <a:spcPts val="0"/>
+              </a:spcBef>
+              <a:spcAft>
+                <a:spcPts val="0"/>
+              </a:spcAft>
+              <a:buNone/>
+            </a:pPr>
+            <a:r>
+              <a:t/>
+            </a:r>
+            <a:endParaRPr b="1">
+              <a:solidFill>
+                <a:schemeClr val="dk1"/>
+              </a:solidFill>
+            </a:endParaRPr>
+          </a:p>
+        </p:txBody>
+      </p:sp>
+    </p:spTree>
+  </p:cSld>
+  <p:clrMapOvr>
+    <a:masterClrMapping/>
+  </p:clrMapOvr>
+</p:sld>
+</file>
+
+<file path=ppt/slides/slide15.xml><?xml version="1.0" encoding="utf-8"?>
+<p:sld xmlns:a="http://schemas.openxmlformats.org/drawingml/2006/main" xmlns:r="http://schemas.openxmlformats.org/officeDocument/2006/relationships" xmlns:mc="http://schemas.openxmlformats.org/markup-compatibility/2006" xmlns:mv="urn:schemas-microsoft-com:mac:vml" xmlns:p="http://schemas.openxmlformats.org/presentationml/2006/main" xmlns:c="http://schemas.openxmlformats.org/drawingml/2006/chart" xmlns:dgm="http://schemas.openxmlformats.org/drawingml/2006/diagram" xmlns:o="urn:schemas-microsoft-com:office:office" xmlns:v="urn:schemas-microsoft-com:vml" xmlns:pvml="urn:schemas-microsoft-com:office:powerpoint" xmlns:com="http://schemas.openxmlformats.org/drawingml/2006/compatibility" xmlns:p14="http://schemas.microsoft.com/office/powerpoint/2010/main" xmlns:p15="http://schemas.microsoft.com/office/powerpoint/2012/main" xmlns:ahyp="http://schemas.microsoft.com/office/drawing/2018/hyperlinkcolor">
+  <p:cSld>
+    <p:spTree>
+      <p:nvGrpSpPr>
+        <p:cNvPr id="206" name="Shape 206"/>
+        <p:cNvGrpSpPr/>
+        <p:nvPr/>
+      </p:nvGrpSpPr>
+      <p:grpSpPr>
+        <a:xfrm>
+          <a:off x="0" y="0"/>
+          <a:ext cx="0" cy="0"/>
+          <a:chOff x="0" y="0"/>
+          <a:chExt cx="0" cy="0"/>
+        </a:xfrm>
+      </p:grpSpPr>
+      <p:sp>
+        <p:nvSpPr>
+          <p:cNvPr id="207" name="Google Shape;207;p35"/>
+          <p:cNvSpPr txBox="1"/>
+          <p:nvPr>
+            <p:ph type="title"/>
+          </p:nvPr>
+        </p:nvSpPr>
+        <p:spPr>
+          <a:xfrm>
+            <a:off x="228600" y="228600"/>
+            <a:ext cx="8686800" cy="572700"/>
+          </a:xfrm>
+          <a:prstGeom prst="rect">
+            <a:avLst/>
+          </a:prstGeom>
+        </p:spPr>
+        <p:txBody>
+          <a:bodyPr anchorCtr="0" anchor="t" bIns="91425" lIns="91425" spcFirstLastPara="1" rIns="91425" wrap="square" tIns="91425">
+            <a:noAutofit/>
+          </a:bodyPr>
+          <a:lstStyle/>
+          <a:p>
+            <a:pPr indent="0" lvl="0" marL="0" rtl="0" algn="ctr">
+              <a:spcBef>
+                <a:spcPts val="0"/>
+              </a:spcBef>
+              <a:spcAft>
+                <a:spcPts val="0"/>
+              </a:spcAft>
+              <a:buNone/>
+            </a:pPr>
+            <a:r>
+              <a:rPr lang="en"/>
               <a:t>Burn-down chart</a:t>
             </a:r>
             <a:endParaRPr/>
@@ -14841,7 +16182,7 @@
       </p:sp>
       <p:pic>
         <p:nvPicPr>
-          <p:cNvPr id="195" name="Google Shape;195;p33"/>
+          <p:cNvPr id="208" name="Google Shape;208;p35"/>
           <p:cNvPicPr preferRelativeResize="0"/>
           <p:nvPr/>
         </p:nvPicPr>
@@ -14869,7 +16210,7 @@
       </p:pic>
       <p:pic>
         <p:nvPicPr>
-          <p:cNvPr id="196" name="Google Shape;196;p33"/>
+          <p:cNvPr id="209" name="Google Shape;209;p35"/>
           <p:cNvPicPr preferRelativeResize="0"/>
           <p:nvPr/>
         </p:nvPicPr>
@@ -15833,7 +17174,7 @@
             </a:pPr>
             <a:r>
               <a:rPr lang="en"/>
-              <a:t>Si el cuiner el té contractat, envia </a:t>
+              <a:t>Envia </a:t>
             </a:r>
             <a:r>
               <a:rPr lang="en"/>
@@ -16356,7 +17697,7 @@
             <a:avLst/>
           </a:prstGeom>
           <a:solidFill>
-            <a:srgbClr val="434343"/>
+            <a:srgbClr val="990000"/>
           </a:solidFill>
           <a:ln>
             <a:noFill/>
@@ -16511,6 +17852,46 @@
           </a:ln>
         </p:spPr>
       </p:pic>
+      <p:sp>
+        <p:nvSpPr>
+          <p:cNvPr id="148" name="Google Shape;148;p25"/>
+          <p:cNvSpPr txBox="1"/>
+          <p:nvPr>
+            <p:ph idx="6" type="subTitle"/>
+          </p:nvPr>
+        </p:nvSpPr>
+        <p:spPr>
+          <a:xfrm>
+            <a:off x="2954350" y="3585150"/>
+            <a:ext cx="1812000" cy="313200"/>
+          </a:xfrm>
+          <a:prstGeom prst="rect">
+            <a:avLst/>
+          </a:prstGeom>
+        </p:spPr>
+        <p:txBody>
+          <a:bodyPr anchorCtr="0" anchor="ctr" bIns="91425" lIns="91425" spcFirstLastPara="1" rIns="91425" wrap="square" tIns="91425">
+            <a:noAutofit/>
+          </a:bodyPr>
+          <a:lstStyle/>
+          <a:p>
+            <a:pPr indent="0" lvl="0" marL="0" rtl="0" algn="ctr">
+              <a:spcBef>
+                <a:spcPts val="0"/>
+              </a:spcBef>
+              <a:spcAft>
+                <a:spcPts val="0"/>
+              </a:spcAft>
+              <a:buNone/>
+            </a:pPr>
+            <a:r>
+              <a:rPr lang="en" u="sng"/>
+              <a:t>Modificat!!!</a:t>
+            </a:r>
+            <a:endParaRPr u="sng"/>
+          </a:p>
+        </p:txBody>
+      </p:sp>
     </p:spTree>
   </p:cSld>
   <p:clrMapOvr>
@@ -16524,7 +17905,7 @@
   <p:cSld>
     <p:spTree>
       <p:nvGrpSpPr>
-        <p:cNvPr id="151" name="Shape 151"/>
+        <p:cNvPr id="152" name="Shape 152"/>
         <p:cNvGrpSpPr/>
         <p:nvPr/>
       </p:nvGrpSpPr>
@@ -16538,7 +17919,7 @@
       </p:grpSpPr>
       <p:sp>
         <p:nvSpPr>
-          <p:cNvPr id="152" name="Google Shape;152;p26"/>
+          <p:cNvPr id="153" name="Google Shape;153;p26"/>
           <p:cNvSpPr txBox="1"/>
           <p:nvPr>
             <p:ph type="title"/>
@@ -16578,7 +17959,7 @@
       </p:sp>
       <p:sp>
         <p:nvSpPr>
-          <p:cNvPr id="153" name="Google Shape;153;p26"/>
+          <p:cNvPr id="154" name="Google Shape;154;p26"/>
           <p:cNvSpPr txBox="1"/>
           <p:nvPr/>
         </p:nvSpPr>
@@ -17293,7 +18674,7 @@
   <p:cSld>
     <p:spTree>
       <p:nvGrpSpPr>
-        <p:cNvPr id="157" name="Shape 157"/>
+        <p:cNvPr id="158" name="Shape 158"/>
         <p:cNvGrpSpPr/>
         <p:nvPr/>
       </p:nvGrpSpPr>
@@ -17307,7 +18688,7 @@
       </p:grpSpPr>
       <p:sp>
         <p:nvSpPr>
-          <p:cNvPr id="158" name="Google Shape;158;p27"/>
+          <p:cNvPr id="159" name="Google Shape;159;p27"/>
           <p:cNvSpPr txBox="1"/>
           <p:nvPr>
             <p:ph type="title"/>
@@ -17347,7 +18728,350 @@
       </p:sp>
       <p:sp>
         <p:nvSpPr>
-          <p:cNvPr id="159" name="Google Shape;159;p27"/>
+          <p:cNvPr id="160" name="Google Shape;160;p27"/>
+          <p:cNvSpPr txBox="1"/>
+          <p:nvPr/>
+        </p:nvSpPr>
+        <p:spPr>
+          <a:xfrm>
+            <a:off x="214796" y="801300"/>
+            <a:ext cx="8686800" cy="3827700"/>
+          </a:xfrm>
+          <a:prstGeom prst="rect">
+            <a:avLst/>
+          </a:prstGeom>
+          <a:noFill/>
+          <a:ln>
+            <a:noFill/>
+          </a:ln>
+        </p:spPr>
+        <p:txBody>
+          <a:bodyPr anchorCtr="0" anchor="t" bIns="91425" lIns="91425" spcFirstLastPara="1" rIns="91425" wrap="square" tIns="91425">
+            <a:noAutofit/>
+          </a:bodyPr>
+          <a:lstStyle/>
+          <a:p>
+            <a:pPr indent="0" lvl="0" marL="0" rtl="0" algn="ctr">
+              <a:spcBef>
+                <a:spcPts val="0"/>
+              </a:spcBef>
+              <a:spcAft>
+                <a:spcPts val="0"/>
+              </a:spcAft>
+              <a:buNone/>
+            </a:pPr>
+            <a:r>
+              <a:rPr b="1" lang="en" sz="1300">
+                <a:solidFill>
+                  <a:schemeClr val="dk1"/>
+                </a:solidFill>
+              </a:rPr>
+              <a:t>GRUP 1: GESTIÓ DE COMPTES I CREACIÓ DE PERFILS D'USUARI</a:t>
+            </a:r>
+            <a:endParaRPr b="1" sz="1300">
+              <a:solidFill>
+                <a:schemeClr val="dk1"/>
+              </a:solidFill>
+            </a:endParaRPr>
+          </a:p>
+          <a:p>
+            <a:pPr indent="0" lvl="0" marL="0" rtl="0" algn="l">
+              <a:spcBef>
+                <a:spcPts val="0"/>
+              </a:spcBef>
+              <a:spcAft>
+                <a:spcPts val="0"/>
+              </a:spcAft>
+              <a:buNone/>
+            </a:pPr>
+            <a:r>
+              <a:t/>
+            </a:r>
+            <a:endParaRPr b="1" sz="1300">
+              <a:solidFill>
+                <a:schemeClr val="dk1"/>
+              </a:solidFill>
+            </a:endParaRPr>
+          </a:p>
+          <a:p>
+            <a:pPr indent="0" lvl="0" marL="0" rtl="0" algn="l">
+              <a:spcBef>
+                <a:spcPts val="0"/>
+              </a:spcBef>
+              <a:spcAft>
+                <a:spcPts val="0"/>
+              </a:spcAft>
+              <a:buNone/>
+            </a:pPr>
+            <a:r>
+              <a:rPr b="1" lang="en" sz="1800" u="sng">
+                <a:solidFill>
+                  <a:srgbClr val="FF0000"/>
+                </a:solidFill>
+              </a:rPr>
+              <a:t>Modificat</a:t>
+            </a:r>
+            <a:r>
+              <a:rPr b="1" lang="en" sz="1800" u="sng">
+                <a:solidFill>
+                  <a:srgbClr val="FF0000"/>
+                </a:solidFill>
+              </a:rPr>
+              <a:t>!!!</a:t>
+            </a:r>
+            <a:endParaRPr b="1" sz="1800" u="sng">
+              <a:solidFill>
+                <a:srgbClr val="FF0000"/>
+              </a:solidFill>
+            </a:endParaRPr>
+          </a:p>
+          <a:p>
+            <a:pPr indent="0" lvl="0" marL="0" rtl="0" algn="l">
+              <a:spcBef>
+                <a:spcPts val="0"/>
+              </a:spcBef>
+              <a:spcAft>
+                <a:spcPts val="0"/>
+              </a:spcAft>
+              <a:buNone/>
+            </a:pPr>
+            <a:r>
+              <a:t/>
+            </a:r>
+            <a:endParaRPr b="1" sz="1800">
+              <a:solidFill>
+                <a:schemeClr val="dk1"/>
+              </a:solidFill>
+            </a:endParaRPr>
+          </a:p>
+          <a:p>
+            <a:pPr indent="-342900" lvl="0" marL="457200" rtl="0" algn="l">
+              <a:spcBef>
+                <a:spcPts val="0"/>
+              </a:spcBef>
+              <a:spcAft>
+                <a:spcPts val="0"/>
+              </a:spcAft>
+              <a:buClr>
+                <a:srgbClr val="FF0000"/>
+              </a:buClr>
+              <a:buSzPts val="1800"/>
+              <a:buChar char="➔"/>
+            </a:pPr>
+            <a:r>
+              <a:rPr b="1" lang="en" sz="1800" u="sng">
+                <a:solidFill>
+                  <a:schemeClr val="dk1"/>
+                </a:solidFill>
+              </a:rPr>
+              <a:t>RNF</a:t>
+            </a:r>
+            <a:r>
+              <a:rPr b="1" lang="en" sz="1800">
+                <a:solidFill>
+                  <a:schemeClr val="dk1"/>
+                </a:solidFill>
+              </a:rPr>
+              <a:t>-1-04: </a:t>
+            </a:r>
+            <a:r>
+              <a:rPr lang="en" sz="1800">
+                <a:solidFill>
+                  <a:schemeClr val="dk1"/>
+                </a:solidFill>
+              </a:rPr>
+              <a:t>Els usuaris hauran d’indicar l'adreça de recollida. RNF de </a:t>
+            </a:r>
+            <a:r>
+              <a:rPr lang="en" sz="1800" u="sng">
+                <a:solidFill>
+                  <a:schemeClr val="dk1"/>
+                </a:solidFill>
+              </a:rPr>
+              <a:t>Restricció de Disseny</a:t>
+            </a:r>
+            <a:r>
+              <a:rPr lang="en" sz="1800">
+                <a:solidFill>
+                  <a:schemeClr val="dk1"/>
+                </a:solidFill>
+              </a:rPr>
+              <a:t>.</a:t>
+            </a:r>
+            <a:endParaRPr sz="1800">
+              <a:solidFill>
+                <a:schemeClr val="dk1"/>
+              </a:solidFill>
+            </a:endParaRPr>
+          </a:p>
+          <a:p>
+            <a:pPr indent="0" lvl="0" marL="457200" rtl="0" algn="l">
+              <a:spcBef>
+                <a:spcPts val="0"/>
+              </a:spcBef>
+              <a:spcAft>
+                <a:spcPts val="0"/>
+              </a:spcAft>
+              <a:buNone/>
+            </a:pPr>
+            <a:r>
+              <a:t/>
+            </a:r>
+            <a:endParaRPr sz="1800">
+              <a:solidFill>
+                <a:schemeClr val="dk1"/>
+              </a:solidFill>
+            </a:endParaRPr>
+          </a:p>
+          <a:p>
+            <a:pPr indent="-342900" lvl="0" marL="457200" rtl="0" algn="l">
+              <a:spcBef>
+                <a:spcPts val="0"/>
+              </a:spcBef>
+              <a:spcAft>
+                <a:spcPts val="0"/>
+              </a:spcAft>
+              <a:buClr>
+                <a:srgbClr val="FF0000"/>
+              </a:buClr>
+              <a:buSzPts val="1800"/>
+              <a:buChar char="➔"/>
+            </a:pPr>
+            <a:r>
+              <a:rPr b="1" lang="en" sz="1800" u="sng">
+                <a:solidFill>
+                  <a:schemeClr val="dk1"/>
+                </a:solidFill>
+              </a:rPr>
+              <a:t>RNF</a:t>
+            </a:r>
+            <a:r>
+              <a:rPr b="1" lang="en" sz="1800">
+                <a:solidFill>
+                  <a:schemeClr val="dk1"/>
+                </a:solidFill>
+              </a:rPr>
+              <a:t>-1-05: </a:t>
+            </a:r>
+            <a:r>
+              <a:rPr lang="en" sz="1800">
+                <a:solidFill>
+                  <a:schemeClr val="dk1"/>
+                </a:solidFill>
+              </a:rPr>
+              <a:t>Els usuaris hauran de definir un nom d'usuari que no estigui repetit dins del sistema. RNF de </a:t>
+            </a:r>
+            <a:r>
+              <a:rPr lang="en" sz="1800" u="sng">
+                <a:solidFill>
+                  <a:schemeClr val="dk1"/>
+                </a:solidFill>
+              </a:rPr>
+              <a:t>Restricció de Disseny</a:t>
+            </a:r>
+            <a:r>
+              <a:rPr lang="en" sz="1800">
+                <a:solidFill>
+                  <a:schemeClr val="dk1"/>
+                </a:solidFill>
+              </a:rPr>
+              <a:t>. </a:t>
+            </a:r>
+            <a:endParaRPr sz="1800">
+              <a:solidFill>
+                <a:schemeClr val="dk1"/>
+              </a:solidFill>
+            </a:endParaRPr>
+          </a:p>
+          <a:p>
+            <a:pPr indent="0" lvl="0" marL="0" rtl="0" algn="l">
+              <a:spcBef>
+                <a:spcPts val="0"/>
+              </a:spcBef>
+              <a:spcAft>
+                <a:spcPts val="0"/>
+              </a:spcAft>
+              <a:buNone/>
+            </a:pPr>
+            <a:r>
+              <a:t/>
+            </a:r>
+            <a:endParaRPr b="1" sz="1300">
+              <a:solidFill>
+                <a:schemeClr val="dk1"/>
+              </a:solidFill>
+            </a:endParaRPr>
+          </a:p>
+        </p:txBody>
+      </p:sp>
+    </p:spTree>
+  </p:cSld>
+  <p:clrMapOvr>
+    <a:masterClrMapping/>
+  </p:clrMapOvr>
+</p:sld>
+</file>
+
+<file path=ppt/slides/slide8.xml><?xml version="1.0" encoding="utf-8"?>
+<p:sld xmlns:a="http://schemas.openxmlformats.org/drawingml/2006/main" xmlns:r="http://schemas.openxmlformats.org/officeDocument/2006/relationships" xmlns:mc="http://schemas.openxmlformats.org/markup-compatibility/2006" xmlns:mv="urn:schemas-microsoft-com:mac:vml" xmlns:p="http://schemas.openxmlformats.org/presentationml/2006/main" xmlns:c="http://schemas.openxmlformats.org/drawingml/2006/chart" xmlns:dgm="http://schemas.openxmlformats.org/drawingml/2006/diagram" xmlns:o="urn:schemas-microsoft-com:office:office" xmlns:v="urn:schemas-microsoft-com:vml" xmlns:pvml="urn:schemas-microsoft-com:office:powerpoint" xmlns:com="http://schemas.openxmlformats.org/drawingml/2006/compatibility" xmlns:p14="http://schemas.microsoft.com/office/powerpoint/2010/main" xmlns:p15="http://schemas.microsoft.com/office/powerpoint/2012/main" xmlns:ahyp="http://schemas.microsoft.com/office/drawing/2018/hyperlinkcolor">
+  <p:cSld>
+    <p:spTree>
+      <p:nvGrpSpPr>
+        <p:cNvPr id="164" name="Shape 164"/>
+        <p:cNvGrpSpPr/>
+        <p:nvPr/>
+      </p:nvGrpSpPr>
+      <p:grpSpPr>
+        <a:xfrm>
+          <a:off x="0" y="0"/>
+          <a:ext cx="0" cy="0"/>
+          <a:chOff x="0" y="0"/>
+          <a:chExt cx="0" cy="0"/>
+        </a:xfrm>
+      </p:grpSpPr>
+      <p:sp>
+        <p:nvSpPr>
+          <p:cNvPr id="165" name="Google Shape;165;p28"/>
+          <p:cNvSpPr txBox="1"/>
+          <p:nvPr>
+            <p:ph type="title"/>
+          </p:nvPr>
+        </p:nvSpPr>
+        <p:spPr>
+          <a:xfrm>
+            <a:off x="228600" y="228600"/>
+            <a:ext cx="8686800" cy="572700"/>
+          </a:xfrm>
+          <a:prstGeom prst="rect">
+            <a:avLst/>
+          </a:prstGeom>
+        </p:spPr>
+        <p:txBody>
+          <a:bodyPr anchorCtr="0" anchor="t" bIns="91425" lIns="91425" spcFirstLastPara="1" rIns="91425" wrap="square" tIns="91425">
+            <a:noAutofit/>
+          </a:bodyPr>
+          <a:lstStyle/>
+          <a:p>
+            <a:pPr indent="0" lvl="0" marL="0" rtl="0" algn="ctr">
+              <a:spcBef>
+                <a:spcPts val="0"/>
+              </a:spcBef>
+              <a:spcAft>
+                <a:spcPts val="0"/>
+              </a:spcAft>
+              <a:buNone/>
+            </a:pPr>
+            <a:r>
+              <a:rPr lang="en"/>
+              <a:t>Requisits</a:t>
+            </a:r>
+            <a:endParaRPr/>
+          </a:p>
+        </p:txBody>
+      </p:sp>
+      <p:sp>
+        <p:nvSpPr>
+          <p:cNvPr id="166" name="Google Shape;166;p28"/>
           <p:cNvSpPr txBox="1"/>
           <p:nvPr/>
         </p:nvSpPr>
@@ -17953,12 +19677,12 @@
 </p:sld>
 </file>
 
-<file path=ppt/slides/slide8.xml><?xml version="1.0" encoding="utf-8"?>
+<file path=ppt/slides/slide9.xml><?xml version="1.0" encoding="utf-8"?>
 <p:sld xmlns:a="http://schemas.openxmlformats.org/drawingml/2006/main" xmlns:r="http://schemas.openxmlformats.org/officeDocument/2006/relationships" xmlns:mc="http://schemas.openxmlformats.org/markup-compatibility/2006" xmlns:mv="urn:schemas-microsoft-com:mac:vml" xmlns:p="http://schemas.openxmlformats.org/presentationml/2006/main" xmlns:c="http://schemas.openxmlformats.org/drawingml/2006/chart" xmlns:dgm="http://schemas.openxmlformats.org/drawingml/2006/diagram" xmlns:o="urn:schemas-microsoft-com:office:office" xmlns:v="urn:schemas-microsoft-com:vml" xmlns:pvml="urn:schemas-microsoft-com:office:powerpoint" xmlns:com="http://schemas.openxmlformats.org/drawingml/2006/compatibility" xmlns:p14="http://schemas.microsoft.com/office/powerpoint/2010/main" xmlns:p15="http://schemas.microsoft.com/office/powerpoint/2012/main" xmlns:ahyp="http://schemas.microsoft.com/office/drawing/2018/hyperlinkcolor">
   <p:cSld>
     <p:spTree>
       <p:nvGrpSpPr>
-        <p:cNvPr id="163" name="Shape 163"/>
+        <p:cNvPr id="170" name="Shape 170"/>
         <p:cNvGrpSpPr/>
         <p:nvPr/>
       </p:nvGrpSpPr>
@@ -17972,7 +19696,7 @@
       </p:grpSpPr>
       <p:sp>
         <p:nvSpPr>
-          <p:cNvPr id="164" name="Google Shape;164;p28"/>
+          <p:cNvPr id="171" name="Google Shape;171;p29"/>
           <p:cNvSpPr txBox="1"/>
           <p:nvPr>
             <p:ph type="title"/>
@@ -18012,7 +19736,7 @@
       </p:sp>
       <p:sp>
         <p:nvSpPr>
-          <p:cNvPr id="165" name="Google Shape;165;p28"/>
+          <p:cNvPr id="172" name="Google Shape;172;p29"/>
           <p:cNvSpPr txBox="1"/>
           <p:nvPr/>
         </p:nvSpPr>
@@ -18050,7 +19774,7 @@
                   <a:schemeClr val="dk1"/>
                 </a:solidFill>
               </a:rPr>
-              <a:t>GRUP 3: ENVIAMENT DE COMANDES</a:t>
+              <a:t>GRUP 2: REALITZACIÓ DE COMANDES</a:t>
             </a:r>
             <a:endParaRPr b="1" sz="1300">
               <a:solidFill>
@@ -18071,38 +19795,6 @@
             <a:r>
               <a:t/>
             </a:r>
-            <a:endParaRPr b="1" sz="1300">
-              <a:solidFill>
-                <a:schemeClr val="dk1"/>
-              </a:solidFill>
-            </a:endParaRPr>
-          </a:p>
-          <a:p>
-            <a:pPr indent="0" lvl="0" marL="0" rtl="0" algn="l">
-              <a:spcBef>
-                <a:spcPts val="0"/>
-              </a:spcBef>
-              <a:spcAft>
-                <a:spcPts val="0"/>
-              </a:spcAft>
-              <a:buNone/>
-            </a:pPr>
-            <a:r>
-              <a:rPr b="1" lang="en" sz="1300">
-                <a:solidFill>
-                  <a:schemeClr val="dk1"/>
-                </a:solidFill>
-              </a:rPr>
-              <a:t>RF-3-01: </a:t>
-            </a:r>
-            <a:r>
-              <a:rPr lang="en" sz="1300">
-                <a:solidFill>
-                  <a:schemeClr val="dk1"/>
-                </a:solidFill>
-              </a:rPr>
-              <a:t>Es pot escollir entre tres tipus d’enviament (que l’enviï el cuiner, un repartidor, o que el busqui el client).  </a:t>
-            </a:r>
             <a:endParaRPr sz="1300">
               <a:solidFill>
                 <a:schemeClr val="dk1"/>
@@ -18120,9 +19812,148 @@
               <a:buNone/>
             </a:pPr>
             <a:r>
+              <a:rPr b="1" lang="en" sz="1800" u="sng">
+                <a:solidFill>
+                  <a:srgbClr val="FF0000"/>
+                </a:solidFill>
+              </a:rPr>
+              <a:t>Modificat!!!</a:t>
+            </a:r>
+            <a:endParaRPr b="1" sz="1800" u="sng">
+              <a:solidFill>
+                <a:srgbClr val="FF0000"/>
+              </a:solidFill>
+            </a:endParaRPr>
+          </a:p>
+          <a:p>
+            <a:pPr indent="0" lvl="0" marL="0" rtl="0" algn="l">
+              <a:spcBef>
+                <a:spcPts val="0"/>
+              </a:spcBef>
+              <a:spcAft>
+                <a:spcPts val="0"/>
+              </a:spcAft>
+              <a:buNone/>
+            </a:pPr>
+            <a:r>
               <a:t/>
             </a:r>
-            <a:endParaRPr b="1" sz="1300">
+            <a:endParaRPr sz="1800">
+              <a:solidFill>
+                <a:schemeClr val="dk1"/>
+              </a:solidFill>
+            </a:endParaRPr>
+          </a:p>
+          <a:p>
+            <a:pPr indent="-342900" lvl="0" marL="457200" rtl="0" algn="l">
+              <a:spcBef>
+                <a:spcPts val="0"/>
+              </a:spcBef>
+              <a:spcAft>
+                <a:spcPts val="0"/>
+              </a:spcAft>
+              <a:buClr>
+                <a:srgbClr val="FF0000"/>
+              </a:buClr>
+              <a:buSzPts val="1800"/>
+              <a:buChar char="➔"/>
+            </a:pPr>
+            <a:r>
+              <a:rPr b="1" lang="en" sz="1800">
+                <a:solidFill>
+                  <a:schemeClr val="dk1"/>
+                </a:solidFill>
+              </a:rPr>
+              <a:t>RF-2-07: </a:t>
+            </a:r>
+            <a:r>
+              <a:rPr lang="en" sz="1800">
+                <a:solidFill>
+                  <a:schemeClr val="dk1"/>
+                </a:solidFill>
+              </a:rPr>
+              <a:t>Els cuiners poden indicar l'hora en què poden acceptar comandes. </a:t>
+            </a:r>
+            <a:endParaRPr sz="1800">
+              <a:solidFill>
+                <a:schemeClr val="dk1"/>
+              </a:solidFill>
+            </a:endParaRPr>
+          </a:p>
+          <a:p>
+            <a:pPr indent="0" lvl="0" marL="457200" rtl="0" algn="l">
+              <a:spcBef>
+                <a:spcPts val="0"/>
+              </a:spcBef>
+              <a:spcAft>
+                <a:spcPts val="0"/>
+              </a:spcAft>
+              <a:buNone/>
+            </a:pPr>
+            <a:r>
+              <a:t/>
+            </a:r>
+            <a:endParaRPr b="1" sz="1800" u="sng">
+              <a:solidFill>
+                <a:schemeClr val="dk1"/>
+              </a:solidFill>
+            </a:endParaRPr>
+          </a:p>
+          <a:p>
+            <a:pPr indent="-342900" lvl="0" marL="457200" rtl="0" algn="l">
+              <a:spcBef>
+                <a:spcPts val="0"/>
+              </a:spcBef>
+              <a:spcAft>
+                <a:spcPts val="0"/>
+              </a:spcAft>
+              <a:buClr>
+                <a:srgbClr val="FF0000"/>
+              </a:buClr>
+              <a:buSzPts val="1800"/>
+              <a:buChar char="➔"/>
+            </a:pPr>
+            <a:r>
+              <a:rPr b="1" lang="en" sz="1800" u="sng">
+                <a:solidFill>
+                  <a:schemeClr val="dk1"/>
+                </a:solidFill>
+              </a:rPr>
+              <a:t>RNF</a:t>
+            </a:r>
+            <a:r>
+              <a:rPr b="1" lang="en" sz="1800">
+                <a:solidFill>
+                  <a:schemeClr val="dk1"/>
+                </a:solidFill>
+              </a:rPr>
+              <a:t>-2-08: </a:t>
+            </a:r>
+            <a:r>
+              <a:rPr lang="en" sz="1800">
+                <a:solidFill>
+                  <a:schemeClr val="dk1"/>
+                </a:solidFill>
+              </a:rPr>
+              <a:t>Els cuiners poden aparèixer en el llistat com a no disponibles. RNF de </a:t>
+            </a:r>
+            <a:r>
+              <a:rPr lang="en" sz="1800" u="sng">
+                <a:solidFill>
+                  <a:schemeClr val="dk1"/>
+                </a:solidFill>
+              </a:rPr>
+              <a:t>Decisió de Disseny</a:t>
+            </a:r>
+            <a:r>
+              <a:rPr lang="en" sz="1800">
+                <a:solidFill>
+                  <a:schemeClr val="dk1"/>
+                </a:solidFill>
+              </a:rPr>
+              <a:t>. </a:t>
+            </a:r>
+            <a:endParaRPr sz="1800">
               <a:solidFill>
                 <a:schemeClr val="dk1"/>
               </a:solidFill>
@@ -18139,22 +19970,9 @@
               <a:buNone/>
             </a:pPr>
             <a:r>
-              <a:rPr b="1" lang="en" sz="1300">
-                <a:solidFill>
-                  <a:schemeClr val="dk1"/>
-                </a:solidFill>
-              </a:rPr>
-              <a:t>RF-3-02: </a:t>
-            </a:r>
-            <a:r>
-              <a:rPr lang="en" sz="1300">
-                <a:solidFill>
-                  <a:schemeClr val="dk1"/>
-                </a:solidFill>
-              </a:rPr>
-              <a:t>El cost de l’enviament es calcula segons la distància entre el cuiner i el lloc de lliurament, sent gratuït si el client recull la comanda al domicili del cuiner. </a:t>
-            </a:r>
-            <a:endParaRPr sz="1300">
+              <a:t/>
+            </a:r>
+            <a:endParaRPr sz="1800">
               <a:solidFill>
                 <a:schemeClr val="dk1"/>
               </a:solidFill>
@@ -18173,420 +19991,7 @@
             <a:r>
               <a:t/>
             </a:r>
-            <a:endParaRPr b="1" sz="1300">
-              <a:solidFill>
-                <a:schemeClr val="dk1"/>
-              </a:solidFill>
-            </a:endParaRPr>
-          </a:p>
-          <a:p>
-            <a:pPr indent="0" lvl="0" marL="0" rtl="0" algn="l">
-              <a:spcBef>
-                <a:spcPts val="0"/>
-              </a:spcBef>
-              <a:spcAft>
-                <a:spcPts val="0"/>
-              </a:spcAft>
-              <a:buNone/>
-            </a:pPr>
-            <a:r>
-              <a:rPr b="1" lang="en" sz="1300">
-                <a:solidFill>
-                  <a:schemeClr val="dk1"/>
-                </a:solidFill>
-              </a:rPr>
-              <a:t>RF-3-03: </a:t>
-            </a:r>
-            <a:r>
-              <a:rPr lang="en" sz="1300">
-                <a:solidFill>
-                  <a:schemeClr val="dk1"/>
-                </a:solidFill>
-              </a:rPr>
-              <a:t>El client pot seguir el progrés de l’entrega un cop l’enviament ha començat.</a:t>
-            </a:r>
-            <a:endParaRPr sz="1300">
-              <a:solidFill>
-                <a:schemeClr val="dk1"/>
-              </a:solidFill>
-            </a:endParaRPr>
-          </a:p>
-          <a:p>
-            <a:pPr indent="0" lvl="0" marL="0" rtl="0" algn="l">
-              <a:spcBef>
-                <a:spcPts val="0"/>
-              </a:spcBef>
-              <a:spcAft>
-                <a:spcPts val="0"/>
-              </a:spcAft>
-              <a:buNone/>
-            </a:pPr>
-            <a:r>
-              <a:t/>
-            </a:r>
-            <a:endParaRPr b="1" sz="1300" u="sng">
-              <a:solidFill>
-                <a:schemeClr val="dk1"/>
-              </a:solidFill>
-            </a:endParaRPr>
-          </a:p>
-          <a:p>
-            <a:pPr indent="0" lvl="0" marL="0" rtl="0" algn="l">
-              <a:spcBef>
-                <a:spcPts val="0"/>
-              </a:spcBef>
-              <a:spcAft>
-                <a:spcPts val="0"/>
-              </a:spcAft>
-              <a:buNone/>
-            </a:pPr>
-            <a:r>
-              <a:rPr b="1" lang="en" sz="1300" u="sng">
-                <a:solidFill>
-                  <a:schemeClr val="dk1"/>
-                </a:solidFill>
-              </a:rPr>
-              <a:t>RNF</a:t>
-            </a:r>
-            <a:r>
-              <a:rPr b="1" lang="en" sz="1300">
-                <a:solidFill>
-                  <a:schemeClr val="dk1"/>
-                </a:solidFill>
-              </a:rPr>
-              <a:t>-3-04: </a:t>
-            </a:r>
-            <a:r>
-              <a:rPr lang="en" sz="1300">
-                <a:solidFill>
-                  <a:schemeClr val="dk1"/>
-                </a:solidFill>
-              </a:rPr>
-              <a:t>La posició del repartidor es mostra en un mapa utilitzant la interfície de Google Maps. RNF d’</a:t>
-            </a:r>
-            <a:r>
-              <a:rPr lang="en" sz="1300" u="sng">
-                <a:solidFill>
-                  <a:schemeClr val="dk1"/>
-                </a:solidFill>
-              </a:rPr>
-              <a:t>Interfícies Externes.</a:t>
-            </a:r>
-            <a:r>
-              <a:rPr lang="en" sz="1300">
-                <a:solidFill>
-                  <a:schemeClr val="dk1"/>
-                </a:solidFill>
-              </a:rPr>
-              <a:t> </a:t>
-            </a:r>
-            <a:endParaRPr sz="1300">
-              <a:solidFill>
-                <a:schemeClr val="dk1"/>
-              </a:solidFill>
-            </a:endParaRPr>
-          </a:p>
-          <a:p>
-            <a:pPr indent="0" lvl="0" marL="0" rtl="0" algn="l">
-              <a:spcBef>
-                <a:spcPts val="0"/>
-              </a:spcBef>
-              <a:spcAft>
-                <a:spcPts val="0"/>
-              </a:spcAft>
-              <a:buNone/>
-            </a:pPr>
-            <a:r>
-              <a:t/>
-            </a:r>
-            <a:endParaRPr b="1" sz="1300">
-              <a:solidFill>
-                <a:schemeClr val="dk1"/>
-              </a:solidFill>
-            </a:endParaRPr>
-          </a:p>
-        </p:txBody>
-      </p:sp>
-    </p:spTree>
-  </p:cSld>
-  <p:clrMapOvr>
-    <a:masterClrMapping/>
-  </p:clrMapOvr>
-</p:sld>
-</file>
-
-<file path=ppt/slides/slide9.xml><?xml version="1.0" encoding="utf-8"?>
-<p:sld xmlns:a="http://schemas.openxmlformats.org/drawingml/2006/main" xmlns:r="http://schemas.openxmlformats.org/officeDocument/2006/relationships" xmlns:mc="http://schemas.openxmlformats.org/markup-compatibility/2006" xmlns:mv="urn:schemas-microsoft-com:mac:vml" xmlns:p="http://schemas.openxmlformats.org/presentationml/2006/main" xmlns:c="http://schemas.openxmlformats.org/drawingml/2006/chart" xmlns:dgm="http://schemas.openxmlformats.org/drawingml/2006/diagram" xmlns:o="urn:schemas-microsoft-com:office:office" xmlns:v="urn:schemas-microsoft-com:vml" xmlns:pvml="urn:schemas-microsoft-com:office:powerpoint" xmlns:com="http://schemas.openxmlformats.org/drawingml/2006/compatibility" xmlns:p14="http://schemas.microsoft.com/office/powerpoint/2010/main" xmlns:p15="http://schemas.microsoft.com/office/powerpoint/2012/main" xmlns:ahyp="http://schemas.microsoft.com/office/drawing/2018/hyperlinkcolor">
-  <p:cSld>
-    <p:spTree>
-      <p:nvGrpSpPr>
-        <p:cNvPr id="169" name="Shape 169"/>
-        <p:cNvGrpSpPr/>
-        <p:nvPr/>
-      </p:nvGrpSpPr>
-      <p:grpSpPr>
-        <a:xfrm>
-          <a:off x="0" y="0"/>
-          <a:ext cx="0" cy="0"/>
-          <a:chOff x="0" y="0"/>
-          <a:chExt cx="0" cy="0"/>
-        </a:xfrm>
-      </p:grpSpPr>
-      <p:sp>
-        <p:nvSpPr>
-          <p:cNvPr id="170" name="Google Shape;170;p29"/>
-          <p:cNvSpPr txBox="1"/>
-          <p:nvPr>
-            <p:ph type="title"/>
-          </p:nvPr>
-        </p:nvSpPr>
-        <p:spPr>
-          <a:xfrm>
-            <a:off x="228600" y="228600"/>
-            <a:ext cx="8686800" cy="572700"/>
-          </a:xfrm>
-          <a:prstGeom prst="rect">
-            <a:avLst/>
-          </a:prstGeom>
-        </p:spPr>
-        <p:txBody>
-          <a:bodyPr anchorCtr="0" anchor="t" bIns="91425" lIns="91425" spcFirstLastPara="1" rIns="91425" wrap="square" tIns="91425">
-            <a:noAutofit/>
-          </a:bodyPr>
-          <a:lstStyle/>
-          <a:p>
-            <a:pPr indent="0" lvl="0" marL="0" rtl="0" algn="ctr">
-              <a:spcBef>
-                <a:spcPts val="0"/>
-              </a:spcBef>
-              <a:spcAft>
-                <a:spcPts val="0"/>
-              </a:spcAft>
-              <a:buNone/>
-            </a:pPr>
-            <a:r>
-              <a:rPr lang="en"/>
-              <a:t>Requisits</a:t>
-            </a:r>
-            <a:endParaRPr/>
-          </a:p>
-        </p:txBody>
-      </p:sp>
-      <p:sp>
-        <p:nvSpPr>
-          <p:cNvPr id="171" name="Google Shape;171;p29"/>
-          <p:cNvSpPr txBox="1"/>
-          <p:nvPr/>
-        </p:nvSpPr>
-        <p:spPr>
-          <a:xfrm>
-            <a:off x="228600" y="801300"/>
-            <a:ext cx="8686800" cy="3827700"/>
-          </a:xfrm>
-          <a:prstGeom prst="rect">
-            <a:avLst/>
-          </a:prstGeom>
-          <a:noFill/>
-          <a:ln>
-            <a:noFill/>
-          </a:ln>
-        </p:spPr>
-        <p:txBody>
-          <a:bodyPr anchorCtr="0" anchor="t" bIns="91425" lIns="91425" spcFirstLastPara="1" rIns="91425" wrap="square" tIns="91425">
-            <a:noAutofit/>
-          </a:bodyPr>
-          <a:lstStyle/>
-          <a:p>
-            <a:pPr indent="0" lvl="0" marL="0" rtl="0" algn="ctr">
-              <a:spcBef>
-                <a:spcPts val="0"/>
-              </a:spcBef>
-              <a:spcAft>
-                <a:spcPts val="0"/>
-              </a:spcAft>
-              <a:buNone/>
-            </a:pPr>
-            <a:r>
-              <a:rPr b="1" lang="en" sz="1300">
-                <a:solidFill>
-                  <a:schemeClr val="dk1"/>
-                </a:solidFill>
-              </a:rPr>
-              <a:t>GRUP 4: PAGAMENT DE LA COMANDA</a:t>
-            </a:r>
-            <a:endParaRPr b="1" sz="1300">
-              <a:solidFill>
-                <a:schemeClr val="dk1"/>
-              </a:solidFill>
-            </a:endParaRPr>
-          </a:p>
-          <a:p>
-            <a:pPr indent="0" lvl="0" marL="0" rtl="0" algn="l">
-              <a:spcBef>
-                <a:spcPts val="0"/>
-              </a:spcBef>
-              <a:spcAft>
-                <a:spcPts val="0"/>
-              </a:spcAft>
-              <a:buNone/>
-            </a:pPr>
-            <a:r>
-              <a:t/>
-            </a:r>
-            <a:endParaRPr b="1" sz="1300">
-              <a:solidFill>
-                <a:schemeClr val="dk1"/>
-              </a:solidFill>
-            </a:endParaRPr>
-          </a:p>
-          <a:p>
-            <a:pPr indent="0" lvl="0" marL="0" rtl="0" algn="l">
-              <a:spcBef>
-                <a:spcPts val="0"/>
-              </a:spcBef>
-              <a:spcAft>
-                <a:spcPts val="0"/>
-              </a:spcAft>
-              <a:buNone/>
-            </a:pPr>
-            <a:r>
-              <a:rPr b="1" lang="en" sz="1300">
-                <a:solidFill>
-                  <a:schemeClr val="dk1"/>
-                </a:solidFill>
-              </a:rPr>
-              <a:t>RF-4-01: </a:t>
-            </a:r>
-            <a:r>
-              <a:rPr lang="en" sz="1300">
-                <a:solidFill>
-                  <a:schemeClr val="dk1"/>
-                </a:solidFill>
-              </a:rPr>
-              <a:t>El cuiner i repartidor reben l’ingrés de la comanda un cop s’ha pagat a la mateixa aplicació amb targeta bancària o PayPal</a:t>
-            </a:r>
-            <a:r>
-              <a:rPr b="1" lang="en" sz="1300">
-                <a:solidFill>
-                  <a:schemeClr val="dk1"/>
-                </a:solidFill>
-              </a:rPr>
-              <a:t>. </a:t>
-            </a:r>
-            <a:endParaRPr b="1" sz="1300">
-              <a:solidFill>
-                <a:schemeClr val="dk1"/>
-              </a:solidFill>
-            </a:endParaRPr>
-          </a:p>
-          <a:p>
-            <a:pPr indent="0" lvl="0" marL="0" rtl="0" algn="l">
-              <a:spcBef>
-                <a:spcPts val="0"/>
-              </a:spcBef>
-              <a:spcAft>
-                <a:spcPts val="0"/>
-              </a:spcAft>
-              <a:buNone/>
-            </a:pPr>
-            <a:r>
-              <a:t/>
-            </a:r>
-            <a:endParaRPr b="1" sz="1300">
-              <a:solidFill>
-                <a:schemeClr val="dk1"/>
-              </a:solidFill>
-            </a:endParaRPr>
-          </a:p>
-          <a:p>
-            <a:pPr indent="0" lvl="0" marL="0" rtl="0" algn="l">
-              <a:spcBef>
-                <a:spcPts val="0"/>
-              </a:spcBef>
-              <a:spcAft>
-                <a:spcPts val="0"/>
-              </a:spcAft>
-              <a:buNone/>
-            </a:pPr>
-            <a:r>
-              <a:rPr b="1" lang="en" sz="1300" u="sng">
-                <a:solidFill>
-                  <a:schemeClr val="dk1"/>
-                </a:solidFill>
-              </a:rPr>
-              <a:t>RNF</a:t>
-            </a:r>
-            <a:r>
-              <a:rPr b="1" lang="en" sz="1300">
-                <a:solidFill>
-                  <a:schemeClr val="dk1"/>
-                </a:solidFill>
-              </a:rPr>
-              <a:t>-4-02: </a:t>
-            </a:r>
-            <a:r>
-              <a:rPr lang="en" sz="1300">
-                <a:solidFill>
-                  <a:schemeClr val="dk1"/>
-                </a:solidFill>
-              </a:rPr>
-              <a:t>El sistema s'ha de connectar amb la plataforma de pagament corresponent per autenticar les dades i confirmar la transacció. RNF d’</a:t>
-            </a:r>
-            <a:r>
-              <a:rPr lang="en" sz="1300" u="sng">
-                <a:solidFill>
-                  <a:schemeClr val="dk1"/>
-                </a:solidFill>
-              </a:rPr>
-              <a:t>Interfícies Externes</a:t>
-            </a:r>
-            <a:r>
-              <a:rPr lang="en" sz="1300">
-                <a:solidFill>
-                  <a:schemeClr val="dk1"/>
-                </a:solidFill>
-              </a:rPr>
-              <a:t>. </a:t>
-            </a:r>
-            <a:endParaRPr sz="1300">
-              <a:solidFill>
-                <a:schemeClr val="dk1"/>
-              </a:solidFill>
-            </a:endParaRPr>
-          </a:p>
-          <a:p>
-            <a:pPr indent="0" lvl="0" marL="0" rtl="0" algn="l">
-              <a:spcBef>
-                <a:spcPts val="0"/>
-              </a:spcBef>
-              <a:spcAft>
-                <a:spcPts val="0"/>
-              </a:spcAft>
-              <a:buNone/>
-            </a:pPr>
-            <a:r>
-              <a:t/>
-            </a:r>
-            <a:endParaRPr sz="1300">
-              <a:solidFill>
-                <a:schemeClr val="dk1"/>
-              </a:solidFill>
-            </a:endParaRPr>
-          </a:p>
-          <a:p>
-            <a:pPr indent="0" lvl="0" marL="0" rtl="0" algn="l">
-              <a:spcBef>
-                <a:spcPts val="0"/>
-              </a:spcBef>
-              <a:spcAft>
-                <a:spcPts val="0"/>
-              </a:spcAft>
-              <a:buNone/>
-            </a:pPr>
-            <a:r>
-              <a:t/>
-            </a:r>
-            <a:endParaRPr b="1" sz="1300">
+            <a:endParaRPr b="1" sz="1600">
               <a:solidFill>
                 <a:schemeClr val="dk1"/>
               </a:solidFill>
@@ -18603,6 +20008,285 @@
 </file>
 
 <file path=ppt/theme/theme1.xml><?xml version="1.0" encoding="utf-8"?>
+<a:theme xmlns:a="http://schemas.openxmlformats.org/drawingml/2006/main" xmlns:r="http://schemas.openxmlformats.org/officeDocument/2006/relationships">
+  <a:themeElements>
+    <a:clrScheme name="Default">
+      <a:dk1>
+        <a:srgbClr val="000000"/>
+      </a:dk1>
+      <a:lt1>
+        <a:srgbClr val="FFFFFF"/>
+      </a:lt1>
+      <a:dk2>
+        <a:srgbClr val="158158"/>
+      </a:dk2>
+      <a:lt2>
+        <a:srgbClr val="F3F3F3"/>
+      </a:lt2>
+      <a:accent1>
+        <a:srgbClr val="058DC7"/>
+      </a:accent1>
+      <a:accent2>
+        <a:srgbClr val="50B432"/>
+      </a:accent2>
+      <a:accent3>
+        <a:srgbClr val="ED561B"/>
+      </a:accent3>
+      <a:accent4>
+        <a:srgbClr val="EDEF00"/>
+      </a:accent4>
+      <a:accent5>
+        <a:srgbClr val="24CBE5"/>
+      </a:accent5>
+      <a:accent6>
+        <a:srgbClr val="64E572"/>
+      </a:accent6>
+      <a:hlink>
+        <a:srgbClr val="2200CC"/>
+      </a:hlink>
+      <a:folHlink>
+        <a:srgbClr val="551A8B"/>
+      </a:folHlink>
+    </a:clrScheme>
+    <a:fontScheme name="Office">
+      <a:majorFont>
+        <a:latin typeface="Arial"/>
+        <a:ea typeface=""/>
+        <a:cs typeface=""/>
+        <a:font script="Jpan" typeface="ＭＳ Ｐゴシック"/>
+        <a:font script="Hang" typeface="맑은 고딕"/>
+        <a:font script="Hans" typeface="宋体"/>
+        <a:font script="Hant" typeface="新細明體"/>
+        <a:font script="Arab" typeface="Times New Roman"/>
+        <a:font script="Hebr" typeface="Times New Roman"/>
+        <a:font script="Thai" typeface="Angsana New"/>
+        <a:font script="Ethi" typeface="Nyala"/>
+        <a:font script="Beng" typeface="Vrinda"/>
+        <a:font script="Gujr" typeface="Shruti"/>
+        <a:font script="Khmr" typeface="MoolBoran"/>
+        <a:font script="Knda" typeface="Tunga"/>
+        <a:font script="Guru" typeface="Raavi"/>
+        <a:font script="Cans" typeface="Euphemia"/>
+        <a:font script="Cher" typeface="Plantagenet Cherokee"/>
+        <a:font script="Yiii" typeface="Microsoft Yi Baiti"/>
+        <a:font script="Tibt" typeface="Microsoft Himalaya"/>
+        <a:font script="Thaa" typeface="MV Boli"/>
+        <a:font script="Deva" typeface="Mangal"/>
+        <a:font script="Telu" typeface="Gautami"/>
+        <a:font script="Taml" typeface="Latha"/>
+        <a:font script="Syrc" typeface="Estrangelo Edessa"/>
+        <a:font script="Orya" typeface="Kalinga"/>
+        <a:font script="Mlym" typeface="Kartika"/>
+        <a:font script="Laoo" typeface="DokChampa"/>
+        <a:font script="Sinh" typeface="Iskoola Pota"/>
+        <a:font script="Mong" typeface="Mongolian Baiti"/>
+        <a:font script="Viet" typeface="Times New Roman"/>
+        <a:font script="Uigh" typeface="Microsoft Uighur"/>
+        <a:font script="Geor" typeface="Sylfaen"/>
+      </a:majorFont>
+      <a:minorFont>
+        <a:latin typeface="Arial"/>
+        <a:ea typeface=""/>
+        <a:cs typeface=""/>
+        <a:font script="Jpan" typeface="ＭＳ Ｐゴシック"/>
+        <a:font script="Hang" typeface="맑은 고딕"/>
+        <a:font script="Hans" typeface="宋体"/>
+        <a:font script="Hant" typeface="新細明體"/>
+        <a:font script="Arab" typeface="Arial"/>
+        <a:font script="Hebr" typeface="Arial"/>
+        <a:font script="Thai" typeface="Cordia New"/>
+        <a:font script="Ethi" typeface="Nyala"/>
+        <a:font script="Beng" typeface="Vrinda"/>
+        <a:font script="Gujr" typeface="Shruti"/>
+        <a:font script="Khmr" typeface="DaunPenh"/>
+        <a:font script="Knda" typeface="Tunga"/>
+        <a:font script="Guru" typeface="Raavi"/>
+        <a:font script="Cans" typeface="Euphemia"/>
+        <a:font script="Cher" typeface="Plantagenet Cherokee"/>
+        <a:font script="Yiii" typeface="Microsoft Yi Baiti"/>
+        <a:font script="Tibt" typeface="Microsoft Himalaya"/>
+        <a:font script="Thaa" typeface="MV Boli"/>
+        <a:font script="Deva" typeface="Mangal"/>
+        <a:font script="Telu" typeface="Gautami"/>
+        <a:font script="Taml" typeface="Latha"/>
+        <a:font script="Syrc" typeface="Estrangelo Edessa"/>
+        <a:font script="Orya" typeface="Kalinga"/>
+        <a:font script="Mlym" typeface="Kartika"/>
+        <a:font script="Laoo" typeface="DokChampa"/>
+        <a:font script="Sinh" typeface="Iskoola Pota"/>
+        <a:font script="Mong" typeface="Mongolian Baiti"/>
+        <a:font script="Viet" typeface="Arial"/>
+        <a:font script="Uigh" typeface="Microsoft Uighur"/>
+        <a:font script="Geor" typeface="Sylfaen"/>
+      </a:minorFont>
+    </a:fontScheme>
+    <a:fmtScheme name="Office">
+      <a:fillStyleLst>
+        <a:solidFill>
+          <a:schemeClr val="phClr"/>
+        </a:solidFill>
+        <a:gradFill rotWithShape="1">
+          <a:gsLst>
+            <a:gs pos="0">
+              <a:schemeClr val="phClr">
+                <a:tint val="50000"/>
+                <a:satMod val="300000"/>
+              </a:schemeClr>
+            </a:gs>
+            <a:gs pos="35000">
+              <a:schemeClr val="phClr">
+                <a:tint val="37000"/>
+                <a:satMod val="300000"/>
+              </a:schemeClr>
+            </a:gs>
+            <a:gs pos="100000">
+              <a:schemeClr val="phClr">
+                <a:tint val="15000"/>
+                <a:satMod val="350000"/>
+              </a:schemeClr>
+            </a:gs>
+          </a:gsLst>
+          <a:lin ang="16200000" scaled="1"/>
+        </a:gradFill>
+        <a:gradFill rotWithShape="1">
+          <a:gsLst>
+            <a:gs pos="0">
+              <a:schemeClr val="phClr">
+                <a:tint val="100000"/>
+                <a:shade val="100000"/>
+                <a:satMod val="130000"/>
+              </a:schemeClr>
+            </a:gs>
+            <a:gs pos="100000">
+              <a:schemeClr val="phClr">
+                <a:tint val="50000"/>
+                <a:shade val="100000"/>
+                <a:satMod val="350000"/>
+              </a:schemeClr>
+            </a:gs>
+          </a:gsLst>
+          <a:lin ang="16200000" scaled="0"/>
+        </a:gradFill>
+      </a:fillStyleLst>
+      <a:lnStyleLst>
+        <a:ln w="9525" cap="flat" cmpd="sng" algn="ctr">
+          <a:solidFill>
+            <a:schemeClr val="phClr">
+              <a:shade val="95000"/>
+              <a:satMod val="105000"/>
+            </a:schemeClr>
+          </a:solidFill>
+          <a:prstDash val="solid"/>
+        </a:ln>
+        <a:ln w="25400" cap="flat" cmpd="sng" algn="ctr">
+          <a:solidFill>
+            <a:schemeClr val="phClr"/>
+          </a:solidFill>
+          <a:prstDash val="solid"/>
+        </a:ln>
+        <a:ln w="38100" cap="flat" cmpd="sng" algn="ctr">
+          <a:solidFill>
+            <a:schemeClr val="phClr"/>
+          </a:solidFill>
+          <a:prstDash val="solid"/>
+        </a:ln>
+      </a:lnStyleLst>
+      <a:effectStyleLst>
+        <a:effectStyle>
+          <a:effectLst>
+            <a:outerShdw blurRad="40000" dist="20000" dir="5400000" rotWithShape="0">
+              <a:srgbClr val="000000">
+                <a:alpha val="38000"/>
+              </a:srgbClr>
+            </a:outerShdw>
+          </a:effectLst>
+        </a:effectStyle>
+        <a:effectStyle>
+          <a:effectLst>
+            <a:outerShdw blurRad="40000" dist="23000" dir="5400000" rotWithShape="0">
+              <a:srgbClr val="000000">
+                <a:alpha val="35000"/>
+              </a:srgbClr>
+            </a:outerShdw>
+          </a:effectLst>
+        </a:effectStyle>
+        <a:effectStyle>
+          <a:effectLst>
+            <a:outerShdw blurRad="40000" dist="23000" dir="5400000" rotWithShape="0">
+              <a:srgbClr val="000000">
+                <a:alpha val="35000"/>
+              </a:srgbClr>
+            </a:outerShdw>
+          </a:effectLst>
+          <a:scene3d>
+            <a:camera prst="orthographicFront">
+              <a:rot lat="0" lon="0" rev="0"/>
+            </a:camera>
+            <a:lightRig rig="threePt" dir="t">
+              <a:rot lat="0" lon="0" rev="1200000"/>
+            </a:lightRig>
+          </a:scene3d>
+          <a:sp3d>
+            <a:bevelT w="63500" h="25400"/>
+          </a:sp3d>
+        </a:effectStyle>
+      </a:effectStyleLst>
+      <a:bgFillStyleLst>
+        <a:solidFill>
+          <a:schemeClr val="phClr"/>
+        </a:solidFill>
+        <a:gradFill rotWithShape="1">
+          <a:gsLst>
+            <a:gs pos="0">
+              <a:schemeClr val="phClr">
+                <a:tint val="40000"/>
+                <a:satMod val="350000"/>
+              </a:schemeClr>
+            </a:gs>
+            <a:gs pos="40000">
+              <a:schemeClr val="phClr">
+                <a:tint val="45000"/>
+                <a:shade val="99000"/>
+                <a:satMod val="350000"/>
+              </a:schemeClr>
+            </a:gs>
+            <a:gs pos="100000">
+              <a:schemeClr val="phClr">
+                <a:shade val="20000"/>
+                <a:satMod val="255000"/>
+              </a:schemeClr>
+            </a:gs>
+          </a:gsLst>
+          <a:path path="circle">
+            <a:fillToRect l="50000" t="-80000" r="50000" b="180000"/>
+          </a:path>
+        </a:gradFill>
+        <a:gradFill rotWithShape="1">
+          <a:gsLst>
+            <a:gs pos="0">
+              <a:schemeClr val="phClr">
+                <a:tint val="80000"/>
+                <a:satMod val="300000"/>
+              </a:schemeClr>
+            </a:gs>
+            <a:gs pos="100000">
+              <a:schemeClr val="phClr">
+                <a:shade val="30000"/>
+                <a:satMod val="200000"/>
+              </a:schemeClr>
+            </a:gs>
+          </a:gsLst>
+          <a:path path="circle">
+            <a:fillToRect l="50000" t="50000" r="50000" b="50000"/>
+          </a:path>
+        </a:gradFill>
+      </a:bgFillStyleLst>
+    </a:fmtScheme>
+  </a:themeElements>
+</a:theme>
+</file>
+
+<file path=ppt/theme/theme2.xml><?xml version="1.0" encoding="utf-8"?>
 <a:theme xmlns:a="http://schemas.openxmlformats.org/drawingml/2006/main" xmlns:r="http://schemas.openxmlformats.org/officeDocument/2006/relationships" name="Dark Theme by Slidesgo">
   <a:themeElements>
     <a:clrScheme name="Simple Light">
@@ -18879,283 +20563,4 @@
     </a:fmtScheme>
   </a:themeElements>
 </a:theme>
-</file>
-
-<file path=ppt/theme/theme2.xml><?xml version="1.0" encoding="utf-8"?>
-<a:theme xmlns:a="http://schemas.openxmlformats.org/drawingml/2006/main" xmlns:r="http://schemas.openxmlformats.org/officeDocument/2006/relationships">
-  <a:themeElements>
-    <a:clrScheme name="Default">
-      <a:dk1>
-        <a:srgbClr val="000000"/>
-      </a:dk1>
-      <a:lt1>
-        <a:srgbClr val="FFFFFF"/>
-      </a:lt1>
-      <a:dk2>
-        <a:srgbClr val="158158"/>
-      </a:dk2>
-      <a:lt2>
-        <a:srgbClr val="F3F3F3"/>
-      </a:lt2>
-      <a:accent1>
-        <a:srgbClr val="058DC7"/>
-      </a:accent1>
-      <a:accent2>
-        <a:srgbClr val="50B432"/>
-      </a:accent2>
-      <a:accent3>
-        <a:srgbClr val="ED561B"/>
-      </a:accent3>
-      <a:accent4>
-        <a:srgbClr val="EDEF00"/>
-      </a:accent4>
-      <a:accent5>
-        <a:srgbClr val="24CBE5"/>
-      </a:accent5>
-      <a:accent6>
-        <a:srgbClr val="64E572"/>
-      </a:accent6>
-      <a:hlink>
-        <a:srgbClr val="2200CC"/>
-      </a:hlink>
-      <a:folHlink>
-        <a:srgbClr val="551A8B"/>
-      </a:folHlink>
-    </a:clrScheme>
-    <a:fontScheme name="Office">
-      <a:majorFont>
-        <a:latin typeface="Arial"/>
-        <a:ea typeface=""/>
-        <a:cs typeface=""/>
-        <a:font script="Jpan" typeface="ＭＳ Ｐゴシック"/>
-        <a:font script="Hang" typeface="맑은 고딕"/>
-        <a:font script="Hans" typeface="宋体"/>
-        <a:font script="Hant" typeface="新細明體"/>
-        <a:font script="Arab" typeface="Times New Roman"/>
-        <a:font script="Hebr" typeface="Times New Roman"/>
-        <a:font script="Thai" typeface="Angsana New"/>
-        <a:font script="Ethi" typeface="Nyala"/>
-        <a:font script="Beng" typeface="Vrinda"/>
-        <a:font script="Gujr" typeface="Shruti"/>
-        <a:font script="Khmr" typeface="MoolBoran"/>
-        <a:font script="Knda" typeface="Tunga"/>
-        <a:font script="Guru" typeface="Raavi"/>
-        <a:font script="Cans" typeface="Euphemia"/>
-        <a:font script="Cher" typeface="Plantagenet Cherokee"/>
-        <a:font script="Yiii" typeface="Microsoft Yi Baiti"/>
-        <a:font script="Tibt" typeface="Microsoft Himalaya"/>
-        <a:font script="Thaa" typeface="MV Boli"/>
-        <a:font script="Deva" typeface="Mangal"/>
-        <a:font script="Telu" typeface="Gautami"/>
-        <a:font script="Taml" typeface="Latha"/>
-        <a:font script="Syrc" typeface="Estrangelo Edessa"/>
-        <a:font script="Orya" typeface="Kalinga"/>
-        <a:font script="Mlym" typeface="Kartika"/>
-        <a:font script="Laoo" typeface="DokChampa"/>
-        <a:font script="Sinh" typeface="Iskoola Pota"/>
-        <a:font script="Mong" typeface="Mongolian Baiti"/>
-        <a:font script="Viet" typeface="Times New Roman"/>
-        <a:font script="Uigh" typeface="Microsoft Uighur"/>
-        <a:font script="Geor" typeface="Sylfaen"/>
-      </a:majorFont>
-      <a:minorFont>
-        <a:latin typeface="Arial"/>
-        <a:ea typeface=""/>
-        <a:cs typeface=""/>
-        <a:font script="Jpan" typeface="ＭＳ Ｐゴシック"/>
-        <a:font script="Hang" typeface="맑은 고딕"/>
-        <a:font script="Hans" typeface="宋体"/>
-        <a:font script="Hant" typeface="新細明體"/>
-        <a:font script="Arab" typeface="Arial"/>
-        <a:font script="Hebr" typeface="Arial"/>
-        <a:font script="Thai" typeface="Cordia New"/>
-        <a:font script="Ethi" typeface="Nyala"/>
-        <a:font script="Beng" typeface="Vrinda"/>
-        <a:font script="Gujr" typeface="Shruti"/>
-        <a:font script="Khmr" typeface="DaunPenh"/>
-        <a:font script="Knda" typeface="Tunga"/>
-        <a:font script="Guru" typeface="Raavi"/>
-        <a:font script="Cans" typeface="Euphemia"/>
-        <a:font script="Cher" typeface="Plantagenet Cherokee"/>
-        <a:font script="Yiii" typeface="Microsoft Yi Baiti"/>
-        <a:font script="Tibt" typeface="Microsoft Himalaya"/>
-        <a:font script="Thaa" typeface="MV Boli"/>
-        <a:font script="Deva" typeface="Mangal"/>
-        <a:font script="Telu" typeface="Gautami"/>
-        <a:font script="Taml" typeface="Latha"/>
-        <a:font script="Syrc" typeface="Estrangelo Edessa"/>
-        <a:font script="Orya" typeface="Kalinga"/>
-        <a:font script="Mlym" typeface="Kartika"/>
-        <a:font script="Laoo" typeface="DokChampa"/>
-        <a:font script="Sinh" typeface="Iskoola Pota"/>
-        <a:font script="Mong" typeface="Mongolian Baiti"/>
-        <a:font script="Viet" typeface="Arial"/>
-        <a:font script="Uigh" typeface="Microsoft Uighur"/>
-        <a:font script="Geor" typeface="Sylfaen"/>
-      </a:minorFont>
-    </a:fontScheme>
-    <a:fmtScheme name="Office">
-      <a:fillStyleLst>
-        <a:solidFill>
-          <a:schemeClr val="phClr"/>
-        </a:solidFill>
-        <a:gradFill rotWithShape="1">
-          <a:gsLst>
-            <a:gs pos="0">
-              <a:schemeClr val="phClr">
-                <a:tint val="50000"/>
-                <a:satMod val="300000"/>
-              </a:schemeClr>
-            </a:gs>
-            <a:gs pos="35000">
-              <a:schemeClr val="phClr">
-                <a:tint val="37000"/>
-                <a:satMod val="300000"/>
-              </a:schemeClr>
-            </a:gs>
-            <a:gs pos="100000">
-              <a:schemeClr val="phClr">
-                <a:tint val="15000"/>
-                <a:satMod val="350000"/>
-              </a:schemeClr>
-            </a:gs>
-          </a:gsLst>
-          <a:lin ang="16200000" scaled="1"/>
-        </a:gradFill>
-        <a:gradFill rotWithShape="1">
-          <a:gsLst>
-            <a:gs pos="0">
-              <a:schemeClr val="phClr">
-                <a:tint val="100000"/>
-                <a:shade val="100000"/>
-                <a:satMod val="130000"/>
-              </a:schemeClr>
-            </a:gs>
-            <a:gs pos="100000">
-              <a:schemeClr val="phClr">
-                <a:tint val="50000"/>
-                <a:shade val="100000"/>
-                <a:satMod val="350000"/>
-              </a:schemeClr>
-            </a:gs>
-          </a:gsLst>
-          <a:lin ang="16200000" scaled="0"/>
-        </a:gradFill>
-      </a:fillStyleLst>
-      <a:lnStyleLst>
-        <a:ln w="9525" cap="flat" cmpd="sng" algn="ctr">
-          <a:solidFill>
-            <a:schemeClr val="phClr">
-              <a:shade val="95000"/>
-              <a:satMod val="105000"/>
-            </a:schemeClr>
-          </a:solidFill>
-          <a:prstDash val="solid"/>
-        </a:ln>
-        <a:ln w="25400" cap="flat" cmpd="sng" algn="ctr">
-          <a:solidFill>
-            <a:schemeClr val="phClr"/>
-          </a:solidFill>
-          <a:prstDash val="solid"/>
-        </a:ln>
-        <a:ln w="38100" cap="flat" cmpd="sng" algn="ctr">
-          <a:solidFill>
-            <a:schemeClr val="phClr"/>
-          </a:solidFill>
-          <a:prstDash val="solid"/>
-        </a:ln>
-      </a:lnStyleLst>
-      <a:effectStyleLst>
-        <a:effectStyle>
-          <a:effectLst>
-            <a:outerShdw blurRad="40000" dist="20000" dir="5400000" rotWithShape="0">
-              <a:srgbClr val="000000">
-                <a:alpha val="38000"/>
-              </a:srgbClr>
-            </a:outerShdw>
-          </a:effectLst>
-        </a:effectStyle>
-        <a:effectStyle>
-          <a:effectLst>
-            <a:outerShdw blurRad="40000" dist="23000" dir="5400000" rotWithShape="0">
-              <a:srgbClr val="000000">
-                <a:alpha val="35000"/>
-              </a:srgbClr>
-            </a:outerShdw>
-          </a:effectLst>
-        </a:effectStyle>
-        <a:effectStyle>
-          <a:effectLst>
-            <a:outerShdw blurRad="40000" dist="23000" dir="5400000" rotWithShape="0">
-              <a:srgbClr val="000000">
-                <a:alpha val="35000"/>
-              </a:srgbClr>
-            </a:outerShdw>
-          </a:effectLst>
-          <a:scene3d>
-            <a:camera prst="orthographicFront">
-              <a:rot lat="0" lon="0" rev="0"/>
-            </a:camera>
-            <a:lightRig rig="threePt" dir="t">
-              <a:rot lat="0" lon="0" rev="1200000"/>
-            </a:lightRig>
-          </a:scene3d>
-          <a:sp3d>
-            <a:bevelT w="63500" h="25400"/>
-          </a:sp3d>
-        </a:effectStyle>
-      </a:effectStyleLst>
-      <a:bgFillStyleLst>
-        <a:solidFill>
-          <a:schemeClr val="phClr"/>
-        </a:solidFill>
-        <a:gradFill rotWithShape="1">
-          <a:gsLst>
-            <a:gs pos="0">
-              <a:schemeClr val="phClr">
-                <a:tint val="40000"/>
-                <a:satMod val="350000"/>
-              </a:schemeClr>
-            </a:gs>
-            <a:gs pos="40000">
-              <a:schemeClr val="phClr">
-                <a:tint val="45000"/>
-                <a:shade val="99000"/>
-                <a:satMod val="350000"/>
-              </a:schemeClr>
-            </a:gs>
-            <a:gs pos="100000">
-              <a:schemeClr val="phClr">
-                <a:shade val="20000"/>
-                <a:satMod val="255000"/>
-              </a:schemeClr>
-            </a:gs>
-          </a:gsLst>
-          <a:path path="circle">
-            <a:fillToRect l="50000" t="-80000" r="50000" b="180000"/>
-          </a:path>
-        </a:gradFill>
-        <a:gradFill rotWithShape="1">
-          <a:gsLst>
-            <a:gs pos="0">
-              <a:schemeClr val="phClr">
-                <a:tint val="80000"/>
-                <a:satMod val="300000"/>
-              </a:schemeClr>
-            </a:gs>
-            <a:gs pos="100000">
-              <a:schemeClr val="phClr">
-                <a:shade val="30000"/>
-                <a:satMod val="200000"/>
-              </a:schemeClr>
-            </a:gs>
-          </a:gsLst>
-          <a:path path="circle">
-            <a:fillToRect l="50000" t="50000" r="50000" b="50000"/>
-          </a:path>
-        </a:gradFill>
-      </a:bgFillStyleLst>
-    </a:fmtScheme>
-  </a:themeElements>
-</a:theme>
 </file>